--- a/output/g20-ministers-trade-deck.pptx
+++ b/output/g20-ministers-trade-deck.pptx
@@ -4244,8 +4244,8 @@
         </p:nvSpPr>
         <p:spPr>
           <a:xfrm>
-            <a:off x="3611880" y="1426464"/>
-            <a:ext cx="8028431" cy="274320"/>
+            <a:off x="3611880" y="1408176"/>
+            <a:ext cx="8028431" cy="256032"/>
           </a:xfrm>
           <a:prstGeom prst="rect">
             <a:avLst/>
@@ -4278,8 +4278,8 @@
         </p:nvSpPr>
         <p:spPr>
           <a:xfrm>
-            <a:off x="3611880" y="1719072"/>
-            <a:ext cx="8028431" cy="420624"/>
+            <a:off x="3611880" y="1682495"/>
+            <a:ext cx="8028431" cy="347472"/>
           </a:xfrm>
           <a:prstGeom prst="rect">
             <a:avLst/>
@@ -4317,8 +4317,8 @@
         </p:nvSpPr>
         <p:spPr>
           <a:xfrm>
-            <a:off x="3611880" y="2157984"/>
-            <a:ext cx="8028431" cy="347472"/>
+            <a:off x="3611880" y="2048256"/>
+            <a:ext cx="8028431" cy="292608"/>
           </a:xfrm>
           <a:prstGeom prst="rect">
             <a:avLst/>
@@ -4365,8 +4365,8 @@
         </p:nvSpPr>
         <p:spPr>
           <a:xfrm>
-            <a:off x="3611880" y="2578608"/>
-            <a:ext cx="8028431" cy="1152143"/>
+            <a:off x="3611880" y="2377440"/>
+            <a:ext cx="8028431" cy="1353311"/>
           </a:xfrm>
           <a:prstGeom prst="rect">
             <a:avLst/>
@@ -4474,8 +4474,8 @@
         </p:nvSpPr>
         <p:spPr>
           <a:xfrm>
-            <a:off x="3611880" y="4059935"/>
-            <a:ext cx="8028431" cy="274320"/>
+            <a:off x="3611880" y="4041648"/>
+            <a:ext cx="8028431" cy="256032"/>
           </a:xfrm>
           <a:prstGeom prst="rect">
             <a:avLst/>
@@ -4508,8 +4508,8 @@
         </p:nvSpPr>
         <p:spPr>
           <a:xfrm>
-            <a:off x="3611880" y="4352544"/>
-            <a:ext cx="8028431" cy="420624"/>
+            <a:off x="3611880" y="4315968"/>
+            <a:ext cx="8028431" cy="347472"/>
           </a:xfrm>
           <a:prstGeom prst="rect">
             <a:avLst/>
@@ -4547,8 +4547,8 @@
         </p:nvSpPr>
         <p:spPr>
           <a:xfrm>
-            <a:off x="3611880" y="4791456"/>
-            <a:ext cx="8028431" cy="347472"/>
+            <a:off x="3611880" y="4681727"/>
+            <a:ext cx="8028431" cy="292608"/>
           </a:xfrm>
           <a:prstGeom prst="rect">
             <a:avLst/>
@@ -4595,8 +4595,8 @@
         </p:nvSpPr>
         <p:spPr>
           <a:xfrm>
-            <a:off x="3611880" y="5212079"/>
-            <a:ext cx="8028431" cy="1152143"/>
+            <a:off x="3611880" y="5010912"/>
+            <a:ext cx="8028431" cy="1353311"/>
           </a:xfrm>
           <a:prstGeom prst="rect">
             <a:avLst/>
@@ -5414,8 +5414,8 @@
         </p:nvSpPr>
         <p:spPr>
           <a:xfrm>
-            <a:off x="3611880" y="1426464"/>
-            <a:ext cx="8028431" cy="274320"/>
+            <a:off x="3611880" y="1408176"/>
+            <a:ext cx="8028431" cy="256032"/>
           </a:xfrm>
           <a:prstGeom prst="rect">
             <a:avLst/>
@@ -5448,8 +5448,8 @@
         </p:nvSpPr>
         <p:spPr>
           <a:xfrm>
-            <a:off x="3611880" y="1719072"/>
-            <a:ext cx="8028431" cy="420624"/>
+            <a:off x="3611880" y="1682495"/>
+            <a:ext cx="8028431" cy="347472"/>
           </a:xfrm>
           <a:prstGeom prst="rect">
             <a:avLst/>
@@ -5487,8 +5487,8 @@
         </p:nvSpPr>
         <p:spPr>
           <a:xfrm>
-            <a:off x="3611880" y="2157984"/>
-            <a:ext cx="8028431" cy="347472"/>
+            <a:off x="3611880" y="2048256"/>
+            <a:ext cx="8028431" cy="292608"/>
           </a:xfrm>
           <a:prstGeom prst="rect">
             <a:avLst/>
@@ -5535,8 +5535,8 @@
         </p:nvSpPr>
         <p:spPr>
           <a:xfrm>
-            <a:off x="3611880" y="2578608"/>
-            <a:ext cx="8028431" cy="1152143"/>
+            <a:off x="3611880" y="2377440"/>
+            <a:ext cx="8028431" cy="1353311"/>
           </a:xfrm>
           <a:prstGeom prst="rect">
             <a:avLst/>
@@ -5644,8 +5644,8 @@
         </p:nvSpPr>
         <p:spPr>
           <a:xfrm>
-            <a:off x="3611880" y="4059935"/>
-            <a:ext cx="8028431" cy="274320"/>
+            <a:off x="3611880" y="4041648"/>
+            <a:ext cx="8028431" cy="256032"/>
           </a:xfrm>
           <a:prstGeom prst="rect">
             <a:avLst/>
@@ -5678,8 +5678,8 @@
         </p:nvSpPr>
         <p:spPr>
           <a:xfrm>
-            <a:off x="3611880" y="4352544"/>
-            <a:ext cx="8028431" cy="420624"/>
+            <a:off x="3611880" y="4315968"/>
+            <a:ext cx="8028431" cy="347472"/>
           </a:xfrm>
           <a:prstGeom prst="rect">
             <a:avLst/>
@@ -5717,8 +5717,8 @@
         </p:nvSpPr>
         <p:spPr>
           <a:xfrm>
-            <a:off x="3611880" y="4791456"/>
-            <a:ext cx="8028431" cy="347472"/>
+            <a:off x="3611880" y="4681727"/>
+            <a:ext cx="8028431" cy="292608"/>
           </a:xfrm>
           <a:prstGeom prst="rect">
             <a:avLst/>
@@ -5765,8 +5765,8 @@
         </p:nvSpPr>
         <p:spPr>
           <a:xfrm>
-            <a:off x="3611880" y="5212079"/>
-            <a:ext cx="8028431" cy="1152143"/>
+            <a:off x="3611880" y="5010912"/>
+            <a:ext cx="8028431" cy="1353311"/>
           </a:xfrm>
           <a:prstGeom prst="rect">
             <a:avLst/>
@@ -6600,8 +6600,8 @@
         </p:nvSpPr>
         <p:spPr>
           <a:xfrm>
-            <a:off x="3611880" y="1426464"/>
-            <a:ext cx="8028431" cy="274320"/>
+            <a:off x="3611880" y="1408176"/>
+            <a:ext cx="8028431" cy="256032"/>
           </a:xfrm>
           <a:prstGeom prst="rect">
             <a:avLst/>
@@ -6634,8 +6634,8 @@
         </p:nvSpPr>
         <p:spPr>
           <a:xfrm>
-            <a:off x="3611880" y="1719072"/>
-            <a:ext cx="8028431" cy="420624"/>
+            <a:off x="3611880" y="1682495"/>
+            <a:ext cx="8028431" cy="347472"/>
           </a:xfrm>
           <a:prstGeom prst="rect">
             <a:avLst/>
@@ -6673,8 +6673,8 @@
         </p:nvSpPr>
         <p:spPr>
           <a:xfrm>
-            <a:off x="3611880" y="2157984"/>
-            <a:ext cx="8028431" cy="347472"/>
+            <a:off x="3611880" y="2048256"/>
+            <a:ext cx="8028431" cy="292608"/>
           </a:xfrm>
           <a:prstGeom prst="rect">
             <a:avLst/>
@@ -6721,8 +6721,8 @@
         </p:nvSpPr>
         <p:spPr>
           <a:xfrm>
-            <a:off x="3611880" y="2578608"/>
-            <a:ext cx="8028431" cy="1152143"/>
+            <a:off x="3611880" y="2377440"/>
+            <a:ext cx="8028431" cy="1353311"/>
           </a:xfrm>
           <a:prstGeom prst="rect">
             <a:avLst/>
@@ -6846,8 +6846,8 @@
         </p:nvSpPr>
         <p:spPr>
           <a:xfrm>
-            <a:off x="3611880" y="4041648"/>
-            <a:ext cx="3849624" cy="1152144"/>
+            <a:off x="3611880" y="4023359"/>
+            <a:ext cx="3849624" cy="914400"/>
           </a:xfrm>
           <a:prstGeom prst="rect">
             <a:avLst/>
@@ -6915,8 +6915,8 @@
         </p:nvSpPr>
         <p:spPr>
           <a:xfrm>
-            <a:off x="3611880" y="5047488"/>
-            <a:ext cx="3849624" cy="310896"/>
+            <a:off x="3611880" y="4956048"/>
+            <a:ext cx="3849624" cy="292608"/>
           </a:xfrm>
           <a:prstGeom prst="rect">
             <a:avLst/>
@@ -6963,8 +6963,8 @@
         </p:nvSpPr>
         <p:spPr>
           <a:xfrm>
-            <a:off x="3611880" y="5376672"/>
-            <a:ext cx="3849624" cy="987551"/>
+            <a:off x="3611880" y="5266944"/>
+            <a:ext cx="3849624" cy="1097279"/>
           </a:xfrm>
           <a:prstGeom prst="rect">
             <a:avLst/>
@@ -7002,8 +7002,8 @@
         </p:nvSpPr>
         <p:spPr>
           <a:xfrm>
-            <a:off x="7790688" y="4041648"/>
-            <a:ext cx="3849624" cy="1152144"/>
+            <a:off x="7790688" y="4023359"/>
+            <a:ext cx="3849624" cy="914400"/>
           </a:xfrm>
           <a:prstGeom prst="rect">
             <a:avLst/>
@@ -7071,8 +7071,8 @@
         </p:nvSpPr>
         <p:spPr>
           <a:xfrm>
-            <a:off x="7790688" y="5047488"/>
-            <a:ext cx="3849624" cy="310896"/>
+            <a:off x="7790688" y="4956048"/>
+            <a:ext cx="3849624" cy="292608"/>
           </a:xfrm>
           <a:prstGeom prst="rect">
             <a:avLst/>
@@ -7119,8 +7119,8 @@
         </p:nvSpPr>
         <p:spPr>
           <a:xfrm>
-            <a:off x="7790688" y="5376672"/>
-            <a:ext cx="3849624" cy="987551"/>
+            <a:off x="7790688" y="5266944"/>
+            <a:ext cx="3849624" cy="1097279"/>
           </a:xfrm>
           <a:prstGeom prst="rect">
             <a:avLst/>
@@ -7938,8 +7938,8 @@
         </p:nvSpPr>
         <p:spPr>
           <a:xfrm>
-            <a:off x="3611880" y="1426464"/>
-            <a:ext cx="8028431" cy="274320"/>
+            <a:off x="3611880" y="1408176"/>
+            <a:ext cx="8028431" cy="256032"/>
           </a:xfrm>
           <a:prstGeom prst="rect">
             <a:avLst/>
@@ -7972,8 +7972,8 @@
         </p:nvSpPr>
         <p:spPr>
           <a:xfrm>
-            <a:off x="3611880" y="1719072"/>
-            <a:ext cx="8028431" cy="420624"/>
+            <a:off x="3611880" y="1682495"/>
+            <a:ext cx="8028431" cy="347472"/>
           </a:xfrm>
           <a:prstGeom prst="rect">
             <a:avLst/>
@@ -8011,8 +8011,8 @@
         </p:nvSpPr>
         <p:spPr>
           <a:xfrm>
-            <a:off x="3611880" y="2157984"/>
-            <a:ext cx="8028431" cy="347472"/>
+            <a:off x="3611880" y="2048256"/>
+            <a:ext cx="8028431" cy="292608"/>
           </a:xfrm>
           <a:prstGeom prst="rect">
             <a:avLst/>
@@ -8059,8 +8059,8 @@
         </p:nvSpPr>
         <p:spPr>
           <a:xfrm>
-            <a:off x="3611880" y="2578608"/>
-            <a:ext cx="8028431" cy="1152143"/>
+            <a:off x="3611880" y="2377440"/>
+            <a:ext cx="8028431" cy="1353311"/>
           </a:xfrm>
           <a:prstGeom prst="rect">
             <a:avLst/>
@@ -8168,8 +8168,8 @@
         </p:nvSpPr>
         <p:spPr>
           <a:xfrm>
-            <a:off x="3611880" y="4041648"/>
-            <a:ext cx="3849624" cy="1152144"/>
+            <a:off x="3611880" y="4023359"/>
+            <a:ext cx="3849624" cy="914400"/>
           </a:xfrm>
           <a:prstGeom prst="rect">
             <a:avLst/>
@@ -8237,8 +8237,8 @@
         </p:nvSpPr>
         <p:spPr>
           <a:xfrm>
-            <a:off x="3611880" y="5047488"/>
-            <a:ext cx="3849624" cy="310896"/>
+            <a:off x="3611880" y="4956048"/>
+            <a:ext cx="3849624" cy="292608"/>
           </a:xfrm>
           <a:prstGeom prst="rect">
             <a:avLst/>
@@ -8285,8 +8285,8 @@
         </p:nvSpPr>
         <p:spPr>
           <a:xfrm>
-            <a:off x="3611880" y="5376672"/>
-            <a:ext cx="3849624" cy="987551"/>
+            <a:off x="3611880" y="5266944"/>
+            <a:ext cx="3849624" cy="1097279"/>
           </a:xfrm>
           <a:prstGeom prst="rect">
             <a:avLst/>
@@ -8324,8 +8324,8 @@
         </p:nvSpPr>
         <p:spPr>
           <a:xfrm>
-            <a:off x="7790688" y="4041648"/>
-            <a:ext cx="3849624" cy="1152144"/>
+            <a:off x="7790688" y="4023359"/>
+            <a:ext cx="3849624" cy="914400"/>
           </a:xfrm>
           <a:prstGeom prst="rect">
             <a:avLst/>
@@ -8393,8 +8393,8 @@
         </p:nvSpPr>
         <p:spPr>
           <a:xfrm>
-            <a:off x="7790688" y="5047488"/>
-            <a:ext cx="3849624" cy="310896"/>
+            <a:off x="7790688" y="4956048"/>
+            <a:ext cx="3849624" cy="292608"/>
           </a:xfrm>
           <a:prstGeom prst="rect">
             <a:avLst/>
@@ -8441,8 +8441,8 @@
         </p:nvSpPr>
         <p:spPr>
           <a:xfrm>
-            <a:off x="7790688" y="5376672"/>
-            <a:ext cx="3849624" cy="987551"/>
+            <a:off x="7790688" y="5266944"/>
+            <a:ext cx="3849624" cy="1097279"/>
           </a:xfrm>
           <a:prstGeom prst="rect">
             <a:avLst/>
@@ -9260,8 +9260,8 @@
         </p:nvSpPr>
         <p:spPr>
           <a:xfrm>
-            <a:off x="3611880" y="1426464"/>
-            <a:ext cx="8028431" cy="274320"/>
+            <a:off x="3611880" y="1408176"/>
+            <a:ext cx="8028431" cy="256032"/>
           </a:xfrm>
           <a:prstGeom prst="rect">
             <a:avLst/>
@@ -9294,8 +9294,8 @@
         </p:nvSpPr>
         <p:spPr>
           <a:xfrm>
-            <a:off x="3611880" y="1719072"/>
-            <a:ext cx="8028431" cy="420624"/>
+            <a:off x="3611880" y="1682495"/>
+            <a:ext cx="8028431" cy="347472"/>
           </a:xfrm>
           <a:prstGeom prst="rect">
             <a:avLst/>
@@ -9333,8 +9333,8 @@
         </p:nvSpPr>
         <p:spPr>
           <a:xfrm>
-            <a:off x="3611880" y="2157984"/>
-            <a:ext cx="8028431" cy="347472"/>
+            <a:off x="3611880" y="2048256"/>
+            <a:ext cx="8028431" cy="292608"/>
           </a:xfrm>
           <a:prstGeom prst="rect">
             <a:avLst/>
@@ -9381,8 +9381,8 @@
         </p:nvSpPr>
         <p:spPr>
           <a:xfrm>
-            <a:off x="3611880" y="2578608"/>
-            <a:ext cx="8028431" cy="1152143"/>
+            <a:off x="3611880" y="2377440"/>
+            <a:ext cx="8028431" cy="1353311"/>
           </a:xfrm>
           <a:prstGeom prst="rect">
             <a:avLst/>
@@ -9490,8 +9490,8 @@
         </p:nvSpPr>
         <p:spPr>
           <a:xfrm>
-            <a:off x="3611880" y="4041648"/>
-            <a:ext cx="3849624" cy="1152144"/>
+            <a:off x="3611880" y="4023359"/>
+            <a:ext cx="3849624" cy="914400"/>
           </a:xfrm>
           <a:prstGeom prst="rect">
             <a:avLst/>
@@ -9559,8 +9559,8 @@
         </p:nvSpPr>
         <p:spPr>
           <a:xfrm>
-            <a:off x="3611880" y="5047488"/>
-            <a:ext cx="3849624" cy="310896"/>
+            <a:off x="3611880" y="4956048"/>
+            <a:ext cx="3849624" cy="292608"/>
           </a:xfrm>
           <a:prstGeom prst="rect">
             <a:avLst/>
@@ -9607,8 +9607,8 @@
         </p:nvSpPr>
         <p:spPr>
           <a:xfrm>
-            <a:off x="3611880" y="5376672"/>
-            <a:ext cx="3849624" cy="987551"/>
+            <a:off x="3611880" y="5266944"/>
+            <a:ext cx="3849624" cy="1097279"/>
           </a:xfrm>
           <a:prstGeom prst="rect">
             <a:avLst/>
@@ -9646,8 +9646,8 @@
         </p:nvSpPr>
         <p:spPr>
           <a:xfrm>
-            <a:off x="7790688" y="4041648"/>
-            <a:ext cx="3849624" cy="1152144"/>
+            <a:off x="7790688" y="4023359"/>
+            <a:ext cx="3849624" cy="914400"/>
           </a:xfrm>
           <a:prstGeom prst="rect">
             <a:avLst/>
@@ -9715,8 +9715,8 @@
         </p:nvSpPr>
         <p:spPr>
           <a:xfrm>
-            <a:off x="7790688" y="5047488"/>
-            <a:ext cx="3849624" cy="310896"/>
+            <a:off x="7790688" y="4956048"/>
+            <a:ext cx="3849624" cy="292608"/>
           </a:xfrm>
           <a:prstGeom prst="rect">
             <a:avLst/>
@@ -9763,8 +9763,8 @@
         </p:nvSpPr>
         <p:spPr>
           <a:xfrm>
-            <a:off x="7790688" y="5376672"/>
-            <a:ext cx="3849624" cy="987551"/>
+            <a:off x="7790688" y="5266944"/>
+            <a:ext cx="3849624" cy="1097279"/>
           </a:xfrm>
           <a:prstGeom prst="rect">
             <a:avLst/>
@@ -10582,8 +10582,8 @@
         </p:nvSpPr>
         <p:spPr>
           <a:xfrm>
-            <a:off x="3611880" y="1426464"/>
-            <a:ext cx="8028431" cy="274320"/>
+            <a:off x="3611880" y="1408176"/>
+            <a:ext cx="8028431" cy="256032"/>
           </a:xfrm>
           <a:prstGeom prst="rect">
             <a:avLst/>
@@ -10616,8 +10616,8 @@
         </p:nvSpPr>
         <p:spPr>
           <a:xfrm>
-            <a:off x="3611880" y="1719072"/>
-            <a:ext cx="8028431" cy="420624"/>
+            <a:off x="3611880" y="1682495"/>
+            <a:ext cx="8028431" cy="347472"/>
           </a:xfrm>
           <a:prstGeom prst="rect">
             <a:avLst/>
@@ -10655,8 +10655,8 @@
         </p:nvSpPr>
         <p:spPr>
           <a:xfrm>
-            <a:off x="3611880" y="2157984"/>
-            <a:ext cx="8028431" cy="347472"/>
+            <a:off x="3611880" y="2048256"/>
+            <a:ext cx="8028431" cy="292608"/>
           </a:xfrm>
           <a:prstGeom prst="rect">
             <a:avLst/>
@@ -10703,8 +10703,8 @@
         </p:nvSpPr>
         <p:spPr>
           <a:xfrm>
-            <a:off x="3611880" y="2578608"/>
-            <a:ext cx="8028431" cy="1152143"/>
+            <a:off x="3611880" y="2377440"/>
+            <a:ext cx="8028431" cy="1353311"/>
           </a:xfrm>
           <a:prstGeom prst="rect">
             <a:avLst/>
@@ -10812,8 +10812,8 @@
         </p:nvSpPr>
         <p:spPr>
           <a:xfrm>
-            <a:off x="3611880" y="4059935"/>
-            <a:ext cx="8028431" cy="274320"/>
+            <a:off x="3611880" y="4041648"/>
+            <a:ext cx="8028431" cy="256032"/>
           </a:xfrm>
           <a:prstGeom prst="rect">
             <a:avLst/>
@@ -10846,8 +10846,8 @@
         </p:nvSpPr>
         <p:spPr>
           <a:xfrm>
-            <a:off x="3611880" y="4352544"/>
-            <a:ext cx="8028431" cy="420624"/>
+            <a:off x="3611880" y="4315968"/>
+            <a:ext cx="8028431" cy="347472"/>
           </a:xfrm>
           <a:prstGeom prst="rect">
             <a:avLst/>
@@ -10885,8 +10885,8 @@
         </p:nvSpPr>
         <p:spPr>
           <a:xfrm>
-            <a:off x="3611880" y="4791456"/>
-            <a:ext cx="8028431" cy="347472"/>
+            <a:off x="3611880" y="4681727"/>
+            <a:ext cx="8028431" cy="292608"/>
           </a:xfrm>
           <a:prstGeom prst="rect">
             <a:avLst/>
@@ -10933,8 +10933,8 @@
         </p:nvSpPr>
         <p:spPr>
           <a:xfrm>
-            <a:off x="3611880" y="5212079"/>
-            <a:ext cx="8028431" cy="1152143"/>
+            <a:off x="3611880" y="5010912"/>
+            <a:ext cx="8028431" cy="1353311"/>
           </a:xfrm>
           <a:prstGeom prst="rect">
             <a:avLst/>
@@ -10959,7 +10959,7 @@
                 </a:solidFill>
                 <a:latin typeface="Open Sans"/>
               </a:rPr>
-              <a:t>Akazawa Ryosei is a Liberal Democratic Party member of the House of Representatives for Tottori's 2nd district, first elected in 2005. A University of Tokyo Law graduate with a Cornell MBA, he spent about two decades as an MLIT-lineage bureaucrat. Under PM Ishiba he was Minister for Economic Revitalization and Japan's chief negotiator in the 2025 US tariff talks.</a:t>
+              <a:t>Akazawa Ryosei is a Liberal Democratic Party member of the House of Representatives for Tottori's 2nd district, first elected in 2005. A University of Tokyo Law graduate with a Cornell MBA, he spent about two decades as an MLIT-lineage bureaucrat. Under PM Ishiba he was Minister for Economic Revitalization and Japan's chief negotiator in the 2025 US tariff talks. PM Takaichi appointed him METI Minister on October 21, 2025, reappointed February 18, 2026.</a:t>
             </a:r>
           </a:p>
           <a:p>
@@ -11768,8 +11768,8 @@
         </p:nvSpPr>
         <p:spPr>
           <a:xfrm>
-            <a:off x="3611880" y="1426464"/>
-            <a:ext cx="8028431" cy="274320"/>
+            <a:off x="3611880" y="1408176"/>
+            <a:ext cx="8028431" cy="256032"/>
           </a:xfrm>
           <a:prstGeom prst="rect">
             <a:avLst/>
@@ -11802,8 +11802,8 @@
         </p:nvSpPr>
         <p:spPr>
           <a:xfrm>
-            <a:off x="3611880" y="1719072"/>
-            <a:ext cx="8028431" cy="420624"/>
+            <a:off x="3611880" y="1682495"/>
+            <a:ext cx="8028431" cy="347472"/>
           </a:xfrm>
           <a:prstGeom prst="rect">
             <a:avLst/>
@@ -11841,8 +11841,8 @@
         </p:nvSpPr>
         <p:spPr>
           <a:xfrm>
-            <a:off x="3611880" y="2157984"/>
-            <a:ext cx="8028431" cy="347472"/>
+            <a:off x="3611880" y="2048256"/>
+            <a:ext cx="8028431" cy="292608"/>
           </a:xfrm>
           <a:prstGeom prst="rect">
             <a:avLst/>
@@ -11889,8 +11889,8 @@
         </p:nvSpPr>
         <p:spPr>
           <a:xfrm>
-            <a:off x="3611880" y="2578608"/>
-            <a:ext cx="8028431" cy="1152143"/>
+            <a:off x="3611880" y="2377440"/>
+            <a:ext cx="8028431" cy="1353311"/>
           </a:xfrm>
           <a:prstGeom prst="rect">
             <a:avLst/>
@@ -11998,8 +11998,8 @@
         </p:nvSpPr>
         <p:spPr>
           <a:xfrm>
-            <a:off x="3611880" y="4041648"/>
-            <a:ext cx="3849624" cy="1152144"/>
+            <a:off x="3611880" y="4023359"/>
+            <a:ext cx="3849624" cy="914400"/>
           </a:xfrm>
           <a:prstGeom prst="rect">
             <a:avLst/>
@@ -12067,8 +12067,8 @@
         </p:nvSpPr>
         <p:spPr>
           <a:xfrm>
-            <a:off x="3611880" y="5047488"/>
-            <a:ext cx="3849624" cy="310896"/>
+            <a:off x="3611880" y="4956048"/>
+            <a:ext cx="3849624" cy="292608"/>
           </a:xfrm>
           <a:prstGeom prst="rect">
             <a:avLst/>
@@ -12115,8 +12115,8 @@
         </p:nvSpPr>
         <p:spPr>
           <a:xfrm>
-            <a:off x="3611880" y="5376672"/>
-            <a:ext cx="3849624" cy="987551"/>
+            <a:off x="3611880" y="5266944"/>
+            <a:ext cx="3849624" cy="1097279"/>
           </a:xfrm>
           <a:prstGeom prst="rect">
             <a:avLst/>
@@ -12154,8 +12154,8 @@
         </p:nvSpPr>
         <p:spPr>
           <a:xfrm>
-            <a:off x="7790688" y="4041648"/>
-            <a:ext cx="3849624" cy="1152144"/>
+            <a:off x="7790688" y="4023359"/>
+            <a:ext cx="3849624" cy="914400"/>
           </a:xfrm>
           <a:prstGeom prst="rect">
             <a:avLst/>
@@ -12223,8 +12223,8 @@
         </p:nvSpPr>
         <p:spPr>
           <a:xfrm>
-            <a:off x="7790688" y="5047488"/>
-            <a:ext cx="3849624" cy="310896"/>
+            <a:off x="7790688" y="4956048"/>
+            <a:ext cx="3849624" cy="292608"/>
           </a:xfrm>
           <a:prstGeom prst="rect">
             <a:avLst/>
@@ -12271,8 +12271,8 @@
         </p:nvSpPr>
         <p:spPr>
           <a:xfrm>
-            <a:off x="7790688" y="5376672"/>
-            <a:ext cx="3849624" cy="987551"/>
+            <a:off x="7790688" y="5266944"/>
+            <a:ext cx="3849624" cy="1097279"/>
           </a:xfrm>
           <a:prstGeom prst="rect">
             <a:avLst/>
@@ -13090,8 +13090,8 @@
         </p:nvSpPr>
         <p:spPr>
           <a:xfrm>
-            <a:off x="3611880" y="1426464"/>
-            <a:ext cx="8028431" cy="274320"/>
+            <a:off x="3611880" y="1408176"/>
+            <a:ext cx="8028431" cy="256032"/>
           </a:xfrm>
           <a:prstGeom prst="rect">
             <a:avLst/>
@@ -13124,8 +13124,8 @@
         </p:nvSpPr>
         <p:spPr>
           <a:xfrm>
-            <a:off x="3611880" y="1719072"/>
-            <a:ext cx="8028431" cy="420624"/>
+            <a:off x="3611880" y="1682495"/>
+            <a:ext cx="8028431" cy="347472"/>
           </a:xfrm>
           <a:prstGeom prst="rect">
             <a:avLst/>
@@ -13163,8 +13163,8 @@
         </p:nvSpPr>
         <p:spPr>
           <a:xfrm>
-            <a:off x="3611880" y="2157984"/>
-            <a:ext cx="8028431" cy="347472"/>
+            <a:off x="3611880" y="2048256"/>
+            <a:ext cx="8028431" cy="292608"/>
           </a:xfrm>
           <a:prstGeom prst="rect">
             <a:avLst/>
@@ -13211,8 +13211,8 @@
         </p:nvSpPr>
         <p:spPr>
           <a:xfrm>
-            <a:off x="3611880" y="2578608"/>
-            <a:ext cx="8028431" cy="1152143"/>
+            <a:off x="3611880" y="2377440"/>
+            <a:ext cx="8028431" cy="1353311"/>
           </a:xfrm>
           <a:prstGeom prst="rect">
             <a:avLst/>
@@ -13336,8 +13336,8 @@
         </p:nvSpPr>
         <p:spPr>
           <a:xfrm>
-            <a:off x="3611880" y="4041648"/>
-            <a:ext cx="3849624" cy="1152144"/>
+            <a:off x="3611880" y="4023359"/>
+            <a:ext cx="3849624" cy="914400"/>
           </a:xfrm>
           <a:prstGeom prst="rect">
             <a:avLst/>
@@ -13405,8 +13405,8 @@
         </p:nvSpPr>
         <p:spPr>
           <a:xfrm>
-            <a:off x="3611880" y="5047488"/>
-            <a:ext cx="3849624" cy="310896"/>
+            <a:off x="3611880" y="4956048"/>
+            <a:ext cx="3849624" cy="292608"/>
           </a:xfrm>
           <a:prstGeom prst="rect">
             <a:avLst/>
@@ -13453,8 +13453,8 @@
         </p:nvSpPr>
         <p:spPr>
           <a:xfrm>
-            <a:off x="3611880" y="5376672"/>
-            <a:ext cx="3849624" cy="987551"/>
+            <a:off x="3611880" y="5266944"/>
+            <a:ext cx="3849624" cy="1097279"/>
           </a:xfrm>
           <a:prstGeom prst="rect">
             <a:avLst/>
@@ -13492,8 +13492,8 @@
         </p:nvSpPr>
         <p:spPr>
           <a:xfrm>
-            <a:off x="7790688" y="4041648"/>
-            <a:ext cx="3849624" cy="1152144"/>
+            <a:off x="7790688" y="4023359"/>
+            <a:ext cx="3849624" cy="914400"/>
           </a:xfrm>
           <a:prstGeom prst="rect">
             <a:avLst/>
@@ -13561,8 +13561,8 @@
         </p:nvSpPr>
         <p:spPr>
           <a:xfrm>
-            <a:off x="7790688" y="5047488"/>
-            <a:ext cx="3849624" cy="310896"/>
+            <a:off x="7790688" y="4956048"/>
+            <a:ext cx="3849624" cy="292608"/>
           </a:xfrm>
           <a:prstGeom prst="rect">
             <a:avLst/>
@@ -13609,8 +13609,8 @@
         </p:nvSpPr>
         <p:spPr>
           <a:xfrm>
-            <a:off x="7790688" y="5376672"/>
-            <a:ext cx="3849624" cy="987551"/>
+            <a:off x="7790688" y="5266944"/>
+            <a:ext cx="3849624" cy="1097279"/>
           </a:xfrm>
           <a:prstGeom prst="rect">
             <a:avLst/>
@@ -14428,8 +14428,8 @@
         </p:nvSpPr>
         <p:spPr>
           <a:xfrm>
-            <a:off x="3611880" y="1426464"/>
-            <a:ext cx="8028431" cy="274320"/>
+            <a:off x="3611880" y="1408176"/>
+            <a:ext cx="8028431" cy="256032"/>
           </a:xfrm>
           <a:prstGeom prst="rect">
             <a:avLst/>
@@ -14462,8 +14462,8 @@
         </p:nvSpPr>
         <p:spPr>
           <a:xfrm>
-            <a:off x="3611880" y="1719072"/>
-            <a:ext cx="8028431" cy="420624"/>
+            <a:off x="3611880" y="1682495"/>
+            <a:ext cx="8028431" cy="347472"/>
           </a:xfrm>
           <a:prstGeom prst="rect">
             <a:avLst/>
@@ -14501,8 +14501,8 @@
         </p:nvSpPr>
         <p:spPr>
           <a:xfrm>
-            <a:off x="3611880" y="2157984"/>
-            <a:ext cx="8028431" cy="347472"/>
+            <a:off x="3611880" y="2048256"/>
+            <a:ext cx="8028431" cy="292608"/>
           </a:xfrm>
           <a:prstGeom prst="rect">
             <a:avLst/>
@@ -14549,8 +14549,8 @@
         </p:nvSpPr>
         <p:spPr>
           <a:xfrm>
-            <a:off x="3611880" y="2578608"/>
-            <a:ext cx="8028431" cy="1152143"/>
+            <a:off x="3611880" y="2377440"/>
+            <a:ext cx="8028431" cy="1353311"/>
           </a:xfrm>
           <a:prstGeom prst="rect">
             <a:avLst/>
@@ -14674,8 +14674,8 @@
         </p:nvSpPr>
         <p:spPr>
           <a:xfrm>
-            <a:off x="3611880" y="4041648"/>
-            <a:ext cx="3849624" cy="1152144"/>
+            <a:off x="3611880" y="4023359"/>
+            <a:ext cx="3849624" cy="914400"/>
           </a:xfrm>
           <a:prstGeom prst="rect">
             <a:avLst/>
@@ -14743,8 +14743,8 @@
         </p:nvSpPr>
         <p:spPr>
           <a:xfrm>
-            <a:off x="3611880" y="5047488"/>
-            <a:ext cx="3849624" cy="310896"/>
+            <a:off x="3611880" y="4956048"/>
+            <a:ext cx="3849624" cy="292608"/>
           </a:xfrm>
           <a:prstGeom prst="rect">
             <a:avLst/>
@@ -14791,8 +14791,8 @@
         </p:nvSpPr>
         <p:spPr>
           <a:xfrm>
-            <a:off x="3611880" y="5376672"/>
-            <a:ext cx="3849624" cy="987551"/>
+            <a:off x="3611880" y="5266944"/>
+            <a:ext cx="3849624" cy="1097279"/>
           </a:xfrm>
           <a:prstGeom prst="rect">
             <a:avLst/>
@@ -14830,8 +14830,8 @@
         </p:nvSpPr>
         <p:spPr>
           <a:xfrm>
-            <a:off x="7790688" y="4041648"/>
-            <a:ext cx="3849624" cy="1152144"/>
+            <a:off x="7790688" y="4023359"/>
+            <a:ext cx="3849624" cy="914400"/>
           </a:xfrm>
           <a:prstGeom prst="rect">
             <a:avLst/>
@@ -14899,8 +14899,8 @@
         </p:nvSpPr>
         <p:spPr>
           <a:xfrm>
-            <a:off x="7790688" y="5047488"/>
-            <a:ext cx="3849624" cy="310896"/>
+            <a:off x="7790688" y="4956048"/>
+            <a:ext cx="3849624" cy="292608"/>
           </a:xfrm>
           <a:prstGeom prst="rect">
             <a:avLst/>
@@ -14947,8 +14947,8 @@
         </p:nvSpPr>
         <p:spPr>
           <a:xfrm>
-            <a:off x="7790688" y="5376672"/>
-            <a:ext cx="3849624" cy="987551"/>
+            <a:off x="7790688" y="5266944"/>
+            <a:ext cx="3849624" cy="1097279"/>
           </a:xfrm>
           <a:prstGeom prst="rect">
             <a:avLst/>
@@ -15766,8 +15766,8 @@
         </p:nvSpPr>
         <p:spPr>
           <a:xfrm>
-            <a:off x="3611880" y="1426464"/>
-            <a:ext cx="8028431" cy="274320"/>
+            <a:off x="3611880" y="1408176"/>
+            <a:ext cx="8028431" cy="256032"/>
           </a:xfrm>
           <a:prstGeom prst="rect">
             <a:avLst/>
@@ -15800,8 +15800,8 @@
         </p:nvSpPr>
         <p:spPr>
           <a:xfrm>
-            <a:off x="3611880" y="1719072"/>
-            <a:ext cx="8028431" cy="420624"/>
+            <a:off x="3611880" y="1682495"/>
+            <a:ext cx="8028431" cy="347472"/>
           </a:xfrm>
           <a:prstGeom prst="rect">
             <a:avLst/>
@@ -15839,8 +15839,8 @@
         </p:nvSpPr>
         <p:spPr>
           <a:xfrm>
-            <a:off x="3611880" y="2157984"/>
-            <a:ext cx="8028431" cy="347472"/>
+            <a:off x="3611880" y="2048256"/>
+            <a:ext cx="8028431" cy="292608"/>
           </a:xfrm>
           <a:prstGeom prst="rect">
             <a:avLst/>
@@ -15887,8 +15887,8 @@
         </p:nvSpPr>
         <p:spPr>
           <a:xfrm>
-            <a:off x="3611880" y="2578608"/>
-            <a:ext cx="8028431" cy="1152143"/>
+            <a:off x="3611880" y="2377440"/>
+            <a:ext cx="8028431" cy="1353311"/>
           </a:xfrm>
           <a:prstGeom prst="rect">
             <a:avLst/>
@@ -15996,8 +15996,8 @@
         </p:nvSpPr>
         <p:spPr>
           <a:xfrm>
-            <a:off x="3611880" y="4041648"/>
-            <a:ext cx="3849624" cy="1152144"/>
+            <a:off x="3611880" y="4023359"/>
+            <a:ext cx="3849624" cy="914400"/>
           </a:xfrm>
           <a:prstGeom prst="rect">
             <a:avLst/>
@@ -16065,8 +16065,8 @@
         </p:nvSpPr>
         <p:spPr>
           <a:xfrm>
-            <a:off x="3611880" y="5047488"/>
-            <a:ext cx="3849624" cy="310896"/>
+            <a:off x="3611880" y="4956048"/>
+            <a:ext cx="3849624" cy="292608"/>
           </a:xfrm>
           <a:prstGeom prst="rect">
             <a:avLst/>
@@ -16113,8 +16113,8 @@
         </p:nvSpPr>
         <p:spPr>
           <a:xfrm>
-            <a:off x="3611880" y="5376672"/>
-            <a:ext cx="3849624" cy="987551"/>
+            <a:off x="3611880" y="5266944"/>
+            <a:ext cx="3849624" cy="1097279"/>
           </a:xfrm>
           <a:prstGeom prst="rect">
             <a:avLst/>
@@ -16152,8 +16152,8 @@
         </p:nvSpPr>
         <p:spPr>
           <a:xfrm>
-            <a:off x="7790688" y="4041648"/>
-            <a:ext cx="3849624" cy="1152144"/>
+            <a:off x="7790688" y="4023359"/>
+            <a:ext cx="3849624" cy="914400"/>
           </a:xfrm>
           <a:prstGeom prst="rect">
             <a:avLst/>
@@ -16230,8 +16230,8 @@
         </p:nvSpPr>
         <p:spPr>
           <a:xfrm>
-            <a:off x="7790688" y="5047488"/>
-            <a:ext cx="3849624" cy="310896"/>
+            <a:off x="7790688" y="4956048"/>
+            <a:ext cx="3849624" cy="292608"/>
           </a:xfrm>
           <a:prstGeom prst="rect">
             <a:avLst/>
@@ -16269,8 +16269,8 @@
         </p:nvSpPr>
         <p:spPr>
           <a:xfrm>
-            <a:off x="7790688" y="5376672"/>
-            <a:ext cx="3849624" cy="987551"/>
+            <a:off x="7790688" y="5266944"/>
+            <a:ext cx="3849624" cy="1097279"/>
           </a:xfrm>
           <a:prstGeom prst="rect">
             <a:avLst/>
@@ -16631,7 +16631,7 @@
         <p:spPr>
           <a:xfrm>
             <a:off x="548640" y="1298448"/>
-            <a:ext cx="6858000" cy="4846320"/>
+            <a:ext cx="10332720" cy="4846320"/>
           </a:xfrm>
           <a:prstGeom prst="rect">
             <a:avLst/>
@@ -16795,195 +16795,9 @@
           </a:p>
         </p:txBody>
       </p:sp>
-      <p:sp>
-        <p:nvSpPr>
-          <p:cNvPr id="7" name="Rectangle 6"/>
-          <p:cNvSpPr/>
-          <p:nvPr/>
-        </p:nvSpPr>
-        <p:spPr>
-          <a:xfrm>
-            <a:off x="7772400" y="1298448"/>
-            <a:ext cx="3867912" cy="4663440"/>
-          </a:xfrm>
-          <a:prstGeom prst="rect">
-            <a:avLst/>
-          </a:prstGeom>
-          <a:solidFill>
-            <a:srgbClr val="E1DACE"/>
-          </a:solidFill>
-          <a:ln>
-            <a:noFill/>
-          </a:ln>
-          <a:effectLst/>
-        </p:spPr>
-        <p:style>
-          <a:lnRef idx="1">
-            <a:schemeClr val="accent1"/>
-          </a:lnRef>
-          <a:fillRef idx="3">
-            <a:schemeClr val="accent1"/>
-          </a:fillRef>
-          <a:effectRef idx="2">
-            <a:schemeClr val="accent1"/>
-          </a:effectRef>
-          <a:fontRef idx="minor">
-            <a:schemeClr val="lt1"/>
-          </a:fontRef>
-        </p:style>
-        <p:txBody>
-          <a:bodyPr rtlCol="0" anchor="ctr"/>
-          <a:lstStyle/>
-          <a:p>
-            <a:pPr algn="ctr"/>
-          </a:p>
-        </p:txBody>
-      </p:sp>
-      <p:sp>
-        <p:nvSpPr>
-          <p:cNvPr id="8" name="Rectangle 7"/>
-          <p:cNvSpPr/>
-          <p:nvPr/>
-        </p:nvSpPr>
-        <p:spPr>
-          <a:xfrm>
-            <a:off x="7772400" y="1298448"/>
-            <a:ext cx="3867912" cy="41148"/>
-          </a:xfrm>
-          <a:prstGeom prst="rect">
-            <a:avLst/>
-          </a:prstGeom>
-          <a:solidFill>
-            <a:srgbClr val="B4862D"/>
-          </a:solidFill>
-          <a:ln>
-            <a:noFill/>
-          </a:ln>
-          <a:effectLst/>
-        </p:spPr>
-        <p:style>
-          <a:lnRef idx="1">
-            <a:schemeClr val="accent1"/>
-          </a:lnRef>
-          <a:fillRef idx="3">
-            <a:schemeClr val="accent1"/>
-          </a:fillRef>
-          <a:effectRef idx="2">
-            <a:schemeClr val="accent1"/>
-          </a:effectRef>
-          <a:fontRef idx="minor">
-            <a:schemeClr val="lt1"/>
-          </a:fontRef>
-        </p:style>
-        <p:txBody>
-          <a:bodyPr rtlCol="0" anchor="ctr"/>
-          <a:lstStyle/>
-          <a:p>
-            <a:pPr algn="ctr"/>
-          </a:p>
-        </p:txBody>
-      </p:sp>
-      <p:sp>
-        <p:nvSpPr>
-          <p:cNvPr id="9" name="TextBox 8"/>
-          <p:cNvSpPr txBox="1"/>
-          <p:nvPr/>
-        </p:nvSpPr>
-        <p:spPr>
-          <a:xfrm>
-            <a:off x="8046720" y="1536192"/>
-            <a:ext cx="3383280" cy="4297680"/>
-          </a:xfrm>
-          <a:prstGeom prst="rect">
-            <a:avLst/>
-          </a:prstGeom>
-          <a:noFill/>
-        </p:spPr>
-        <p:txBody>
-          <a:bodyPr wrap="square" anchor="t" lIns="0" rIns="0" tIns="0" bIns="0">
-            <a:spAutoFit/>
-          </a:bodyPr>
-          <a:lstStyle/>
-          <a:p>
-            <a:r>
-              <a:rPr sz="1100" b="1" i="0" spc="100">
-                <a:solidFill>
-                  <a:srgbClr val="0A314D"/>
-                </a:solidFill>
-                <a:latin typeface="Open Sans"/>
-              </a:rPr>
-              <a:t>ABOUT THIS DOCUMENT</a:t>
-            </a:r>
-          </a:p>
-          <a:p>
-            <a:pPr>
-              <a:spcBef>
-                <a:spcPts val="900"/>
-              </a:spcBef>
-            </a:pPr>
-            <a:r>
-              <a:rPr sz="1050" b="0" i="0">
-                <a:solidFill>
-                  <a:srgbClr val="54606C"/>
-                </a:solidFill>
-                <a:latin typeface="Open Sans"/>
-              </a:rPr>
-              <a:t>Prepared within the International Trade Administration, U.S. Department of Commerce, as an internal reference.</a:t>
-            </a:r>
-          </a:p>
-          <a:p>
-            <a:pPr>
-              <a:spcBef>
-                <a:spcPts val="900"/>
-              </a:spcBef>
-            </a:pPr>
-            <a:r>
-              <a:rPr sz="1050" b="0" i="0">
-                <a:solidFill>
-                  <a:srgbClr val="54606C"/>
-                </a:solidFill>
-                <a:latin typeface="Open Sans"/>
-              </a:rPr>
-              <a:t>Formatted to the ITA Visual Style Guide (January 2026 edition): Trade Navy/Trade Blue palette, Open Sans typography, official document signatures.</a:t>
-            </a:r>
-          </a:p>
-          <a:p>
-            <a:pPr>
-              <a:spcBef>
-                <a:spcPts val="900"/>
-              </a:spcBef>
-            </a:pPr>
-            <a:r>
-              <a:rPr sz="1050" b="0" i="0">
-                <a:solidFill>
-                  <a:srgbClr val="54606C"/>
-                </a:solidFill>
-                <a:latin typeface="Open Sans"/>
-              </a:rPr>
-              <a:t>One structured dataset generates this deck, the companion workbook, and the PDF, so figures cannot drift between formats.</a:t>
-            </a:r>
-          </a:p>
-          <a:p>
-            <a:pPr>
-              <a:spcBef>
-                <a:spcPts val="900"/>
-              </a:spcBef>
-            </a:pPr>
-            <a:r>
-              <a:rPr sz="1050" b="0" i="0">
-                <a:solidFill>
-                  <a:srgbClr val="54606C"/>
-                </a:solidFill>
-                <a:latin typeface="Open Sans"/>
-              </a:rPr>
-              <a:t>Data caveats, acting officials, and items pending confirmation are tracked in a separate gaps register (GAPS.md) rather than flagged on slides.</a:t>
-            </a:r>
-          </a:p>
-        </p:txBody>
-      </p:sp>
       <p:cxnSp>
         <p:nvCxnSpPr>
-          <p:cNvPr id="10" name="Connector 9"/>
+          <p:cNvPr id="7" name="Connector 6"/>
           <p:cNvCxnSpPr/>
           <p:nvPr/>
         </p:nvCxnSpPr>
@@ -17019,7 +16833,7 @@
       </p:cxnSp>
       <p:sp>
         <p:nvSpPr>
-          <p:cNvPr id="11" name="TextBox 10"/>
+          <p:cNvPr id="8" name="TextBox 7"/>
           <p:cNvSpPr txBox="1"/>
           <p:nvPr/>
         </p:nvSpPr>
@@ -17053,7 +16867,7 @@
       </p:sp>
       <p:sp>
         <p:nvSpPr>
-          <p:cNvPr id="12" name="TextBox 11"/>
+          <p:cNvPr id="9" name="TextBox 8"/>
           <p:cNvSpPr txBox="1"/>
           <p:nvPr/>
         </p:nvSpPr>
@@ -17087,7 +16901,7 @@
       </p:sp>
       <p:sp>
         <p:nvSpPr>
-          <p:cNvPr id="13" name="TextBox 12"/>
+          <p:cNvPr id="10" name="TextBox 9"/>
           <p:cNvSpPr txBox="1"/>
           <p:nvPr/>
         </p:nvSpPr>
@@ -17760,8 +17574,8 @@
         </p:nvSpPr>
         <p:spPr>
           <a:xfrm>
-            <a:off x="3611880" y="1426464"/>
-            <a:ext cx="8028431" cy="274320"/>
+            <a:off x="3611880" y="1408176"/>
+            <a:ext cx="8028431" cy="256032"/>
           </a:xfrm>
           <a:prstGeom prst="rect">
             <a:avLst/>
@@ -17794,8 +17608,8 @@
         </p:nvSpPr>
         <p:spPr>
           <a:xfrm>
-            <a:off x="3611880" y="1719072"/>
-            <a:ext cx="8028431" cy="420624"/>
+            <a:off x="3611880" y="1682495"/>
+            <a:ext cx="8028431" cy="347472"/>
           </a:xfrm>
           <a:prstGeom prst="rect">
             <a:avLst/>
@@ -17833,8 +17647,8 @@
         </p:nvSpPr>
         <p:spPr>
           <a:xfrm>
-            <a:off x="3611880" y="2157984"/>
-            <a:ext cx="8028431" cy="347472"/>
+            <a:off x="3611880" y="2048256"/>
+            <a:ext cx="8028431" cy="292608"/>
           </a:xfrm>
           <a:prstGeom prst="rect">
             <a:avLst/>
@@ -17881,8 +17695,8 @@
         </p:nvSpPr>
         <p:spPr>
           <a:xfrm>
-            <a:off x="3611880" y="2578608"/>
-            <a:ext cx="8028431" cy="1152143"/>
+            <a:off x="3611880" y="2377440"/>
+            <a:ext cx="8028431" cy="1353311"/>
           </a:xfrm>
           <a:prstGeom prst="rect">
             <a:avLst/>
@@ -17990,8 +17804,8 @@
         </p:nvSpPr>
         <p:spPr>
           <a:xfrm>
-            <a:off x="3611880" y="4041648"/>
-            <a:ext cx="3849624" cy="1152144"/>
+            <a:off x="3611880" y="4023359"/>
+            <a:ext cx="3849624" cy="914400"/>
           </a:xfrm>
           <a:prstGeom prst="rect">
             <a:avLst/>
@@ -18059,8 +17873,8 @@
         </p:nvSpPr>
         <p:spPr>
           <a:xfrm>
-            <a:off x="3611880" y="5047488"/>
-            <a:ext cx="3849624" cy="310896"/>
+            <a:off x="3611880" y="4956048"/>
+            <a:ext cx="3849624" cy="292608"/>
           </a:xfrm>
           <a:prstGeom prst="rect">
             <a:avLst/>
@@ -18107,8 +17921,8 @@
         </p:nvSpPr>
         <p:spPr>
           <a:xfrm>
-            <a:off x="3611880" y="5376672"/>
-            <a:ext cx="3849624" cy="987551"/>
+            <a:off x="3611880" y="5266944"/>
+            <a:ext cx="3849624" cy="1097279"/>
           </a:xfrm>
           <a:prstGeom prst="rect">
             <a:avLst/>
@@ -18146,8 +17960,8 @@
         </p:nvSpPr>
         <p:spPr>
           <a:xfrm>
-            <a:off x="7790688" y="4041648"/>
-            <a:ext cx="3849624" cy="1152144"/>
+            <a:off x="7790688" y="4023359"/>
+            <a:ext cx="3849624" cy="914400"/>
           </a:xfrm>
           <a:prstGeom prst="rect">
             <a:avLst/>
@@ -18215,8 +18029,8 @@
         </p:nvSpPr>
         <p:spPr>
           <a:xfrm>
-            <a:off x="7790688" y="5047488"/>
-            <a:ext cx="3849624" cy="310896"/>
+            <a:off x="7790688" y="4956048"/>
+            <a:ext cx="3849624" cy="292608"/>
           </a:xfrm>
           <a:prstGeom prst="rect">
             <a:avLst/>
@@ -18263,8 +18077,8 @@
         </p:nvSpPr>
         <p:spPr>
           <a:xfrm>
-            <a:off x="7790688" y="5376672"/>
-            <a:ext cx="3849624" cy="987551"/>
+            <a:off x="7790688" y="5266944"/>
+            <a:ext cx="3849624" cy="1097279"/>
           </a:xfrm>
           <a:prstGeom prst="rect">
             <a:avLst/>
@@ -19082,8 +18896,8 @@
         </p:nvSpPr>
         <p:spPr>
           <a:xfrm>
-            <a:off x="3611880" y="1426464"/>
-            <a:ext cx="8028431" cy="274320"/>
+            <a:off x="3611880" y="1408176"/>
+            <a:ext cx="8028431" cy="256032"/>
           </a:xfrm>
           <a:prstGeom prst="rect">
             <a:avLst/>
@@ -19116,8 +18930,8 @@
         </p:nvSpPr>
         <p:spPr>
           <a:xfrm>
-            <a:off x="3611880" y="1719072"/>
-            <a:ext cx="8028431" cy="420624"/>
+            <a:off x="3611880" y="1682495"/>
+            <a:ext cx="8028431" cy="347472"/>
           </a:xfrm>
           <a:prstGeom prst="rect">
             <a:avLst/>
@@ -19155,8 +18969,8 @@
         </p:nvSpPr>
         <p:spPr>
           <a:xfrm>
-            <a:off x="3611880" y="2157984"/>
-            <a:ext cx="8028431" cy="347472"/>
+            <a:off x="3611880" y="2048256"/>
+            <a:ext cx="8028431" cy="292608"/>
           </a:xfrm>
           <a:prstGeom prst="rect">
             <a:avLst/>
@@ -19203,8 +19017,8 @@
         </p:nvSpPr>
         <p:spPr>
           <a:xfrm>
-            <a:off x="3611880" y="2578608"/>
-            <a:ext cx="8028431" cy="1152143"/>
+            <a:off x="3611880" y="2377440"/>
+            <a:ext cx="8028431" cy="1353311"/>
           </a:xfrm>
           <a:prstGeom prst="rect">
             <a:avLst/>
@@ -19328,8 +19142,8 @@
         </p:nvSpPr>
         <p:spPr>
           <a:xfrm>
-            <a:off x="3611880" y="4059935"/>
-            <a:ext cx="8028431" cy="274320"/>
+            <a:off x="3611880" y="4041648"/>
+            <a:ext cx="8028431" cy="256032"/>
           </a:xfrm>
           <a:prstGeom prst="rect">
             <a:avLst/>
@@ -19362,8 +19176,8 @@
         </p:nvSpPr>
         <p:spPr>
           <a:xfrm>
-            <a:off x="3611880" y="4352544"/>
-            <a:ext cx="8028431" cy="420624"/>
+            <a:off x="3611880" y="4315968"/>
+            <a:ext cx="8028431" cy="347472"/>
           </a:xfrm>
           <a:prstGeom prst="rect">
             <a:avLst/>
@@ -19401,8 +19215,8 @@
         </p:nvSpPr>
         <p:spPr>
           <a:xfrm>
-            <a:off x="3611880" y="4791456"/>
-            <a:ext cx="8028431" cy="347472"/>
+            <a:off x="3611880" y="4681727"/>
+            <a:ext cx="8028431" cy="292608"/>
           </a:xfrm>
           <a:prstGeom prst="rect">
             <a:avLst/>
@@ -19449,8 +19263,8 @@
         </p:nvSpPr>
         <p:spPr>
           <a:xfrm>
-            <a:off x="3611880" y="5212079"/>
-            <a:ext cx="8028431" cy="1152143"/>
+            <a:off x="3611880" y="5010912"/>
+            <a:ext cx="8028431" cy="1353311"/>
           </a:xfrm>
           <a:prstGeom prst="rect">
             <a:avLst/>
@@ -20268,8 +20082,8 @@
         </p:nvSpPr>
         <p:spPr>
           <a:xfrm>
-            <a:off x="3611880" y="1426464"/>
-            <a:ext cx="8028431" cy="274320"/>
+            <a:off x="3611880" y="1408176"/>
+            <a:ext cx="8028431" cy="256032"/>
           </a:xfrm>
           <a:prstGeom prst="rect">
             <a:avLst/>
@@ -20302,8 +20116,8 @@
         </p:nvSpPr>
         <p:spPr>
           <a:xfrm>
-            <a:off x="3611880" y="1719072"/>
-            <a:ext cx="8028431" cy="420624"/>
+            <a:off x="3611880" y="1682495"/>
+            <a:ext cx="8028431" cy="347472"/>
           </a:xfrm>
           <a:prstGeom prst="rect">
             <a:avLst/>
@@ -20341,8 +20155,8 @@
         </p:nvSpPr>
         <p:spPr>
           <a:xfrm>
-            <a:off x="3611880" y="2157984"/>
-            <a:ext cx="8028431" cy="347472"/>
+            <a:off x="3611880" y="2048256"/>
+            <a:ext cx="8028431" cy="292608"/>
           </a:xfrm>
           <a:prstGeom prst="rect">
             <a:avLst/>
@@ -20389,8 +20203,8 @@
         </p:nvSpPr>
         <p:spPr>
           <a:xfrm>
-            <a:off x="3611880" y="2578608"/>
-            <a:ext cx="8028431" cy="1152143"/>
+            <a:off x="3611880" y="2377440"/>
+            <a:ext cx="8028431" cy="1353311"/>
           </a:xfrm>
           <a:prstGeom prst="rect">
             <a:avLst/>
@@ -20514,8 +20328,8 @@
         </p:nvSpPr>
         <p:spPr>
           <a:xfrm>
-            <a:off x="3611880" y="4041648"/>
-            <a:ext cx="3849624" cy="1152144"/>
+            <a:off x="3611880" y="4023359"/>
+            <a:ext cx="3849624" cy="914400"/>
           </a:xfrm>
           <a:prstGeom prst="rect">
             <a:avLst/>
@@ -20583,8 +20397,8 @@
         </p:nvSpPr>
         <p:spPr>
           <a:xfrm>
-            <a:off x="3611880" y="5047488"/>
-            <a:ext cx="3849624" cy="310896"/>
+            <a:off x="3611880" y="4956048"/>
+            <a:ext cx="3849624" cy="292608"/>
           </a:xfrm>
           <a:prstGeom prst="rect">
             <a:avLst/>
@@ -20631,8 +20445,8 @@
         </p:nvSpPr>
         <p:spPr>
           <a:xfrm>
-            <a:off x="3611880" y="5376672"/>
-            <a:ext cx="3849624" cy="987551"/>
+            <a:off x="3611880" y="5266944"/>
+            <a:ext cx="3849624" cy="1097279"/>
           </a:xfrm>
           <a:prstGeom prst="rect">
             <a:avLst/>
@@ -20670,8 +20484,8 @@
         </p:nvSpPr>
         <p:spPr>
           <a:xfrm>
-            <a:off x="7790688" y="4041648"/>
-            <a:ext cx="3849624" cy="1152144"/>
+            <a:off x="7790688" y="4023359"/>
+            <a:ext cx="3849624" cy="914400"/>
           </a:xfrm>
           <a:prstGeom prst="rect">
             <a:avLst/>
@@ -20739,8 +20553,8 @@
         </p:nvSpPr>
         <p:spPr>
           <a:xfrm>
-            <a:off x="7790688" y="5047488"/>
-            <a:ext cx="3849624" cy="310896"/>
+            <a:off x="7790688" y="4956048"/>
+            <a:ext cx="3849624" cy="292608"/>
           </a:xfrm>
           <a:prstGeom prst="rect">
             <a:avLst/>
@@ -20787,8 +20601,8 @@
         </p:nvSpPr>
         <p:spPr>
           <a:xfrm>
-            <a:off x="7790688" y="5376672"/>
-            <a:ext cx="3849624" cy="987551"/>
+            <a:off x="7790688" y="5266944"/>
+            <a:ext cx="3849624" cy="1097279"/>
           </a:xfrm>
           <a:prstGeom prst="rect">
             <a:avLst/>
@@ -21606,8 +21420,8 @@
         </p:nvSpPr>
         <p:spPr>
           <a:xfrm>
-            <a:off x="3611880" y="1408176"/>
-            <a:ext cx="3849624" cy="1152144"/>
+            <a:off x="3611880" y="1389888"/>
+            <a:ext cx="3849624" cy="914400"/>
           </a:xfrm>
           <a:prstGeom prst="rect">
             <a:avLst/>
@@ -21675,8 +21489,8 @@
         </p:nvSpPr>
         <p:spPr>
           <a:xfrm>
-            <a:off x="3611880" y="2414015"/>
-            <a:ext cx="3849624" cy="310896"/>
+            <a:off x="3611880" y="2322576"/>
+            <a:ext cx="3849624" cy="292608"/>
           </a:xfrm>
           <a:prstGeom prst="rect">
             <a:avLst/>
@@ -21723,8 +21537,8 @@
         </p:nvSpPr>
         <p:spPr>
           <a:xfrm>
-            <a:off x="3611880" y="2743200"/>
-            <a:ext cx="3849624" cy="987551"/>
+            <a:off x="3611880" y="2633472"/>
+            <a:ext cx="3849624" cy="1097279"/>
           </a:xfrm>
           <a:prstGeom prst="rect">
             <a:avLst/>
@@ -21762,8 +21576,8 @@
         </p:nvSpPr>
         <p:spPr>
           <a:xfrm>
-            <a:off x="7790688" y="1408176"/>
-            <a:ext cx="3849624" cy="1152144"/>
+            <a:off x="7790688" y="1389888"/>
+            <a:ext cx="3849624" cy="914400"/>
           </a:xfrm>
           <a:prstGeom prst="rect">
             <a:avLst/>
@@ -21831,8 +21645,8 @@
         </p:nvSpPr>
         <p:spPr>
           <a:xfrm>
-            <a:off x="7790688" y="2414015"/>
-            <a:ext cx="3849624" cy="310896"/>
+            <a:off x="7790688" y="2322576"/>
+            <a:ext cx="3849624" cy="292608"/>
           </a:xfrm>
           <a:prstGeom prst="rect">
             <a:avLst/>
@@ -21879,8 +21693,8 @@
         </p:nvSpPr>
         <p:spPr>
           <a:xfrm>
-            <a:off x="7790688" y="2743200"/>
-            <a:ext cx="3849624" cy="987551"/>
+            <a:off x="7790688" y="2633472"/>
+            <a:ext cx="3849624" cy="1097279"/>
           </a:xfrm>
           <a:prstGeom prst="rect">
             <a:avLst/>
@@ -21988,8 +21802,8 @@
         </p:nvSpPr>
         <p:spPr>
           <a:xfrm>
-            <a:off x="3611880" y="4041648"/>
-            <a:ext cx="3849624" cy="1152144"/>
+            <a:off x="3611880" y="4023359"/>
+            <a:ext cx="3849624" cy="914400"/>
           </a:xfrm>
           <a:prstGeom prst="rect">
             <a:avLst/>
@@ -22057,8 +21871,8 @@
         </p:nvSpPr>
         <p:spPr>
           <a:xfrm>
-            <a:off x="3611880" y="5047488"/>
-            <a:ext cx="3849624" cy="310896"/>
+            <a:off x="3611880" y="4956048"/>
+            <a:ext cx="3849624" cy="292608"/>
           </a:xfrm>
           <a:prstGeom prst="rect">
             <a:avLst/>
@@ -22105,8 +21919,8 @@
         </p:nvSpPr>
         <p:spPr>
           <a:xfrm>
-            <a:off x="3611880" y="5376672"/>
-            <a:ext cx="3849624" cy="987551"/>
+            <a:off x="3611880" y="5266944"/>
+            <a:ext cx="3849624" cy="1097279"/>
           </a:xfrm>
           <a:prstGeom prst="rect">
             <a:avLst/>
@@ -22144,8 +21958,8 @@
         </p:nvSpPr>
         <p:spPr>
           <a:xfrm>
-            <a:off x="7790688" y="4041648"/>
-            <a:ext cx="3849624" cy="1152144"/>
+            <a:off x="7790688" y="4023359"/>
+            <a:ext cx="3849624" cy="914400"/>
           </a:xfrm>
           <a:prstGeom prst="rect">
             <a:avLst/>
@@ -22213,8 +22027,8 @@
         </p:nvSpPr>
         <p:spPr>
           <a:xfrm>
-            <a:off x="7790688" y="5047488"/>
-            <a:ext cx="3849624" cy="310896"/>
+            <a:off x="7790688" y="4956048"/>
+            <a:ext cx="3849624" cy="292608"/>
           </a:xfrm>
           <a:prstGeom prst="rect">
             <a:avLst/>
@@ -22261,8 +22075,8 @@
         </p:nvSpPr>
         <p:spPr>
           <a:xfrm>
-            <a:off x="7790688" y="5376672"/>
-            <a:ext cx="3849624" cy="987551"/>
+            <a:off x="7790688" y="5266944"/>
+            <a:ext cx="3849624" cy="1097279"/>
           </a:xfrm>
           <a:prstGeom prst="rect">
             <a:avLst/>
@@ -23123,8 +22937,8 @@
         </p:nvSpPr>
         <p:spPr>
           <a:xfrm>
-            <a:off x="3611880" y="1426464"/>
-            <a:ext cx="8028431" cy="274320"/>
+            <a:off x="3611880" y="1408176"/>
+            <a:ext cx="8028431" cy="256032"/>
           </a:xfrm>
           <a:prstGeom prst="rect">
             <a:avLst/>
@@ -23157,8 +22971,8 @@
         </p:nvSpPr>
         <p:spPr>
           <a:xfrm>
-            <a:off x="3611880" y="1719072"/>
-            <a:ext cx="8028431" cy="420624"/>
+            <a:off x="3611880" y="1682495"/>
+            <a:ext cx="8028431" cy="347472"/>
           </a:xfrm>
           <a:prstGeom prst="rect">
             <a:avLst/>
@@ -23196,8 +23010,8 @@
         </p:nvSpPr>
         <p:spPr>
           <a:xfrm>
-            <a:off x="3611880" y="2157984"/>
-            <a:ext cx="8028431" cy="347472"/>
+            <a:off x="3611880" y="2048256"/>
+            <a:ext cx="8028431" cy="292608"/>
           </a:xfrm>
           <a:prstGeom prst="rect">
             <a:avLst/>
@@ -23244,8 +23058,8 @@
         </p:nvSpPr>
         <p:spPr>
           <a:xfrm>
-            <a:off x="3611880" y="2578608"/>
-            <a:ext cx="8028431" cy="1152143"/>
+            <a:off x="3611880" y="2377440"/>
+            <a:ext cx="8028431" cy="1353311"/>
           </a:xfrm>
           <a:prstGeom prst="rect">
             <a:avLst/>
@@ -23353,8 +23167,8 @@
         </p:nvSpPr>
         <p:spPr>
           <a:xfrm>
-            <a:off x="3611880" y="4059935"/>
-            <a:ext cx="8028431" cy="274320"/>
+            <a:off x="3611880" y="4041648"/>
+            <a:ext cx="8028431" cy="256032"/>
           </a:xfrm>
           <a:prstGeom prst="rect">
             <a:avLst/>
@@ -23387,8 +23201,8 @@
         </p:nvSpPr>
         <p:spPr>
           <a:xfrm>
-            <a:off x="3611880" y="4352544"/>
-            <a:ext cx="8028431" cy="420624"/>
+            <a:off x="3611880" y="4315968"/>
+            <a:ext cx="8028431" cy="347472"/>
           </a:xfrm>
           <a:prstGeom prst="rect">
             <a:avLst/>
@@ -23426,8 +23240,8 @@
         </p:nvSpPr>
         <p:spPr>
           <a:xfrm>
-            <a:off x="3611880" y="4791456"/>
-            <a:ext cx="8028431" cy="347472"/>
+            <a:off x="3611880" y="4681727"/>
+            <a:ext cx="8028431" cy="292608"/>
           </a:xfrm>
           <a:prstGeom prst="rect">
             <a:avLst/>
@@ -23474,8 +23288,8 @@
         </p:nvSpPr>
         <p:spPr>
           <a:xfrm>
-            <a:off x="3611880" y="5212079"/>
-            <a:ext cx="8028431" cy="1152143"/>
+            <a:off x="3611880" y="5010912"/>
+            <a:ext cx="8028431" cy="1353311"/>
           </a:xfrm>
           <a:prstGeom prst="rect">
             <a:avLst/>
@@ -24366,8 +24180,8 @@
         </p:nvSpPr>
         <p:spPr>
           <a:xfrm>
-            <a:off x="3611880" y="1426464"/>
-            <a:ext cx="8028431" cy="274320"/>
+            <a:off x="3611880" y="1408176"/>
+            <a:ext cx="8028431" cy="256032"/>
           </a:xfrm>
           <a:prstGeom prst="rect">
             <a:avLst/>
@@ -24400,8 +24214,8 @@
         </p:nvSpPr>
         <p:spPr>
           <a:xfrm>
-            <a:off x="3611880" y="1719072"/>
-            <a:ext cx="8028431" cy="420624"/>
+            <a:off x="3611880" y="1682495"/>
+            <a:ext cx="8028431" cy="347472"/>
           </a:xfrm>
           <a:prstGeom prst="rect">
             <a:avLst/>
@@ -24439,8 +24253,8 @@
         </p:nvSpPr>
         <p:spPr>
           <a:xfrm>
-            <a:off x="3611880" y="2157984"/>
-            <a:ext cx="8028431" cy="347472"/>
+            <a:off x="3611880" y="2048256"/>
+            <a:ext cx="8028431" cy="292608"/>
           </a:xfrm>
           <a:prstGeom prst="rect">
             <a:avLst/>
@@ -24487,8 +24301,8 @@
         </p:nvSpPr>
         <p:spPr>
           <a:xfrm>
-            <a:off x="3611880" y="2578608"/>
-            <a:ext cx="8028431" cy="1152143"/>
+            <a:off x="3611880" y="2377440"/>
+            <a:ext cx="8028431" cy="1353311"/>
           </a:xfrm>
           <a:prstGeom prst="rect">
             <a:avLst/>
@@ -24596,8 +24410,8 @@
         </p:nvSpPr>
         <p:spPr>
           <a:xfrm>
-            <a:off x="3611880" y="4059935"/>
-            <a:ext cx="8028431" cy="274320"/>
+            <a:off x="3611880" y="4041648"/>
+            <a:ext cx="8028431" cy="256032"/>
           </a:xfrm>
           <a:prstGeom prst="rect">
             <a:avLst/>
@@ -24630,8 +24444,8 @@
         </p:nvSpPr>
         <p:spPr>
           <a:xfrm>
-            <a:off x="3611880" y="4352544"/>
-            <a:ext cx="8028431" cy="420624"/>
+            <a:off x="3611880" y="4315968"/>
+            <a:ext cx="8028431" cy="347472"/>
           </a:xfrm>
           <a:prstGeom prst="rect">
             <a:avLst/>
@@ -24669,8 +24483,8 @@
         </p:nvSpPr>
         <p:spPr>
           <a:xfrm>
-            <a:off x="3611880" y="4791456"/>
-            <a:ext cx="8028431" cy="347472"/>
+            <a:off x="3611880" y="4681727"/>
+            <a:ext cx="8028431" cy="292608"/>
           </a:xfrm>
           <a:prstGeom prst="rect">
             <a:avLst/>
@@ -24717,8 +24531,8 @@
         </p:nvSpPr>
         <p:spPr>
           <a:xfrm>
-            <a:off x="3611880" y="5212079"/>
-            <a:ext cx="8028431" cy="1152143"/>
+            <a:off x="3611880" y="5010912"/>
+            <a:ext cx="8028431" cy="1353311"/>
           </a:xfrm>
           <a:prstGeom prst="rect">
             <a:avLst/>
@@ -25003,7 +24817,7 @@
                 </a:solidFill>
                 <a:latin typeface="Open Sans"/>
               </a:rPr>
-              <a:t>Sources &amp; Notes</a:t>
+              <a:t>Sources</a:t>
             </a:r>
           </a:p>
         </p:txBody>
@@ -25037,7 +24851,7 @@
                 </a:solidFill>
                 <a:latin typeface="Open Sans"/>
               </a:rPr>
-              <a:t>datasets, vintages, and measurement notes</a:t>
+              <a:t>datasets and vintages</a:t>
             </a:r>
           </a:p>
         </p:txBody>
@@ -25094,8 +24908,8 @@
         </p:nvSpPr>
         <p:spPr>
           <a:xfrm>
-            <a:off x="548640" y="1298448"/>
-            <a:ext cx="5532120" cy="4846320"/>
+            <a:off x="548640" y="1371600"/>
+            <a:ext cx="10881360" cy="4754880"/>
           </a:xfrm>
           <a:prstGeom prst="rect">
             <a:avLst/>
@@ -25113,7 +24927,7 @@
                 <a:spcPts val="0"/>
               </a:spcBef>
               <a:spcAft>
-                <a:spcPts val="300"/>
+                <a:spcPts val="400"/>
               </a:spcAft>
             </a:pPr>
             <a:r>
@@ -25129,11 +24943,11 @@
           <a:p>
             <a:pPr>
               <a:spcAft>
-                <a:spcPts val="200"/>
+                <a:spcPts val="400"/>
               </a:spcAft>
             </a:pPr>
             <a:r>
-              <a:rPr sz="1050" b="1" i="0">
+              <a:rPr sz="1100" b="1" i="0">
                 <a:solidFill>
                   <a:srgbClr val="B4862D"/>
                 </a:solidFill>
@@ -25142,7 +24956,7 @@
               <a:t>•  </a:t>
             </a:r>
             <a:r>
-              <a:rPr sz="1050" b="0" i="0">
+              <a:rPr sz="1100" b="0" i="0">
                 <a:solidFill>
                   <a:srgbClr val="2C2C2C"/>
                 </a:solidFill>
@@ -25154,11 +24968,11 @@
           <a:p>
             <a:pPr>
               <a:spcAft>
-                <a:spcPts val="200"/>
+                <a:spcPts val="400"/>
               </a:spcAft>
             </a:pPr>
             <a:r>
-              <a:rPr sz="1050" b="1" i="0">
+              <a:rPr sz="1100" b="1" i="0">
                 <a:solidFill>
                   <a:srgbClr val="B4862D"/>
                 </a:solidFill>
@@ -25167,7 +24981,7 @@
               <a:t>•  </a:t>
             </a:r>
             <a:r>
-              <a:rPr sz="1050" b="0" i="0">
+              <a:rPr sz="1100" b="0" i="0">
                 <a:solidFill>
                   <a:srgbClr val="2C2C2C"/>
                 </a:solidFill>
@@ -25179,11 +24993,11 @@
           <a:p>
             <a:pPr>
               <a:spcAft>
-                <a:spcPts val="200"/>
+                <a:spcPts val="400"/>
               </a:spcAft>
             </a:pPr>
             <a:r>
-              <a:rPr sz="1050" b="1" i="0">
+              <a:rPr sz="1100" b="1" i="0">
                 <a:solidFill>
                   <a:srgbClr val="B4862D"/>
                 </a:solidFill>
@@ -25192,7 +25006,7 @@
               <a:t>•  </a:t>
             </a:r>
             <a:r>
-              <a:rPr sz="1050" b="0" i="0">
+              <a:rPr sz="1100" b="0" i="0">
                 <a:solidFill>
                   <a:srgbClr val="2C2C2C"/>
                 </a:solidFill>
@@ -25204,11 +25018,11 @@
           <a:p>
             <a:pPr>
               <a:spcAft>
-                <a:spcPts val="200"/>
+                <a:spcPts val="400"/>
               </a:spcAft>
             </a:pPr>
             <a:r>
-              <a:rPr sz="1050" b="1" i="0">
+              <a:rPr sz="1100" b="1" i="0">
                 <a:solidFill>
                   <a:srgbClr val="B4862D"/>
                 </a:solidFill>
@@ -25217,7 +25031,7 @@
               <a:t>•  </a:t>
             </a:r>
             <a:r>
-              <a:rPr sz="1050" b="0" i="0">
+              <a:rPr sz="1100" b="0" i="0">
                 <a:solidFill>
                   <a:srgbClr val="2C2C2C"/>
                 </a:solidFill>
@@ -25229,11 +25043,11 @@
           <a:p>
             <a:pPr>
               <a:spcAft>
-                <a:spcPts val="200"/>
+                <a:spcPts val="400"/>
               </a:spcAft>
             </a:pPr>
             <a:r>
-              <a:rPr sz="1050" b="1" i="0">
+              <a:rPr sz="1100" b="1" i="0">
                 <a:solidFill>
                   <a:srgbClr val="B4862D"/>
                 </a:solidFill>
@@ -25242,65 +25056,23 @@
               <a:t>•  </a:t>
             </a:r>
             <a:r>
-              <a:rPr sz="1050" b="0" i="0">
+              <a:rPr sz="1100" b="0" i="0">
                 <a:solidFill>
                   <a:srgbClr val="2C2C2C"/>
                 </a:solidFill>
                 <a:latin typeface="Open Sans"/>
               </a:rPr>
-              <a:t>Officeholders: official government sources and 2026-dated press, verified 2026-07-16 with an independent second pass.</a:t>
-            </a:r>
-          </a:p>
-        </p:txBody>
-      </p:sp>
-      <p:sp>
-        <p:nvSpPr>
-          <p:cNvPr id="7" name="TextBox 6"/>
-          <p:cNvSpPr txBox="1"/>
-          <p:nvPr/>
-        </p:nvSpPr>
-        <p:spPr>
-          <a:xfrm>
-            <a:off x="6355080" y="1298448"/>
-            <a:ext cx="5303520" cy="4846320"/>
-          </a:xfrm>
-          <a:prstGeom prst="rect">
-            <a:avLst/>
-          </a:prstGeom>
-          <a:noFill/>
-        </p:spPr>
-        <p:txBody>
-          <a:bodyPr wrap="square" anchor="t" lIns="0" rIns="0" tIns="0" bIns="0">
-            <a:spAutoFit/>
-          </a:bodyPr>
-          <a:lstStyle/>
+              <a:t>EU &amp; African Union annex: IMF WEO, Eurostat, USTR, and official EU/AU sources, verified 2026-07-16.</a:t>
+            </a:r>
+          </a:p>
           <a:p>
             <a:pPr>
-              <a:spcBef>
-                <a:spcPts val="0"/>
-              </a:spcBef>
               <a:spcAft>
-                <a:spcPts val="300"/>
+                <a:spcPts val="400"/>
               </a:spcAft>
             </a:pPr>
             <a:r>
-              <a:rPr sz="1150" b="1" i="0" spc="60">
-                <a:solidFill>
-                  <a:srgbClr val="0A314D"/>
-                </a:solidFill>
-                <a:latin typeface="Open Sans"/>
-              </a:rPr>
-              <a:t>MEASUREMENT NOTES</a:t>
-            </a:r>
-          </a:p>
-          <a:p>
-            <a:pPr>
-              <a:spcAft>
-                <a:spcPts val="200"/>
-              </a:spcAft>
-            </a:pPr>
-            <a:r>
-              <a:rPr sz="1050" b="1" i="0">
+              <a:rPr sz="1100" b="1" i="0">
                 <a:solidFill>
                   <a:srgbClr val="B4862D"/>
                 </a:solidFill>
@@ -25309,208 +25081,20 @@
               <a:t>•  </a:t>
             </a:r>
             <a:r>
-              <a:rPr sz="1050" b="0" i="0">
+              <a:rPr sz="1100" b="0" i="0">
                 <a:solidFill>
                   <a:srgbClr val="2C2C2C"/>
                 </a:solidFill>
                 <a:latin typeface="Open Sans"/>
               </a:rPr>
-              <a:t>Australia's overall balance is goods+services; India's is fiscal year 2025-26. All others goods-only, calendar 2025.</a:t>
-            </a:r>
-          </a:p>
-          <a:p>
-            <a:pPr>
-              <a:spcAft>
-                <a:spcPts val="200"/>
-              </a:spcAft>
-            </a:pPr>
-            <a:r>
-              <a:rPr sz="1050" b="1" i="0">
-                <a:solidFill>
-                  <a:srgbClr val="B4862D"/>
-                </a:solidFill>
-                <a:latin typeface="Open Sans"/>
-              </a:rPr>
-              <a:t>•  </a:t>
-            </a:r>
-            <a:r>
-              <a:rPr sz="1050" b="0" i="0">
-                <a:solidFill>
-                  <a:srgbClr val="2C2C2C"/>
-                </a:solidFill>
-                <a:latin typeface="Open Sans"/>
-              </a:rPr>
-              <a:t>Several overall balances are converted from local currency (EUR/GBP/CAD/AUD/JPY/SAR) at ~2025 average rates; USD values carry exchange-rate uncertainty.</a:t>
-            </a:r>
-          </a:p>
-          <a:p>
-            <a:pPr>
-              <a:spcAft>
-                <a:spcPts val="200"/>
-              </a:spcAft>
-            </a:pPr>
-            <a:r>
-              <a:rPr sz="1050" b="1" i="0">
-                <a:solidFill>
-                  <a:srgbClr val="B4862D"/>
-                </a:solidFill>
-                <a:latin typeface="Open Sans"/>
-              </a:rPr>
-              <a:t>•  </a:t>
-            </a:r>
-            <a:r>
-              <a:rPr sz="1050" b="0" i="0">
-                <a:solidFill>
-                  <a:srgbClr val="2C2C2C"/>
-                </a:solidFill>
-                <a:latin typeface="Open Sans"/>
-              </a:rPr>
-              <a:t>census.gov and imf.org were not directly reachable from the build environment; figures come from official-data-derived channels.</a:t>
-            </a:r>
-          </a:p>
-          <a:p>
-            <a:pPr>
-              <a:spcBef>
-                <a:spcPts val="1000"/>
-              </a:spcBef>
-              <a:spcAft>
-                <a:spcPts val="300"/>
-              </a:spcAft>
-            </a:pPr>
-            <a:r>
-              <a:rPr sz="1150" b="1" i="0" spc="60">
-                <a:solidFill>
-                  <a:srgbClr val="0A314D"/>
-                </a:solidFill>
-                <a:latin typeface="Open Sans"/>
-              </a:rPr>
-              <a:t>IMAGERY &amp; FORMAT</a:t>
-            </a:r>
-          </a:p>
-          <a:p>
-            <a:pPr>
-              <a:spcAft>
-                <a:spcPts val="200"/>
-              </a:spcAft>
-            </a:pPr>
-            <a:r>
-              <a:rPr sz="1050" b="1" i="0">
-                <a:solidFill>
-                  <a:srgbClr val="B4862D"/>
-                </a:solidFill>
-                <a:latin typeface="Open Sans"/>
-              </a:rPr>
-              <a:t>•  </a:t>
-            </a:r>
-            <a:r>
-              <a:rPr sz="1050" b="0" i="0">
-                <a:solidFill>
-                  <a:srgbClr val="2C2C2C"/>
-                </a:solidFill>
-                <a:latin typeface="Open Sans"/>
-              </a:rPr>
-              <a:t>Flags: public-domain renderings, uniform height, true aspect ratios.</a:t>
-            </a:r>
-          </a:p>
-          <a:p>
-            <a:pPr>
-              <a:spcAft>
-                <a:spcPts val="200"/>
-              </a:spcAft>
-            </a:pPr>
-            <a:r>
-              <a:rPr sz="1050" b="1" i="0">
-                <a:solidFill>
-                  <a:srgbClr val="B4862D"/>
-                </a:solidFill>
-                <a:latin typeface="Open Sans"/>
-              </a:rPr>
-              <a:t>•  </a:t>
-            </a:r>
-            <a:r>
-              <a:rPr sz="1050" b="0" i="0">
-                <a:solidFill>
-                  <a:srgbClr val="2C2C2C"/>
-                </a:solidFill>
-                <a:latin typeface="Open Sans"/>
-              </a:rPr>
-              <a:t>Design per the ITA Visual Style Guide (Jan 2026): Trade Navy/Blue palette, Open Sans, official signatures.</a:t>
-            </a:r>
-          </a:p>
-          <a:p>
-            <a:pPr>
-              <a:spcBef>
-                <a:spcPts val="1000"/>
-              </a:spcBef>
-              <a:spcAft>
-                <a:spcPts val="300"/>
-              </a:spcAft>
-            </a:pPr>
-            <a:r>
-              <a:rPr sz="1150" b="1" i="0" spc="60">
-                <a:solidFill>
-                  <a:srgbClr val="0A314D"/>
-                </a:solidFill>
-                <a:latin typeface="Open Sans"/>
-              </a:rPr>
-              <a:t>SCOPE</a:t>
-            </a:r>
-          </a:p>
-          <a:p>
-            <a:pPr>
-              <a:spcAft>
-                <a:spcPts val="200"/>
-              </a:spcAft>
-            </a:pPr>
-            <a:r>
-              <a:rPr sz="1050" b="1" i="0">
-                <a:solidFill>
-                  <a:srgbClr val="B4862D"/>
-                </a:solidFill>
-                <a:latin typeface="Open Sans"/>
-              </a:rPr>
-              <a:t>•  </a:t>
-            </a:r>
-            <a:r>
-              <a:rPr sz="1050" b="0" i="0">
-                <a:solidFill>
-                  <a:srgbClr val="2C2C2C"/>
-                </a:solidFill>
-                <a:latin typeface="Open Sans"/>
-              </a:rPr>
-              <a:t>Poland substituted for South Africa. The EU and African Union hold G20 bloc seats and are profiled in the bloc annex.</a:t>
-            </a:r>
-          </a:p>
-          <a:p>
-            <a:pPr>
-              <a:spcAft>
-                <a:spcPts val="200"/>
-              </a:spcAft>
-            </a:pPr>
-            <a:r>
-              <a:rPr sz="1050" b="1" i="0">
-                <a:solidFill>
-                  <a:srgbClr val="B4862D"/>
-                </a:solidFill>
-                <a:latin typeface="Open Sans"/>
-              </a:rPr>
-              <a:t>•  </a:t>
-            </a:r>
-            <a:r>
-              <a:rPr sz="1050" b="0" i="0">
-                <a:solidFill>
-                  <a:srgbClr val="2C2C2C"/>
-                </a:solidFill>
-                <a:latin typeface="Open Sans"/>
-              </a:rPr>
-              <a:t>A detailed uncertainty register (acting officials, figures pending confirmation) accompanies this deck: output/GAPS.md.</a:t>
+              <a:t>Officeholders: official government sources and 2026-dated press, verified 2026-07-16 with an independent second pass.</a:t>
             </a:r>
           </a:p>
         </p:txBody>
       </p:sp>
       <p:cxnSp>
         <p:nvCxnSpPr>
-          <p:cNvPr id="8" name="Connector 7"/>
+          <p:cNvPr id="7" name="Connector 6"/>
           <p:cNvCxnSpPr/>
           <p:nvPr/>
         </p:nvCxnSpPr>
@@ -25546,7 +25130,7 @@
       </p:cxnSp>
       <p:sp>
         <p:nvSpPr>
-          <p:cNvPr id="9" name="TextBox 8"/>
+          <p:cNvPr id="8" name="TextBox 7"/>
           <p:cNvSpPr txBox="1"/>
           <p:nvPr/>
         </p:nvSpPr>
@@ -25580,7 +25164,7 @@
       </p:sp>
       <p:sp>
         <p:nvSpPr>
-          <p:cNvPr id="10" name="TextBox 9"/>
+          <p:cNvPr id="9" name="TextBox 8"/>
           <p:cNvSpPr txBox="1"/>
           <p:nvPr/>
         </p:nvSpPr>
@@ -25614,7 +25198,7 @@
       </p:sp>
       <p:sp>
         <p:nvSpPr>
-          <p:cNvPr id="11" name="TextBox 10"/>
+          <p:cNvPr id="10" name="TextBox 9"/>
           <p:cNvSpPr txBox="1"/>
           <p:nvPr/>
         </p:nvSpPr>
@@ -31184,8 +30768,8 @@
         </p:nvSpPr>
         <p:spPr>
           <a:xfrm>
-            <a:off x="3611880" y="1426464"/>
-            <a:ext cx="8028431" cy="274320"/>
+            <a:off x="3611880" y="1408176"/>
+            <a:ext cx="8028431" cy="256032"/>
           </a:xfrm>
           <a:prstGeom prst="rect">
             <a:avLst/>
@@ -31218,8 +30802,8 @@
         </p:nvSpPr>
         <p:spPr>
           <a:xfrm>
-            <a:off x="3611880" y="1719072"/>
-            <a:ext cx="8028431" cy="420624"/>
+            <a:off x="3611880" y="1682495"/>
+            <a:ext cx="8028431" cy="347472"/>
           </a:xfrm>
           <a:prstGeom prst="rect">
             <a:avLst/>
@@ -31257,8 +30841,8 @@
         </p:nvSpPr>
         <p:spPr>
           <a:xfrm>
-            <a:off x="3611880" y="2157984"/>
-            <a:ext cx="8028431" cy="347472"/>
+            <a:off x="3611880" y="2048256"/>
+            <a:ext cx="8028431" cy="292608"/>
           </a:xfrm>
           <a:prstGeom prst="rect">
             <a:avLst/>
@@ -31305,8 +30889,8 @@
         </p:nvSpPr>
         <p:spPr>
           <a:xfrm>
-            <a:off x="3611880" y="2578608"/>
-            <a:ext cx="8028431" cy="1152143"/>
+            <a:off x="3611880" y="2377440"/>
+            <a:ext cx="8028431" cy="1353311"/>
           </a:xfrm>
           <a:prstGeom prst="rect">
             <a:avLst/>
@@ -31331,7 +30915,7 @@
                 </a:solidFill>
                 <a:latin typeface="Open Sans"/>
               </a:rPr>
-              <a:t>Darío Leandro Genua, a business-administration graduate of the Universidad Catolica Argentina with a postgraduate degree in information systems and administrative processes, became Secretary of Innovation, Science and Technology in June 2024, succeeding Alejandro Cosentino. He previously served as executive coordinator of the intervention of ENACOM, Argentina's telecommunications regulator, working on the repeal of DNU 690 and satellite-internet opening.</a:t>
+              <a:t>Darío Leandro Genua, a business-administration graduate of the Universidad Catolica Argentina with a postgraduate degree in information systems and administrative processes, became Secretary of Innovation, Science and Technology in June 2024, succeeding Alejandro Cosentino. He previously served as executive coordinator of the intervention of ENACOM, Argentina's telecommunications regulator, working on the repeal of DNU 690 and satellite-internet opening. His secretariat leads state digitalization, digital public services, connectivity and telecommunications policy under the Chief of Cabinet.</a:t>
             </a:r>
           </a:p>
           <a:p>
@@ -31430,8 +31014,8 @@
         </p:nvSpPr>
         <p:spPr>
           <a:xfrm>
-            <a:off x="3611880" y="4041648"/>
-            <a:ext cx="3849624" cy="1152144"/>
+            <a:off x="3611880" y="4023359"/>
+            <a:ext cx="3849624" cy="914400"/>
           </a:xfrm>
           <a:prstGeom prst="rect">
             <a:avLst/>
@@ -31499,8 +31083,8 @@
         </p:nvSpPr>
         <p:spPr>
           <a:xfrm>
-            <a:off x="3611880" y="5047488"/>
-            <a:ext cx="3849624" cy="310896"/>
+            <a:off x="3611880" y="4956048"/>
+            <a:ext cx="3849624" cy="292608"/>
           </a:xfrm>
           <a:prstGeom prst="rect">
             <a:avLst/>
@@ -31547,8 +31131,8 @@
         </p:nvSpPr>
         <p:spPr>
           <a:xfrm>
-            <a:off x="3611880" y="5376672"/>
-            <a:ext cx="3849624" cy="987551"/>
+            <a:off x="3611880" y="5266944"/>
+            <a:ext cx="3849624" cy="1097279"/>
           </a:xfrm>
           <a:prstGeom prst="rect">
             <a:avLst/>
@@ -31586,8 +31170,8 @@
         </p:nvSpPr>
         <p:spPr>
           <a:xfrm>
-            <a:off x="7790688" y="4041648"/>
-            <a:ext cx="3849624" cy="1152144"/>
+            <a:off x="7790688" y="4023359"/>
+            <a:ext cx="3849624" cy="914400"/>
           </a:xfrm>
           <a:prstGeom prst="rect">
             <a:avLst/>
@@ -31664,8 +31248,8 @@
         </p:nvSpPr>
         <p:spPr>
           <a:xfrm>
-            <a:off x="7790688" y="5047488"/>
-            <a:ext cx="3849624" cy="310896"/>
+            <a:off x="7790688" y="4956048"/>
+            <a:ext cx="3849624" cy="292608"/>
           </a:xfrm>
           <a:prstGeom prst="rect">
             <a:avLst/>
@@ -31712,8 +31296,8 @@
         </p:nvSpPr>
         <p:spPr>
           <a:xfrm>
-            <a:off x="7790688" y="5376672"/>
-            <a:ext cx="3849624" cy="987551"/>
+            <a:off x="7790688" y="5266944"/>
+            <a:ext cx="3849624" cy="1097279"/>
           </a:xfrm>
           <a:prstGeom prst="rect">
             <a:avLst/>
@@ -32531,8 +32115,8 @@
         </p:nvSpPr>
         <p:spPr>
           <a:xfrm>
-            <a:off x="3611880" y="1408176"/>
-            <a:ext cx="3849624" cy="1152144"/>
+            <a:off x="3611880" y="1389888"/>
+            <a:ext cx="3849624" cy="914400"/>
           </a:xfrm>
           <a:prstGeom prst="rect">
             <a:avLst/>
@@ -32600,8 +32184,8 @@
         </p:nvSpPr>
         <p:spPr>
           <a:xfrm>
-            <a:off x="3611880" y="2414015"/>
-            <a:ext cx="3849624" cy="310896"/>
+            <a:off x="3611880" y="2322576"/>
+            <a:ext cx="3849624" cy="292608"/>
           </a:xfrm>
           <a:prstGeom prst="rect">
             <a:avLst/>
@@ -32648,8 +32232,8 @@
         </p:nvSpPr>
         <p:spPr>
           <a:xfrm>
-            <a:off x="3611880" y="2743200"/>
-            <a:ext cx="3849624" cy="987551"/>
+            <a:off x="3611880" y="2633472"/>
+            <a:ext cx="3849624" cy="1097279"/>
           </a:xfrm>
           <a:prstGeom prst="rect">
             <a:avLst/>
@@ -32687,8 +32271,8 @@
         </p:nvSpPr>
         <p:spPr>
           <a:xfrm>
-            <a:off x="7790688" y="1408176"/>
-            <a:ext cx="3849624" cy="1152144"/>
+            <a:off x="7790688" y="1389888"/>
+            <a:ext cx="3849624" cy="914400"/>
           </a:xfrm>
           <a:prstGeom prst="rect">
             <a:avLst/>
@@ -32756,8 +32340,8 @@
         </p:nvSpPr>
         <p:spPr>
           <a:xfrm>
-            <a:off x="7790688" y="2414015"/>
-            <a:ext cx="3849624" cy="310896"/>
+            <a:off x="7790688" y="2322576"/>
+            <a:ext cx="3849624" cy="292608"/>
           </a:xfrm>
           <a:prstGeom prst="rect">
             <a:avLst/>
@@ -32804,8 +32388,8 @@
         </p:nvSpPr>
         <p:spPr>
           <a:xfrm>
-            <a:off x="7790688" y="2743200"/>
-            <a:ext cx="3849624" cy="987551"/>
+            <a:off x="7790688" y="2633472"/>
+            <a:ext cx="3849624" cy="1097279"/>
           </a:xfrm>
           <a:prstGeom prst="rect">
             <a:avLst/>
@@ -32913,8 +32497,8 @@
         </p:nvSpPr>
         <p:spPr>
           <a:xfrm>
-            <a:off x="3611880" y="4059935"/>
-            <a:ext cx="8028431" cy="274320"/>
+            <a:off x="3611880" y="4041648"/>
+            <a:ext cx="8028431" cy="256032"/>
           </a:xfrm>
           <a:prstGeom prst="rect">
             <a:avLst/>
@@ -32947,8 +32531,8 @@
         </p:nvSpPr>
         <p:spPr>
           <a:xfrm>
-            <a:off x="3611880" y="4352544"/>
-            <a:ext cx="8028431" cy="420624"/>
+            <a:off x="3611880" y="4315968"/>
+            <a:ext cx="8028431" cy="347472"/>
           </a:xfrm>
           <a:prstGeom prst="rect">
             <a:avLst/>
@@ -32986,8 +32570,8 @@
         </p:nvSpPr>
         <p:spPr>
           <a:xfrm>
-            <a:off x="3611880" y="4791456"/>
-            <a:ext cx="8028431" cy="347472"/>
+            <a:off x="3611880" y="4681727"/>
+            <a:ext cx="8028431" cy="292608"/>
           </a:xfrm>
           <a:prstGeom prst="rect">
             <a:avLst/>
@@ -33034,8 +32618,8 @@
         </p:nvSpPr>
         <p:spPr>
           <a:xfrm>
-            <a:off x="3611880" y="5212079"/>
-            <a:ext cx="8028431" cy="1152143"/>
+            <a:off x="3611880" y="5010912"/>
+            <a:ext cx="8028431" cy="1353311"/>
           </a:xfrm>
           <a:prstGeom prst="rect">
             <a:avLst/>
@@ -33869,8 +33453,8 @@
         </p:nvSpPr>
         <p:spPr>
           <a:xfrm>
-            <a:off x="3611880" y="1408176"/>
-            <a:ext cx="3849624" cy="1152144"/>
+            <a:off x="3611880" y="1389888"/>
+            <a:ext cx="3849624" cy="914400"/>
           </a:xfrm>
           <a:prstGeom prst="rect">
             <a:avLst/>
@@ -33938,8 +33522,8 @@
         </p:nvSpPr>
         <p:spPr>
           <a:xfrm>
-            <a:off x="3611880" y="2414015"/>
-            <a:ext cx="3849624" cy="310896"/>
+            <a:off x="3611880" y="2322576"/>
+            <a:ext cx="3849624" cy="292608"/>
           </a:xfrm>
           <a:prstGeom prst="rect">
             <a:avLst/>
@@ -33986,8 +33570,8 @@
         </p:nvSpPr>
         <p:spPr>
           <a:xfrm>
-            <a:off x="3611880" y="2743200"/>
-            <a:ext cx="3849624" cy="987551"/>
+            <a:off x="3611880" y="2633472"/>
+            <a:ext cx="3849624" cy="1097279"/>
           </a:xfrm>
           <a:prstGeom prst="rect">
             <a:avLst/>
@@ -34025,8 +33609,8 @@
         </p:nvSpPr>
         <p:spPr>
           <a:xfrm>
-            <a:off x="7790688" y="1408176"/>
-            <a:ext cx="3849624" cy="1152144"/>
+            <a:off x="7790688" y="1389888"/>
+            <a:ext cx="3849624" cy="914400"/>
           </a:xfrm>
           <a:prstGeom prst="rect">
             <a:avLst/>
@@ -34094,8 +33678,8 @@
         </p:nvSpPr>
         <p:spPr>
           <a:xfrm>
-            <a:off x="7790688" y="2414015"/>
-            <a:ext cx="3849624" cy="310896"/>
+            <a:off x="7790688" y="2322576"/>
+            <a:ext cx="3849624" cy="292608"/>
           </a:xfrm>
           <a:prstGeom prst="rect">
             <a:avLst/>
@@ -34142,8 +33726,8 @@
         </p:nvSpPr>
         <p:spPr>
           <a:xfrm>
-            <a:off x="7790688" y="2743200"/>
-            <a:ext cx="3849624" cy="987551"/>
+            <a:off x="7790688" y="2633472"/>
+            <a:ext cx="3849624" cy="1097279"/>
           </a:xfrm>
           <a:prstGeom prst="rect">
             <a:avLst/>
@@ -34238,7 +33822,7 @@
                 </a:solidFill>
                 <a:latin typeface="Open Sans"/>
               </a:rPr>
-              <a:t>TRADE / COMMERCE  ·  SPLIT PORTFOLIO</a:t>
+              <a:t>TRADE / COMMERCE</a:t>
             </a:r>
           </a:p>
         </p:txBody>
@@ -34252,37 +33836,21 @@
         <p:spPr>
           <a:xfrm>
             <a:off x="3611880" y="4041648"/>
-            <a:ext cx="3849624" cy="1152144"/>
-          </a:xfrm>
-          <a:prstGeom prst="rect">
-            <a:avLst/>
-          </a:prstGeom>
-          <a:noFill/>
-        </p:spPr>
-        <p:txBody>
-          <a:bodyPr wrap="square" anchor="t" lIns="0" rIns="0" tIns="0" bIns="0">
-            <a:spAutoFit/>
-          </a:bodyPr>
-          <a:lstStyle/>
-          <a:p>
-            <a:r>
-              <a:rPr sz="750" b="1" i="0" spc="80">
-                <a:solidFill>
-                  <a:srgbClr val="007582"/>
-                </a:solidFill>
-                <a:latin typeface="Open Sans"/>
-              </a:rPr>
-              <a:t>MDIC MINISTER</a:t>
-            </a:r>
-          </a:p>
-          <a:p>
-            <a:pPr>
-              <a:spcBef>
-                <a:spcPts val="200"/>
-              </a:spcBef>
-            </a:pPr>
-            <a:r>
-              <a:rPr sz="1200" b="1" i="0">
+            <a:ext cx="8028431" cy="256032"/>
+          </a:xfrm>
+          <a:prstGeom prst="rect">
+            <a:avLst/>
+          </a:prstGeom>
+          <a:noFill/>
+        </p:spPr>
+        <p:txBody>
+          <a:bodyPr wrap="square" anchor="t" lIns="0" rIns="0" tIns="0" bIns="0">
+            <a:spAutoFit/>
+          </a:bodyPr>
+          <a:lstStyle/>
+          <a:p>
+            <a:r>
+              <a:rPr sz="1400" b="1" i="0">
                 <a:solidFill>
                   <a:srgbClr val="0A314D"/>
                 </a:solidFill>
@@ -34291,17 +33859,37 @@
               <a:t>Márcio Fernando Elias Rosa</a:t>
             </a:r>
           </a:p>
+        </p:txBody>
+      </p:sp>
+      <p:sp>
+        <p:nvSpPr>
+          <p:cNvPr id="25" name="TextBox 24"/>
+          <p:cNvSpPr txBox="1"/>
+          <p:nvPr/>
+        </p:nvSpPr>
+        <p:spPr>
+          <a:xfrm>
+            <a:off x="3611880" y="4315968"/>
+            <a:ext cx="8028431" cy="347472"/>
+          </a:xfrm>
+          <a:prstGeom prst="rect">
+            <a:avLst/>
+          </a:prstGeom>
+          <a:noFill/>
+        </p:spPr>
+        <p:txBody>
+          <a:bodyPr wrap="square" anchor="t" lIns="0" rIns="0" tIns="0" bIns="0">
+            <a:spAutoFit/>
+          </a:bodyPr>
+          <a:lstStyle/>
           <a:p>
             <a:pPr>
               <a:lnSpc>
-                <a:spcPct val="104000"/>
+                <a:spcPct val="105000"/>
               </a:lnSpc>
-              <a:spcBef>
-                <a:spcPts val="200"/>
-              </a:spcBef>
             </a:pPr>
             <a:r>
-              <a:rPr sz="900" b="0" i="1">
+              <a:rPr sz="1100" b="0" i="1">
                 <a:solidFill>
                   <a:srgbClr val="54606C"/>
                 </a:solidFill>
@@ -34314,14 +33902,14 @@
       </p:sp>
       <p:sp>
         <p:nvSpPr>
-          <p:cNvPr id="25" name="TextBox 24"/>
-          <p:cNvSpPr txBox="1"/>
-          <p:nvPr/>
-        </p:nvSpPr>
-        <p:spPr>
-          <a:xfrm>
-            <a:off x="3611880" y="5047488"/>
-            <a:ext cx="3849624" cy="310896"/>
+          <p:cNvPr id="26" name="TextBox 25"/>
+          <p:cNvSpPr txBox="1"/>
+          <p:nvPr/>
+        </p:nvSpPr>
+        <p:spPr>
+          <a:xfrm>
+            <a:off x="3611880" y="4681727"/>
+            <a:ext cx="8028431" cy="292608"/>
           </a:xfrm>
           <a:prstGeom prst="rect">
             <a:avLst/>
@@ -34336,11 +33924,11 @@
           <a:p>
             <a:pPr>
               <a:lnSpc>
-                <a:spcPct val="104000"/>
+                <a:spcPct val="105000"/>
               </a:lnSpc>
             </a:pPr>
             <a:r>
-              <a:rPr sz="850" b="0" i="0">
+              <a:rPr sz="950" b="0" i="0">
                 <a:solidFill>
                   <a:srgbClr val="2C2C2C"/>
                 </a:solidFill>
@@ -34349,27 +33937,27 @@
               <a:t>Ministry of Development, Industry, Trade and Services (Ministério do Desenvolvimento, Indústria, Comércio e Serviços, MDIC)</a:t>
             </a:r>
             <a:r>
-              <a:rPr sz="850" b="0" i="0">
+              <a:rPr sz="950" b="0" i="0">
                 <a:solidFill>
                   <a:srgbClr val="757D87"/>
                 </a:solidFill>
                 <a:latin typeface="Open Sans"/>
               </a:rPr>
-              <a:t>  ·  2026-04-06</a:t>
-            </a:r>
-          </a:p>
-        </p:txBody>
-      </p:sp>
-      <p:sp>
-        <p:nvSpPr>
-          <p:cNvPr id="26" name="TextBox 25"/>
-          <p:cNvSpPr txBox="1"/>
-          <p:nvPr/>
-        </p:nvSpPr>
-        <p:spPr>
-          <a:xfrm>
-            <a:off x="3611880" y="5376672"/>
-            <a:ext cx="3849624" cy="987551"/>
+              <a:t>   ·   Assumed office: 2026-04-06</a:t>
+            </a:r>
+          </a:p>
+        </p:txBody>
+      </p:sp>
+      <p:sp>
+        <p:nvSpPr>
+          <p:cNvPr id="27" name="TextBox 26"/>
+          <p:cNvSpPr txBox="1"/>
+          <p:nvPr/>
+        </p:nvSpPr>
+        <p:spPr>
+          <a:xfrm>
+            <a:off x="3611880" y="5010912"/>
+            <a:ext cx="8028431" cy="1353311"/>
           </a:xfrm>
           <a:prstGeom prst="rect">
             <a:avLst/>
@@ -34384,180 +33972,24 @@
           <a:p>
             <a:pPr>
               <a:lnSpc>
-                <a:spcPct val="104000"/>
+                <a:spcPct val="103000"/>
               </a:lnSpc>
             </a:pPr>
             <a:r>
-              <a:rPr sz="1050" b="0" i="0">
+              <a:rPr sz="1100" b="0" i="0">
                 <a:solidFill>
                   <a:srgbClr val="2C2C2C"/>
                 </a:solidFill>
                 <a:latin typeface="Open Sans"/>
               </a:rPr>
-              <a:t>Márcio Fernando Elias Rosa, a retired public prosecutor who twice served as São Paulo Attorney General of Justice (2012-2016), joined MDIC as Executive Secretary in January 2023 and was sworn in as Minister on 6 April 2026, succeeding Geraldo Alckmin.</a:t>
-            </a:r>
-          </a:p>
-        </p:txBody>
-      </p:sp>
-      <p:sp>
-        <p:nvSpPr>
-          <p:cNvPr id="27" name="TextBox 26"/>
-          <p:cNvSpPr txBox="1"/>
-          <p:nvPr/>
-        </p:nvSpPr>
-        <p:spPr>
-          <a:xfrm>
-            <a:off x="7790688" y="4041648"/>
-            <a:ext cx="3849624" cy="1152144"/>
-          </a:xfrm>
-          <a:prstGeom prst="rect">
-            <a:avLst/>
-          </a:prstGeom>
-          <a:noFill/>
-        </p:spPr>
-        <p:txBody>
-          <a:bodyPr wrap="square" anchor="t" lIns="0" rIns="0" tIns="0" bIns="0">
-            <a:spAutoFit/>
-          </a:bodyPr>
-          <a:lstStyle/>
-          <a:p>
-            <a:r>
-              <a:rPr sz="750" b="1" i="0" spc="80">
-                <a:solidFill>
-                  <a:srgbClr val="007582"/>
-                </a:solidFill>
-                <a:latin typeface="Open Sans"/>
-              </a:rPr>
-              <a:t>FOREIGN TRADE (SECEX)</a:t>
-            </a:r>
-          </a:p>
-          <a:p>
-            <a:pPr>
-              <a:spcBef>
-                <a:spcPts val="200"/>
-              </a:spcBef>
-            </a:pPr>
-            <a:r>
-              <a:rPr sz="1200" b="1" i="0">
-                <a:solidFill>
-                  <a:srgbClr val="0A314D"/>
-                </a:solidFill>
-                <a:latin typeface="Open Sans"/>
-              </a:rPr>
-              <a:t>Lucas Pedreira do Couto Ferraz</a:t>
-            </a:r>
-          </a:p>
-          <a:p>
-            <a:pPr>
-              <a:lnSpc>
-                <a:spcPct val="104000"/>
-              </a:lnSpc>
-              <a:spcBef>
-                <a:spcPts val="200"/>
-              </a:spcBef>
-            </a:pPr>
-            <a:r>
-              <a:rPr sz="900" b="0" i="1">
-                <a:solidFill>
-                  <a:srgbClr val="54606C"/>
-                </a:solidFill>
-                <a:latin typeface="Open Sans"/>
-              </a:rPr>
-              <a:t>Secretary of Foreign Trade (SECEX)</a:t>
-            </a:r>
-          </a:p>
-        </p:txBody>
-      </p:sp>
-      <p:sp>
-        <p:nvSpPr>
-          <p:cNvPr id="28" name="TextBox 27"/>
-          <p:cNvSpPr txBox="1"/>
-          <p:nvPr/>
-        </p:nvSpPr>
-        <p:spPr>
-          <a:xfrm>
-            <a:off x="7790688" y="5047488"/>
-            <a:ext cx="3849624" cy="310896"/>
-          </a:xfrm>
-          <a:prstGeom prst="rect">
-            <a:avLst/>
-          </a:prstGeom>
-          <a:noFill/>
-        </p:spPr>
-        <p:txBody>
-          <a:bodyPr wrap="square" anchor="t" lIns="0" rIns="0" tIns="0" bIns="0">
-            <a:spAutoFit/>
-          </a:bodyPr>
-          <a:lstStyle/>
-          <a:p>
-            <a:pPr>
-              <a:lnSpc>
-                <a:spcPct val="104000"/>
-              </a:lnSpc>
-            </a:pPr>
-            <a:r>
-              <a:rPr sz="850" b="0" i="0">
-                <a:solidFill>
-                  <a:srgbClr val="2C2C2C"/>
-                </a:solidFill>
-                <a:latin typeface="Open Sans"/>
-              </a:rPr>
-              <a:t>Ministry of Development, Industry, Trade and Services (MDIC) - Secretariat of Foreign Trade (SECEX)</a:t>
-            </a:r>
-            <a:r>
-              <a:rPr sz="850" b="0" i="0">
-                <a:solidFill>
-                  <a:srgbClr val="757D87"/>
-                </a:solidFill>
-                <a:latin typeface="Open Sans"/>
-              </a:rPr>
-              <a:t>  ·  2023-01-01</a:t>
-            </a:r>
-          </a:p>
-        </p:txBody>
-      </p:sp>
-      <p:sp>
-        <p:nvSpPr>
-          <p:cNvPr id="29" name="TextBox 28"/>
-          <p:cNvSpPr txBox="1"/>
-          <p:nvPr/>
-        </p:nvSpPr>
-        <p:spPr>
-          <a:xfrm>
-            <a:off x="7790688" y="5376672"/>
-            <a:ext cx="3849624" cy="987551"/>
-          </a:xfrm>
-          <a:prstGeom prst="rect">
-            <a:avLst/>
-          </a:prstGeom>
-          <a:noFill/>
-        </p:spPr>
-        <p:txBody>
-          <a:bodyPr wrap="square" anchor="t" lIns="0" rIns="0" tIns="0" bIns="0">
-            <a:spAutoFit/>
-          </a:bodyPr>
-          <a:lstStyle/>
-          <a:p>
-            <a:pPr>
-              <a:lnSpc>
-                <a:spcPct val="104000"/>
-              </a:lnSpc>
-            </a:pPr>
-            <a:r>
-              <a:rPr sz="1050" b="0" i="0">
-                <a:solidFill>
-                  <a:srgbClr val="2C2C2C"/>
-                </a:solidFill>
-                <a:latin typeface="Open Sans"/>
-              </a:rPr>
-              <a:t>Lucas Pedreira do Couto Ferraz, an economist with a PhD from FGV's EPGE, where he is a professor, has served as MDIC Secretary of Foreign Trade (SECEX) since January 2023, leading trade negotiations including the Mercosur-EU and OECD agendas.</a:t>
+              <a:t>Retired public prosecutor, lawyer and law professor, born in Ibiúna, São Paulo, in 1962. He spent his career in the São Paulo Public Prosecutor's Office, serving twice as Attorney General of Justice (2012-2016) and as São Paulo State Secretary of Justice. He joined MDIC as Executive Secretary in January 2023, and was sworn in as Minister on 6 April 2026, succeeding Vice President Geraldo Alckmin, who left the post to run for re-election as Lula's running mate. His agenda centers on the Nova Indústria Brasil program, expanding investment and foreign trade.</a:t>
             </a:r>
           </a:p>
         </p:txBody>
       </p:sp>
       <p:cxnSp>
         <p:nvCxnSpPr>
-          <p:cNvPr id="30" name="Connector 29"/>
+          <p:cNvPr id="28" name="Connector 27"/>
           <p:cNvCxnSpPr/>
           <p:nvPr/>
         </p:nvCxnSpPr>
@@ -34593,7 +34025,7 @@
       </p:cxnSp>
       <p:sp>
         <p:nvSpPr>
-          <p:cNvPr id="31" name="TextBox 30"/>
+          <p:cNvPr id="29" name="TextBox 28"/>
           <p:cNvSpPr txBox="1"/>
           <p:nvPr/>
         </p:nvSpPr>
@@ -34627,7 +34059,7 @@
       </p:sp>
       <p:sp>
         <p:nvSpPr>
-          <p:cNvPr id="32" name="TextBox 31"/>
+          <p:cNvPr id="30" name="TextBox 29"/>
           <p:cNvSpPr txBox="1"/>
           <p:nvPr/>
         </p:nvSpPr>
@@ -34661,7 +34093,7 @@
       </p:sp>
       <p:sp>
         <p:nvSpPr>
-          <p:cNvPr id="33" name="TextBox 32"/>
+          <p:cNvPr id="31" name="TextBox 30"/>
           <p:cNvSpPr txBox="1"/>
           <p:nvPr/>
         </p:nvSpPr>
@@ -35343,8 +34775,8 @@
         </p:nvSpPr>
         <p:spPr>
           <a:xfrm>
-            <a:off x="3611880" y="1426464"/>
-            <a:ext cx="8028431" cy="274320"/>
+            <a:off x="3611880" y="1408176"/>
+            <a:ext cx="8028431" cy="256032"/>
           </a:xfrm>
           <a:prstGeom prst="rect">
             <a:avLst/>
@@ -35377,8 +34809,8 @@
         </p:nvSpPr>
         <p:spPr>
           <a:xfrm>
-            <a:off x="3611880" y="1719072"/>
-            <a:ext cx="8028431" cy="420624"/>
+            <a:off x="3611880" y="1682495"/>
+            <a:ext cx="8028431" cy="347472"/>
           </a:xfrm>
           <a:prstGeom prst="rect">
             <a:avLst/>
@@ -35416,8 +34848,8 @@
         </p:nvSpPr>
         <p:spPr>
           <a:xfrm>
-            <a:off x="3611880" y="2157984"/>
-            <a:ext cx="8028431" cy="347472"/>
+            <a:off x="3611880" y="2048256"/>
+            <a:ext cx="8028431" cy="292608"/>
           </a:xfrm>
           <a:prstGeom prst="rect">
             <a:avLst/>
@@ -35464,8 +34896,8 @@
         </p:nvSpPr>
         <p:spPr>
           <a:xfrm>
-            <a:off x="3611880" y="2578608"/>
-            <a:ext cx="8028431" cy="1152143"/>
+            <a:off x="3611880" y="2377440"/>
+            <a:ext cx="8028431" cy="1353311"/>
           </a:xfrm>
           <a:prstGeom prst="rect">
             <a:avLst/>
@@ -35573,8 +35005,8 @@
         </p:nvSpPr>
         <p:spPr>
           <a:xfrm>
-            <a:off x="3611880" y="4041648"/>
-            <a:ext cx="3849624" cy="1152144"/>
+            <a:off x="3611880" y="4023359"/>
+            <a:ext cx="3849624" cy="914400"/>
           </a:xfrm>
           <a:prstGeom prst="rect">
             <a:avLst/>
@@ -35642,8 +35074,8 @@
         </p:nvSpPr>
         <p:spPr>
           <a:xfrm>
-            <a:off x="3611880" y="5047488"/>
-            <a:ext cx="3849624" cy="310896"/>
+            <a:off x="3611880" y="4956048"/>
+            <a:ext cx="3849624" cy="292608"/>
           </a:xfrm>
           <a:prstGeom prst="rect">
             <a:avLst/>
@@ -35690,8 +35122,8 @@
         </p:nvSpPr>
         <p:spPr>
           <a:xfrm>
-            <a:off x="3611880" y="5376672"/>
-            <a:ext cx="3849624" cy="987551"/>
+            <a:off x="3611880" y="5266944"/>
+            <a:ext cx="3849624" cy="1097279"/>
           </a:xfrm>
           <a:prstGeom prst="rect">
             <a:avLst/>
@@ -35729,8 +35161,8 @@
         </p:nvSpPr>
         <p:spPr>
           <a:xfrm>
-            <a:off x="7790688" y="4041648"/>
-            <a:ext cx="3849624" cy="1152144"/>
+            <a:off x="7790688" y="4023359"/>
+            <a:ext cx="3849624" cy="914400"/>
           </a:xfrm>
           <a:prstGeom prst="rect">
             <a:avLst/>
@@ -35798,8 +35230,8 @@
         </p:nvSpPr>
         <p:spPr>
           <a:xfrm>
-            <a:off x="7790688" y="5047488"/>
-            <a:ext cx="3849624" cy="310896"/>
+            <a:off x="7790688" y="4956048"/>
+            <a:ext cx="3849624" cy="292608"/>
           </a:xfrm>
           <a:prstGeom prst="rect">
             <a:avLst/>
@@ -35846,8 +35278,8 @@
         </p:nvSpPr>
         <p:spPr>
           <a:xfrm>
-            <a:off x="7790688" y="5376672"/>
-            <a:ext cx="3849624" cy="987551"/>
+            <a:off x="7790688" y="5266944"/>
+            <a:ext cx="3849624" cy="1097279"/>
           </a:xfrm>
           <a:prstGeom prst="rect">
             <a:avLst/>
@@ -36665,8 +36097,8 @@
         </p:nvSpPr>
         <p:spPr>
           <a:xfrm>
-            <a:off x="3611880" y="1408176"/>
-            <a:ext cx="3849624" cy="1152144"/>
+            <a:off x="3611880" y="1389888"/>
+            <a:ext cx="3849624" cy="914400"/>
           </a:xfrm>
           <a:prstGeom prst="rect">
             <a:avLst/>
@@ -36734,8 +36166,8 @@
         </p:nvSpPr>
         <p:spPr>
           <a:xfrm>
-            <a:off x="3611880" y="2414015"/>
-            <a:ext cx="3849624" cy="310896"/>
+            <a:off x="3611880" y="2322576"/>
+            <a:ext cx="3849624" cy="292608"/>
           </a:xfrm>
           <a:prstGeom prst="rect">
             <a:avLst/>
@@ -36782,8 +36214,8 @@
         </p:nvSpPr>
         <p:spPr>
           <a:xfrm>
-            <a:off x="3611880" y="2743200"/>
-            <a:ext cx="3849624" cy="987551"/>
+            <a:off x="3611880" y="2633472"/>
+            <a:ext cx="3849624" cy="1097279"/>
           </a:xfrm>
           <a:prstGeom prst="rect">
             <a:avLst/>
@@ -36821,8 +36253,8 @@
         </p:nvSpPr>
         <p:spPr>
           <a:xfrm>
-            <a:off x="7790688" y="1408176"/>
-            <a:ext cx="3849624" cy="1152144"/>
+            <a:off x="7790688" y="1389888"/>
+            <a:ext cx="3849624" cy="914400"/>
           </a:xfrm>
           <a:prstGeom prst="rect">
             <a:avLst/>
@@ -36890,8 +36322,8 @@
         </p:nvSpPr>
         <p:spPr>
           <a:xfrm>
-            <a:off x="7790688" y="2414015"/>
-            <a:ext cx="3849624" cy="310896"/>
+            <a:off x="7790688" y="2322576"/>
+            <a:ext cx="3849624" cy="292608"/>
           </a:xfrm>
           <a:prstGeom prst="rect">
             <a:avLst/>
@@ -36938,8 +36370,8 @@
         </p:nvSpPr>
         <p:spPr>
           <a:xfrm>
-            <a:off x="7790688" y="2743200"/>
-            <a:ext cx="3849624" cy="987551"/>
+            <a:off x="7790688" y="2633472"/>
+            <a:ext cx="3849624" cy="1097279"/>
           </a:xfrm>
           <a:prstGeom prst="rect">
             <a:avLst/>
@@ -37047,8 +36479,8 @@
         </p:nvSpPr>
         <p:spPr>
           <a:xfrm>
-            <a:off x="3611880" y="4041648"/>
-            <a:ext cx="3849624" cy="1152144"/>
+            <a:off x="3611880" y="4023359"/>
+            <a:ext cx="3849624" cy="914400"/>
           </a:xfrm>
           <a:prstGeom prst="rect">
             <a:avLst/>
@@ -37116,8 +36548,8 @@
         </p:nvSpPr>
         <p:spPr>
           <a:xfrm>
-            <a:off x="3611880" y="5047488"/>
-            <a:ext cx="3849624" cy="310896"/>
+            <a:off x="3611880" y="4956048"/>
+            <a:ext cx="3849624" cy="292608"/>
           </a:xfrm>
           <a:prstGeom prst="rect">
             <a:avLst/>
@@ -37164,8 +36596,8 @@
         </p:nvSpPr>
         <p:spPr>
           <a:xfrm>
-            <a:off x="3611880" y="5376672"/>
-            <a:ext cx="3849624" cy="987551"/>
+            <a:off x="3611880" y="5266944"/>
+            <a:ext cx="3849624" cy="1097279"/>
           </a:xfrm>
           <a:prstGeom prst="rect">
             <a:avLst/>
@@ -37203,8 +36635,8 @@
         </p:nvSpPr>
         <p:spPr>
           <a:xfrm>
-            <a:off x="7790688" y="4041648"/>
-            <a:ext cx="3849624" cy="1152144"/>
+            <a:off x="7790688" y="4023359"/>
+            <a:ext cx="3849624" cy="914400"/>
           </a:xfrm>
           <a:prstGeom prst="rect">
             <a:avLst/>
@@ -37272,8 +36704,8 @@
         </p:nvSpPr>
         <p:spPr>
           <a:xfrm>
-            <a:off x="7790688" y="5047488"/>
-            <a:ext cx="3849624" cy="310896"/>
+            <a:off x="7790688" y="4956048"/>
+            <a:ext cx="3849624" cy="292608"/>
           </a:xfrm>
           <a:prstGeom prst="rect">
             <a:avLst/>
@@ -37320,8 +36752,8 @@
         </p:nvSpPr>
         <p:spPr>
           <a:xfrm>
-            <a:off x="7790688" y="5376672"/>
-            <a:ext cx="3849624" cy="987551"/>
+            <a:off x="7790688" y="5266944"/>
+            <a:ext cx="3849624" cy="1097279"/>
           </a:xfrm>
           <a:prstGeom prst="rect">
             <a:avLst/>

--- a/output/g20-ministers-trade-deck.pptx
+++ b/output/g20-ministers-trade-deck.pptx
@@ -4381,17 +4381,17 @@
           <a:p>
             <a:pPr>
               <a:lnSpc>
-                <a:spcPct val="103000"/>
+                <a:spcPct val="112000"/>
               </a:lnSpc>
             </a:pPr>
             <a:r>
-              <a:rPr sz="1100" b="0" i="0">
+              <a:rPr sz="1050" b="0" i="0">
                 <a:solidFill>
                   <a:srgbClr val="2C2C2C"/>
                 </a:solidFill>
-                <a:latin typeface="Open Sans"/>
-              </a:rPr>
-              <a:t>Anne Le Hénanff (born 22 July 1969 in Vannes) is a Horizons-party politician and, since the Lecornu II government, France's Minister Delegate for Artificial Intelligence and Digital Affairs, attached to the Economy ministry. With a background in cybersecurity (she held a cyber chair at Université Bretagne-Sud), she was a deputy mayor of Vannes for digital affairs and was elected deputy for Morbihan's 1st constituency in 2022, re-elected in 2024, sitting on the Defence Committee. She succeeded Clara Chappaz in the digital portfolio.</a:t>
+                <a:latin typeface="Merriweather"/>
+              </a:rPr>
+              <a:t>Anne Le Hénanff (born 22 July 1969 in Vannes) is a Horizons-party politician and, since the Lecornu II government, France's Minister Delegate for Artificial Intelligence and Digital Affairs, attached to the Economy ministry. With a background in cybersecurity (she held a cyber chair at Université Bretagne-Sud), she was a deputy mayor of Vannes for digital affairs and was elected deputy for Morbihan's 1st constituency in 2022, re-elected in 2024, sitting on the Defence Committee.</a:t>
             </a:r>
           </a:p>
         </p:txBody>
@@ -4611,15 +4611,15 @@
           <a:p>
             <a:pPr>
               <a:lnSpc>
-                <a:spcPct val="103000"/>
+                <a:spcPct val="112000"/>
               </a:lnSpc>
             </a:pPr>
             <a:r>
-              <a:rPr sz="1100" b="0" i="0">
+              <a:rPr sz="1050" b="0" i="0">
                 <a:solidFill>
                   <a:srgbClr val="2C2C2C"/>
                 </a:solidFill>
-                <a:latin typeface="Open Sans"/>
+                <a:latin typeface="Merriweather"/>
               </a:rPr>
               <a:t>Nicolas Forissier (born 17 February 1961) is a Les Républicains politician and, since October 2025 (retained in the Lecornu II government), France's Minister Delegate for Foreign Trade and Attractiveness, attached to the Minister for Europe and Foreign Affairs. A Sciences Po Paris graduate with a Sorbonne history degree, he was mayor of La Châtre (1995-2017) and has represented Indre's 2nd constituency in the National Assembly across several terms since 1993. He earlier served as Secretary of State for Agriculture (2004-2005).</a:t>
             </a:r>
@@ -5551,15 +5551,15 @@
           <a:p>
             <a:pPr>
               <a:lnSpc>
-                <a:spcPct val="103000"/>
+                <a:spcPct val="112000"/>
               </a:lnSpc>
             </a:pPr>
             <a:r>
-              <a:rPr sz="1100" b="0" i="0">
+              <a:rPr sz="1050" b="0" i="0">
                 <a:solidFill>
                   <a:srgbClr val="2C2C2C"/>
                 </a:solidFill>
-                <a:latin typeface="Open Sans"/>
+                <a:latin typeface="Merriweather"/>
               </a:rPr>
               <a:t>Karsten Wildberger (born 5 September 1969, Gießen) holds a doctorate in solid-state physics from RWTH Aachen and an INSEAD MBA. After Boston Consulting Group he held senior roles at T-Mobile, Vodafone and Telstra, sat on E.ON's management board (2016-2021), then led Ceconomy AG (parent of MediaMarktSaturn) from 2021 to 2025. On 6 May 2025 he became Germany's first federal digital minister under Chancellor Friedrich Merz, heading a new ministry consolidating digital responsibilities previously spread across several ministries.</a:t>
             </a:r>
@@ -5781,15 +5781,15 @@
           <a:p>
             <a:pPr>
               <a:lnSpc>
-                <a:spcPct val="103000"/>
+                <a:spcPct val="112000"/>
               </a:lnSpc>
             </a:pPr>
             <a:r>
-              <a:rPr sz="1100" b="0" i="0">
+              <a:rPr sz="1050" b="0" i="0">
                 <a:solidFill>
                   <a:srgbClr val="2C2C2C"/>
                 </a:solidFill>
-                <a:latin typeface="Open Sans"/>
+                <a:latin typeface="Merriweather"/>
               </a:rPr>
               <a:t>Katherina Reiche (born 16 July 1973, Luckenwalde) is a CDU politician and former energy executive, a trained chemist. She was a Bundestag member 1998-2015, including deputy chair of the CDU/CSU parliamentary group and parliamentary state secretary roles. She then led the municipal-utilities association VKU (2015-2019) and chaired the board of E.ON subsidiary Westenergie AG (2020-2025).</a:t>
             </a:r>
@@ -6737,15 +6737,15 @@
           <a:p>
             <a:pPr>
               <a:lnSpc>
-                <a:spcPct val="103000"/>
+                <a:spcPct val="112000"/>
               </a:lnSpc>
             </a:pPr>
             <a:r>
-              <a:rPr sz="1100" b="0" i="0">
+              <a:rPr sz="1050" b="0" i="0">
                 <a:solidFill>
                   <a:srgbClr val="2C2C2C"/>
                 </a:solidFill>
-                <a:latin typeface="Open Sans"/>
+                <a:latin typeface="Merriweather"/>
               </a:rPr>
               <a:t>Ashwini Vaishnaw (born 18 July 1970), a 1994-batch former IAS officer of the Odisha cadre, holds engineering degrees from MBM Jodhpur and IIT Kanpur and an MBA from Wharton. After district-collector postings and corporate roles at GE Transportation and Siemens, he entered the Rajya Sabha from Odisha in 2019.</a:t>
             </a:r>
@@ -6979,15 +6979,15 @@
           <a:p>
             <a:pPr>
               <a:lnSpc>
-                <a:spcPct val="104000"/>
+                <a:spcPct val="112000"/>
               </a:lnSpc>
             </a:pPr>
             <a:r>
-              <a:rPr sz="1050" b="0" i="0">
+              <a:rPr sz="950" b="0" i="0">
                 <a:solidFill>
                   <a:srgbClr val="2C2C2C"/>
                 </a:solidFill>
-                <a:latin typeface="Open Sans"/>
+                <a:latin typeface="Merriweather"/>
               </a:rPr>
               <a:t>Piyush Goyal, a chartered accountant, lawyer and BJP parliamentarian, has served as India's Union Minister of Commerce and Industry since 2019, leading trade policy and free-trade-agreement strategy including India-US talks. He previously held the Railways, Power and Textiles portfolios.</a:t>
             </a:r>
@@ -7135,15 +7135,15 @@
           <a:p>
             <a:pPr>
               <a:lnSpc>
-                <a:spcPct val="104000"/>
+                <a:spcPct val="112000"/>
               </a:lnSpc>
             </a:pPr>
             <a:r>
-              <a:rPr sz="1050" b="0" i="0">
+              <a:rPr sz="950" b="0" i="0">
                 <a:solidFill>
                   <a:srgbClr val="2C2C2C"/>
                 </a:solidFill>
-                <a:latin typeface="Open Sans"/>
+                <a:latin typeface="Merriweather"/>
               </a:rPr>
               <a:t>Rajesh Agrawal, a senior IAS officer, became India's Commerce Secretary on 1 October 2025 after serving as Special Secretary and Additional Secretary in the Department of Commerce. He is chief negotiator for major trade deals, including the India-US Bilateral Trade Agreement.</a:t>
             </a:r>
@@ -8075,17 +8075,17 @@
           <a:p>
             <a:pPr>
               <a:lnSpc>
-                <a:spcPct val="103000"/>
+                <a:spcPct val="112000"/>
               </a:lnSpc>
             </a:pPr>
             <a:r>
-              <a:rPr sz="1100" b="0" i="0">
+              <a:rPr sz="1050" b="0" i="0">
                 <a:solidFill>
                   <a:srgbClr val="2C2C2C"/>
                 </a:solidFill>
-                <a:latin typeface="Open Sans"/>
-              </a:rPr>
-              <a:t>Meutya Viada Hafid (born 3 May 1978, Bandung) is an Indonesian former television journalist and Golkar politician who became Minister of Communication and Digital Affairs on 21 October 2024 in President Prabowo Subianto's Red and White Cabinet, the first woman to lead the ministry. A former Metro TV newscaster, she previously served multiple terms in the House of Representatives (DPR), chairing Commission I on defense, foreign affairs and information. As minister she has prioritized child protection online, combating online gambling and illegal lending, and digital-economy value retention.</a:t>
+                <a:latin typeface="Merriweather"/>
+              </a:rPr>
+              <a:t>Meutya Viada Hafid (born 3 May 1978, Bandung) is an Indonesian former television journalist and Golkar politician who became Minister of Communication and Digital Affairs on 21 October 2024 in President Prabowo Subianto's Red and White Cabinet, the first woman to lead the ministry. A former Metro TV newscaster, she previously served multiple terms in the House of Representatives (DPR), chairing Commission I on defense, foreign affairs and information.</a:t>
             </a:r>
           </a:p>
         </p:txBody>
@@ -8301,15 +8301,15 @@
           <a:p>
             <a:pPr>
               <a:lnSpc>
-                <a:spcPct val="104000"/>
+                <a:spcPct val="112000"/>
               </a:lnSpc>
             </a:pPr>
             <a:r>
-              <a:rPr sz="1050" b="0" i="0">
+              <a:rPr sz="950" b="0" i="0">
                 <a:solidFill>
                   <a:srgbClr val="2C2C2C"/>
                 </a:solidFill>
-                <a:latin typeface="Open Sans"/>
+                <a:latin typeface="Merriweather"/>
               </a:rPr>
               <a:t>Budi Santoso, a career Ministry of Trade civil servant, has served as Indonesia's Minister of Trade since October 2024 in President Prabowo Subianto's cabinet. He was Director General of Foreign Trade (2022-2024) and emphasizes expanding exports through trade agreements.</a:t>
             </a:r>
@@ -8457,15 +8457,15 @@
           <a:p>
             <a:pPr>
               <a:lnSpc>
-                <a:spcPct val="104000"/>
+                <a:spcPct val="112000"/>
               </a:lnSpc>
             </a:pPr>
             <a:r>
-              <a:rPr sz="1050" b="0" i="0">
+              <a:rPr sz="950" b="0" i="0">
                 <a:solidFill>
                   <a:srgbClr val="2C2C2C"/>
                 </a:solidFill>
-                <a:latin typeface="Open Sans"/>
+                <a:latin typeface="Merriweather"/>
               </a:rPr>
               <a:t>Airlangga Hartarto has served as Indonesia's Coordinating Minister for Economic Affairs since 2019, retained under President Prabowo Subianto, and acts as chief negotiator in trade talks with the United States. He was Minister of Industry (2016-2019) and Golkar Party chairman (2017-2024).</a:t>
             </a:r>
@@ -9397,17 +9397,17 @@
           <a:p>
             <a:pPr>
               <a:lnSpc>
-                <a:spcPct val="103000"/>
+                <a:spcPct val="112000"/>
               </a:lnSpc>
             </a:pPr>
             <a:r>
-              <a:rPr sz="1100" b="0" i="0">
+              <a:rPr sz="1050" b="0" i="0">
                 <a:solidFill>
                   <a:srgbClr val="2C2C2C"/>
                 </a:solidFill>
-                <a:latin typeface="Open Sans"/>
-              </a:rPr>
-              <a:t>Alessio Butti (born 1959) is an Italian politician of Fratelli d'Italia and a longtime senator and deputy who served as the party's head of media and telecommunications. In the Meloni government he holds the digital portfolio as Undersecretary of State to the Presidency of the Council with responsibility for Technological Innovation, inheriting functions of the former standalone Ministry for Technological Innovation and Digital Transition (held under Draghi by Vittorio Colao) that Meloni abolished. He oversees the Department for Digital Transformation, PNRR digital targets, digital identity (IT Wallet), cloud, AI and broadband.</a:t>
+                <a:latin typeface="Merriweather"/>
+              </a:rPr>
+              <a:t>Alessio Butti (born 1959) is an Italian politician of Fratelli d'Italia and a longtime senator and deputy who served as the party's head of media and telecommunications. In the Meloni government he holds the digital portfolio as Undersecretary of State to the Presidency of the Council with responsibility for Technological Innovation, inheriting functions of the former standalone Ministry for Technological Innovation and Digital Transition (held under Draghi by Vittorio Colao) that Meloni abolished.</a:t>
             </a:r>
           </a:p>
         </p:txBody>
@@ -9623,15 +9623,15 @@
           <a:p>
             <a:pPr>
               <a:lnSpc>
-                <a:spcPct val="104000"/>
+                <a:spcPct val="112000"/>
               </a:lnSpc>
             </a:pPr>
             <a:r>
-              <a:rPr sz="1050" b="0" i="0">
+              <a:rPr sz="950" b="0" i="0">
                 <a:solidFill>
                   <a:srgbClr val="2C2C2C"/>
                 </a:solidFill>
-                <a:latin typeface="Open Sans"/>
+                <a:latin typeface="Merriweather"/>
               </a:rPr>
               <a:t>Antonio Tajani, a Forza Italia founder, former European Commissioner and President of the European Parliament (2017-2019), has been Italy's Deputy Prime Minister and Foreign Minister since October 2022. His ministry holds Italy's foreign-trade and export-promotion competency, coordinating ITA/ICE, SACE and SIMEST.</a:t>
             </a:r>
@@ -9779,15 +9779,15 @@
           <a:p>
             <a:pPr>
               <a:lnSpc>
-                <a:spcPct val="104000"/>
+                <a:spcPct val="112000"/>
               </a:lnSpc>
             </a:pPr>
             <a:r>
-              <a:rPr sz="1050" b="0" i="0">
+              <a:rPr sz="950" b="0" i="0">
                 <a:solidFill>
                   <a:srgbClr val="2C2C2C"/>
                 </a:solidFill>
-                <a:latin typeface="Open Sans"/>
+                <a:latin typeface="Merriweather"/>
               </a:rPr>
               <a:t>Adolfo Urso, a politician and journalist of the Italian right and former Deputy Minister of Economic Development responsible for Foreign Trade under Berlusconi, has led the Ministry of Enterprises and Made in Italy since 22 October 2022, covering industrial policy.</a:t>
             </a:r>
@@ -10719,17 +10719,17 @@
           <a:p>
             <a:pPr>
               <a:lnSpc>
-                <a:spcPct val="103000"/>
+                <a:spcPct val="112000"/>
               </a:lnSpc>
             </a:pPr>
             <a:r>
-              <a:rPr sz="1100" b="0" i="0">
+              <a:rPr sz="1050" b="0" i="0">
                 <a:solidFill>
                   <a:srgbClr val="2C2C2C"/>
                 </a:solidFill>
-                <a:latin typeface="Open Sans"/>
-              </a:rPr>
-              <a:t>Matsumoto Hisashi (born June 13, 1962) is a Liberal Democratic Party member of the House of Representatives for Chiba's 13th district, elected in 2021. A former emergency and trauma surgeon and specially appointed professor at Nippon Medical School, he was named Minister for Digital Transformation by Prime Minister Takaichi Sanae on October 21, 2025, and reappointed in the Second Takaichi cabinet on February 18, 2026. He concurrently serves as Minister in charge of Cybersecurity and holds administrative, fiscal and regulatory reform portfolios.</a:t>
+                <a:latin typeface="Merriweather"/>
+              </a:rPr>
+              <a:t>Matsumoto Hisashi (born June 13, 1962) is a Liberal Democratic Party member of the House of Representatives for Chiba's 13th district, elected in 2021. A former emergency and trauma surgeon and specially appointed professor at Nippon Medical School, he was named Minister for Digital Transformation by Prime Minister Takaichi Sanae on October 21, 2025, and reappointed in the Second Takaichi cabinet on February 18, 2026.</a:t>
             </a:r>
           </a:p>
         </p:txBody>
@@ -10949,17 +10949,17 @@
           <a:p>
             <a:pPr>
               <a:lnSpc>
-                <a:spcPct val="103000"/>
+                <a:spcPct val="112000"/>
               </a:lnSpc>
             </a:pPr>
             <a:r>
-              <a:rPr sz="1100" b="0" i="0">
+              <a:rPr sz="1050" b="0" i="0">
                 <a:solidFill>
                   <a:srgbClr val="2C2C2C"/>
                 </a:solidFill>
-                <a:latin typeface="Open Sans"/>
-              </a:rPr>
-              <a:t>Akazawa Ryosei is a Liberal Democratic Party member of the House of Representatives for Tottori's 2nd district, first elected in 2005. A University of Tokyo Law graduate with a Cornell MBA, he spent about two decades as an MLIT-lineage bureaucrat. Under PM Ishiba he was Minister for Economic Revitalization and Japan's chief negotiator in the 2025 US tariff talks. PM Takaichi appointed him METI Minister on October 21, 2025, reappointed February 18, 2026.</a:t>
+                <a:latin typeface="Merriweather"/>
+              </a:rPr>
+              <a:t>Akazawa Ryosei is a Liberal Democratic Party member of the House of Representatives for Tottori's 2nd district, first elected in 2005. A University of Tokyo Law graduate with a Cornell MBA, he spent about two decades as an MLIT-lineage bureaucrat.</a:t>
             </a:r>
           </a:p>
           <a:p>
@@ -11905,17 +11905,17 @@
           <a:p>
             <a:pPr>
               <a:lnSpc>
-                <a:spcPct val="103000"/>
+                <a:spcPct val="112000"/>
               </a:lnSpc>
             </a:pPr>
             <a:r>
-              <a:rPr sz="1100" b="0" i="0">
+              <a:rPr sz="1050" b="0" i="0">
                 <a:solidFill>
                   <a:srgbClr val="2C2C2C"/>
                 </a:solidFill>
-                <a:latin typeface="Open Sans"/>
-              </a:rPr>
-              <a:t>José Antonio 'Pepe' Peña Merino is a political scientist and data specialist. He studied Political Science and International Relations at CIDE and earned a PhD in Political Science from New York University, specializing in political economy and quantitative methods. He co-founded Data Cívica and led Mexico City's Agencia Digital de Innovación Pública (ADIP) under then-Mayor Claudia Sheinbaum. Named by Sheinbaum to head the newly created cabinet-rank ATDT, which unifies federal digital, technology and telecommunications policy, he took office with her administration in October 2024 and remains in post.</a:t>
+                <a:latin typeface="Merriweather"/>
+              </a:rPr>
+              <a:t>José Antonio 'Pepe' Peña Merino is a political scientist and data specialist. He studied Political Science and International Relations at CIDE and earned a PhD in Political Science from New York University, specializing in political economy and quantitative methods. He co-founded Data Cívica and led Mexico City's Agencia Digital de Innovación Pública (ADIP) under then-Mayor Claudia Sheinbaum.</a:t>
             </a:r>
           </a:p>
         </p:txBody>
@@ -12131,15 +12131,15 @@
           <a:p>
             <a:pPr>
               <a:lnSpc>
-                <a:spcPct val="104000"/>
+                <a:spcPct val="112000"/>
               </a:lnSpc>
             </a:pPr>
             <a:r>
-              <a:rPr sz="1050" b="0" i="0">
+              <a:rPr sz="950" b="0" i="0">
                 <a:solidFill>
                   <a:srgbClr val="2C2C2C"/>
                 </a:solidFill>
-                <a:latin typeface="Open Sans"/>
+                <a:latin typeface="Merriweather"/>
               </a:rPr>
               <a:t>Marcelo Ebrard Casaubón, former Head of Government of Mexico City (2006-2012) and Secretary of Foreign Affairs (2018-2023), took office as Mexico's Secretary of Economy on 1 October 2024. He leads trade policy, including the 2026 USMCA review and US tariff negotiations.</a:t>
             </a:r>
@@ -12287,15 +12287,15 @@
           <a:p>
             <a:pPr>
               <a:lnSpc>
-                <a:spcPct val="104000"/>
+                <a:spcPct val="112000"/>
               </a:lnSpc>
             </a:pPr>
             <a:r>
-              <a:rPr sz="1050" b="0" i="0">
+              <a:rPr sz="950" b="0" i="0">
                 <a:solidFill>
                   <a:srgbClr val="2C2C2C"/>
                 </a:solidFill>
-                <a:latin typeface="Open Sans"/>
+                <a:latin typeface="Merriweather"/>
               </a:rPr>
               <a:t>Luis Rosendo Gutiérrez Romano is Mexico's Undersecretary for Foreign Trade and lead trade negotiator, appointed to the Secretaría de Economía in October 2024. Holding a PhD from the University of Essex, he leads tariff and trade-treaty negotiations, including the USMCA review.</a:t>
             </a:r>
@@ -13227,17 +13227,17 @@
           <a:p>
             <a:pPr>
               <a:lnSpc>
-                <a:spcPct val="103000"/>
+                <a:spcPct val="112000"/>
               </a:lnSpc>
             </a:pPr>
             <a:r>
-              <a:rPr sz="1100" b="0" i="0">
+              <a:rPr sz="1050" b="0" i="0">
                 <a:solidFill>
                   <a:srgbClr val="2C2C2C"/>
                 </a:solidFill>
-                <a:latin typeface="Open Sans"/>
-              </a:rPr>
-              <a:t>Krzysztof Gawkowski (b. 1980) is a Polish political scientist and New Left (Nowa Lewica) politician, serving as the party's deputy chairman. A member of the Sejm since 2019 and former leader of the Left parliamentary caucus, he became Deputy Prime Minister and Minister of Digital Affairs in Donald Tusk's cabinet on 13 December 2023 and remains in the role in 2026.</a:t>
+                <a:latin typeface="Merriweather"/>
+              </a:rPr>
+              <a:t>Krzysztof Gawkowski (b. 1980) is a Polish political scientist and New Left (Nowa Lewica) politician, serving as the party's deputy chairman.</a:t>
             </a:r>
           </a:p>
           <a:p>
@@ -13469,15 +13469,15 @@
           <a:p>
             <a:pPr>
               <a:lnSpc>
-                <a:spcPct val="104000"/>
+                <a:spcPct val="112000"/>
               </a:lnSpc>
             </a:pPr>
             <a:r>
-              <a:rPr sz="1050" b="0" i="0">
+              <a:rPr sz="950" b="0" i="0">
                 <a:solidFill>
                   <a:srgbClr val="2C2C2C"/>
                 </a:solidFill>
-                <a:latin typeface="Open Sans"/>
+                <a:latin typeface="Merriweather"/>
               </a:rPr>
               <a:t>Andrzej Domański, a Polish economist and Civic Coalition politician, became Minister of Finance on 13 December 2023. Since a July 2025 reshuffle merged that ministry with the Ministry of Development and Technology, he has served as Minister of Finance and Economy.</a:t>
             </a:r>
@@ -13625,15 +13625,15 @@
           <a:p>
             <a:pPr>
               <a:lnSpc>
-                <a:spcPct val="104000"/>
+                <a:spcPct val="112000"/>
               </a:lnSpc>
             </a:pPr>
             <a:r>
-              <a:rPr sz="1050" b="0" i="0">
+              <a:rPr sz="950" b="0" i="0">
                 <a:solidFill>
                   <a:srgbClr val="2C2C2C"/>
                 </a:solidFill>
-                <a:latin typeface="Open Sans"/>
+                <a:latin typeface="Merriweather"/>
               </a:rPr>
               <a:t>Michał Baranowski spent nearly two decades at the German Marshall Fund, founding its Warsaw office in 2011. Appointed Poland's Undersecretary of State responsible for trade on 30 December 2024, he represents Poland at the EU Foreign Affairs Council (Trade).</a:t>
             </a:r>
@@ -14565,15 +14565,15 @@
           <a:p>
             <a:pPr>
               <a:lnSpc>
-                <a:spcPct val="103000"/>
+                <a:spcPct val="112000"/>
               </a:lnSpc>
             </a:pPr>
             <a:r>
-              <a:rPr sz="1100" b="0" i="0">
+              <a:rPr sz="1050" b="0" i="0">
                 <a:solidFill>
                   <a:srgbClr val="2C2C2C"/>
                 </a:solidFill>
-                <a:latin typeface="Open Sans"/>
+                <a:latin typeface="Merriweather"/>
               </a:rPr>
               <a:t>Maksut Igorevich Shadayev (born 11 November 1979) has led Russia's digital ministry since 21 January 2020 and was reappointed on 14 May 2024. Trained at the Russian State Social University, he built his career in ICT and public administration: department director at the communications ministry, aide to Sergey Naryshkin, IT minister of Moscow Oblast (2014-2018), then Rostelecom vice-president.</a:t>
             </a:r>
@@ -14807,15 +14807,15 @@
           <a:p>
             <a:pPr>
               <a:lnSpc>
-                <a:spcPct val="104000"/>
+                <a:spcPct val="112000"/>
               </a:lnSpc>
             </a:pPr>
             <a:r>
-              <a:rPr sz="1050" b="0" i="0">
+              <a:rPr sz="950" b="0" i="0">
                 <a:solidFill>
                   <a:srgbClr val="2C2C2C"/>
                 </a:solidFill>
-                <a:latin typeface="Open Sans"/>
+                <a:latin typeface="Merriweather"/>
               </a:rPr>
               <a:t>Anton Alikhanov has been Russia's Minister of Industry and Trade since 14 May 2024, overseeing industrial policy, trade in goods, export support and import substitution. Previously governor of Kaliningrad Oblast (2016-2024), he holds degrees in finance and law.</a:t>
             </a:r>
@@ -14963,15 +14963,15 @@
           <a:p>
             <a:pPr>
               <a:lnSpc>
-                <a:spcPct val="104000"/>
+                <a:spcPct val="112000"/>
               </a:lnSpc>
             </a:pPr>
             <a:r>
-              <a:rPr sz="1050" b="0" i="0">
+              <a:rPr sz="950" b="0" i="0">
                 <a:solidFill>
                   <a:srgbClr val="2C2C2C"/>
                 </a:solidFill>
-                <a:latin typeface="Open Sans"/>
+                <a:latin typeface="Merriweather"/>
               </a:rPr>
               <a:t>Maxim Reshetnikov has served as Russia's Minister of Economic Development since 21 January 2020 and was reappointed in May 2024. He previously headed Moscow's economic-policy department (2012-2017) and governed Perm Krai (2017-2020). His ministry directs macroeconomic policy and international trade negotiations.</a:t>
             </a:r>
@@ -15903,17 +15903,17 @@
           <a:p>
             <a:pPr>
               <a:lnSpc>
-                <a:spcPct val="103000"/>
+                <a:spcPct val="112000"/>
               </a:lnSpc>
             </a:pPr>
             <a:r>
-              <a:rPr sz="1100" b="0" i="0">
+              <a:rPr sz="1050" b="0" i="0">
                 <a:solidFill>
                   <a:srgbClr val="2C2C2C"/>
                 </a:solidFill>
-                <a:latin typeface="Open Sans"/>
-              </a:rPr>
-              <a:t>Abdullah bin Amer Alswaha, a Saudi engineer, has been Minister of Communications and Information Technology since 24 April 2017 and remains in office in 2026 (the ministry publicly welcomed the 2026 budget under his name). He holds electrical-engineering and computer-science degrees from KFUPM and the University of Washington plus Harvard executive education. Before government he led Cisco Saudi Arabia as managing director, then served as the Kingdom's Chief Digital Officer. As minister he drives Saudi Arabia's digital transformation and AI agenda under Vision 2030 and chairs related technology and space bodies.</a:t>
+                <a:latin typeface="Merriweather"/>
+              </a:rPr>
+              <a:t>Abdullah bin Amer Alswaha, a Saudi engineer, has been Minister of Communications and Information Technology since 24 April 2017 and remains in office in 2026 (the ministry publicly welcomed the 2026 budget under his name). He holds electrical-engineering and computer-science degrees from KFUPM and the University of Washington plus Harvard executive education. Before government he led Cisco Saudi Arabia as managing director, then served as the Kingdom's Chief Digital Officer.</a:t>
             </a:r>
           </a:p>
         </p:txBody>
@@ -16129,15 +16129,15 @@
           <a:p>
             <a:pPr>
               <a:lnSpc>
-                <a:spcPct val="104000"/>
+                <a:spcPct val="112000"/>
               </a:lnSpc>
             </a:pPr>
             <a:r>
-              <a:rPr sz="1050" b="0" i="0">
+              <a:rPr sz="950" b="0" i="0">
                 <a:solidFill>
                   <a:srgbClr val="2C2C2C"/>
                 </a:solidFill>
-                <a:latin typeface="Open Sans"/>
+                <a:latin typeface="Merriweather"/>
               </a:rPr>
               <a:t>Majid bin Abdullah Al-Qasabi has been Saudi Arabia's Minister of Commerce since May 2016 and chairs the board of the General Authority for Foreign Trade, which handles WTO representation and trade negotiations. He previously served as acting Minister of Media (2020-2023).</a:t>
             </a:r>
@@ -16285,15 +16285,15 @@
           <a:p>
             <a:pPr>
               <a:lnSpc>
-                <a:spcPct val="104000"/>
+                <a:spcPct val="112000"/>
               </a:lnSpc>
             </a:pPr>
             <a:r>
-              <a:rPr sz="1050" b="0" i="0">
+              <a:rPr sz="950" b="0" i="0">
                 <a:solidFill>
                   <a:srgbClr val="2C2C2C"/>
                 </a:solidFill>
-                <a:latin typeface="Open Sans"/>
+                <a:latin typeface="Merriweather"/>
               </a:rPr>
               <a:t>Mohammed bin Abdulaziz Al-Abduljabbar serves as Acting Governor of Saudi Arabia's General Authority for Foreign Trade (GAFT), which represents the Kingdom at the WTO, supervises the negotiating team and leads free-trade-agreement negotiations. GAFT's 2025-2026 communications list him in an acting capacity.</a:t>
             </a:r>
@@ -17711,17 +17711,17 @@
           <a:p>
             <a:pPr>
               <a:lnSpc>
-                <a:spcPct val="103000"/>
+                <a:spcPct val="112000"/>
               </a:lnSpc>
             </a:pPr>
             <a:r>
-              <a:rPr sz="1100" b="0" i="0">
+              <a:rPr sz="1050" b="0" i="0">
                 <a:solidFill>
                   <a:srgbClr val="2C2C2C"/>
                 </a:solidFill>
-                <a:latin typeface="Open Sans"/>
-              </a:rPr>
-              <a:t>Bae Kyung-hoon is an AI specialist who holds a PhD in computer vision (Kwangwoon University, 2006) and led LG AI Research, where he developed the Exaone large language model. President Lee Jae-myung appointed him Minister of Science and ICT on 16 July 2025; the post was later elevated to Deputy Prime Minister rank. He also serves as standing vice chairman of the National AI Strategy Committee and pursues Lee's goal of making Korea a top-three global AI power with record R&amp;D budgets and a large GPU buildout.</a:t>
+                <a:latin typeface="Merriweather"/>
+              </a:rPr>
+              <a:t>Bae Kyung-hoon is an AI specialist who holds a PhD in computer vision (Kwangwoon University, 2006) and led LG AI Research, where he developed the Exaone large language model. President Lee Jae-myung appointed him Minister of Science and ICT on 16 July 2025; the post was later elevated to Deputy Prime Minister rank.</a:t>
             </a:r>
           </a:p>
         </p:txBody>
@@ -17937,15 +17937,15 @@
           <a:p>
             <a:pPr>
               <a:lnSpc>
-                <a:spcPct val="104000"/>
+                <a:spcPct val="112000"/>
               </a:lnSpc>
             </a:pPr>
             <a:r>
-              <a:rPr sz="1050" b="0" i="0">
+              <a:rPr sz="950" b="0" i="0">
                 <a:solidFill>
                   <a:srgbClr val="2C2C2C"/>
                 </a:solidFill>
-                <a:latin typeface="Open Sans"/>
+                <a:latin typeface="Merriweather"/>
               </a:rPr>
               <a:t>Kim Jung-kwan, a finance technocrat who served at Korea's Ministry of Economy and Finance, the Bank of Korea and the World Bank and led Doosan Enerbility, was nominated by President Lee and took office in July 2025 heading the renamed MOTIR.</a:t>
             </a:r>
@@ -18093,15 +18093,15 @@
           <a:p>
             <a:pPr>
               <a:lnSpc>
-                <a:spcPct val="104000"/>
+                <a:spcPct val="112000"/>
               </a:lnSpc>
             </a:pPr>
             <a:r>
-              <a:rPr sz="1050" b="0" i="0">
+              <a:rPr sz="950" b="0" i="0">
                 <a:solidFill>
                   <a:srgbClr val="2C2C2C"/>
                 </a:solidFill>
-                <a:latin typeface="Open Sans"/>
+                <a:latin typeface="Merriweather"/>
               </a:rPr>
               <a:t>Yeo Han-koo, with nearly three decades of public service, was appointed South Korea's Minister for Trade in mid-2025 under President Lee. Previously chief trade negotiator in 2021-2022 and a Peterson Institute senior fellow, he leads tariff talks with the United States.</a:t>
             </a:r>
@@ -19033,15 +19033,15 @@
           <a:p>
             <a:pPr>
               <a:lnSpc>
-                <a:spcPct val="103000"/>
+                <a:spcPct val="112000"/>
               </a:lnSpc>
             </a:pPr>
             <a:r>
-              <a:rPr sz="1100" b="0" i="0">
+              <a:rPr sz="1050" b="0" i="0">
                 <a:solidFill>
                   <a:srgbClr val="2C2C2C"/>
                 </a:solidFill>
-                <a:latin typeface="Open Sans"/>
+                <a:latin typeface="Merriweather"/>
               </a:rPr>
               <a:t>Mehmet Fatih Kacır (born 16 October 1984) became Minister of Industry and Technology on 3 June 2023, having previously served as a deputy minister in the same ministry. An industrial engineering graduate of Boğaziçi University (2008), he co-founded and chaired the T3 Foundation until 2018 and helped launch TEKNOFEST and the DENEYAP technology workshops.</a:t>
             </a:r>
@@ -19279,17 +19279,17 @@
           <a:p>
             <a:pPr>
               <a:lnSpc>
-                <a:spcPct val="103000"/>
+                <a:spcPct val="112000"/>
               </a:lnSpc>
             </a:pPr>
             <a:r>
-              <a:rPr sz="1100" b="0" i="0">
+              <a:rPr sz="1050" b="0" i="0">
                 <a:solidFill>
                   <a:srgbClr val="2C2C2C"/>
                 </a:solidFill>
-                <a:latin typeface="Open Sans"/>
-              </a:rPr>
-              <a:t>Prof. Dr. Ömer Bolat (born 30 August 1963, Istanbul) has been Minister of Trade since the cabinet formed after Türkiye's May 2023 elections. He graduated from Marmara University's Faculty of Economics and Administrative Sciences in international economic relations, becoming associate professor in 2014 and professor in 2019. Before politics he was General Coordinator/CEO of the Albayrak Group for about 23 years and chaired the MÜSİAD business association. As minister he directs export strategy, customs, FTA negotiations and WTO representation, and has led trade talks with the United States.</a:t>
+                <a:latin typeface="Merriweather"/>
+              </a:rPr>
+              <a:t>Prof. Dr. Ömer Bolat (born 30 August 1963, Istanbul) has been Minister of Trade since the cabinet formed after Türkiye's May 2023 elections. He graduated from Marmara University's Faculty of Economics and Administrative Sciences in international economic relations, becoming associate professor in 2014 and professor in 2019. Before politics he was General Coordinator/CEO of the Albayrak Group for about 23 years and chaired the MÜSİAD business association.</a:t>
             </a:r>
           </a:p>
         </p:txBody>
@@ -20219,15 +20219,15 @@
           <a:p>
             <a:pPr>
               <a:lnSpc>
-                <a:spcPct val="103000"/>
+                <a:spcPct val="112000"/>
               </a:lnSpc>
             </a:pPr>
             <a:r>
-              <a:rPr sz="1100" b="0" i="0">
+              <a:rPr sz="1050" b="0" i="0">
                 <a:solidFill>
                   <a:srgbClr val="2C2C2C"/>
                 </a:solidFill>
-                <a:latin typeface="Open Sans"/>
+                <a:latin typeface="Merriweather"/>
               </a:rPr>
               <a:t>Liz Kendall is the Labour MP for Leicester West, first elected in 2010. She contested the 2015 Labour leadership election and held several shadow ministerial roles. After Labour's 2024 general election win she served as Secretary of State for Work and Pensions (July 2024 to September 2025).</a:t>
             </a:r>
@@ -20461,15 +20461,15 @@
           <a:p>
             <a:pPr>
               <a:lnSpc>
-                <a:spcPct val="104000"/>
+                <a:spcPct val="112000"/>
               </a:lnSpc>
             </a:pPr>
             <a:r>
-              <a:rPr sz="1050" b="0" i="0">
+              <a:rPr sz="950" b="0" i="0">
                 <a:solidFill>
                   <a:srgbClr val="2C2C2C"/>
                 </a:solidFill>
-                <a:latin typeface="Open Sans"/>
+                <a:latin typeface="Merriweather"/>
               </a:rPr>
               <a:t>Peter Kyle, Labour MP for Hove and Portslade since 2015, became Secretary of State for Business and Trade and President of the Board of Trade in the September 2025 reshuffle. He was previously Science, Innovation and Technology Secretary (2024-2025).</a:t>
             </a:r>
@@ -20617,15 +20617,15 @@
           <a:p>
             <a:pPr>
               <a:lnSpc>
-                <a:spcPct val="104000"/>
+                <a:spcPct val="112000"/>
               </a:lnSpc>
             </a:pPr>
             <a:r>
-              <a:rPr sz="1050" b="0" i="0">
+              <a:rPr sz="950" b="0" i="0">
                 <a:solidFill>
                   <a:srgbClr val="2C2C2C"/>
                 </a:solidFill>
-                <a:latin typeface="Open Sans"/>
+                <a:latin typeface="Merriweather"/>
               </a:rPr>
               <a:t>Sir Chris Bryant, a former Anglican priest and Labour MP since 2001, now for Rhondda and Ogmore, was appointed Minister of State for Trade Policy and Economic Security at DBT on 6 September 2025, succeeding Douglas Alexander.</a:t>
             </a:r>
@@ -21553,15 +21553,15 @@
           <a:p>
             <a:pPr>
               <a:lnSpc>
-                <a:spcPct val="104000"/>
+                <a:spcPct val="112000"/>
               </a:lnSpc>
             </a:pPr>
             <a:r>
-              <a:rPr sz="1050" b="0" i="0">
+              <a:rPr sz="950" b="0" i="0">
                 <a:solidFill>
                   <a:srgbClr val="2C2C2C"/>
                 </a:solidFill>
-                <a:latin typeface="Open Sans"/>
+                <a:latin typeface="Merriweather"/>
               </a:rPr>
               <a:t>Michael Kratsios, confirmed March 25, 2025, is the 13th Director of the White House Office of Science and Technology Policy. Previously U.S. Chief Technology Officer and Under Secretary of Defense for Research and Engineering, he leads the administration's AI Action Plan.</a:t>
             </a:r>
@@ -21709,15 +21709,15 @@
           <a:p>
             <a:pPr>
               <a:lnSpc>
-                <a:spcPct val="104000"/>
+                <a:spcPct val="112000"/>
               </a:lnSpc>
             </a:pPr>
             <a:r>
-              <a:rPr sz="1050" b="0" i="0">
+              <a:rPr sz="950" b="0" i="0">
                 <a:solidFill>
                   <a:srgbClr val="2C2C2C"/>
                 </a:solidFill>
-                <a:latin typeface="Open Sans"/>
+                <a:latin typeface="Merriweather"/>
               </a:rPr>
               <a:t>Arielle Roth is Assistant Secretary of Commerce for Communications and Information and NTIA Administrator, confirmed July 23, 2025. Formerly telecommunications policy director for the Senate Commerce Committee's Republican staff, she oversees federal spectrum management and broadband programs including BEAD.</a:t>
             </a:r>
@@ -21935,15 +21935,15 @@
           <a:p>
             <a:pPr>
               <a:lnSpc>
-                <a:spcPct val="104000"/>
+                <a:spcPct val="112000"/>
               </a:lnSpc>
             </a:pPr>
             <a:r>
-              <a:rPr sz="1050" b="0" i="0">
+              <a:rPr sz="950" b="0" i="0">
                 <a:solidFill>
                   <a:srgbClr val="2C2C2C"/>
                 </a:solidFill>
-                <a:latin typeface="Open Sans"/>
+                <a:latin typeface="Merriweather"/>
               </a:rPr>
               <a:t>Howard Lutnick, the 41st U.S. Secretary of Commerce, was confirmed February 18, 2025. Longtime chairman and CEO of Cantor Fitzgerald, which he rebuilt after 9/11, he oversees trade policy, tariffs and export controls, and co-chaired Trump's 2024-25 transition.</a:t>
             </a:r>
@@ -22091,15 +22091,15 @@
           <a:p>
             <a:pPr>
               <a:lnSpc>
-                <a:spcPct val="104000"/>
+                <a:spcPct val="112000"/>
               </a:lnSpc>
             </a:pPr>
             <a:r>
-              <a:rPr sz="1050" b="0" i="0">
+              <a:rPr sz="950" b="0" i="0">
                 <a:solidFill>
                   <a:srgbClr val="2C2C2C"/>
                 </a:solidFill>
-                <a:latin typeface="Open Sans"/>
+                <a:latin typeface="Merriweather"/>
               </a:rPr>
               <a:t>Jamieson Greer is the 20th U.S. Trade Representative, confirmed February 27, 2025. A trade attorney and former Air Force JAG officer, he was chief of staff to USTR Robert Lighthizer and leads U.S. trade negotiations, tariff strategy and enforcement.</a:t>
             </a:r>
@@ -23074,15 +23074,15 @@
           <a:p>
             <a:pPr>
               <a:lnSpc>
-                <a:spcPct val="103000"/>
+                <a:spcPct val="112000"/>
               </a:lnSpc>
             </a:pPr>
             <a:r>
-              <a:rPr sz="1100" b="0" i="0">
+              <a:rPr sz="1050" b="0" i="0">
                 <a:solidFill>
                   <a:srgbClr val="2C2C2C"/>
                 </a:solidFill>
-                <a:latin typeface="Open Sans"/>
+                <a:latin typeface="Merriweather"/>
               </a:rPr>
               <a:t>Finnish politician of the National Coalition Party (EPP), born 1972 in Joutsa. A former journalist, she sat in Finland's Parliament from 2007 to 2014, serving as Minister of Education (2008-2011), of Public Administration and Local Government (2011-2014), and of Transport and Local Government (2014). An MEP from 2014 to 2024, she became Executive Vice-President on 1 December 2024, leading EU digital, AI, cybersecurity, platform-regulation and democracy policy.</a:t>
             </a:r>
@@ -23304,15 +23304,15 @@
           <a:p>
             <a:pPr>
               <a:lnSpc>
-                <a:spcPct val="103000"/>
+                <a:spcPct val="112000"/>
               </a:lnSpc>
             </a:pPr>
             <a:r>
-              <a:rPr sz="1100" b="0" i="0">
+              <a:rPr sz="1050" b="0" i="0">
                 <a:solidFill>
                   <a:srgbClr val="2C2C2C"/>
                 </a:solidFill>
-                <a:latin typeface="Open Sans"/>
+                <a:latin typeface="Merriweather"/>
               </a:rPr>
               <a:t>Slovak diplomat and politician, born 1966. A career diplomat and Slovakia's Permanent Representative to the EU (2004-2009), he has served in every European Commission since 2009, including as Vice-President for the Energy Union and Executive Vice-President for the European Green Deal. A veteran Brexit negotiator, he took the trade portfolio on 1 December 2024 and led the EU side of the 2025 U.S.-EU tariff framework agreed at Turnberry.</a:t>
             </a:r>
@@ -24317,15 +24317,15 @@
           <a:p>
             <a:pPr>
               <a:lnSpc>
-                <a:spcPct val="103000"/>
+                <a:spcPct val="112000"/>
               </a:lnSpc>
             </a:pPr>
             <a:r>
-              <a:rPr sz="1100" b="0" i="0">
+              <a:rPr sz="1050" b="0" i="0">
                 <a:solidFill>
                   <a:srgbClr val="2C2C2C"/>
                 </a:solidFill>
-                <a:latin typeface="Open Sans"/>
+                <a:latin typeface="Merriweather"/>
               </a:rPr>
               <a:t>A South African trade-and-investment specialist with over 23 years' experience, Mataboge leads the AU portfolio spanning transport, energy and ICT/digital transformation. She was previously Deputy Director-General at South Africa's Department of Trade, Industry and Competition, founded and led Trade Invest Africa, and served as South Africa's chief trade and investment representative in Washington, D.C. Elected in the February 2025 AUC elections, she was sworn in with the new Commission on 13 March 2025.</a:t>
             </a:r>
@@ -24547,15 +24547,15 @@
           <a:p>
             <a:pPr>
               <a:lnSpc>
-                <a:spcPct val="103000"/>
+                <a:spcPct val="112000"/>
               </a:lnSpc>
             </a:pPr>
             <a:r>
-              <a:rPr sz="1100" b="0" i="0">
+              <a:rPr sz="1050" b="0" i="0">
                 <a:solidFill>
                   <a:srgbClr val="2C2C2C"/>
                 </a:solidFill>
-                <a:latin typeface="Open Sans"/>
+                <a:latin typeface="Merriweather"/>
               </a:rPr>
               <a:t>An Equatoguinean economist and politician, Tatchouop Belobe heads the AU's economic integration, trade, industry and minerals portfolio. She previously served as Vice-President of the ECCAS Commission (Economic Community of Central African States), Second Vice-President of Equatorial Guinea's National Assembly, and Minister and Deputy Minister of Economy, Trade and SME Promotion.</a:t>
             </a:r>
@@ -24817,7 +24817,7 @@
                 </a:solidFill>
                 <a:latin typeface="Open Sans"/>
               </a:rPr>
-              <a:t>Sources</a:t>
+              <a:t>Sources &amp; Data Caveats</a:t>
             </a:r>
           </a:p>
         </p:txBody>
@@ -24851,7 +24851,7 @@
                 </a:solidFill>
                 <a:latin typeface="Open Sans"/>
               </a:rPr>
-              <a:t>datasets and vintages</a:t>
+              <a:t>datasets, vintages, and measurement caveats</a:t>
             </a:r>
           </a:p>
         </p:txBody>
@@ -24909,7 +24909,7 @@
         <p:spPr>
           <a:xfrm>
             <a:off x="548640" y="1371600"/>
-            <a:ext cx="10881360" cy="4754880"/>
+            <a:ext cx="5394960" cy="4754880"/>
           </a:xfrm>
           <a:prstGeom prst="rect">
             <a:avLst/>
@@ -25092,9 +25092,201 @@
           </a:p>
         </p:txBody>
       </p:sp>
+      <p:sp>
+        <p:nvSpPr>
+          <p:cNvPr id="7" name="TextBox 6"/>
+          <p:cNvSpPr txBox="1"/>
+          <p:nvPr/>
+        </p:nvSpPr>
+        <p:spPr>
+          <a:xfrm>
+            <a:off x="6309360" y="1371600"/>
+            <a:ext cx="5349240" cy="4754880"/>
+          </a:xfrm>
+          <a:prstGeom prst="rect">
+            <a:avLst/>
+          </a:prstGeom>
+          <a:noFill/>
+        </p:spPr>
+        <p:txBody>
+          <a:bodyPr wrap="square" anchor="t" lIns="0" rIns="0" tIns="0" bIns="0">
+            <a:spAutoFit/>
+          </a:bodyPr>
+          <a:lstStyle/>
+          <a:p>
+            <a:pPr>
+              <a:spcBef>
+                <a:spcPts val="0"/>
+              </a:spcBef>
+              <a:spcAft>
+                <a:spcPts val="400"/>
+              </a:spcAft>
+            </a:pPr>
+            <a:r>
+              <a:rPr sz="1150" b="1" i="0" spc="60">
+                <a:solidFill>
+                  <a:srgbClr val="0A314D"/>
+                </a:solidFill>
+                <a:latin typeface="Open Sans"/>
+              </a:rPr>
+              <a:t>DATA CAVEATS</a:t>
+            </a:r>
+          </a:p>
+          <a:p>
+            <a:pPr>
+              <a:spcAft>
+                <a:spcPts val="400"/>
+              </a:spcAft>
+            </a:pPr>
+            <a:r>
+              <a:rPr sz="1100" b="1" i="0">
+                <a:solidFill>
+                  <a:srgbClr val="B4862D"/>
+                </a:solidFill>
+                <a:latin typeface="Open Sans"/>
+              </a:rPr>
+              <a:t>•  </a:t>
+            </a:r>
+            <a:r>
+              <a:rPr sz="1100" b="0" i="0">
+                <a:solidFill>
+                  <a:srgbClr val="2C2C2C"/>
+                </a:solidFill>
+                <a:latin typeface="Open Sans"/>
+              </a:rPr>
+              <a:t>Basis exceptions: Australia's overall balance is goods+services; India's is fiscal year 2025-26. All others goods-only, calendar 2025.</a:t>
+            </a:r>
+          </a:p>
+          <a:p>
+            <a:pPr>
+              <a:spcAft>
+                <a:spcPts val="400"/>
+              </a:spcAft>
+            </a:pPr>
+            <a:r>
+              <a:rPr sz="1100" b="1" i="0">
+                <a:solidFill>
+                  <a:srgbClr val="B4862D"/>
+                </a:solidFill>
+                <a:latin typeface="Open Sans"/>
+              </a:rPr>
+              <a:t>•  </a:t>
+            </a:r>
+            <a:r>
+              <a:rPr sz="1100" b="0" i="0">
+                <a:solidFill>
+                  <a:srgbClr val="2C2C2C"/>
+                </a:solidFill>
+                <a:latin typeface="Open Sans"/>
+              </a:rPr>
+              <a:t>Several overall balances are converted from local currency (EUR/GBP/CAD/AUD/JPY/SAR) at ~2025 average rates; USD values carry exchange-rate uncertainty.</a:t>
+            </a:r>
+          </a:p>
+          <a:p>
+            <a:pPr>
+              <a:spcAft>
+                <a:spcPts val="400"/>
+              </a:spcAft>
+            </a:pPr>
+            <a:r>
+              <a:rPr sz="1100" b="1" i="0">
+                <a:solidFill>
+                  <a:srgbClr val="B4862D"/>
+                </a:solidFill>
+                <a:latin typeface="Open Sans"/>
+              </a:rPr>
+              <a:t>•  </a:t>
+            </a:r>
+            <a:r>
+              <a:rPr sz="1100" b="0" i="0">
+                <a:solidFill>
+                  <a:srgbClr val="2C2C2C"/>
+                </a:solidFill>
+                <a:latin typeface="Open Sans"/>
+              </a:rPr>
+              <a:t>census.gov and imf.org were not directly reachable from the build environment; figures come from official-data-derived channels.</a:t>
+            </a:r>
+          </a:p>
+          <a:p>
+            <a:pPr>
+              <a:spcAft>
+                <a:spcPts val="400"/>
+              </a:spcAft>
+            </a:pPr>
+            <a:r>
+              <a:rPr sz="1100" b="1" i="0">
+                <a:solidFill>
+                  <a:srgbClr val="B4862D"/>
+                </a:solidFill>
+                <a:latin typeface="Open Sans"/>
+              </a:rPr>
+              <a:t>•  </a:t>
+            </a:r>
+            <a:r>
+              <a:rPr sz="1100" b="0" i="0">
+                <a:solidFill>
+                  <a:srgbClr val="2C2C2C"/>
+                </a:solidFill>
+                <a:latin typeface="Open Sans"/>
+              </a:rPr>
+              <a:t>African Union: U.S. trade figures are U.S.–Africa goods totals (proxy); no clean continental goods balance is published (shown N/A).</a:t>
+            </a:r>
+          </a:p>
+          <a:p>
+            <a:pPr>
+              <a:spcAft>
+                <a:spcPts val="400"/>
+              </a:spcAft>
+            </a:pPr>
+            <a:r>
+              <a:rPr sz="1100" b="1" i="0">
+                <a:solidFill>
+                  <a:srgbClr val="B4862D"/>
+                </a:solidFill>
+                <a:latin typeface="Open Sans"/>
+              </a:rPr>
+              <a:t>•  </a:t>
+            </a:r>
+            <a:r>
+              <a:rPr sz="1100" b="0" i="0">
+                <a:solidFill>
+                  <a:srgbClr val="2C2C2C"/>
+                </a:solidFill>
+                <a:latin typeface="Open Sans"/>
+              </a:rPr>
+              <a:t>Acting officials: Argentina's domestic commerce portfolio (Lavigne) and Saudi Arabia's GAFT governorship are held on an acting basis.</a:t>
+            </a:r>
+          </a:p>
+          <a:p>
+            <a:pPr>
+              <a:spcAft>
+                <a:spcPts val="400"/>
+              </a:spcAft>
+            </a:pPr>
+            <a:r>
+              <a:rPr sz="1100" b="1" i="0">
+                <a:solidFill>
+                  <a:srgbClr val="B4862D"/>
+                </a:solidFill>
+                <a:latin typeface="Open Sans"/>
+              </a:rPr>
+              <a:t>•  </a:t>
+            </a:r>
+            <a:r>
+              <a:rPr sz="1100" b="0" i="0">
+                <a:solidFill>
+                  <a:srgbClr val="2C2C2C"/>
+                </a:solidFill>
+                <a:latin typeface="Open Sans"/>
+              </a:rPr>
+              <a:t>Full uncertainty register (confidence flags, items to re-verify): output/GAPS.md.</a:t>
+            </a:r>
+          </a:p>
+        </p:txBody>
+      </p:sp>
       <p:cxnSp>
         <p:nvCxnSpPr>
-          <p:cNvPr id="7" name="Connector 6"/>
+          <p:cNvPr id="8" name="Connector 7"/>
           <p:cNvCxnSpPr/>
           <p:nvPr/>
         </p:nvCxnSpPr>
@@ -25130,7 +25322,7 @@
       </p:cxnSp>
       <p:sp>
         <p:nvSpPr>
-          <p:cNvPr id="8" name="TextBox 7"/>
+          <p:cNvPr id="9" name="TextBox 8"/>
           <p:cNvSpPr txBox="1"/>
           <p:nvPr/>
         </p:nvSpPr>
@@ -25164,7 +25356,7 @@
       </p:sp>
       <p:sp>
         <p:nvSpPr>
-          <p:cNvPr id="9" name="TextBox 8"/>
+          <p:cNvPr id="10" name="TextBox 9"/>
           <p:cNvSpPr txBox="1"/>
           <p:nvPr/>
         </p:nvSpPr>
@@ -25198,7 +25390,7 @@
       </p:sp>
       <p:sp>
         <p:nvSpPr>
-          <p:cNvPr id="10" name="TextBox 9"/>
+          <p:cNvPr id="11" name="TextBox 10"/>
           <p:cNvSpPr txBox="1"/>
           <p:nvPr/>
         </p:nvSpPr>
@@ -30905,17 +31097,17 @@
           <a:p>
             <a:pPr>
               <a:lnSpc>
-                <a:spcPct val="103000"/>
+                <a:spcPct val="112000"/>
               </a:lnSpc>
             </a:pPr>
             <a:r>
-              <a:rPr sz="1100" b="0" i="0">
+              <a:rPr sz="1050" b="0" i="0">
                 <a:solidFill>
                   <a:srgbClr val="2C2C2C"/>
                 </a:solidFill>
-                <a:latin typeface="Open Sans"/>
-              </a:rPr>
-              <a:t>Darío Leandro Genua, a business-administration graduate of the Universidad Catolica Argentina with a postgraduate degree in information systems and administrative processes, became Secretary of Innovation, Science and Technology in June 2024, succeeding Alejandro Cosentino. He previously served as executive coordinator of the intervention of ENACOM, Argentina's telecommunications regulator, working on the repeal of DNU 690 and satellite-internet opening. His secretariat leads state digitalization, digital public services, connectivity and telecommunications policy under the Chief of Cabinet.</a:t>
+                <a:latin typeface="Merriweather"/>
+              </a:rPr>
+              <a:t>Darío Leandro Genua, a business-administration graduate of the Universidad Catolica Argentina with a postgraduate degree in information systems and administrative processes, became Secretary of Innovation, Science and Technology in June 2024, succeeding Alejandro Cosentino. He previously served as executive coordinator of the intervention of ENACOM, Argentina's telecommunications regulator, working on the repeal of DNU 690 and satellite-internet opening.</a:t>
             </a:r>
           </a:p>
           <a:p>
@@ -31147,15 +31339,15 @@
           <a:p>
             <a:pPr>
               <a:lnSpc>
-                <a:spcPct val="104000"/>
+                <a:spcPct val="112000"/>
               </a:lnSpc>
             </a:pPr>
             <a:r>
-              <a:rPr sz="1050" b="0" i="0">
+              <a:rPr sz="950" b="0" i="0">
                 <a:solidFill>
                   <a:srgbClr val="2C2C2C"/>
                 </a:solidFill>
-                <a:latin typeface="Open Sans"/>
+                <a:latin typeface="Merriweather"/>
               </a:rPr>
               <a:t>Minister of Foreign Affairs, International Trade and Worship since October 27, 2025, succeeding Gerardo Werthein. Economist (born August 24, 1966) and former longtime JPMorgan executive; served as Secretary of Finance under Economy Minister Luis Caputo from December 2023, leading Argentina's debt operations.</a:t>
             </a:r>
@@ -31312,15 +31504,15 @@
           <a:p>
             <a:pPr>
               <a:lnSpc>
-                <a:spcPct val="104000"/>
+                <a:spcPct val="112000"/>
               </a:lnSpc>
             </a:pPr>
             <a:r>
-              <a:rPr sz="1050" b="0" i="0">
+              <a:rPr sz="950" b="0" i="0">
                 <a:solidFill>
                   <a:srgbClr val="2C2C2C"/>
                 </a:solidFill>
-                <a:latin typeface="Open Sans"/>
+                <a:latin typeface="Merriweather"/>
               </a:rPr>
               <a:t>Pablo Lavigne has been Secretary of Production Coordination in Argentina's Economy Ministry since December 2024. He led the Secretariat of Industry and Commerce; a March 2026 decree merged those functions into his secretariat, and he exercises them on an acting basis.</a:t>
             </a:r>
@@ -32248,15 +32440,15 @@
           <a:p>
             <a:pPr>
               <a:lnSpc>
-                <a:spcPct val="104000"/>
+                <a:spcPct val="112000"/>
               </a:lnSpc>
             </a:pPr>
             <a:r>
-              <a:rPr sz="1050" b="0" i="0">
+              <a:rPr sz="950" b="0" i="0">
                 <a:solidFill>
                   <a:srgbClr val="2C2C2C"/>
                 </a:solidFill>
-                <a:latin typeface="Open Sans"/>
+                <a:latin typeface="Merriweather"/>
               </a:rPr>
               <a:t>Cabinet Secretary and Assistant Minister for Science, Technology and the Digital Economy since 13 May 2025; Labor MP for Parramatta since 2022.</a:t>
             </a:r>
@@ -32404,15 +32596,15 @@
           <a:p>
             <a:pPr>
               <a:lnSpc>
-                <a:spcPct val="104000"/>
+                <a:spcPct val="112000"/>
               </a:lnSpc>
             </a:pPr>
             <a:r>
-              <a:rPr sz="1050" b="0" i="0">
+              <a:rPr sz="950" b="0" i="0">
                 <a:solidFill>
                   <a:srgbClr val="2C2C2C"/>
                 </a:solidFill>
-                <a:latin typeface="Open Sans"/>
+                <a:latin typeface="Merriweather"/>
               </a:rPr>
               <a:t>Minister for Industry and Innovation and Minister for Science since 13 May 2025; Labor Senator for New South Wales since 2019.</a:t>
             </a:r>
@@ -32634,17 +32826,17 @@
           <a:p>
             <a:pPr>
               <a:lnSpc>
-                <a:spcPct val="103000"/>
+                <a:spcPct val="112000"/>
               </a:lnSpc>
             </a:pPr>
             <a:r>
-              <a:rPr sz="1100" b="0" i="0">
+              <a:rPr sz="1050" b="0" i="0">
                 <a:solidFill>
                   <a:srgbClr val="2C2C2C"/>
                 </a:solidFill>
-                <a:latin typeface="Open Sans"/>
-              </a:rPr>
-              <a:t>Senator Donald Edward Farrell (born 1954) is a Labor Senator for South Australia and a former trade unionist who was state secretary of the Shop, Distributive and Allied Employees Association (SDA) from 1993 to 2008. A University of Adelaide law graduate, he served in the Senate from 2008-2014 and again from 2016, holding ministries under the Rudd and Gillard governments.</a:t>
+                <a:latin typeface="Merriweather"/>
+              </a:rPr>
+              <a:t>Senator Donald Edward Farrell (born 1954) is a Labor Senator for South Australia and a former trade unionist who was state secretary of the Shop, Distributive and Allied Employees Association (SDA) from 1993 to 2008.</a:t>
             </a:r>
           </a:p>
           <a:p>
@@ -33586,15 +33778,15 @@
           <a:p>
             <a:pPr>
               <a:lnSpc>
-                <a:spcPct val="104000"/>
+                <a:spcPct val="112000"/>
               </a:lnSpc>
             </a:pPr>
             <a:r>
-              <a:rPr sz="1050" b="0" i="0">
+              <a:rPr sz="950" b="0" i="0">
                 <a:solidFill>
                   <a:srgbClr val="2C2C2C"/>
                 </a:solidFill>
-                <a:latin typeface="Open Sans"/>
+                <a:latin typeface="Merriweather"/>
               </a:rPr>
               <a:t>Frederico de Siqueira Filho, a Brazilian engineer with over 26 years in telecommunications, including some 21 years at operator Oi, led state-owned Telebras from 2023 to 2025. President Lula appointed him Minister of Communications in April 2025, succeeding Juscelino Filho.</a:t>
             </a:r>
@@ -33742,15 +33934,15 @@
           <a:p>
             <a:pPr>
               <a:lnSpc>
-                <a:spcPct val="104000"/>
+                <a:spcPct val="112000"/>
               </a:lnSpc>
             </a:pPr>
             <a:r>
-              <a:rPr sz="1050" b="0" i="0">
+              <a:rPr sz="950" b="0" i="0">
                 <a:solidFill>
                   <a:srgbClr val="2C2C2C"/>
                 </a:solidFill>
-                <a:latin typeface="Open Sans"/>
+                <a:latin typeface="Merriweather"/>
               </a:rPr>
               <a:t>Luciana Santos, an electrical engineer and national president of the Communist Party of Brazil, has been Minister of Science, Technology and Innovation since 1 January 2023. She previously served as mayor of Olinda, federal deputy and vice-governor of Pernambuco.</a:t>
             </a:r>
@@ -33972,17 +34164,17 @@
           <a:p>
             <a:pPr>
               <a:lnSpc>
-                <a:spcPct val="103000"/>
+                <a:spcPct val="112000"/>
               </a:lnSpc>
             </a:pPr>
             <a:r>
-              <a:rPr sz="1100" b="0" i="0">
+              <a:rPr sz="1050" b="0" i="0">
                 <a:solidFill>
                   <a:srgbClr val="2C2C2C"/>
                 </a:solidFill>
-                <a:latin typeface="Open Sans"/>
-              </a:rPr>
-              <a:t>Retired public prosecutor, lawyer and law professor, born in Ibiúna, São Paulo, in 1962. He spent his career in the São Paulo Public Prosecutor's Office, serving twice as Attorney General of Justice (2012-2016) and as São Paulo State Secretary of Justice. He joined MDIC as Executive Secretary in January 2023, and was sworn in as Minister on 6 April 2026, succeeding Vice President Geraldo Alckmin, who left the post to run for re-election as Lula's running mate. His agenda centers on the Nova Indústria Brasil program, expanding investment and foreign trade.</a:t>
+                <a:latin typeface="Merriweather"/>
+              </a:rPr>
+              <a:t>Retired public prosecutor, lawyer and law professor, born in Ibiúna, São Paulo, in 1962. He spent his career in the São Paulo Public Prosecutor's Office, serving twice as Attorney General of Justice (2012-2016) and as São Paulo State Secretary of Justice. He joined MDIC as Executive Secretary in January 2023, and was sworn in as Minister on 6 April 2026, succeeding Vice President Geraldo Alckmin, who left the post to run for re-election as Lula's running mate.</a:t>
             </a:r>
           </a:p>
         </p:txBody>
@@ -34912,15 +35104,15 @@
           <a:p>
             <a:pPr>
               <a:lnSpc>
-                <a:spcPct val="103000"/>
+                <a:spcPct val="112000"/>
               </a:lnSpc>
             </a:pPr>
             <a:r>
-              <a:rPr sz="1100" b="0" i="0">
+              <a:rPr sz="1050" b="0" i="0">
                 <a:solidFill>
                   <a:srgbClr val="2C2C2C"/>
                 </a:solidFill>
-                <a:latin typeface="Open Sans"/>
+                <a:latin typeface="Merriweather"/>
               </a:rPr>
               <a:t>Solomon, a longtime Canadian broadcaster and author, was elected Liberal MP for Toronto Centre in April 2025 and sworn in May 13, 2025 as Canada's first Minister of Artificial Intelligence and Digital Innovation, a portfolio created by PM Mark Carney. Before politics he hosted CTV's Power Play and Question Period and a CFRB talk-radio show, wrote for Maclean's, and co-founded Shift magazine. He studied at McGill University and now leads federal AI, quantum and digital policy within ISED.</a:t>
             </a:r>
@@ -35138,15 +35330,15 @@
           <a:p>
             <a:pPr>
               <a:lnSpc>
-                <a:spcPct val="104000"/>
+                <a:spcPct val="112000"/>
               </a:lnSpc>
             </a:pPr>
             <a:r>
-              <a:rPr sz="1050" b="0" i="0">
+              <a:rPr sz="950" b="0" i="0">
                 <a:solidFill>
                   <a:srgbClr val="2C2C2C"/>
                 </a:solidFill>
-                <a:latin typeface="Open Sans"/>
+                <a:latin typeface="Merriweather"/>
               </a:rPr>
               <a:t>Maninder Sidhu, a businessman and Liberal MP for Brampton East since 2019, was sworn into Mark Carney's cabinet on May 13, 2025, as Minister of International Trade. He was previously Parliamentary Secretary to the Ministers of Foreign Affairs and International Development.</a:t>
             </a:r>
@@ -35294,15 +35486,15 @@
           <a:p>
             <a:pPr>
               <a:lnSpc>
-                <a:spcPct val="104000"/>
+                <a:spcPct val="112000"/>
               </a:lnSpc>
             </a:pPr>
             <a:r>
-              <a:rPr sz="1050" b="0" i="0">
+              <a:rPr sz="950" b="0" i="0">
                 <a:solidFill>
                   <a:srgbClr val="2C2C2C"/>
                 </a:solidFill>
-                <a:latin typeface="Open Sans"/>
+                <a:latin typeface="Merriweather"/>
               </a:rPr>
               <a:t>Dominic LeBlanc, a lawyer and Liberal MP for Beausejour since 2000, is a veteran minister who has held Fisheries, Intergovernmental Affairs, Public Safety and Finance. Since May 13, 2025 he has led the Canada-U.S. trade file as Privy Council President.</a:t>
             </a:r>
@@ -36230,15 +36422,15 @@
           <a:p>
             <a:pPr>
               <a:lnSpc>
-                <a:spcPct val="104000"/>
+                <a:spcPct val="112000"/>
               </a:lnSpc>
             </a:pPr>
             <a:r>
-              <a:rPr sz="1050" b="0" i="0">
+              <a:rPr sz="950" b="0" i="0">
                 <a:solidFill>
                   <a:srgbClr val="2C2C2C"/>
                 </a:solidFill>
-                <a:latin typeface="Open Sans"/>
+                <a:latin typeface="Merriweather"/>
               </a:rPr>
               <a:t>Li Lecheng was appointed China's Minister of Industry and Information Technology on 30 April 2025, replacing Jin Zhuanglong, after becoming MIIT party secretary in February 2025. He previously served as Governor of Liaoning (2021-2025) and executive vice governor of Hubei.</a:t>
             </a:r>
@@ -36386,15 +36578,15 @@
           <a:p>
             <a:pPr>
               <a:lnSpc>
-                <a:spcPct val="104000"/>
+                <a:spcPct val="112000"/>
               </a:lnSpc>
             </a:pPr>
             <a:r>
-              <a:rPr sz="1050" b="0" i="0">
+              <a:rPr sz="950" b="0" i="0">
                 <a:solidFill>
                   <a:srgbClr val="2C2C2C"/>
                 </a:solidFill>
-                <a:latin typeface="Open Sans"/>
+                <a:latin typeface="Merriweather"/>
               </a:rPr>
               <a:t>Minister of Science and Technology since October 24, 2023, and MOST Party Secretary since October 7, 2023.</a:t>
             </a:r>
@@ -36612,15 +36804,15 @@
           <a:p>
             <a:pPr>
               <a:lnSpc>
-                <a:spcPct val="104000"/>
+                <a:spcPct val="112000"/>
               </a:lnSpc>
             </a:pPr>
             <a:r>
-              <a:rPr sz="1050" b="0" i="0">
+              <a:rPr sz="950" b="0" i="0">
                 <a:solidFill>
                   <a:srgbClr val="2C2C2C"/>
                 </a:solidFill>
-                <a:latin typeface="Open Sans"/>
+                <a:latin typeface="Merriweather"/>
               </a:rPr>
               <a:t>Wang Wentao has served as China's Minister of Commerce since December 2020, leading trade, investment and market-access policy. He was previously mayor of Nanchang and Governor of Heilongjiang (2018-2020). In 2026 he co-chaired the first China-EU Trade and Investment Consultations.</a:t>
             </a:r>
@@ -36768,15 +36960,15 @@
           <a:p>
             <a:pPr>
               <a:lnSpc>
-                <a:spcPct val="104000"/>
+                <a:spcPct val="112000"/>
               </a:lnSpc>
             </a:pPr>
             <a:r>
-              <a:rPr sz="1050" b="0" i="0">
+              <a:rPr sz="950" b="0" i="0">
                 <a:solidFill>
                   <a:srgbClr val="2C2C2C"/>
                 </a:solidFill>
-                <a:latin typeface="Open Sans"/>
+                <a:latin typeface="Merriweather"/>
               </a:rPr>
               <a:t>Li Chenggang, a career MOFCOM official who served as China's Ambassador to the WTO from February 2021, was appointed China International Trade Representative and Vice Minister of Commerce on 16 April 2025, replacing Wang Shouwen as Beijing's chief trade negotiator.</a:t>
             </a:r>

--- a/output/g20-ministers-trade-deck.pptx
+++ b/output/g20-ministers-trade-deck.pptx
@@ -4236,16 +4236,84 @@
           </a:p>
         </p:txBody>
       </p:sp>
-      <p:sp>
-        <p:nvSpPr>
-          <p:cNvPr id="16" name="TextBox 15"/>
-          <p:cNvSpPr txBox="1"/>
-          <p:nvPr/>
-        </p:nvSpPr>
+      <p:pic>
+        <p:nvPicPr>
+          <p:cNvPr id="16" name="Picture 15" descr="_ph-france-lehenanff.png"/>
+          <p:cNvPicPr>
+            <a:picLocks noChangeAspect="1"/>
+          </p:cNvPicPr>
+          <p:nvPr/>
+        </p:nvPicPr>
+        <p:blipFill>
+          <a:blip r:embed="rId3"/>
+          <a:stretch>
+            <a:fillRect/>
+          </a:stretch>
+        </p:blipFill>
         <p:spPr>
           <a:xfrm>
             <a:off x="3611880" y="1408176"/>
-            <a:ext cx="8028431" cy="256032"/>
+            <a:ext cx="731520" cy="914400"/>
+          </a:xfrm>
+          <a:prstGeom prst="rect">
+            <a:avLst/>
+          </a:prstGeom>
+        </p:spPr>
+      </p:pic>
+      <p:sp>
+        <p:nvSpPr>
+          <p:cNvPr id="17" name="Rectangle 16"/>
+          <p:cNvSpPr/>
+          <p:nvPr/>
+        </p:nvSpPr>
+        <p:spPr>
+          <a:xfrm>
+            <a:off x="3611880" y="1408176"/>
+            <a:ext cx="731520" cy="914400"/>
+          </a:xfrm>
+          <a:prstGeom prst="rect">
+            <a:avLst/>
+          </a:prstGeom>
+          <a:noFill/>
+          <a:ln w="12700">
+            <a:solidFill>
+              <a:srgbClr val="B1BBCA"/>
+            </a:solidFill>
+          </a:ln>
+          <a:effectLst/>
+        </p:spPr>
+        <p:style>
+          <a:lnRef idx="1">
+            <a:schemeClr val="accent1"/>
+          </a:lnRef>
+          <a:fillRef idx="3">
+            <a:schemeClr val="accent1"/>
+          </a:fillRef>
+          <a:effectRef idx="2">
+            <a:schemeClr val="accent1"/>
+          </a:effectRef>
+          <a:fontRef idx="minor">
+            <a:schemeClr val="lt1"/>
+          </a:fontRef>
+        </p:style>
+        <p:txBody>
+          <a:bodyPr rtlCol="0" anchor="ctr"/>
+          <a:lstStyle/>
+          <a:p>
+            <a:pPr algn="ctr"/>
+          </a:p>
+        </p:txBody>
+      </p:sp>
+      <p:sp>
+        <p:nvSpPr>
+          <p:cNvPr id="18" name="TextBox 17"/>
+          <p:cNvSpPr txBox="1"/>
+          <p:nvPr/>
+        </p:nvSpPr>
+        <p:spPr>
+          <a:xfrm>
+            <a:off x="4507992" y="1408176"/>
+            <a:ext cx="7132320" cy="256032"/>
           </a:xfrm>
           <a:prstGeom prst="rect">
             <a:avLst/>
@@ -4272,14 +4340,14 @@
       </p:sp>
       <p:sp>
         <p:nvSpPr>
-          <p:cNvPr id="17" name="TextBox 16"/>
-          <p:cNvSpPr txBox="1"/>
-          <p:nvPr/>
-        </p:nvSpPr>
-        <p:spPr>
-          <a:xfrm>
-            <a:off x="3611880" y="1682495"/>
-            <a:ext cx="8028431" cy="347472"/>
+          <p:cNvPr id="19" name="TextBox 18"/>
+          <p:cNvSpPr txBox="1"/>
+          <p:nvPr/>
+        </p:nvSpPr>
+        <p:spPr>
+          <a:xfrm>
+            <a:off x="4507992" y="1682495"/>
+            <a:ext cx="7132320" cy="347472"/>
           </a:xfrm>
           <a:prstGeom prst="rect">
             <a:avLst/>
@@ -4311,14 +4379,14 @@
       </p:sp>
       <p:sp>
         <p:nvSpPr>
-          <p:cNvPr id="18" name="TextBox 17"/>
-          <p:cNvSpPr txBox="1"/>
-          <p:nvPr/>
-        </p:nvSpPr>
-        <p:spPr>
-          <a:xfrm>
-            <a:off x="3611880" y="2048256"/>
-            <a:ext cx="8028431" cy="292608"/>
+          <p:cNvPr id="20" name="TextBox 19"/>
+          <p:cNvSpPr txBox="1"/>
+          <p:nvPr/>
+        </p:nvSpPr>
+        <p:spPr>
+          <a:xfrm>
+            <a:off x="4507992" y="2048256"/>
+            <a:ext cx="7132320" cy="292608"/>
           </a:xfrm>
           <a:prstGeom prst="rect">
             <a:avLst/>
@@ -4359,7 +4427,7 @@
       </p:sp>
       <p:sp>
         <p:nvSpPr>
-          <p:cNvPr id="19" name="TextBox 18"/>
+          <p:cNvPr id="21" name="TextBox 20"/>
           <p:cNvSpPr txBox="1"/>
           <p:nvPr/>
         </p:nvSpPr>
@@ -4398,7 +4466,7 @@
       </p:sp>
       <p:cxnSp>
         <p:nvCxnSpPr>
-          <p:cNvPr id="20" name="Connector 19"/>
+          <p:cNvPr id="22" name="Connector 21"/>
           <p:cNvCxnSpPr/>
           <p:nvPr/>
         </p:nvCxnSpPr>
@@ -4434,7 +4502,7 @@
       </p:cxnSp>
       <p:sp>
         <p:nvSpPr>
-          <p:cNvPr id="21" name="TextBox 20"/>
+          <p:cNvPr id="23" name="TextBox 22"/>
           <p:cNvSpPr txBox="1"/>
           <p:nvPr/>
         </p:nvSpPr>
@@ -4466,16 +4534,84 @@
           </a:p>
         </p:txBody>
       </p:sp>
-      <p:sp>
-        <p:nvSpPr>
-          <p:cNvPr id="22" name="TextBox 21"/>
-          <p:cNvSpPr txBox="1"/>
-          <p:nvPr/>
-        </p:nvSpPr>
+      <p:pic>
+        <p:nvPicPr>
+          <p:cNvPr id="24" name="Picture 23" descr="_ph-france-forissier.png"/>
+          <p:cNvPicPr>
+            <a:picLocks noChangeAspect="1"/>
+          </p:cNvPicPr>
+          <p:nvPr/>
+        </p:nvPicPr>
+        <p:blipFill>
+          <a:blip r:embed="rId4"/>
+          <a:stretch>
+            <a:fillRect/>
+          </a:stretch>
+        </p:blipFill>
         <p:spPr>
           <a:xfrm>
             <a:off x="3611880" y="4041648"/>
-            <a:ext cx="8028431" cy="256032"/>
+            <a:ext cx="731520" cy="914400"/>
+          </a:xfrm>
+          <a:prstGeom prst="rect">
+            <a:avLst/>
+          </a:prstGeom>
+        </p:spPr>
+      </p:pic>
+      <p:sp>
+        <p:nvSpPr>
+          <p:cNvPr id="25" name="Rectangle 24"/>
+          <p:cNvSpPr/>
+          <p:nvPr/>
+        </p:nvSpPr>
+        <p:spPr>
+          <a:xfrm>
+            <a:off x="3611880" y="4041648"/>
+            <a:ext cx="731520" cy="914400"/>
+          </a:xfrm>
+          <a:prstGeom prst="rect">
+            <a:avLst/>
+          </a:prstGeom>
+          <a:noFill/>
+          <a:ln w="12700">
+            <a:solidFill>
+              <a:srgbClr val="B1BBCA"/>
+            </a:solidFill>
+          </a:ln>
+          <a:effectLst/>
+        </p:spPr>
+        <p:style>
+          <a:lnRef idx="1">
+            <a:schemeClr val="accent1"/>
+          </a:lnRef>
+          <a:fillRef idx="3">
+            <a:schemeClr val="accent1"/>
+          </a:fillRef>
+          <a:effectRef idx="2">
+            <a:schemeClr val="accent1"/>
+          </a:effectRef>
+          <a:fontRef idx="minor">
+            <a:schemeClr val="lt1"/>
+          </a:fontRef>
+        </p:style>
+        <p:txBody>
+          <a:bodyPr rtlCol="0" anchor="ctr"/>
+          <a:lstStyle/>
+          <a:p>
+            <a:pPr algn="ctr"/>
+          </a:p>
+        </p:txBody>
+      </p:sp>
+      <p:sp>
+        <p:nvSpPr>
+          <p:cNvPr id="26" name="TextBox 25"/>
+          <p:cNvSpPr txBox="1"/>
+          <p:nvPr/>
+        </p:nvSpPr>
+        <p:spPr>
+          <a:xfrm>
+            <a:off x="4507992" y="4041648"/>
+            <a:ext cx="7132320" cy="256032"/>
           </a:xfrm>
           <a:prstGeom prst="rect">
             <a:avLst/>
@@ -4502,14 +4638,14 @@
       </p:sp>
       <p:sp>
         <p:nvSpPr>
-          <p:cNvPr id="23" name="TextBox 22"/>
-          <p:cNvSpPr txBox="1"/>
-          <p:nvPr/>
-        </p:nvSpPr>
-        <p:spPr>
-          <a:xfrm>
-            <a:off x="3611880" y="4315968"/>
-            <a:ext cx="8028431" cy="347472"/>
+          <p:cNvPr id="27" name="TextBox 26"/>
+          <p:cNvSpPr txBox="1"/>
+          <p:nvPr/>
+        </p:nvSpPr>
+        <p:spPr>
+          <a:xfrm>
+            <a:off x="4507992" y="4315968"/>
+            <a:ext cx="7132320" cy="347472"/>
           </a:xfrm>
           <a:prstGeom prst="rect">
             <a:avLst/>
@@ -4541,14 +4677,14 @@
       </p:sp>
       <p:sp>
         <p:nvSpPr>
-          <p:cNvPr id="24" name="TextBox 23"/>
-          <p:cNvSpPr txBox="1"/>
-          <p:nvPr/>
-        </p:nvSpPr>
-        <p:spPr>
-          <a:xfrm>
-            <a:off x="3611880" y="4681727"/>
-            <a:ext cx="8028431" cy="292608"/>
+          <p:cNvPr id="28" name="TextBox 27"/>
+          <p:cNvSpPr txBox="1"/>
+          <p:nvPr/>
+        </p:nvSpPr>
+        <p:spPr>
+          <a:xfrm>
+            <a:off x="4507992" y="4681727"/>
+            <a:ext cx="7132320" cy="292608"/>
           </a:xfrm>
           <a:prstGeom prst="rect">
             <a:avLst/>
@@ -4589,7 +4725,7 @@
       </p:sp>
       <p:sp>
         <p:nvSpPr>
-          <p:cNvPr id="25" name="TextBox 24"/>
+          <p:cNvPr id="29" name="TextBox 28"/>
           <p:cNvSpPr txBox="1"/>
           <p:nvPr/>
         </p:nvSpPr>
@@ -4628,7 +4764,7 @@
       </p:sp>
       <p:cxnSp>
         <p:nvCxnSpPr>
-          <p:cNvPr id="26" name="Connector 25"/>
+          <p:cNvPr id="30" name="Connector 29"/>
           <p:cNvCxnSpPr/>
           <p:nvPr/>
         </p:nvCxnSpPr>
@@ -4664,7 +4800,7 @@
       </p:cxnSp>
       <p:sp>
         <p:nvSpPr>
-          <p:cNvPr id="27" name="TextBox 26"/>
+          <p:cNvPr id="31" name="TextBox 30"/>
           <p:cNvSpPr txBox="1"/>
           <p:nvPr/>
         </p:nvSpPr>
@@ -4698,7 +4834,7 @@
       </p:sp>
       <p:sp>
         <p:nvSpPr>
-          <p:cNvPr id="28" name="TextBox 27"/>
+          <p:cNvPr id="32" name="TextBox 31"/>
           <p:cNvSpPr txBox="1"/>
           <p:nvPr/>
         </p:nvSpPr>
@@ -4732,7 +4868,7 @@
       </p:sp>
       <p:sp>
         <p:nvSpPr>
-          <p:cNvPr id="29" name="TextBox 28"/>
+          <p:cNvPr id="33" name="TextBox 32"/>
           <p:cNvSpPr txBox="1"/>
           <p:nvPr/>
         </p:nvSpPr>
@@ -5406,16 +5542,84 @@
           </a:p>
         </p:txBody>
       </p:sp>
-      <p:sp>
-        <p:nvSpPr>
-          <p:cNvPr id="16" name="TextBox 15"/>
-          <p:cNvSpPr txBox="1"/>
-          <p:nvPr/>
-        </p:nvSpPr>
+      <p:pic>
+        <p:nvPicPr>
+          <p:cNvPr id="16" name="Picture 15" descr="_ph-germany-wildberger.png"/>
+          <p:cNvPicPr>
+            <a:picLocks noChangeAspect="1"/>
+          </p:cNvPicPr>
+          <p:nvPr/>
+        </p:nvPicPr>
+        <p:blipFill>
+          <a:blip r:embed="rId3"/>
+          <a:stretch>
+            <a:fillRect/>
+          </a:stretch>
+        </p:blipFill>
         <p:spPr>
           <a:xfrm>
             <a:off x="3611880" y="1408176"/>
-            <a:ext cx="8028431" cy="256032"/>
+            <a:ext cx="731520" cy="914400"/>
+          </a:xfrm>
+          <a:prstGeom prst="rect">
+            <a:avLst/>
+          </a:prstGeom>
+        </p:spPr>
+      </p:pic>
+      <p:sp>
+        <p:nvSpPr>
+          <p:cNvPr id="17" name="Rectangle 16"/>
+          <p:cNvSpPr/>
+          <p:nvPr/>
+        </p:nvSpPr>
+        <p:spPr>
+          <a:xfrm>
+            <a:off x="3611880" y="1408176"/>
+            <a:ext cx="731520" cy="914400"/>
+          </a:xfrm>
+          <a:prstGeom prst="rect">
+            <a:avLst/>
+          </a:prstGeom>
+          <a:noFill/>
+          <a:ln w="12700">
+            <a:solidFill>
+              <a:srgbClr val="B1BBCA"/>
+            </a:solidFill>
+          </a:ln>
+          <a:effectLst/>
+        </p:spPr>
+        <p:style>
+          <a:lnRef idx="1">
+            <a:schemeClr val="accent1"/>
+          </a:lnRef>
+          <a:fillRef idx="3">
+            <a:schemeClr val="accent1"/>
+          </a:fillRef>
+          <a:effectRef idx="2">
+            <a:schemeClr val="accent1"/>
+          </a:effectRef>
+          <a:fontRef idx="minor">
+            <a:schemeClr val="lt1"/>
+          </a:fontRef>
+        </p:style>
+        <p:txBody>
+          <a:bodyPr rtlCol="0" anchor="ctr"/>
+          <a:lstStyle/>
+          <a:p>
+            <a:pPr algn="ctr"/>
+          </a:p>
+        </p:txBody>
+      </p:sp>
+      <p:sp>
+        <p:nvSpPr>
+          <p:cNvPr id="18" name="TextBox 17"/>
+          <p:cNvSpPr txBox="1"/>
+          <p:nvPr/>
+        </p:nvSpPr>
+        <p:spPr>
+          <a:xfrm>
+            <a:off x="4507992" y="1408176"/>
+            <a:ext cx="7132320" cy="256032"/>
           </a:xfrm>
           <a:prstGeom prst="rect">
             <a:avLst/>
@@ -5442,14 +5646,14 @@
       </p:sp>
       <p:sp>
         <p:nvSpPr>
-          <p:cNvPr id="17" name="TextBox 16"/>
-          <p:cNvSpPr txBox="1"/>
-          <p:nvPr/>
-        </p:nvSpPr>
-        <p:spPr>
-          <a:xfrm>
-            <a:off x="3611880" y="1682495"/>
-            <a:ext cx="8028431" cy="347472"/>
+          <p:cNvPr id="19" name="TextBox 18"/>
+          <p:cNvSpPr txBox="1"/>
+          <p:nvPr/>
+        </p:nvSpPr>
+        <p:spPr>
+          <a:xfrm>
+            <a:off x="4507992" y="1682495"/>
+            <a:ext cx="7132320" cy="347472"/>
           </a:xfrm>
           <a:prstGeom prst="rect">
             <a:avLst/>
@@ -5481,14 +5685,14 @@
       </p:sp>
       <p:sp>
         <p:nvSpPr>
-          <p:cNvPr id="18" name="TextBox 17"/>
-          <p:cNvSpPr txBox="1"/>
-          <p:nvPr/>
-        </p:nvSpPr>
-        <p:spPr>
-          <a:xfrm>
-            <a:off x="3611880" y="2048256"/>
-            <a:ext cx="8028431" cy="292608"/>
+          <p:cNvPr id="20" name="TextBox 19"/>
+          <p:cNvSpPr txBox="1"/>
+          <p:nvPr/>
+        </p:nvSpPr>
+        <p:spPr>
+          <a:xfrm>
+            <a:off x="4507992" y="2048256"/>
+            <a:ext cx="7132320" cy="292608"/>
           </a:xfrm>
           <a:prstGeom prst="rect">
             <a:avLst/>
@@ -5529,7 +5733,7 @@
       </p:sp>
       <p:sp>
         <p:nvSpPr>
-          <p:cNvPr id="19" name="TextBox 18"/>
+          <p:cNvPr id="21" name="TextBox 20"/>
           <p:cNvSpPr txBox="1"/>
           <p:nvPr/>
         </p:nvSpPr>
@@ -5568,7 +5772,7 @@
       </p:sp>
       <p:cxnSp>
         <p:nvCxnSpPr>
-          <p:cNvPr id="20" name="Connector 19"/>
+          <p:cNvPr id="22" name="Connector 21"/>
           <p:cNvCxnSpPr/>
           <p:nvPr/>
         </p:nvCxnSpPr>
@@ -5604,7 +5808,7 @@
       </p:cxnSp>
       <p:sp>
         <p:nvSpPr>
-          <p:cNvPr id="21" name="TextBox 20"/>
+          <p:cNvPr id="23" name="TextBox 22"/>
           <p:cNvSpPr txBox="1"/>
           <p:nvPr/>
         </p:nvSpPr>
@@ -5636,16 +5840,84 @@
           </a:p>
         </p:txBody>
       </p:sp>
-      <p:sp>
-        <p:nvSpPr>
-          <p:cNvPr id="22" name="TextBox 21"/>
-          <p:cNvSpPr txBox="1"/>
-          <p:nvPr/>
-        </p:nvSpPr>
+      <p:pic>
+        <p:nvPicPr>
+          <p:cNvPr id="24" name="Picture 23" descr="_ph-germany-reiche.png"/>
+          <p:cNvPicPr>
+            <a:picLocks noChangeAspect="1"/>
+          </p:cNvPicPr>
+          <p:nvPr/>
+        </p:nvPicPr>
+        <p:blipFill>
+          <a:blip r:embed="rId4"/>
+          <a:stretch>
+            <a:fillRect/>
+          </a:stretch>
+        </p:blipFill>
         <p:spPr>
           <a:xfrm>
             <a:off x="3611880" y="4041648"/>
-            <a:ext cx="8028431" cy="256032"/>
+            <a:ext cx="731520" cy="914400"/>
+          </a:xfrm>
+          <a:prstGeom prst="rect">
+            <a:avLst/>
+          </a:prstGeom>
+        </p:spPr>
+      </p:pic>
+      <p:sp>
+        <p:nvSpPr>
+          <p:cNvPr id="25" name="Rectangle 24"/>
+          <p:cNvSpPr/>
+          <p:nvPr/>
+        </p:nvSpPr>
+        <p:spPr>
+          <a:xfrm>
+            <a:off x="3611880" y="4041648"/>
+            <a:ext cx="731520" cy="914400"/>
+          </a:xfrm>
+          <a:prstGeom prst="rect">
+            <a:avLst/>
+          </a:prstGeom>
+          <a:noFill/>
+          <a:ln w="12700">
+            <a:solidFill>
+              <a:srgbClr val="B1BBCA"/>
+            </a:solidFill>
+          </a:ln>
+          <a:effectLst/>
+        </p:spPr>
+        <p:style>
+          <a:lnRef idx="1">
+            <a:schemeClr val="accent1"/>
+          </a:lnRef>
+          <a:fillRef idx="3">
+            <a:schemeClr val="accent1"/>
+          </a:fillRef>
+          <a:effectRef idx="2">
+            <a:schemeClr val="accent1"/>
+          </a:effectRef>
+          <a:fontRef idx="minor">
+            <a:schemeClr val="lt1"/>
+          </a:fontRef>
+        </p:style>
+        <p:txBody>
+          <a:bodyPr rtlCol="0" anchor="ctr"/>
+          <a:lstStyle/>
+          <a:p>
+            <a:pPr algn="ctr"/>
+          </a:p>
+        </p:txBody>
+      </p:sp>
+      <p:sp>
+        <p:nvSpPr>
+          <p:cNvPr id="26" name="TextBox 25"/>
+          <p:cNvSpPr txBox="1"/>
+          <p:nvPr/>
+        </p:nvSpPr>
+        <p:spPr>
+          <a:xfrm>
+            <a:off x="4507992" y="4041648"/>
+            <a:ext cx="7132320" cy="256032"/>
           </a:xfrm>
           <a:prstGeom prst="rect">
             <a:avLst/>
@@ -5672,14 +5944,14 @@
       </p:sp>
       <p:sp>
         <p:nvSpPr>
-          <p:cNvPr id="23" name="TextBox 22"/>
-          <p:cNvSpPr txBox="1"/>
-          <p:nvPr/>
-        </p:nvSpPr>
-        <p:spPr>
-          <a:xfrm>
-            <a:off x="3611880" y="4315968"/>
-            <a:ext cx="8028431" cy="347472"/>
+          <p:cNvPr id="27" name="TextBox 26"/>
+          <p:cNvSpPr txBox="1"/>
+          <p:nvPr/>
+        </p:nvSpPr>
+        <p:spPr>
+          <a:xfrm>
+            <a:off x="4507992" y="4315968"/>
+            <a:ext cx="7132320" cy="347472"/>
           </a:xfrm>
           <a:prstGeom prst="rect">
             <a:avLst/>
@@ -5711,14 +5983,14 @@
       </p:sp>
       <p:sp>
         <p:nvSpPr>
-          <p:cNvPr id="24" name="TextBox 23"/>
-          <p:cNvSpPr txBox="1"/>
-          <p:nvPr/>
-        </p:nvSpPr>
-        <p:spPr>
-          <a:xfrm>
-            <a:off x="3611880" y="4681727"/>
-            <a:ext cx="8028431" cy="292608"/>
+          <p:cNvPr id="28" name="TextBox 27"/>
+          <p:cNvSpPr txBox="1"/>
+          <p:nvPr/>
+        </p:nvSpPr>
+        <p:spPr>
+          <a:xfrm>
+            <a:off x="4507992" y="4681727"/>
+            <a:ext cx="7132320" cy="292608"/>
           </a:xfrm>
           <a:prstGeom prst="rect">
             <a:avLst/>
@@ -5759,7 +6031,7 @@
       </p:sp>
       <p:sp>
         <p:nvSpPr>
-          <p:cNvPr id="25" name="TextBox 24"/>
+          <p:cNvPr id="29" name="TextBox 28"/>
           <p:cNvSpPr txBox="1"/>
           <p:nvPr/>
         </p:nvSpPr>
@@ -5814,7 +6086,7 @@
       </p:sp>
       <p:cxnSp>
         <p:nvCxnSpPr>
-          <p:cNvPr id="26" name="Connector 25"/>
+          <p:cNvPr id="30" name="Connector 29"/>
           <p:cNvCxnSpPr/>
           <p:nvPr/>
         </p:nvCxnSpPr>
@@ -5850,7 +6122,7 @@
       </p:cxnSp>
       <p:sp>
         <p:nvSpPr>
-          <p:cNvPr id="27" name="TextBox 26"/>
+          <p:cNvPr id="31" name="TextBox 30"/>
           <p:cNvSpPr txBox="1"/>
           <p:nvPr/>
         </p:nvSpPr>
@@ -5884,7 +6156,7 @@
       </p:sp>
       <p:sp>
         <p:nvSpPr>
-          <p:cNvPr id="28" name="TextBox 27"/>
+          <p:cNvPr id="32" name="TextBox 31"/>
           <p:cNvSpPr txBox="1"/>
           <p:nvPr/>
         </p:nvSpPr>
@@ -5918,7 +6190,7 @@
       </p:sp>
       <p:sp>
         <p:nvSpPr>
-          <p:cNvPr id="29" name="TextBox 28"/>
+          <p:cNvPr id="33" name="TextBox 32"/>
           <p:cNvSpPr txBox="1"/>
           <p:nvPr/>
         </p:nvSpPr>
@@ -6592,16 +6864,84 @@
           </a:p>
         </p:txBody>
       </p:sp>
-      <p:sp>
-        <p:nvSpPr>
-          <p:cNvPr id="16" name="TextBox 15"/>
-          <p:cNvSpPr txBox="1"/>
-          <p:nvPr/>
-        </p:nvSpPr>
+      <p:pic>
+        <p:nvPicPr>
+          <p:cNvPr id="16" name="Picture 15" descr="_ph-india-vaishnaw.png"/>
+          <p:cNvPicPr>
+            <a:picLocks noChangeAspect="1"/>
+          </p:cNvPicPr>
+          <p:nvPr/>
+        </p:nvPicPr>
+        <p:blipFill>
+          <a:blip r:embed="rId3"/>
+          <a:stretch>
+            <a:fillRect/>
+          </a:stretch>
+        </p:blipFill>
         <p:spPr>
           <a:xfrm>
             <a:off x="3611880" y="1408176"/>
-            <a:ext cx="8028431" cy="256032"/>
+            <a:ext cx="731520" cy="914400"/>
+          </a:xfrm>
+          <a:prstGeom prst="rect">
+            <a:avLst/>
+          </a:prstGeom>
+        </p:spPr>
+      </p:pic>
+      <p:sp>
+        <p:nvSpPr>
+          <p:cNvPr id="17" name="Rectangle 16"/>
+          <p:cNvSpPr/>
+          <p:nvPr/>
+        </p:nvSpPr>
+        <p:spPr>
+          <a:xfrm>
+            <a:off x="3611880" y="1408176"/>
+            <a:ext cx="731520" cy="914400"/>
+          </a:xfrm>
+          <a:prstGeom prst="rect">
+            <a:avLst/>
+          </a:prstGeom>
+          <a:noFill/>
+          <a:ln w="12700">
+            <a:solidFill>
+              <a:srgbClr val="B1BBCA"/>
+            </a:solidFill>
+          </a:ln>
+          <a:effectLst/>
+        </p:spPr>
+        <p:style>
+          <a:lnRef idx="1">
+            <a:schemeClr val="accent1"/>
+          </a:lnRef>
+          <a:fillRef idx="3">
+            <a:schemeClr val="accent1"/>
+          </a:fillRef>
+          <a:effectRef idx="2">
+            <a:schemeClr val="accent1"/>
+          </a:effectRef>
+          <a:fontRef idx="minor">
+            <a:schemeClr val="lt1"/>
+          </a:fontRef>
+        </p:style>
+        <p:txBody>
+          <a:bodyPr rtlCol="0" anchor="ctr"/>
+          <a:lstStyle/>
+          <a:p>
+            <a:pPr algn="ctr"/>
+          </a:p>
+        </p:txBody>
+      </p:sp>
+      <p:sp>
+        <p:nvSpPr>
+          <p:cNvPr id="18" name="TextBox 17"/>
+          <p:cNvSpPr txBox="1"/>
+          <p:nvPr/>
+        </p:nvSpPr>
+        <p:spPr>
+          <a:xfrm>
+            <a:off x="4507992" y="1408176"/>
+            <a:ext cx="7132320" cy="256032"/>
           </a:xfrm>
           <a:prstGeom prst="rect">
             <a:avLst/>
@@ -6628,14 +6968,14 @@
       </p:sp>
       <p:sp>
         <p:nvSpPr>
-          <p:cNvPr id="17" name="TextBox 16"/>
-          <p:cNvSpPr txBox="1"/>
-          <p:nvPr/>
-        </p:nvSpPr>
-        <p:spPr>
-          <a:xfrm>
-            <a:off x="3611880" y="1682495"/>
-            <a:ext cx="8028431" cy="347472"/>
+          <p:cNvPr id="19" name="TextBox 18"/>
+          <p:cNvSpPr txBox="1"/>
+          <p:nvPr/>
+        </p:nvSpPr>
+        <p:spPr>
+          <a:xfrm>
+            <a:off x="4507992" y="1682495"/>
+            <a:ext cx="7132320" cy="347472"/>
           </a:xfrm>
           <a:prstGeom prst="rect">
             <a:avLst/>
@@ -6667,14 +7007,14 @@
       </p:sp>
       <p:sp>
         <p:nvSpPr>
-          <p:cNvPr id="18" name="TextBox 17"/>
-          <p:cNvSpPr txBox="1"/>
-          <p:nvPr/>
-        </p:nvSpPr>
-        <p:spPr>
-          <a:xfrm>
-            <a:off x="3611880" y="2048256"/>
-            <a:ext cx="8028431" cy="292608"/>
+          <p:cNvPr id="20" name="TextBox 19"/>
+          <p:cNvSpPr txBox="1"/>
+          <p:nvPr/>
+        </p:nvSpPr>
+        <p:spPr>
+          <a:xfrm>
+            <a:off x="4507992" y="2048256"/>
+            <a:ext cx="7132320" cy="292608"/>
           </a:xfrm>
           <a:prstGeom prst="rect">
             <a:avLst/>
@@ -6715,7 +7055,7 @@
       </p:sp>
       <p:sp>
         <p:nvSpPr>
-          <p:cNvPr id="19" name="TextBox 18"/>
+          <p:cNvPr id="21" name="TextBox 20"/>
           <p:cNvSpPr txBox="1"/>
           <p:nvPr/>
         </p:nvSpPr>
@@ -6770,7 +7110,7 @@
       </p:sp>
       <p:cxnSp>
         <p:nvCxnSpPr>
-          <p:cNvPr id="20" name="Connector 19"/>
+          <p:cNvPr id="22" name="Connector 21"/>
           <p:cNvCxnSpPr/>
           <p:nvPr/>
         </p:nvCxnSpPr>
@@ -6806,7 +7146,7 @@
       </p:cxnSp>
       <p:sp>
         <p:nvSpPr>
-          <p:cNvPr id="21" name="TextBox 20"/>
+          <p:cNvPr id="23" name="TextBox 22"/>
           <p:cNvSpPr txBox="1"/>
           <p:nvPr/>
         </p:nvSpPr>
@@ -6838,16 +7178,84 @@
           </a:p>
         </p:txBody>
       </p:sp>
-      <p:sp>
-        <p:nvSpPr>
-          <p:cNvPr id="22" name="TextBox 21"/>
-          <p:cNvSpPr txBox="1"/>
-          <p:nvPr/>
-        </p:nvSpPr>
+      <p:pic>
+        <p:nvPicPr>
+          <p:cNvPr id="24" name="Picture 23" descr="_ph-india-goyal.png"/>
+          <p:cNvPicPr>
+            <a:picLocks noChangeAspect="1"/>
+          </p:cNvPicPr>
+          <p:nvPr/>
+        </p:nvPicPr>
+        <p:blipFill>
+          <a:blip r:embed="rId4"/>
+          <a:stretch>
+            <a:fillRect/>
+          </a:stretch>
+        </p:blipFill>
         <p:spPr>
           <a:xfrm>
             <a:off x="3611880" y="4023359"/>
-            <a:ext cx="3849624" cy="914400"/>
+            <a:ext cx="585216" cy="731520"/>
+          </a:xfrm>
+          <a:prstGeom prst="rect">
+            <a:avLst/>
+          </a:prstGeom>
+        </p:spPr>
+      </p:pic>
+      <p:sp>
+        <p:nvSpPr>
+          <p:cNvPr id="25" name="Rectangle 24"/>
+          <p:cNvSpPr/>
+          <p:nvPr/>
+        </p:nvSpPr>
+        <p:spPr>
+          <a:xfrm>
+            <a:off x="3611880" y="4023359"/>
+            <a:ext cx="585216" cy="731520"/>
+          </a:xfrm>
+          <a:prstGeom prst="rect">
+            <a:avLst/>
+          </a:prstGeom>
+          <a:noFill/>
+          <a:ln w="12700">
+            <a:solidFill>
+              <a:srgbClr val="B1BBCA"/>
+            </a:solidFill>
+          </a:ln>
+          <a:effectLst/>
+        </p:spPr>
+        <p:style>
+          <a:lnRef idx="1">
+            <a:schemeClr val="accent1"/>
+          </a:lnRef>
+          <a:fillRef idx="3">
+            <a:schemeClr val="accent1"/>
+          </a:fillRef>
+          <a:effectRef idx="2">
+            <a:schemeClr val="accent1"/>
+          </a:effectRef>
+          <a:fontRef idx="minor">
+            <a:schemeClr val="lt1"/>
+          </a:fontRef>
+        </p:style>
+        <p:txBody>
+          <a:bodyPr rtlCol="0" anchor="ctr"/>
+          <a:lstStyle/>
+          <a:p>
+            <a:pPr algn="ctr"/>
+          </a:p>
+        </p:txBody>
+      </p:sp>
+      <p:sp>
+        <p:nvSpPr>
+          <p:cNvPr id="26" name="TextBox 25"/>
+          <p:cNvSpPr txBox="1"/>
+          <p:nvPr/>
+        </p:nvSpPr>
+        <p:spPr>
+          <a:xfrm>
+            <a:off x="4325112" y="4023359"/>
+            <a:ext cx="3136391" cy="914400"/>
           </a:xfrm>
           <a:prstGeom prst="rect">
             <a:avLst/>
@@ -6909,7 +7317,7 @@
       </p:sp>
       <p:sp>
         <p:nvSpPr>
-          <p:cNvPr id="23" name="TextBox 22"/>
+          <p:cNvPr id="27" name="TextBox 26"/>
           <p:cNvSpPr txBox="1"/>
           <p:nvPr/>
         </p:nvSpPr>
@@ -6957,7 +7365,7 @@
       </p:sp>
       <p:sp>
         <p:nvSpPr>
-          <p:cNvPr id="24" name="TextBox 23"/>
+          <p:cNvPr id="28" name="TextBox 27"/>
           <p:cNvSpPr txBox="1"/>
           <p:nvPr/>
         </p:nvSpPr>
@@ -6994,16 +7402,84 @@
           </a:p>
         </p:txBody>
       </p:sp>
-      <p:sp>
-        <p:nvSpPr>
-          <p:cNvPr id="25" name="TextBox 24"/>
-          <p:cNvSpPr txBox="1"/>
-          <p:nvPr/>
-        </p:nvSpPr>
+      <p:pic>
+        <p:nvPicPr>
+          <p:cNvPr id="29" name="Picture 28" descr="_ph-india-agrawal.png"/>
+          <p:cNvPicPr>
+            <a:picLocks noChangeAspect="1"/>
+          </p:cNvPicPr>
+          <p:nvPr/>
+        </p:nvPicPr>
+        <p:blipFill>
+          <a:blip r:embed="rId5"/>
+          <a:stretch>
+            <a:fillRect/>
+          </a:stretch>
+        </p:blipFill>
         <p:spPr>
           <a:xfrm>
             <a:off x="7790688" y="4023359"/>
-            <a:ext cx="3849624" cy="914400"/>
+            <a:ext cx="585216" cy="731520"/>
+          </a:xfrm>
+          <a:prstGeom prst="rect">
+            <a:avLst/>
+          </a:prstGeom>
+        </p:spPr>
+      </p:pic>
+      <p:sp>
+        <p:nvSpPr>
+          <p:cNvPr id="30" name="Rectangle 29"/>
+          <p:cNvSpPr/>
+          <p:nvPr/>
+        </p:nvSpPr>
+        <p:spPr>
+          <a:xfrm>
+            <a:off x="7790688" y="4023359"/>
+            <a:ext cx="585216" cy="731520"/>
+          </a:xfrm>
+          <a:prstGeom prst="rect">
+            <a:avLst/>
+          </a:prstGeom>
+          <a:noFill/>
+          <a:ln w="12700">
+            <a:solidFill>
+              <a:srgbClr val="B1BBCA"/>
+            </a:solidFill>
+          </a:ln>
+          <a:effectLst/>
+        </p:spPr>
+        <p:style>
+          <a:lnRef idx="1">
+            <a:schemeClr val="accent1"/>
+          </a:lnRef>
+          <a:fillRef idx="3">
+            <a:schemeClr val="accent1"/>
+          </a:fillRef>
+          <a:effectRef idx="2">
+            <a:schemeClr val="accent1"/>
+          </a:effectRef>
+          <a:fontRef idx="minor">
+            <a:schemeClr val="lt1"/>
+          </a:fontRef>
+        </p:style>
+        <p:txBody>
+          <a:bodyPr rtlCol="0" anchor="ctr"/>
+          <a:lstStyle/>
+          <a:p>
+            <a:pPr algn="ctr"/>
+          </a:p>
+        </p:txBody>
+      </p:sp>
+      <p:sp>
+        <p:nvSpPr>
+          <p:cNvPr id="31" name="TextBox 30"/>
+          <p:cNvSpPr txBox="1"/>
+          <p:nvPr/>
+        </p:nvSpPr>
+        <p:spPr>
+          <a:xfrm>
+            <a:off x="8503920" y="4023359"/>
+            <a:ext cx="3136391" cy="914400"/>
           </a:xfrm>
           <a:prstGeom prst="rect">
             <a:avLst/>
@@ -7065,7 +7541,7 @@
       </p:sp>
       <p:sp>
         <p:nvSpPr>
-          <p:cNvPr id="26" name="TextBox 25"/>
+          <p:cNvPr id="32" name="TextBox 31"/>
           <p:cNvSpPr txBox="1"/>
           <p:nvPr/>
         </p:nvSpPr>
@@ -7113,7 +7589,7 @@
       </p:sp>
       <p:sp>
         <p:nvSpPr>
-          <p:cNvPr id="27" name="TextBox 26"/>
+          <p:cNvPr id="33" name="TextBox 32"/>
           <p:cNvSpPr txBox="1"/>
           <p:nvPr/>
         </p:nvSpPr>
@@ -7152,7 +7628,7 @@
       </p:sp>
       <p:cxnSp>
         <p:nvCxnSpPr>
-          <p:cNvPr id="28" name="Connector 27"/>
+          <p:cNvPr id="34" name="Connector 33"/>
           <p:cNvCxnSpPr/>
           <p:nvPr/>
         </p:nvCxnSpPr>
@@ -7188,7 +7664,7 @@
       </p:cxnSp>
       <p:sp>
         <p:nvSpPr>
-          <p:cNvPr id="29" name="TextBox 28"/>
+          <p:cNvPr id="35" name="TextBox 34"/>
           <p:cNvSpPr txBox="1"/>
           <p:nvPr/>
         </p:nvSpPr>
@@ -7222,7 +7698,7 @@
       </p:sp>
       <p:sp>
         <p:nvSpPr>
-          <p:cNvPr id="30" name="TextBox 29"/>
+          <p:cNvPr id="36" name="TextBox 35"/>
           <p:cNvSpPr txBox="1"/>
           <p:nvPr/>
         </p:nvSpPr>
@@ -7256,7 +7732,7 @@
       </p:sp>
       <p:sp>
         <p:nvSpPr>
-          <p:cNvPr id="31" name="TextBox 30"/>
+          <p:cNvPr id="37" name="TextBox 36"/>
           <p:cNvSpPr txBox="1"/>
           <p:nvPr/>
         </p:nvSpPr>
@@ -7930,16 +8406,84 @@
           </a:p>
         </p:txBody>
       </p:sp>
-      <p:sp>
-        <p:nvSpPr>
-          <p:cNvPr id="16" name="TextBox 15"/>
-          <p:cNvSpPr txBox="1"/>
-          <p:nvPr/>
-        </p:nvSpPr>
+      <p:pic>
+        <p:nvPicPr>
+          <p:cNvPr id="16" name="Picture 15" descr="_ph-indonesia-hafid.png"/>
+          <p:cNvPicPr>
+            <a:picLocks noChangeAspect="1"/>
+          </p:cNvPicPr>
+          <p:nvPr/>
+        </p:nvPicPr>
+        <p:blipFill>
+          <a:blip r:embed="rId3"/>
+          <a:stretch>
+            <a:fillRect/>
+          </a:stretch>
+        </p:blipFill>
         <p:spPr>
           <a:xfrm>
             <a:off x="3611880" y="1408176"/>
-            <a:ext cx="8028431" cy="256032"/>
+            <a:ext cx="731520" cy="914400"/>
+          </a:xfrm>
+          <a:prstGeom prst="rect">
+            <a:avLst/>
+          </a:prstGeom>
+        </p:spPr>
+      </p:pic>
+      <p:sp>
+        <p:nvSpPr>
+          <p:cNvPr id="17" name="Rectangle 16"/>
+          <p:cNvSpPr/>
+          <p:nvPr/>
+        </p:nvSpPr>
+        <p:spPr>
+          <a:xfrm>
+            <a:off x="3611880" y="1408176"/>
+            <a:ext cx="731520" cy="914400"/>
+          </a:xfrm>
+          <a:prstGeom prst="rect">
+            <a:avLst/>
+          </a:prstGeom>
+          <a:noFill/>
+          <a:ln w="12700">
+            <a:solidFill>
+              <a:srgbClr val="B1BBCA"/>
+            </a:solidFill>
+          </a:ln>
+          <a:effectLst/>
+        </p:spPr>
+        <p:style>
+          <a:lnRef idx="1">
+            <a:schemeClr val="accent1"/>
+          </a:lnRef>
+          <a:fillRef idx="3">
+            <a:schemeClr val="accent1"/>
+          </a:fillRef>
+          <a:effectRef idx="2">
+            <a:schemeClr val="accent1"/>
+          </a:effectRef>
+          <a:fontRef idx="minor">
+            <a:schemeClr val="lt1"/>
+          </a:fontRef>
+        </p:style>
+        <p:txBody>
+          <a:bodyPr rtlCol="0" anchor="ctr"/>
+          <a:lstStyle/>
+          <a:p>
+            <a:pPr algn="ctr"/>
+          </a:p>
+        </p:txBody>
+      </p:sp>
+      <p:sp>
+        <p:nvSpPr>
+          <p:cNvPr id="18" name="TextBox 17"/>
+          <p:cNvSpPr txBox="1"/>
+          <p:nvPr/>
+        </p:nvSpPr>
+        <p:spPr>
+          <a:xfrm>
+            <a:off x="4507992" y="1408176"/>
+            <a:ext cx="7132320" cy="256032"/>
           </a:xfrm>
           <a:prstGeom prst="rect">
             <a:avLst/>
@@ -7966,14 +8510,14 @@
       </p:sp>
       <p:sp>
         <p:nvSpPr>
-          <p:cNvPr id="17" name="TextBox 16"/>
-          <p:cNvSpPr txBox="1"/>
-          <p:nvPr/>
-        </p:nvSpPr>
-        <p:spPr>
-          <a:xfrm>
-            <a:off x="3611880" y="1682495"/>
-            <a:ext cx="8028431" cy="347472"/>
+          <p:cNvPr id="19" name="TextBox 18"/>
+          <p:cNvSpPr txBox="1"/>
+          <p:nvPr/>
+        </p:nvSpPr>
+        <p:spPr>
+          <a:xfrm>
+            <a:off x="4507992" y="1682495"/>
+            <a:ext cx="7132320" cy="347472"/>
           </a:xfrm>
           <a:prstGeom prst="rect">
             <a:avLst/>
@@ -8005,14 +8549,14 @@
       </p:sp>
       <p:sp>
         <p:nvSpPr>
-          <p:cNvPr id="18" name="TextBox 17"/>
-          <p:cNvSpPr txBox="1"/>
-          <p:nvPr/>
-        </p:nvSpPr>
-        <p:spPr>
-          <a:xfrm>
-            <a:off x="3611880" y="2048256"/>
-            <a:ext cx="8028431" cy="292608"/>
+          <p:cNvPr id="20" name="TextBox 19"/>
+          <p:cNvSpPr txBox="1"/>
+          <p:nvPr/>
+        </p:nvSpPr>
+        <p:spPr>
+          <a:xfrm>
+            <a:off x="4507992" y="2048256"/>
+            <a:ext cx="7132320" cy="292608"/>
           </a:xfrm>
           <a:prstGeom prst="rect">
             <a:avLst/>
@@ -8053,7 +8597,7 @@
       </p:sp>
       <p:sp>
         <p:nvSpPr>
-          <p:cNvPr id="19" name="TextBox 18"/>
+          <p:cNvPr id="21" name="TextBox 20"/>
           <p:cNvSpPr txBox="1"/>
           <p:nvPr/>
         </p:nvSpPr>
@@ -8092,7 +8636,7 @@
       </p:sp>
       <p:cxnSp>
         <p:nvCxnSpPr>
-          <p:cNvPr id="20" name="Connector 19"/>
+          <p:cNvPr id="22" name="Connector 21"/>
           <p:cNvCxnSpPr/>
           <p:nvPr/>
         </p:nvCxnSpPr>
@@ -8128,7 +8672,7 @@
       </p:cxnSp>
       <p:sp>
         <p:nvSpPr>
-          <p:cNvPr id="21" name="TextBox 20"/>
+          <p:cNvPr id="23" name="TextBox 22"/>
           <p:cNvSpPr txBox="1"/>
           <p:nvPr/>
         </p:nvSpPr>
@@ -8160,16 +8704,84 @@
           </a:p>
         </p:txBody>
       </p:sp>
-      <p:sp>
-        <p:nvSpPr>
-          <p:cNvPr id="22" name="TextBox 21"/>
-          <p:cNvSpPr txBox="1"/>
-          <p:nvPr/>
-        </p:nvSpPr>
+      <p:pic>
+        <p:nvPicPr>
+          <p:cNvPr id="24" name="Picture 23" descr="_ph-indonesia-santoso.png"/>
+          <p:cNvPicPr>
+            <a:picLocks noChangeAspect="1"/>
+          </p:cNvPicPr>
+          <p:nvPr/>
+        </p:nvPicPr>
+        <p:blipFill>
+          <a:blip r:embed="rId4"/>
+          <a:stretch>
+            <a:fillRect/>
+          </a:stretch>
+        </p:blipFill>
         <p:spPr>
           <a:xfrm>
             <a:off x="3611880" y="4023359"/>
-            <a:ext cx="3849624" cy="914400"/>
+            <a:ext cx="585216" cy="731520"/>
+          </a:xfrm>
+          <a:prstGeom prst="rect">
+            <a:avLst/>
+          </a:prstGeom>
+        </p:spPr>
+      </p:pic>
+      <p:sp>
+        <p:nvSpPr>
+          <p:cNvPr id="25" name="Rectangle 24"/>
+          <p:cNvSpPr/>
+          <p:nvPr/>
+        </p:nvSpPr>
+        <p:spPr>
+          <a:xfrm>
+            <a:off x="3611880" y="4023359"/>
+            <a:ext cx="585216" cy="731520"/>
+          </a:xfrm>
+          <a:prstGeom prst="rect">
+            <a:avLst/>
+          </a:prstGeom>
+          <a:noFill/>
+          <a:ln w="12700">
+            <a:solidFill>
+              <a:srgbClr val="B1BBCA"/>
+            </a:solidFill>
+          </a:ln>
+          <a:effectLst/>
+        </p:spPr>
+        <p:style>
+          <a:lnRef idx="1">
+            <a:schemeClr val="accent1"/>
+          </a:lnRef>
+          <a:fillRef idx="3">
+            <a:schemeClr val="accent1"/>
+          </a:fillRef>
+          <a:effectRef idx="2">
+            <a:schemeClr val="accent1"/>
+          </a:effectRef>
+          <a:fontRef idx="minor">
+            <a:schemeClr val="lt1"/>
+          </a:fontRef>
+        </p:style>
+        <p:txBody>
+          <a:bodyPr rtlCol="0" anchor="ctr"/>
+          <a:lstStyle/>
+          <a:p>
+            <a:pPr algn="ctr"/>
+          </a:p>
+        </p:txBody>
+      </p:sp>
+      <p:sp>
+        <p:nvSpPr>
+          <p:cNvPr id="26" name="TextBox 25"/>
+          <p:cNvSpPr txBox="1"/>
+          <p:nvPr/>
+        </p:nvSpPr>
+        <p:spPr>
+          <a:xfrm>
+            <a:off x="4325112" y="4023359"/>
+            <a:ext cx="3136391" cy="914400"/>
           </a:xfrm>
           <a:prstGeom prst="rect">
             <a:avLst/>
@@ -8231,7 +8843,7 @@
       </p:sp>
       <p:sp>
         <p:nvSpPr>
-          <p:cNvPr id="23" name="TextBox 22"/>
+          <p:cNvPr id="27" name="TextBox 26"/>
           <p:cNvSpPr txBox="1"/>
           <p:nvPr/>
         </p:nvSpPr>
@@ -8279,7 +8891,7 @@
       </p:sp>
       <p:sp>
         <p:nvSpPr>
-          <p:cNvPr id="24" name="TextBox 23"/>
+          <p:cNvPr id="28" name="TextBox 27"/>
           <p:cNvSpPr txBox="1"/>
           <p:nvPr/>
         </p:nvSpPr>
@@ -8316,16 +8928,84 @@
           </a:p>
         </p:txBody>
       </p:sp>
-      <p:sp>
-        <p:nvSpPr>
-          <p:cNvPr id="25" name="TextBox 24"/>
-          <p:cNvSpPr txBox="1"/>
-          <p:nvPr/>
-        </p:nvSpPr>
+      <p:pic>
+        <p:nvPicPr>
+          <p:cNvPr id="29" name="Picture 28" descr="_ph-indonesia-airlangga.png"/>
+          <p:cNvPicPr>
+            <a:picLocks noChangeAspect="1"/>
+          </p:cNvPicPr>
+          <p:nvPr/>
+        </p:nvPicPr>
+        <p:blipFill>
+          <a:blip r:embed="rId5"/>
+          <a:stretch>
+            <a:fillRect/>
+          </a:stretch>
+        </p:blipFill>
         <p:spPr>
           <a:xfrm>
             <a:off x="7790688" y="4023359"/>
-            <a:ext cx="3849624" cy="914400"/>
+            <a:ext cx="585216" cy="731520"/>
+          </a:xfrm>
+          <a:prstGeom prst="rect">
+            <a:avLst/>
+          </a:prstGeom>
+        </p:spPr>
+      </p:pic>
+      <p:sp>
+        <p:nvSpPr>
+          <p:cNvPr id="30" name="Rectangle 29"/>
+          <p:cNvSpPr/>
+          <p:nvPr/>
+        </p:nvSpPr>
+        <p:spPr>
+          <a:xfrm>
+            <a:off x="7790688" y="4023359"/>
+            <a:ext cx="585216" cy="731520"/>
+          </a:xfrm>
+          <a:prstGeom prst="rect">
+            <a:avLst/>
+          </a:prstGeom>
+          <a:noFill/>
+          <a:ln w="12700">
+            <a:solidFill>
+              <a:srgbClr val="B1BBCA"/>
+            </a:solidFill>
+          </a:ln>
+          <a:effectLst/>
+        </p:spPr>
+        <p:style>
+          <a:lnRef idx="1">
+            <a:schemeClr val="accent1"/>
+          </a:lnRef>
+          <a:fillRef idx="3">
+            <a:schemeClr val="accent1"/>
+          </a:fillRef>
+          <a:effectRef idx="2">
+            <a:schemeClr val="accent1"/>
+          </a:effectRef>
+          <a:fontRef idx="minor">
+            <a:schemeClr val="lt1"/>
+          </a:fontRef>
+        </p:style>
+        <p:txBody>
+          <a:bodyPr rtlCol="0" anchor="ctr"/>
+          <a:lstStyle/>
+          <a:p>
+            <a:pPr algn="ctr"/>
+          </a:p>
+        </p:txBody>
+      </p:sp>
+      <p:sp>
+        <p:nvSpPr>
+          <p:cNvPr id="31" name="TextBox 30"/>
+          <p:cNvSpPr txBox="1"/>
+          <p:nvPr/>
+        </p:nvSpPr>
+        <p:spPr>
+          <a:xfrm>
+            <a:off x="8503920" y="4023359"/>
+            <a:ext cx="3136391" cy="914400"/>
           </a:xfrm>
           <a:prstGeom prst="rect">
             <a:avLst/>
@@ -8387,7 +9067,7 @@
       </p:sp>
       <p:sp>
         <p:nvSpPr>
-          <p:cNvPr id="26" name="TextBox 25"/>
+          <p:cNvPr id="32" name="TextBox 31"/>
           <p:cNvSpPr txBox="1"/>
           <p:nvPr/>
         </p:nvSpPr>
@@ -8435,7 +9115,7 @@
       </p:sp>
       <p:sp>
         <p:nvSpPr>
-          <p:cNvPr id="27" name="TextBox 26"/>
+          <p:cNvPr id="33" name="TextBox 32"/>
           <p:cNvSpPr txBox="1"/>
           <p:nvPr/>
         </p:nvSpPr>
@@ -8474,7 +9154,7 @@
       </p:sp>
       <p:cxnSp>
         <p:nvCxnSpPr>
-          <p:cNvPr id="28" name="Connector 27"/>
+          <p:cNvPr id="34" name="Connector 33"/>
           <p:cNvCxnSpPr/>
           <p:nvPr/>
         </p:nvCxnSpPr>
@@ -8510,7 +9190,7 @@
       </p:cxnSp>
       <p:sp>
         <p:nvSpPr>
-          <p:cNvPr id="29" name="TextBox 28"/>
+          <p:cNvPr id="35" name="TextBox 34"/>
           <p:cNvSpPr txBox="1"/>
           <p:nvPr/>
         </p:nvSpPr>
@@ -8544,7 +9224,7 @@
       </p:sp>
       <p:sp>
         <p:nvSpPr>
-          <p:cNvPr id="30" name="TextBox 29"/>
+          <p:cNvPr id="36" name="TextBox 35"/>
           <p:cNvSpPr txBox="1"/>
           <p:nvPr/>
         </p:nvSpPr>
@@ -8578,7 +9258,7 @@
       </p:sp>
       <p:sp>
         <p:nvSpPr>
-          <p:cNvPr id="31" name="TextBox 30"/>
+          <p:cNvPr id="37" name="TextBox 36"/>
           <p:cNvSpPr txBox="1"/>
           <p:nvPr/>
         </p:nvSpPr>
@@ -9252,16 +9932,84 @@
           </a:p>
         </p:txBody>
       </p:sp>
-      <p:sp>
-        <p:nvSpPr>
-          <p:cNvPr id="16" name="TextBox 15"/>
-          <p:cNvSpPr txBox="1"/>
-          <p:nvPr/>
-        </p:nvSpPr>
+      <p:pic>
+        <p:nvPicPr>
+          <p:cNvPr id="16" name="Picture 15" descr="_ph-italy-butti.png"/>
+          <p:cNvPicPr>
+            <a:picLocks noChangeAspect="1"/>
+          </p:cNvPicPr>
+          <p:nvPr/>
+        </p:nvPicPr>
+        <p:blipFill>
+          <a:blip r:embed="rId3"/>
+          <a:stretch>
+            <a:fillRect/>
+          </a:stretch>
+        </p:blipFill>
         <p:spPr>
           <a:xfrm>
             <a:off x="3611880" y="1408176"/>
-            <a:ext cx="8028431" cy="256032"/>
+            <a:ext cx="731520" cy="914400"/>
+          </a:xfrm>
+          <a:prstGeom prst="rect">
+            <a:avLst/>
+          </a:prstGeom>
+        </p:spPr>
+      </p:pic>
+      <p:sp>
+        <p:nvSpPr>
+          <p:cNvPr id="17" name="Rectangle 16"/>
+          <p:cNvSpPr/>
+          <p:nvPr/>
+        </p:nvSpPr>
+        <p:spPr>
+          <a:xfrm>
+            <a:off x="3611880" y="1408176"/>
+            <a:ext cx="731520" cy="914400"/>
+          </a:xfrm>
+          <a:prstGeom prst="rect">
+            <a:avLst/>
+          </a:prstGeom>
+          <a:noFill/>
+          <a:ln w="12700">
+            <a:solidFill>
+              <a:srgbClr val="B1BBCA"/>
+            </a:solidFill>
+          </a:ln>
+          <a:effectLst/>
+        </p:spPr>
+        <p:style>
+          <a:lnRef idx="1">
+            <a:schemeClr val="accent1"/>
+          </a:lnRef>
+          <a:fillRef idx="3">
+            <a:schemeClr val="accent1"/>
+          </a:fillRef>
+          <a:effectRef idx="2">
+            <a:schemeClr val="accent1"/>
+          </a:effectRef>
+          <a:fontRef idx="minor">
+            <a:schemeClr val="lt1"/>
+          </a:fontRef>
+        </p:style>
+        <p:txBody>
+          <a:bodyPr rtlCol="0" anchor="ctr"/>
+          <a:lstStyle/>
+          <a:p>
+            <a:pPr algn="ctr"/>
+          </a:p>
+        </p:txBody>
+      </p:sp>
+      <p:sp>
+        <p:nvSpPr>
+          <p:cNvPr id="18" name="TextBox 17"/>
+          <p:cNvSpPr txBox="1"/>
+          <p:nvPr/>
+        </p:nvSpPr>
+        <p:spPr>
+          <a:xfrm>
+            <a:off x="4507992" y="1408176"/>
+            <a:ext cx="7132320" cy="256032"/>
           </a:xfrm>
           <a:prstGeom prst="rect">
             <a:avLst/>
@@ -9288,14 +10036,14 @@
       </p:sp>
       <p:sp>
         <p:nvSpPr>
-          <p:cNvPr id="17" name="TextBox 16"/>
-          <p:cNvSpPr txBox="1"/>
-          <p:nvPr/>
-        </p:nvSpPr>
-        <p:spPr>
-          <a:xfrm>
-            <a:off x="3611880" y="1682495"/>
-            <a:ext cx="8028431" cy="347472"/>
+          <p:cNvPr id="19" name="TextBox 18"/>
+          <p:cNvSpPr txBox="1"/>
+          <p:nvPr/>
+        </p:nvSpPr>
+        <p:spPr>
+          <a:xfrm>
+            <a:off x="4507992" y="1682495"/>
+            <a:ext cx="7132320" cy="347472"/>
           </a:xfrm>
           <a:prstGeom prst="rect">
             <a:avLst/>
@@ -9327,14 +10075,14 @@
       </p:sp>
       <p:sp>
         <p:nvSpPr>
-          <p:cNvPr id="18" name="TextBox 17"/>
-          <p:cNvSpPr txBox="1"/>
-          <p:nvPr/>
-        </p:nvSpPr>
-        <p:spPr>
-          <a:xfrm>
-            <a:off x="3611880" y="2048256"/>
-            <a:ext cx="8028431" cy="292608"/>
+          <p:cNvPr id="20" name="TextBox 19"/>
+          <p:cNvSpPr txBox="1"/>
+          <p:nvPr/>
+        </p:nvSpPr>
+        <p:spPr>
+          <a:xfrm>
+            <a:off x="4507992" y="2048256"/>
+            <a:ext cx="7132320" cy="292608"/>
           </a:xfrm>
           <a:prstGeom prst="rect">
             <a:avLst/>
@@ -9375,7 +10123,7 @@
       </p:sp>
       <p:sp>
         <p:nvSpPr>
-          <p:cNvPr id="19" name="TextBox 18"/>
+          <p:cNvPr id="21" name="TextBox 20"/>
           <p:cNvSpPr txBox="1"/>
           <p:nvPr/>
         </p:nvSpPr>
@@ -9414,7 +10162,7 @@
       </p:sp>
       <p:cxnSp>
         <p:nvCxnSpPr>
-          <p:cNvPr id="20" name="Connector 19"/>
+          <p:cNvPr id="22" name="Connector 21"/>
           <p:cNvCxnSpPr/>
           <p:nvPr/>
         </p:nvCxnSpPr>
@@ -9450,7 +10198,7 @@
       </p:cxnSp>
       <p:sp>
         <p:nvSpPr>
-          <p:cNvPr id="21" name="TextBox 20"/>
+          <p:cNvPr id="23" name="TextBox 22"/>
           <p:cNvSpPr txBox="1"/>
           <p:nvPr/>
         </p:nvSpPr>
@@ -9482,16 +10230,84 @@
           </a:p>
         </p:txBody>
       </p:sp>
-      <p:sp>
-        <p:nvSpPr>
-          <p:cNvPr id="22" name="TextBox 21"/>
-          <p:cNvSpPr txBox="1"/>
-          <p:nvPr/>
-        </p:nvSpPr>
+      <p:pic>
+        <p:nvPicPr>
+          <p:cNvPr id="24" name="Picture 23" descr="_ph-italy-tajani.png"/>
+          <p:cNvPicPr>
+            <a:picLocks noChangeAspect="1"/>
+          </p:cNvPicPr>
+          <p:nvPr/>
+        </p:nvPicPr>
+        <p:blipFill>
+          <a:blip r:embed="rId4"/>
+          <a:stretch>
+            <a:fillRect/>
+          </a:stretch>
+        </p:blipFill>
         <p:spPr>
           <a:xfrm>
             <a:off x="3611880" y="4023359"/>
-            <a:ext cx="3849624" cy="914400"/>
+            <a:ext cx="585216" cy="731520"/>
+          </a:xfrm>
+          <a:prstGeom prst="rect">
+            <a:avLst/>
+          </a:prstGeom>
+        </p:spPr>
+      </p:pic>
+      <p:sp>
+        <p:nvSpPr>
+          <p:cNvPr id="25" name="Rectangle 24"/>
+          <p:cNvSpPr/>
+          <p:nvPr/>
+        </p:nvSpPr>
+        <p:spPr>
+          <a:xfrm>
+            <a:off x="3611880" y="4023359"/>
+            <a:ext cx="585216" cy="731520"/>
+          </a:xfrm>
+          <a:prstGeom prst="rect">
+            <a:avLst/>
+          </a:prstGeom>
+          <a:noFill/>
+          <a:ln w="12700">
+            <a:solidFill>
+              <a:srgbClr val="B1BBCA"/>
+            </a:solidFill>
+          </a:ln>
+          <a:effectLst/>
+        </p:spPr>
+        <p:style>
+          <a:lnRef idx="1">
+            <a:schemeClr val="accent1"/>
+          </a:lnRef>
+          <a:fillRef idx="3">
+            <a:schemeClr val="accent1"/>
+          </a:fillRef>
+          <a:effectRef idx="2">
+            <a:schemeClr val="accent1"/>
+          </a:effectRef>
+          <a:fontRef idx="minor">
+            <a:schemeClr val="lt1"/>
+          </a:fontRef>
+        </p:style>
+        <p:txBody>
+          <a:bodyPr rtlCol="0" anchor="ctr"/>
+          <a:lstStyle/>
+          <a:p>
+            <a:pPr algn="ctr"/>
+          </a:p>
+        </p:txBody>
+      </p:sp>
+      <p:sp>
+        <p:nvSpPr>
+          <p:cNvPr id="26" name="TextBox 25"/>
+          <p:cNvSpPr txBox="1"/>
+          <p:nvPr/>
+        </p:nvSpPr>
+        <p:spPr>
+          <a:xfrm>
+            <a:off x="4325112" y="4023359"/>
+            <a:ext cx="3136391" cy="914400"/>
           </a:xfrm>
           <a:prstGeom prst="rect">
             <a:avLst/>
@@ -9553,7 +10369,7 @@
       </p:sp>
       <p:sp>
         <p:nvSpPr>
-          <p:cNvPr id="23" name="TextBox 22"/>
+          <p:cNvPr id="27" name="TextBox 26"/>
           <p:cNvSpPr txBox="1"/>
           <p:nvPr/>
         </p:nvSpPr>
@@ -9601,7 +10417,7 @@
       </p:sp>
       <p:sp>
         <p:nvSpPr>
-          <p:cNvPr id="24" name="TextBox 23"/>
+          <p:cNvPr id="28" name="TextBox 27"/>
           <p:cNvSpPr txBox="1"/>
           <p:nvPr/>
         </p:nvSpPr>
@@ -9638,16 +10454,84 @@
           </a:p>
         </p:txBody>
       </p:sp>
-      <p:sp>
-        <p:nvSpPr>
-          <p:cNvPr id="25" name="TextBox 24"/>
-          <p:cNvSpPr txBox="1"/>
-          <p:nvPr/>
-        </p:nvSpPr>
+      <p:pic>
+        <p:nvPicPr>
+          <p:cNvPr id="29" name="Picture 28" descr="_ph-italy-urso.png"/>
+          <p:cNvPicPr>
+            <a:picLocks noChangeAspect="1"/>
+          </p:cNvPicPr>
+          <p:nvPr/>
+        </p:nvPicPr>
+        <p:blipFill>
+          <a:blip r:embed="rId5"/>
+          <a:stretch>
+            <a:fillRect/>
+          </a:stretch>
+        </p:blipFill>
         <p:spPr>
           <a:xfrm>
             <a:off x="7790688" y="4023359"/>
-            <a:ext cx="3849624" cy="914400"/>
+            <a:ext cx="585216" cy="731520"/>
+          </a:xfrm>
+          <a:prstGeom prst="rect">
+            <a:avLst/>
+          </a:prstGeom>
+        </p:spPr>
+      </p:pic>
+      <p:sp>
+        <p:nvSpPr>
+          <p:cNvPr id="30" name="Rectangle 29"/>
+          <p:cNvSpPr/>
+          <p:nvPr/>
+        </p:nvSpPr>
+        <p:spPr>
+          <a:xfrm>
+            <a:off x="7790688" y="4023359"/>
+            <a:ext cx="585216" cy="731520"/>
+          </a:xfrm>
+          <a:prstGeom prst="rect">
+            <a:avLst/>
+          </a:prstGeom>
+          <a:noFill/>
+          <a:ln w="12700">
+            <a:solidFill>
+              <a:srgbClr val="B1BBCA"/>
+            </a:solidFill>
+          </a:ln>
+          <a:effectLst/>
+        </p:spPr>
+        <p:style>
+          <a:lnRef idx="1">
+            <a:schemeClr val="accent1"/>
+          </a:lnRef>
+          <a:fillRef idx="3">
+            <a:schemeClr val="accent1"/>
+          </a:fillRef>
+          <a:effectRef idx="2">
+            <a:schemeClr val="accent1"/>
+          </a:effectRef>
+          <a:fontRef idx="minor">
+            <a:schemeClr val="lt1"/>
+          </a:fontRef>
+        </p:style>
+        <p:txBody>
+          <a:bodyPr rtlCol="0" anchor="ctr"/>
+          <a:lstStyle/>
+          <a:p>
+            <a:pPr algn="ctr"/>
+          </a:p>
+        </p:txBody>
+      </p:sp>
+      <p:sp>
+        <p:nvSpPr>
+          <p:cNvPr id="31" name="TextBox 30"/>
+          <p:cNvSpPr txBox="1"/>
+          <p:nvPr/>
+        </p:nvSpPr>
+        <p:spPr>
+          <a:xfrm>
+            <a:off x="8503920" y="4023359"/>
+            <a:ext cx="3136391" cy="914400"/>
           </a:xfrm>
           <a:prstGeom prst="rect">
             <a:avLst/>
@@ -9709,7 +10593,7 @@
       </p:sp>
       <p:sp>
         <p:nvSpPr>
-          <p:cNvPr id="26" name="TextBox 25"/>
+          <p:cNvPr id="32" name="TextBox 31"/>
           <p:cNvSpPr txBox="1"/>
           <p:nvPr/>
         </p:nvSpPr>
@@ -9757,7 +10641,7 @@
       </p:sp>
       <p:sp>
         <p:nvSpPr>
-          <p:cNvPr id="27" name="TextBox 26"/>
+          <p:cNvPr id="33" name="TextBox 32"/>
           <p:cNvSpPr txBox="1"/>
           <p:nvPr/>
         </p:nvSpPr>
@@ -9796,7 +10680,7 @@
       </p:sp>
       <p:cxnSp>
         <p:nvCxnSpPr>
-          <p:cNvPr id="28" name="Connector 27"/>
+          <p:cNvPr id="34" name="Connector 33"/>
           <p:cNvCxnSpPr/>
           <p:nvPr/>
         </p:nvCxnSpPr>
@@ -9832,7 +10716,7 @@
       </p:cxnSp>
       <p:sp>
         <p:nvSpPr>
-          <p:cNvPr id="29" name="TextBox 28"/>
+          <p:cNvPr id="35" name="TextBox 34"/>
           <p:cNvSpPr txBox="1"/>
           <p:nvPr/>
         </p:nvSpPr>
@@ -9866,7 +10750,7 @@
       </p:sp>
       <p:sp>
         <p:nvSpPr>
-          <p:cNvPr id="30" name="TextBox 29"/>
+          <p:cNvPr id="36" name="TextBox 35"/>
           <p:cNvSpPr txBox="1"/>
           <p:nvPr/>
         </p:nvSpPr>
@@ -9900,7 +10784,7 @@
       </p:sp>
       <p:sp>
         <p:nvSpPr>
-          <p:cNvPr id="31" name="TextBox 30"/>
+          <p:cNvPr id="37" name="TextBox 36"/>
           <p:cNvSpPr txBox="1"/>
           <p:nvPr/>
         </p:nvSpPr>
@@ -10574,16 +11458,84 @@
           </a:p>
         </p:txBody>
       </p:sp>
-      <p:sp>
-        <p:nvSpPr>
-          <p:cNvPr id="16" name="TextBox 15"/>
-          <p:cNvSpPr txBox="1"/>
-          <p:nvPr/>
-        </p:nvSpPr>
+      <p:pic>
+        <p:nvPicPr>
+          <p:cNvPr id="16" name="Picture 15" descr="_ph-japan-matsumoto.png"/>
+          <p:cNvPicPr>
+            <a:picLocks noChangeAspect="1"/>
+          </p:cNvPicPr>
+          <p:nvPr/>
+        </p:nvPicPr>
+        <p:blipFill>
+          <a:blip r:embed="rId3"/>
+          <a:stretch>
+            <a:fillRect/>
+          </a:stretch>
+        </p:blipFill>
         <p:spPr>
           <a:xfrm>
             <a:off x="3611880" y="1408176"/>
-            <a:ext cx="8028431" cy="256032"/>
+            <a:ext cx="731520" cy="914400"/>
+          </a:xfrm>
+          <a:prstGeom prst="rect">
+            <a:avLst/>
+          </a:prstGeom>
+        </p:spPr>
+      </p:pic>
+      <p:sp>
+        <p:nvSpPr>
+          <p:cNvPr id="17" name="Rectangle 16"/>
+          <p:cNvSpPr/>
+          <p:nvPr/>
+        </p:nvSpPr>
+        <p:spPr>
+          <a:xfrm>
+            <a:off x="3611880" y="1408176"/>
+            <a:ext cx="731520" cy="914400"/>
+          </a:xfrm>
+          <a:prstGeom prst="rect">
+            <a:avLst/>
+          </a:prstGeom>
+          <a:noFill/>
+          <a:ln w="12700">
+            <a:solidFill>
+              <a:srgbClr val="B1BBCA"/>
+            </a:solidFill>
+          </a:ln>
+          <a:effectLst/>
+        </p:spPr>
+        <p:style>
+          <a:lnRef idx="1">
+            <a:schemeClr val="accent1"/>
+          </a:lnRef>
+          <a:fillRef idx="3">
+            <a:schemeClr val="accent1"/>
+          </a:fillRef>
+          <a:effectRef idx="2">
+            <a:schemeClr val="accent1"/>
+          </a:effectRef>
+          <a:fontRef idx="minor">
+            <a:schemeClr val="lt1"/>
+          </a:fontRef>
+        </p:style>
+        <p:txBody>
+          <a:bodyPr rtlCol="0" anchor="ctr"/>
+          <a:lstStyle/>
+          <a:p>
+            <a:pPr algn="ctr"/>
+          </a:p>
+        </p:txBody>
+      </p:sp>
+      <p:sp>
+        <p:nvSpPr>
+          <p:cNvPr id="18" name="TextBox 17"/>
+          <p:cNvSpPr txBox="1"/>
+          <p:nvPr/>
+        </p:nvSpPr>
+        <p:spPr>
+          <a:xfrm>
+            <a:off x="4507992" y="1408176"/>
+            <a:ext cx="7132320" cy="256032"/>
           </a:xfrm>
           <a:prstGeom prst="rect">
             <a:avLst/>
@@ -10610,14 +11562,14 @@
       </p:sp>
       <p:sp>
         <p:nvSpPr>
-          <p:cNvPr id="17" name="TextBox 16"/>
-          <p:cNvSpPr txBox="1"/>
-          <p:nvPr/>
-        </p:nvSpPr>
-        <p:spPr>
-          <a:xfrm>
-            <a:off x="3611880" y="1682495"/>
-            <a:ext cx="8028431" cy="347472"/>
+          <p:cNvPr id="19" name="TextBox 18"/>
+          <p:cNvSpPr txBox="1"/>
+          <p:nvPr/>
+        </p:nvSpPr>
+        <p:spPr>
+          <a:xfrm>
+            <a:off x="4507992" y="1682495"/>
+            <a:ext cx="7132320" cy="347472"/>
           </a:xfrm>
           <a:prstGeom prst="rect">
             <a:avLst/>
@@ -10649,14 +11601,14 @@
       </p:sp>
       <p:sp>
         <p:nvSpPr>
-          <p:cNvPr id="18" name="TextBox 17"/>
-          <p:cNvSpPr txBox="1"/>
-          <p:nvPr/>
-        </p:nvSpPr>
-        <p:spPr>
-          <a:xfrm>
-            <a:off x="3611880" y="2048256"/>
-            <a:ext cx="8028431" cy="292608"/>
+          <p:cNvPr id="20" name="TextBox 19"/>
+          <p:cNvSpPr txBox="1"/>
+          <p:nvPr/>
+        </p:nvSpPr>
+        <p:spPr>
+          <a:xfrm>
+            <a:off x="4507992" y="2048256"/>
+            <a:ext cx="7132320" cy="292608"/>
           </a:xfrm>
           <a:prstGeom prst="rect">
             <a:avLst/>
@@ -10697,7 +11649,7 @@
       </p:sp>
       <p:sp>
         <p:nvSpPr>
-          <p:cNvPr id="19" name="TextBox 18"/>
+          <p:cNvPr id="21" name="TextBox 20"/>
           <p:cNvSpPr txBox="1"/>
           <p:nvPr/>
         </p:nvSpPr>
@@ -10736,7 +11688,7 @@
       </p:sp>
       <p:cxnSp>
         <p:nvCxnSpPr>
-          <p:cNvPr id="20" name="Connector 19"/>
+          <p:cNvPr id="22" name="Connector 21"/>
           <p:cNvCxnSpPr/>
           <p:nvPr/>
         </p:nvCxnSpPr>
@@ -10772,7 +11724,7 @@
       </p:cxnSp>
       <p:sp>
         <p:nvSpPr>
-          <p:cNvPr id="21" name="TextBox 20"/>
+          <p:cNvPr id="23" name="TextBox 22"/>
           <p:cNvSpPr txBox="1"/>
           <p:nvPr/>
         </p:nvSpPr>
@@ -10804,16 +11756,84 @@
           </a:p>
         </p:txBody>
       </p:sp>
-      <p:sp>
-        <p:nvSpPr>
-          <p:cNvPr id="22" name="TextBox 21"/>
-          <p:cNvSpPr txBox="1"/>
-          <p:nvPr/>
-        </p:nvSpPr>
+      <p:pic>
+        <p:nvPicPr>
+          <p:cNvPr id="24" name="Picture 23" descr="_ph-japan-akazawa.png"/>
+          <p:cNvPicPr>
+            <a:picLocks noChangeAspect="1"/>
+          </p:cNvPicPr>
+          <p:nvPr/>
+        </p:nvPicPr>
+        <p:blipFill>
+          <a:blip r:embed="rId4"/>
+          <a:stretch>
+            <a:fillRect/>
+          </a:stretch>
+        </p:blipFill>
         <p:spPr>
           <a:xfrm>
             <a:off x="3611880" y="4041648"/>
-            <a:ext cx="8028431" cy="256032"/>
+            <a:ext cx="731520" cy="914400"/>
+          </a:xfrm>
+          <a:prstGeom prst="rect">
+            <a:avLst/>
+          </a:prstGeom>
+        </p:spPr>
+      </p:pic>
+      <p:sp>
+        <p:nvSpPr>
+          <p:cNvPr id="25" name="Rectangle 24"/>
+          <p:cNvSpPr/>
+          <p:nvPr/>
+        </p:nvSpPr>
+        <p:spPr>
+          <a:xfrm>
+            <a:off x="3611880" y="4041648"/>
+            <a:ext cx="731520" cy="914400"/>
+          </a:xfrm>
+          <a:prstGeom prst="rect">
+            <a:avLst/>
+          </a:prstGeom>
+          <a:noFill/>
+          <a:ln w="12700">
+            <a:solidFill>
+              <a:srgbClr val="B1BBCA"/>
+            </a:solidFill>
+          </a:ln>
+          <a:effectLst/>
+        </p:spPr>
+        <p:style>
+          <a:lnRef idx="1">
+            <a:schemeClr val="accent1"/>
+          </a:lnRef>
+          <a:fillRef idx="3">
+            <a:schemeClr val="accent1"/>
+          </a:fillRef>
+          <a:effectRef idx="2">
+            <a:schemeClr val="accent1"/>
+          </a:effectRef>
+          <a:fontRef idx="minor">
+            <a:schemeClr val="lt1"/>
+          </a:fontRef>
+        </p:style>
+        <p:txBody>
+          <a:bodyPr rtlCol="0" anchor="ctr"/>
+          <a:lstStyle/>
+          <a:p>
+            <a:pPr algn="ctr"/>
+          </a:p>
+        </p:txBody>
+      </p:sp>
+      <p:sp>
+        <p:nvSpPr>
+          <p:cNvPr id="26" name="TextBox 25"/>
+          <p:cNvSpPr txBox="1"/>
+          <p:nvPr/>
+        </p:nvSpPr>
+        <p:spPr>
+          <a:xfrm>
+            <a:off x="4507992" y="4041648"/>
+            <a:ext cx="7132320" cy="256032"/>
           </a:xfrm>
           <a:prstGeom prst="rect">
             <a:avLst/>
@@ -10840,14 +11860,14 @@
       </p:sp>
       <p:sp>
         <p:nvSpPr>
-          <p:cNvPr id="23" name="TextBox 22"/>
-          <p:cNvSpPr txBox="1"/>
-          <p:nvPr/>
-        </p:nvSpPr>
-        <p:spPr>
-          <a:xfrm>
-            <a:off x="3611880" y="4315968"/>
-            <a:ext cx="8028431" cy="347472"/>
+          <p:cNvPr id="27" name="TextBox 26"/>
+          <p:cNvSpPr txBox="1"/>
+          <p:nvPr/>
+        </p:nvSpPr>
+        <p:spPr>
+          <a:xfrm>
+            <a:off x="4507992" y="4315968"/>
+            <a:ext cx="7132320" cy="347472"/>
           </a:xfrm>
           <a:prstGeom prst="rect">
             <a:avLst/>
@@ -10879,14 +11899,14 @@
       </p:sp>
       <p:sp>
         <p:nvSpPr>
-          <p:cNvPr id="24" name="TextBox 23"/>
-          <p:cNvSpPr txBox="1"/>
-          <p:nvPr/>
-        </p:nvSpPr>
-        <p:spPr>
-          <a:xfrm>
-            <a:off x="3611880" y="4681727"/>
-            <a:ext cx="8028431" cy="292608"/>
+          <p:cNvPr id="28" name="TextBox 27"/>
+          <p:cNvSpPr txBox="1"/>
+          <p:nvPr/>
+        </p:nvSpPr>
+        <p:spPr>
+          <a:xfrm>
+            <a:off x="4507992" y="4681727"/>
+            <a:ext cx="7132320" cy="292608"/>
           </a:xfrm>
           <a:prstGeom prst="rect">
             <a:avLst/>
@@ -10927,7 +11947,7 @@
       </p:sp>
       <p:sp>
         <p:nvSpPr>
-          <p:cNvPr id="25" name="TextBox 24"/>
+          <p:cNvPr id="29" name="TextBox 28"/>
           <p:cNvSpPr txBox="1"/>
           <p:nvPr/>
         </p:nvSpPr>
@@ -10982,7 +12002,7 @@
       </p:sp>
       <p:cxnSp>
         <p:nvCxnSpPr>
-          <p:cNvPr id="26" name="Connector 25"/>
+          <p:cNvPr id="30" name="Connector 29"/>
           <p:cNvCxnSpPr/>
           <p:nvPr/>
         </p:nvCxnSpPr>
@@ -11018,7 +12038,7 @@
       </p:cxnSp>
       <p:sp>
         <p:nvSpPr>
-          <p:cNvPr id="27" name="TextBox 26"/>
+          <p:cNvPr id="31" name="TextBox 30"/>
           <p:cNvSpPr txBox="1"/>
           <p:nvPr/>
         </p:nvSpPr>
@@ -11052,7 +12072,7 @@
       </p:sp>
       <p:sp>
         <p:nvSpPr>
-          <p:cNvPr id="28" name="TextBox 27"/>
+          <p:cNvPr id="32" name="TextBox 31"/>
           <p:cNvSpPr txBox="1"/>
           <p:nvPr/>
         </p:nvSpPr>
@@ -11086,7 +12106,7 @@
       </p:sp>
       <p:sp>
         <p:nvSpPr>
-          <p:cNvPr id="29" name="TextBox 28"/>
+          <p:cNvPr id="33" name="TextBox 32"/>
           <p:cNvSpPr txBox="1"/>
           <p:nvPr/>
         </p:nvSpPr>
@@ -11760,16 +12780,84 @@
           </a:p>
         </p:txBody>
       </p:sp>
-      <p:sp>
-        <p:nvSpPr>
-          <p:cNvPr id="16" name="TextBox 15"/>
-          <p:cNvSpPr txBox="1"/>
-          <p:nvPr/>
-        </p:nvSpPr>
+      <p:pic>
+        <p:nvPicPr>
+          <p:cNvPr id="16" name="Picture 15" descr="_ph-mexico-pena.png"/>
+          <p:cNvPicPr>
+            <a:picLocks noChangeAspect="1"/>
+          </p:cNvPicPr>
+          <p:nvPr/>
+        </p:nvPicPr>
+        <p:blipFill>
+          <a:blip r:embed="rId3"/>
+          <a:stretch>
+            <a:fillRect/>
+          </a:stretch>
+        </p:blipFill>
         <p:spPr>
           <a:xfrm>
             <a:off x="3611880" y="1408176"/>
-            <a:ext cx="8028431" cy="256032"/>
+            <a:ext cx="731520" cy="914400"/>
+          </a:xfrm>
+          <a:prstGeom prst="rect">
+            <a:avLst/>
+          </a:prstGeom>
+        </p:spPr>
+      </p:pic>
+      <p:sp>
+        <p:nvSpPr>
+          <p:cNvPr id="17" name="Rectangle 16"/>
+          <p:cNvSpPr/>
+          <p:nvPr/>
+        </p:nvSpPr>
+        <p:spPr>
+          <a:xfrm>
+            <a:off x="3611880" y="1408176"/>
+            <a:ext cx="731520" cy="914400"/>
+          </a:xfrm>
+          <a:prstGeom prst="rect">
+            <a:avLst/>
+          </a:prstGeom>
+          <a:noFill/>
+          <a:ln w="12700">
+            <a:solidFill>
+              <a:srgbClr val="B1BBCA"/>
+            </a:solidFill>
+          </a:ln>
+          <a:effectLst/>
+        </p:spPr>
+        <p:style>
+          <a:lnRef idx="1">
+            <a:schemeClr val="accent1"/>
+          </a:lnRef>
+          <a:fillRef idx="3">
+            <a:schemeClr val="accent1"/>
+          </a:fillRef>
+          <a:effectRef idx="2">
+            <a:schemeClr val="accent1"/>
+          </a:effectRef>
+          <a:fontRef idx="minor">
+            <a:schemeClr val="lt1"/>
+          </a:fontRef>
+        </p:style>
+        <p:txBody>
+          <a:bodyPr rtlCol="0" anchor="ctr"/>
+          <a:lstStyle/>
+          <a:p>
+            <a:pPr algn="ctr"/>
+          </a:p>
+        </p:txBody>
+      </p:sp>
+      <p:sp>
+        <p:nvSpPr>
+          <p:cNvPr id="18" name="TextBox 17"/>
+          <p:cNvSpPr txBox="1"/>
+          <p:nvPr/>
+        </p:nvSpPr>
+        <p:spPr>
+          <a:xfrm>
+            <a:off x="4507992" y="1408176"/>
+            <a:ext cx="7132320" cy="256032"/>
           </a:xfrm>
           <a:prstGeom prst="rect">
             <a:avLst/>
@@ -11796,14 +12884,14 @@
       </p:sp>
       <p:sp>
         <p:nvSpPr>
-          <p:cNvPr id="17" name="TextBox 16"/>
-          <p:cNvSpPr txBox="1"/>
-          <p:nvPr/>
-        </p:nvSpPr>
-        <p:spPr>
-          <a:xfrm>
-            <a:off x="3611880" y="1682495"/>
-            <a:ext cx="8028431" cy="347472"/>
+          <p:cNvPr id="19" name="TextBox 18"/>
+          <p:cNvSpPr txBox="1"/>
+          <p:nvPr/>
+        </p:nvSpPr>
+        <p:spPr>
+          <a:xfrm>
+            <a:off x="4507992" y="1682495"/>
+            <a:ext cx="7132320" cy="347472"/>
           </a:xfrm>
           <a:prstGeom prst="rect">
             <a:avLst/>
@@ -11835,14 +12923,14 @@
       </p:sp>
       <p:sp>
         <p:nvSpPr>
-          <p:cNvPr id="18" name="TextBox 17"/>
-          <p:cNvSpPr txBox="1"/>
-          <p:nvPr/>
-        </p:nvSpPr>
-        <p:spPr>
-          <a:xfrm>
-            <a:off x="3611880" y="2048256"/>
-            <a:ext cx="8028431" cy="292608"/>
+          <p:cNvPr id="20" name="TextBox 19"/>
+          <p:cNvSpPr txBox="1"/>
+          <p:nvPr/>
+        </p:nvSpPr>
+        <p:spPr>
+          <a:xfrm>
+            <a:off x="4507992" y="2048256"/>
+            <a:ext cx="7132320" cy="292608"/>
           </a:xfrm>
           <a:prstGeom prst="rect">
             <a:avLst/>
@@ -11883,7 +12971,7 @@
       </p:sp>
       <p:sp>
         <p:nvSpPr>
-          <p:cNvPr id="19" name="TextBox 18"/>
+          <p:cNvPr id="21" name="TextBox 20"/>
           <p:cNvSpPr txBox="1"/>
           <p:nvPr/>
         </p:nvSpPr>
@@ -11922,7 +13010,7 @@
       </p:sp>
       <p:cxnSp>
         <p:nvCxnSpPr>
-          <p:cNvPr id="20" name="Connector 19"/>
+          <p:cNvPr id="22" name="Connector 21"/>
           <p:cNvCxnSpPr/>
           <p:nvPr/>
         </p:nvCxnSpPr>
@@ -11958,7 +13046,7 @@
       </p:cxnSp>
       <p:sp>
         <p:nvSpPr>
-          <p:cNvPr id="21" name="TextBox 20"/>
+          <p:cNvPr id="23" name="TextBox 22"/>
           <p:cNvSpPr txBox="1"/>
           <p:nvPr/>
         </p:nvSpPr>
@@ -11990,16 +13078,84 @@
           </a:p>
         </p:txBody>
       </p:sp>
-      <p:sp>
-        <p:nvSpPr>
-          <p:cNvPr id="22" name="TextBox 21"/>
-          <p:cNvSpPr txBox="1"/>
-          <p:nvPr/>
-        </p:nvSpPr>
+      <p:pic>
+        <p:nvPicPr>
+          <p:cNvPr id="24" name="Picture 23" descr="_ph-mexico-ebrard.png"/>
+          <p:cNvPicPr>
+            <a:picLocks noChangeAspect="1"/>
+          </p:cNvPicPr>
+          <p:nvPr/>
+        </p:nvPicPr>
+        <p:blipFill>
+          <a:blip r:embed="rId4"/>
+          <a:stretch>
+            <a:fillRect/>
+          </a:stretch>
+        </p:blipFill>
         <p:spPr>
           <a:xfrm>
             <a:off x="3611880" y="4023359"/>
-            <a:ext cx="3849624" cy="914400"/>
+            <a:ext cx="585216" cy="731520"/>
+          </a:xfrm>
+          <a:prstGeom prst="rect">
+            <a:avLst/>
+          </a:prstGeom>
+        </p:spPr>
+      </p:pic>
+      <p:sp>
+        <p:nvSpPr>
+          <p:cNvPr id="25" name="Rectangle 24"/>
+          <p:cNvSpPr/>
+          <p:nvPr/>
+        </p:nvSpPr>
+        <p:spPr>
+          <a:xfrm>
+            <a:off x="3611880" y="4023359"/>
+            <a:ext cx="585216" cy="731520"/>
+          </a:xfrm>
+          <a:prstGeom prst="rect">
+            <a:avLst/>
+          </a:prstGeom>
+          <a:noFill/>
+          <a:ln w="12700">
+            <a:solidFill>
+              <a:srgbClr val="B1BBCA"/>
+            </a:solidFill>
+          </a:ln>
+          <a:effectLst/>
+        </p:spPr>
+        <p:style>
+          <a:lnRef idx="1">
+            <a:schemeClr val="accent1"/>
+          </a:lnRef>
+          <a:fillRef idx="3">
+            <a:schemeClr val="accent1"/>
+          </a:fillRef>
+          <a:effectRef idx="2">
+            <a:schemeClr val="accent1"/>
+          </a:effectRef>
+          <a:fontRef idx="minor">
+            <a:schemeClr val="lt1"/>
+          </a:fontRef>
+        </p:style>
+        <p:txBody>
+          <a:bodyPr rtlCol="0" anchor="ctr"/>
+          <a:lstStyle/>
+          <a:p>
+            <a:pPr algn="ctr"/>
+          </a:p>
+        </p:txBody>
+      </p:sp>
+      <p:sp>
+        <p:nvSpPr>
+          <p:cNvPr id="26" name="TextBox 25"/>
+          <p:cNvSpPr txBox="1"/>
+          <p:nvPr/>
+        </p:nvSpPr>
+        <p:spPr>
+          <a:xfrm>
+            <a:off x="4325112" y="4023359"/>
+            <a:ext cx="3136391" cy="914400"/>
           </a:xfrm>
           <a:prstGeom prst="rect">
             <a:avLst/>
@@ -12061,7 +13217,7 @@
       </p:sp>
       <p:sp>
         <p:nvSpPr>
-          <p:cNvPr id="23" name="TextBox 22"/>
+          <p:cNvPr id="27" name="TextBox 26"/>
           <p:cNvSpPr txBox="1"/>
           <p:nvPr/>
         </p:nvSpPr>
@@ -12109,7 +13265,7 @@
       </p:sp>
       <p:sp>
         <p:nvSpPr>
-          <p:cNvPr id="24" name="TextBox 23"/>
+          <p:cNvPr id="28" name="TextBox 27"/>
           <p:cNvSpPr txBox="1"/>
           <p:nvPr/>
         </p:nvSpPr>
@@ -12146,16 +13302,84 @@
           </a:p>
         </p:txBody>
       </p:sp>
-      <p:sp>
-        <p:nvSpPr>
-          <p:cNvPr id="25" name="TextBox 24"/>
-          <p:cNvSpPr txBox="1"/>
-          <p:nvPr/>
-        </p:nvSpPr>
+      <p:pic>
+        <p:nvPicPr>
+          <p:cNvPr id="29" name="Picture 28" descr="_ph-mexico-gutierrez.png"/>
+          <p:cNvPicPr>
+            <a:picLocks noChangeAspect="1"/>
+          </p:cNvPicPr>
+          <p:nvPr/>
+        </p:nvPicPr>
+        <p:blipFill>
+          <a:blip r:embed="rId5"/>
+          <a:stretch>
+            <a:fillRect/>
+          </a:stretch>
+        </p:blipFill>
         <p:spPr>
           <a:xfrm>
             <a:off x="7790688" y="4023359"/>
-            <a:ext cx="3849624" cy="914400"/>
+            <a:ext cx="585216" cy="731520"/>
+          </a:xfrm>
+          <a:prstGeom prst="rect">
+            <a:avLst/>
+          </a:prstGeom>
+        </p:spPr>
+      </p:pic>
+      <p:sp>
+        <p:nvSpPr>
+          <p:cNvPr id="30" name="Rectangle 29"/>
+          <p:cNvSpPr/>
+          <p:nvPr/>
+        </p:nvSpPr>
+        <p:spPr>
+          <a:xfrm>
+            <a:off x="7790688" y="4023359"/>
+            <a:ext cx="585216" cy="731520"/>
+          </a:xfrm>
+          <a:prstGeom prst="rect">
+            <a:avLst/>
+          </a:prstGeom>
+          <a:noFill/>
+          <a:ln w="12700">
+            <a:solidFill>
+              <a:srgbClr val="B1BBCA"/>
+            </a:solidFill>
+          </a:ln>
+          <a:effectLst/>
+        </p:spPr>
+        <p:style>
+          <a:lnRef idx="1">
+            <a:schemeClr val="accent1"/>
+          </a:lnRef>
+          <a:fillRef idx="3">
+            <a:schemeClr val="accent1"/>
+          </a:fillRef>
+          <a:effectRef idx="2">
+            <a:schemeClr val="accent1"/>
+          </a:effectRef>
+          <a:fontRef idx="minor">
+            <a:schemeClr val="lt1"/>
+          </a:fontRef>
+        </p:style>
+        <p:txBody>
+          <a:bodyPr rtlCol="0" anchor="ctr"/>
+          <a:lstStyle/>
+          <a:p>
+            <a:pPr algn="ctr"/>
+          </a:p>
+        </p:txBody>
+      </p:sp>
+      <p:sp>
+        <p:nvSpPr>
+          <p:cNvPr id="31" name="TextBox 30"/>
+          <p:cNvSpPr txBox="1"/>
+          <p:nvPr/>
+        </p:nvSpPr>
+        <p:spPr>
+          <a:xfrm>
+            <a:off x="8503920" y="4023359"/>
+            <a:ext cx="3136391" cy="914400"/>
           </a:xfrm>
           <a:prstGeom prst="rect">
             <a:avLst/>
@@ -12217,7 +13441,7 @@
       </p:sp>
       <p:sp>
         <p:nvSpPr>
-          <p:cNvPr id="26" name="TextBox 25"/>
+          <p:cNvPr id="32" name="TextBox 31"/>
           <p:cNvSpPr txBox="1"/>
           <p:nvPr/>
         </p:nvSpPr>
@@ -12265,7 +13489,7 @@
       </p:sp>
       <p:sp>
         <p:nvSpPr>
-          <p:cNvPr id="27" name="TextBox 26"/>
+          <p:cNvPr id="33" name="TextBox 32"/>
           <p:cNvSpPr txBox="1"/>
           <p:nvPr/>
         </p:nvSpPr>
@@ -12304,7 +13528,7 @@
       </p:sp>
       <p:cxnSp>
         <p:nvCxnSpPr>
-          <p:cNvPr id="28" name="Connector 27"/>
+          <p:cNvPr id="34" name="Connector 33"/>
           <p:cNvCxnSpPr/>
           <p:nvPr/>
         </p:nvCxnSpPr>
@@ -12340,7 +13564,7 @@
       </p:cxnSp>
       <p:sp>
         <p:nvSpPr>
-          <p:cNvPr id="29" name="TextBox 28"/>
+          <p:cNvPr id="35" name="TextBox 34"/>
           <p:cNvSpPr txBox="1"/>
           <p:nvPr/>
         </p:nvSpPr>
@@ -12374,7 +13598,7 @@
       </p:sp>
       <p:sp>
         <p:nvSpPr>
-          <p:cNvPr id="30" name="TextBox 29"/>
+          <p:cNvPr id="36" name="TextBox 35"/>
           <p:cNvSpPr txBox="1"/>
           <p:nvPr/>
         </p:nvSpPr>
@@ -12408,7 +13632,7 @@
       </p:sp>
       <p:sp>
         <p:nvSpPr>
-          <p:cNvPr id="31" name="TextBox 30"/>
+          <p:cNvPr id="37" name="TextBox 36"/>
           <p:cNvSpPr txBox="1"/>
           <p:nvPr/>
         </p:nvSpPr>
@@ -13082,16 +14306,84 @@
           </a:p>
         </p:txBody>
       </p:sp>
-      <p:sp>
-        <p:nvSpPr>
-          <p:cNvPr id="16" name="TextBox 15"/>
-          <p:cNvSpPr txBox="1"/>
-          <p:nvPr/>
-        </p:nvSpPr>
+      <p:pic>
+        <p:nvPicPr>
+          <p:cNvPr id="16" name="Picture 15" descr="_ph-poland-gawkowski.png"/>
+          <p:cNvPicPr>
+            <a:picLocks noChangeAspect="1"/>
+          </p:cNvPicPr>
+          <p:nvPr/>
+        </p:nvPicPr>
+        <p:blipFill>
+          <a:blip r:embed="rId3"/>
+          <a:stretch>
+            <a:fillRect/>
+          </a:stretch>
+        </p:blipFill>
         <p:spPr>
           <a:xfrm>
             <a:off x="3611880" y="1408176"/>
-            <a:ext cx="8028431" cy="256032"/>
+            <a:ext cx="731520" cy="914400"/>
+          </a:xfrm>
+          <a:prstGeom prst="rect">
+            <a:avLst/>
+          </a:prstGeom>
+        </p:spPr>
+      </p:pic>
+      <p:sp>
+        <p:nvSpPr>
+          <p:cNvPr id="17" name="Rectangle 16"/>
+          <p:cNvSpPr/>
+          <p:nvPr/>
+        </p:nvSpPr>
+        <p:spPr>
+          <a:xfrm>
+            <a:off x="3611880" y="1408176"/>
+            <a:ext cx="731520" cy="914400"/>
+          </a:xfrm>
+          <a:prstGeom prst="rect">
+            <a:avLst/>
+          </a:prstGeom>
+          <a:noFill/>
+          <a:ln w="12700">
+            <a:solidFill>
+              <a:srgbClr val="B1BBCA"/>
+            </a:solidFill>
+          </a:ln>
+          <a:effectLst/>
+        </p:spPr>
+        <p:style>
+          <a:lnRef idx="1">
+            <a:schemeClr val="accent1"/>
+          </a:lnRef>
+          <a:fillRef idx="3">
+            <a:schemeClr val="accent1"/>
+          </a:fillRef>
+          <a:effectRef idx="2">
+            <a:schemeClr val="accent1"/>
+          </a:effectRef>
+          <a:fontRef idx="minor">
+            <a:schemeClr val="lt1"/>
+          </a:fontRef>
+        </p:style>
+        <p:txBody>
+          <a:bodyPr rtlCol="0" anchor="ctr"/>
+          <a:lstStyle/>
+          <a:p>
+            <a:pPr algn="ctr"/>
+          </a:p>
+        </p:txBody>
+      </p:sp>
+      <p:sp>
+        <p:nvSpPr>
+          <p:cNvPr id="18" name="TextBox 17"/>
+          <p:cNvSpPr txBox="1"/>
+          <p:nvPr/>
+        </p:nvSpPr>
+        <p:spPr>
+          <a:xfrm>
+            <a:off x="4507992" y="1408176"/>
+            <a:ext cx="7132320" cy="256032"/>
           </a:xfrm>
           <a:prstGeom prst="rect">
             <a:avLst/>
@@ -13118,14 +14410,14 @@
       </p:sp>
       <p:sp>
         <p:nvSpPr>
-          <p:cNvPr id="17" name="TextBox 16"/>
-          <p:cNvSpPr txBox="1"/>
-          <p:nvPr/>
-        </p:nvSpPr>
-        <p:spPr>
-          <a:xfrm>
-            <a:off x="3611880" y="1682495"/>
-            <a:ext cx="8028431" cy="347472"/>
+          <p:cNvPr id="19" name="TextBox 18"/>
+          <p:cNvSpPr txBox="1"/>
+          <p:nvPr/>
+        </p:nvSpPr>
+        <p:spPr>
+          <a:xfrm>
+            <a:off x="4507992" y="1682495"/>
+            <a:ext cx="7132320" cy="347472"/>
           </a:xfrm>
           <a:prstGeom prst="rect">
             <a:avLst/>
@@ -13157,14 +14449,14 @@
       </p:sp>
       <p:sp>
         <p:nvSpPr>
-          <p:cNvPr id="18" name="TextBox 17"/>
-          <p:cNvSpPr txBox="1"/>
-          <p:nvPr/>
-        </p:nvSpPr>
-        <p:spPr>
-          <a:xfrm>
-            <a:off x="3611880" y="2048256"/>
-            <a:ext cx="8028431" cy="292608"/>
+          <p:cNvPr id="20" name="TextBox 19"/>
+          <p:cNvSpPr txBox="1"/>
+          <p:nvPr/>
+        </p:nvSpPr>
+        <p:spPr>
+          <a:xfrm>
+            <a:off x="4507992" y="2048256"/>
+            <a:ext cx="7132320" cy="292608"/>
           </a:xfrm>
           <a:prstGeom prst="rect">
             <a:avLst/>
@@ -13205,7 +14497,7 @@
       </p:sp>
       <p:sp>
         <p:nvSpPr>
-          <p:cNvPr id="19" name="TextBox 18"/>
+          <p:cNvPr id="21" name="TextBox 20"/>
           <p:cNvSpPr txBox="1"/>
           <p:nvPr/>
         </p:nvSpPr>
@@ -13260,7 +14552,7 @@
       </p:sp>
       <p:cxnSp>
         <p:nvCxnSpPr>
-          <p:cNvPr id="20" name="Connector 19"/>
+          <p:cNvPr id="22" name="Connector 21"/>
           <p:cNvCxnSpPr/>
           <p:nvPr/>
         </p:nvCxnSpPr>
@@ -13296,7 +14588,7 @@
       </p:cxnSp>
       <p:sp>
         <p:nvSpPr>
-          <p:cNvPr id="21" name="TextBox 20"/>
+          <p:cNvPr id="23" name="TextBox 22"/>
           <p:cNvSpPr txBox="1"/>
           <p:nvPr/>
         </p:nvSpPr>
@@ -13328,16 +14620,84 @@
           </a:p>
         </p:txBody>
       </p:sp>
-      <p:sp>
-        <p:nvSpPr>
-          <p:cNvPr id="22" name="TextBox 21"/>
-          <p:cNvSpPr txBox="1"/>
-          <p:nvPr/>
-        </p:nvSpPr>
+      <p:pic>
+        <p:nvPicPr>
+          <p:cNvPr id="24" name="Picture 23" descr="_ph-poland-domanski.png"/>
+          <p:cNvPicPr>
+            <a:picLocks noChangeAspect="1"/>
+          </p:cNvPicPr>
+          <p:nvPr/>
+        </p:nvPicPr>
+        <p:blipFill>
+          <a:blip r:embed="rId4"/>
+          <a:stretch>
+            <a:fillRect/>
+          </a:stretch>
+        </p:blipFill>
         <p:spPr>
           <a:xfrm>
             <a:off x="3611880" y="4023359"/>
-            <a:ext cx="3849624" cy="914400"/>
+            <a:ext cx="585216" cy="731520"/>
+          </a:xfrm>
+          <a:prstGeom prst="rect">
+            <a:avLst/>
+          </a:prstGeom>
+        </p:spPr>
+      </p:pic>
+      <p:sp>
+        <p:nvSpPr>
+          <p:cNvPr id="25" name="Rectangle 24"/>
+          <p:cNvSpPr/>
+          <p:nvPr/>
+        </p:nvSpPr>
+        <p:spPr>
+          <a:xfrm>
+            <a:off x="3611880" y="4023359"/>
+            <a:ext cx="585216" cy="731520"/>
+          </a:xfrm>
+          <a:prstGeom prst="rect">
+            <a:avLst/>
+          </a:prstGeom>
+          <a:noFill/>
+          <a:ln w="12700">
+            <a:solidFill>
+              <a:srgbClr val="B1BBCA"/>
+            </a:solidFill>
+          </a:ln>
+          <a:effectLst/>
+        </p:spPr>
+        <p:style>
+          <a:lnRef idx="1">
+            <a:schemeClr val="accent1"/>
+          </a:lnRef>
+          <a:fillRef idx="3">
+            <a:schemeClr val="accent1"/>
+          </a:fillRef>
+          <a:effectRef idx="2">
+            <a:schemeClr val="accent1"/>
+          </a:effectRef>
+          <a:fontRef idx="minor">
+            <a:schemeClr val="lt1"/>
+          </a:fontRef>
+        </p:style>
+        <p:txBody>
+          <a:bodyPr rtlCol="0" anchor="ctr"/>
+          <a:lstStyle/>
+          <a:p>
+            <a:pPr algn="ctr"/>
+          </a:p>
+        </p:txBody>
+      </p:sp>
+      <p:sp>
+        <p:nvSpPr>
+          <p:cNvPr id="26" name="TextBox 25"/>
+          <p:cNvSpPr txBox="1"/>
+          <p:nvPr/>
+        </p:nvSpPr>
+        <p:spPr>
+          <a:xfrm>
+            <a:off x="4325112" y="4023359"/>
+            <a:ext cx="3136391" cy="914400"/>
           </a:xfrm>
           <a:prstGeom prst="rect">
             <a:avLst/>
@@ -13399,7 +14759,7 @@
       </p:sp>
       <p:sp>
         <p:nvSpPr>
-          <p:cNvPr id="23" name="TextBox 22"/>
+          <p:cNvPr id="27" name="TextBox 26"/>
           <p:cNvSpPr txBox="1"/>
           <p:nvPr/>
         </p:nvSpPr>
@@ -13447,7 +14807,7 @@
       </p:sp>
       <p:sp>
         <p:nvSpPr>
-          <p:cNvPr id="24" name="TextBox 23"/>
+          <p:cNvPr id="28" name="TextBox 27"/>
           <p:cNvSpPr txBox="1"/>
           <p:nvPr/>
         </p:nvSpPr>
@@ -13484,16 +14844,84 @@
           </a:p>
         </p:txBody>
       </p:sp>
-      <p:sp>
-        <p:nvSpPr>
-          <p:cNvPr id="25" name="TextBox 24"/>
-          <p:cNvSpPr txBox="1"/>
-          <p:nvPr/>
-        </p:nvSpPr>
+      <p:pic>
+        <p:nvPicPr>
+          <p:cNvPr id="29" name="Picture 28" descr="_ph-poland-baranowski.png"/>
+          <p:cNvPicPr>
+            <a:picLocks noChangeAspect="1"/>
+          </p:cNvPicPr>
+          <p:nvPr/>
+        </p:nvPicPr>
+        <p:blipFill>
+          <a:blip r:embed="rId5"/>
+          <a:stretch>
+            <a:fillRect/>
+          </a:stretch>
+        </p:blipFill>
         <p:spPr>
           <a:xfrm>
             <a:off x="7790688" y="4023359"/>
-            <a:ext cx="3849624" cy="914400"/>
+            <a:ext cx="585216" cy="731520"/>
+          </a:xfrm>
+          <a:prstGeom prst="rect">
+            <a:avLst/>
+          </a:prstGeom>
+        </p:spPr>
+      </p:pic>
+      <p:sp>
+        <p:nvSpPr>
+          <p:cNvPr id="30" name="Rectangle 29"/>
+          <p:cNvSpPr/>
+          <p:nvPr/>
+        </p:nvSpPr>
+        <p:spPr>
+          <a:xfrm>
+            <a:off x="7790688" y="4023359"/>
+            <a:ext cx="585216" cy="731520"/>
+          </a:xfrm>
+          <a:prstGeom prst="rect">
+            <a:avLst/>
+          </a:prstGeom>
+          <a:noFill/>
+          <a:ln w="12700">
+            <a:solidFill>
+              <a:srgbClr val="B1BBCA"/>
+            </a:solidFill>
+          </a:ln>
+          <a:effectLst/>
+        </p:spPr>
+        <p:style>
+          <a:lnRef idx="1">
+            <a:schemeClr val="accent1"/>
+          </a:lnRef>
+          <a:fillRef idx="3">
+            <a:schemeClr val="accent1"/>
+          </a:fillRef>
+          <a:effectRef idx="2">
+            <a:schemeClr val="accent1"/>
+          </a:effectRef>
+          <a:fontRef idx="minor">
+            <a:schemeClr val="lt1"/>
+          </a:fontRef>
+        </p:style>
+        <p:txBody>
+          <a:bodyPr rtlCol="0" anchor="ctr"/>
+          <a:lstStyle/>
+          <a:p>
+            <a:pPr algn="ctr"/>
+          </a:p>
+        </p:txBody>
+      </p:sp>
+      <p:sp>
+        <p:nvSpPr>
+          <p:cNvPr id="31" name="TextBox 30"/>
+          <p:cNvSpPr txBox="1"/>
+          <p:nvPr/>
+        </p:nvSpPr>
+        <p:spPr>
+          <a:xfrm>
+            <a:off x="8503920" y="4023359"/>
+            <a:ext cx="3136391" cy="914400"/>
           </a:xfrm>
           <a:prstGeom prst="rect">
             <a:avLst/>
@@ -13555,7 +14983,7 @@
       </p:sp>
       <p:sp>
         <p:nvSpPr>
-          <p:cNvPr id="26" name="TextBox 25"/>
+          <p:cNvPr id="32" name="TextBox 31"/>
           <p:cNvSpPr txBox="1"/>
           <p:nvPr/>
         </p:nvSpPr>
@@ -13603,7 +15031,7 @@
       </p:sp>
       <p:sp>
         <p:nvSpPr>
-          <p:cNvPr id="27" name="TextBox 26"/>
+          <p:cNvPr id="33" name="TextBox 32"/>
           <p:cNvSpPr txBox="1"/>
           <p:nvPr/>
         </p:nvSpPr>
@@ -13642,7 +15070,7 @@
       </p:sp>
       <p:cxnSp>
         <p:nvCxnSpPr>
-          <p:cNvPr id="28" name="Connector 27"/>
+          <p:cNvPr id="34" name="Connector 33"/>
           <p:cNvCxnSpPr/>
           <p:nvPr/>
         </p:nvCxnSpPr>
@@ -13678,7 +15106,7 @@
       </p:cxnSp>
       <p:sp>
         <p:nvSpPr>
-          <p:cNvPr id="29" name="TextBox 28"/>
+          <p:cNvPr id="35" name="TextBox 34"/>
           <p:cNvSpPr txBox="1"/>
           <p:nvPr/>
         </p:nvSpPr>
@@ -13712,7 +15140,7 @@
       </p:sp>
       <p:sp>
         <p:nvSpPr>
-          <p:cNvPr id="30" name="TextBox 29"/>
+          <p:cNvPr id="36" name="TextBox 35"/>
           <p:cNvSpPr txBox="1"/>
           <p:nvPr/>
         </p:nvSpPr>
@@ -13746,7 +15174,7 @@
       </p:sp>
       <p:sp>
         <p:nvSpPr>
-          <p:cNvPr id="31" name="TextBox 30"/>
+          <p:cNvPr id="37" name="TextBox 36"/>
           <p:cNvSpPr txBox="1"/>
           <p:nvPr/>
         </p:nvSpPr>
@@ -14420,16 +15848,84 @@
           </a:p>
         </p:txBody>
       </p:sp>
-      <p:sp>
-        <p:nvSpPr>
-          <p:cNvPr id="16" name="TextBox 15"/>
-          <p:cNvSpPr txBox="1"/>
-          <p:nvPr/>
-        </p:nvSpPr>
+      <p:pic>
+        <p:nvPicPr>
+          <p:cNvPr id="16" name="Picture 15" descr="_ph-canada-sidhu.png"/>
+          <p:cNvPicPr>
+            <a:picLocks noChangeAspect="1"/>
+          </p:cNvPicPr>
+          <p:nvPr/>
+        </p:nvPicPr>
+        <p:blipFill>
+          <a:blip r:embed="rId3"/>
+          <a:stretch>
+            <a:fillRect/>
+          </a:stretch>
+        </p:blipFill>
         <p:spPr>
           <a:xfrm>
             <a:off x="3611880" y="1408176"/>
-            <a:ext cx="8028431" cy="256032"/>
+            <a:ext cx="731520" cy="914400"/>
+          </a:xfrm>
+          <a:prstGeom prst="rect">
+            <a:avLst/>
+          </a:prstGeom>
+        </p:spPr>
+      </p:pic>
+      <p:sp>
+        <p:nvSpPr>
+          <p:cNvPr id="17" name="Rectangle 16"/>
+          <p:cNvSpPr/>
+          <p:nvPr/>
+        </p:nvSpPr>
+        <p:spPr>
+          <a:xfrm>
+            <a:off x="3611880" y="1408176"/>
+            <a:ext cx="731520" cy="914400"/>
+          </a:xfrm>
+          <a:prstGeom prst="rect">
+            <a:avLst/>
+          </a:prstGeom>
+          <a:noFill/>
+          <a:ln w="12700">
+            <a:solidFill>
+              <a:srgbClr val="B1BBCA"/>
+            </a:solidFill>
+          </a:ln>
+          <a:effectLst/>
+        </p:spPr>
+        <p:style>
+          <a:lnRef idx="1">
+            <a:schemeClr val="accent1"/>
+          </a:lnRef>
+          <a:fillRef idx="3">
+            <a:schemeClr val="accent1"/>
+          </a:fillRef>
+          <a:effectRef idx="2">
+            <a:schemeClr val="accent1"/>
+          </a:effectRef>
+          <a:fontRef idx="minor">
+            <a:schemeClr val="lt1"/>
+          </a:fontRef>
+        </p:style>
+        <p:txBody>
+          <a:bodyPr rtlCol="0" anchor="ctr"/>
+          <a:lstStyle/>
+          <a:p>
+            <a:pPr algn="ctr"/>
+          </a:p>
+        </p:txBody>
+      </p:sp>
+      <p:sp>
+        <p:nvSpPr>
+          <p:cNvPr id="18" name="TextBox 17"/>
+          <p:cNvSpPr txBox="1"/>
+          <p:nvPr/>
+        </p:nvSpPr>
+        <p:spPr>
+          <a:xfrm>
+            <a:off x="4507992" y="1408176"/>
+            <a:ext cx="7132320" cy="256032"/>
           </a:xfrm>
           <a:prstGeom prst="rect">
             <a:avLst/>
@@ -14456,14 +15952,14 @@
       </p:sp>
       <p:sp>
         <p:nvSpPr>
-          <p:cNvPr id="17" name="TextBox 16"/>
-          <p:cNvSpPr txBox="1"/>
-          <p:nvPr/>
-        </p:nvSpPr>
-        <p:spPr>
-          <a:xfrm>
-            <a:off x="3611880" y="1682495"/>
-            <a:ext cx="8028431" cy="347472"/>
+          <p:cNvPr id="19" name="TextBox 18"/>
+          <p:cNvSpPr txBox="1"/>
+          <p:nvPr/>
+        </p:nvSpPr>
+        <p:spPr>
+          <a:xfrm>
+            <a:off x="4507992" y="1682495"/>
+            <a:ext cx="7132320" cy="347472"/>
           </a:xfrm>
           <a:prstGeom prst="rect">
             <a:avLst/>
@@ -14495,14 +15991,14 @@
       </p:sp>
       <p:sp>
         <p:nvSpPr>
-          <p:cNvPr id="18" name="TextBox 17"/>
-          <p:cNvSpPr txBox="1"/>
-          <p:nvPr/>
-        </p:nvSpPr>
-        <p:spPr>
-          <a:xfrm>
-            <a:off x="3611880" y="2048256"/>
-            <a:ext cx="8028431" cy="292608"/>
+          <p:cNvPr id="20" name="TextBox 19"/>
+          <p:cNvSpPr txBox="1"/>
+          <p:nvPr/>
+        </p:nvSpPr>
+        <p:spPr>
+          <a:xfrm>
+            <a:off x="4507992" y="2048256"/>
+            <a:ext cx="7132320" cy="292608"/>
           </a:xfrm>
           <a:prstGeom prst="rect">
             <a:avLst/>
@@ -14543,7 +16039,7 @@
       </p:sp>
       <p:sp>
         <p:nvSpPr>
-          <p:cNvPr id="19" name="TextBox 18"/>
+          <p:cNvPr id="21" name="TextBox 20"/>
           <p:cNvSpPr txBox="1"/>
           <p:nvPr/>
         </p:nvSpPr>
@@ -14598,7 +16094,7 @@
       </p:sp>
       <p:cxnSp>
         <p:nvCxnSpPr>
-          <p:cNvPr id="20" name="Connector 19"/>
+          <p:cNvPr id="22" name="Connector 21"/>
           <p:cNvCxnSpPr/>
           <p:nvPr/>
         </p:nvCxnSpPr>
@@ -14634,7 +16130,7 @@
       </p:cxnSp>
       <p:sp>
         <p:nvSpPr>
-          <p:cNvPr id="21" name="TextBox 20"/>
+          <p:cNvPr id="23" name="TextBox 22"/>
           <p:cNvSpPr txBox="1"/>
           <p:nvPr/>
         </p:nvSpPr>
@@ -14666,16 +16162,84 @@
           </a:p>
         </p:txBody>
       </p:sp>
-      <p:sp>
-        <p:nvSpPr>
-          <p:cNvPr id="22" name="TextBox 21"/>
-          <p:cNvSpPr txBox="1"/>
-          <p:nvPr/>
-        </p:nvSpPr>
+      <p:pic>
+        <p:nvPicPr>
+          <p:cNvPr id="24" name="Picture 23" descr="_ph-russia-alikhanov.png"/>
+          <p:cNvPicPr>
+            <a:picLocks noChangeAspect="1"/>
+          </p:cNvPicPr>
+          <p:nvPr/>
+        </p:nvPicPr>
+        <p:blipFill>
+          <a:blip r:embed="rId4"/>
+          <a:stretch>
+            <a:fillRect/>
+          </a:stretch>
+        </p:blipFill>
         <p:spPr>
           <a:xfrm>
             <a:off x="3611880" y="4023359"/>
-            <a:ext cx="3849624" cy="914400"/>
+            <a:ext cx="585216" cy="731520"/>
+          </a:xfrm>
+          <a:prstGeom prst="rect">
+            <a:avLst/>
+          </a:prstGeom>
+        </p:spPr>
+      </p:pic>
+      <p:sp>
+        <p:nvSpPr>
+          <p:cNvPr id="25" name="Rectangle 24"/>
+          <p:cNvSpPr/>
+          <p:nvPr/>
+        </p:nvSpPr>
+        <p:spPr>
+          <a:xfrm>
+            <a:off x="3611880" y="4023359"/>
+            <a:ext cx="585216" cy="731520"/>
+          </a:xfrm>
+          <a:prstGeom prst="rect">
+            <a:avLst/>
+          </a:prstGeom>
+          <a:noFill/>
+          <a:ln w="12700">
+            <a:solidFill>
+              <a:srgbClr val="B1BBCA"/>
+            </a:solidFill>
+          </a:ln>
+          <a:effectLst/>
+        </p:spPr>
+        <p:style>
+          <a:lnRef idx="1">
+            <a:schemeClr val="accent1"/>
+          </a:lnRef>
+          <a:fillRef idx="3">
+            <a:schemeClr val="accent1"/>
+          </a:fillRef>
+          <a:effectRef idx="2">
+            <a:schemeClr val="accent1"/>
+          </a:effectRef>
+          <a:fontRef idx="minor">
+            <a:schemeClr val="lt1"/>
+          </a:fontRef>
+        </p:style>
+        <p:txBody>
+          <a:bodyPr rtlCol="0" anchor="ctr"/>
+          <a:lstStyle/>
+          <a:p>
+            <a:pPr algn="ctr"/>
+          </a:p>
+        </p:txBody>
+      </p:sp>
+      <p:sp>
+        <p:nvSpPr>
+          <p:cNvPr id="26" name="TextBox 25"/>
+          <p:cNvSpPr txBox="1"/>
+          <p:nvPr/>
+        </p:nvSpPr>
+        <p:spPr>
+          <a:xfrm>
+            <a:off x="4325112" y="4023359"/>
+            <a:ext cx="3136391" cy="914400"/>
           </a:xfrm>
           <a:prstGeom prst="rect">
             <a:avLst/>
@@ -14737,7 +16301,7 @@
       </p:sp>
       <p:sp>
         <p:nvSpPr>
-          <p:cNvPr id="23" name="TextBox 22"/>
+          <p:cNvPr id="27" name="TextBox 26"/>
           <p:cNvSpPr txBox="1"/>
           <p:nvPr/>
         </p:nvSpPr>
@@ -14785,7 +16349,7 @@
       </p:sp>
       <p:sp>
         <p:nvSpPr>
-          <p:cNvPr id="24" name="TextBox 23"/>
+          <p:cNvPr id="28" name="TextBox 27"/>
           <p:cNvSpPr txBox="1"/>
           <p:nvPr/>
         </p:nvSpPr>
@@ -14822,16 +16386,84 @@
           </a:p>
         </p:txBody>
       </p:sp>
-      <p:sp>
-        <p:nvSpPr>
-          <p:cNvPr id="25" name="TextBox 24"/>
-          <p:cNvSpPr txBox="1"/>
-          <p:nvPr/>
-        </p:nvSpPr>
+      <p:pic>
+        <p:nvPicPr>
+          <p:cNvPr id="29" name="Picture 28" descr="_ph-russia-reshetnikov.png"/>
+          <p:cNvPicPr>
+            <a:picLocks noChangeAspect="1"/>
+          </p:cNvPicPr>
+          <p:nvPr/>
+        </p:nvPicPr>
+        <p:blipFill>
+          <a:blip r:embed="rId5"/>
+          <a:stretch>
+            <a:fillRect/>
+          </a:stretch>
+        </p:blipFill>
         <p:spPr>
           <a:xfrm>
             <a:off x="7790688" y="4023359"/>
-            <a:ext cx="3849624" cy="914400"/>
+            <a:ext cx="585216" cy="731520"/>
+          </a:xfrm>
+          <a:prstGeom prst="rect">
+            <a:avLst/>
+          </a:prstGeom>
+        </p:spPr>
+      </p:pic>
+      <p:sp>
+        <p:nvSpPr>
+          <p:cNvPr id="30" name="Rectangle 29"/>
+          <p:cNvSpPr/>
+          <p:nvPr/>
+        </p:nvSpPr>
+        <p:spPr>
+          <a:xfrm>
+            <a:off x="7790688" y="4023359"/>
+            <a:ext cx="585216" cy="731520"/>
+          </a:xfrm>
+          <a:prstGeom prst="rect">
+            <a:avLst/>
+          </a:prstGeom>
+          <a:noFill/>
+          <a:ln w="12700">
+            <a:solidFill>
+              <a:srgbClr val="B1BBCA"/>
+            </a:solidFill>
+          </a:ln>
+          <a:effectLst/>
+        </p:spPr>
+        <p:style>
+          <a:lnRef idx="1">
+            <a:schemeClr val="accent1"/>
+          </a:lnRef>
+          <a:fillRef idx="3">
+            <a:schemeClr val="accent1"/>
+          </a:fillRef>
+          <a:effectRef idx="2">
+            <a:schemeClr val="accent1"/>
+          </a:effectRef>
+          <a:fontRef idx="minor">
+            <a:schemeClr val="lt1"/>
+          </a:fontRef>
+        </p:style>
+        <p:txBody>
+          <a:bodyPr rtlCol="0" anchor="ctr"/>
+          <a:lstStyle/>
+          <a:p>
+            <a:pPr algn="ctr"/>
+          </a:p>
+        </p:txBody>
+      </p:sp>
+      <p:sp>
+        <p:nvSpPr>
+          <p:cNvPr id="31" name="TextBox 30"/>
+          <p:cNvSpPr txBox="1"/>
+          <p:nvPr/>
+        </p:nvSpPr>
+        <p:spPr>
+          <a:xfrm>
+            <a:off x="8503920" y="4023359"/>
+            <a:ext cx="3136391" cy="914400"/>
           </a:xfrm>
           <a:prstGeom prst="rect">
             <a:avLst/>
@@ -14893,7 +16525,7 @@
       </p:sp>
       <p:sp>
         <p:nvSpPr>
-          <p:cNvPr id="26" name="TextBox 25"/>
+          <p:cNvPr id="32" name="TextBox 31"/>
           <p:cNvSpPr txBox="1"/>
           <p:nvPr/>
         </p:nvSpPr>
@@ -14941,7 +16573,7 @@
       </p:sp>
       <p:sp>
         <p:nvSpPr>
-          <p:cNvPr id="27" name="TextBox 26"/>
+          <p:cNvPr id="33" name="TextBox 32"/>
           <p:cNvSpPr txBox="1"/>
           <p:nvPr/>
         </p:nvSpPr>
@@ -14980,7 +16612,7 @@
       </p:sp>
       <p:cxnSp>
         <p:nvCxnSpPr>
-          <p:cNvPr id="28" name="Connector 27"/>
+          <p:cNvPr id="34" name="Connector 33"/>
           <p:cNvCxnSpPr/>
           <p:nvPr/>
         </p:nvCxnSpPr>
@@ -15016,7 +16648,7 @@
       </p:cxnSp>
       <p:sp>
         <p:nvSpPr>
-          <p:cNvPr id="29" name="TextBox 28"/>
+          <p:cNvPr id="35" name="TextBox 34"/>
           <p:cNvSpPr txBox="1"/>
           <p:nvPr/>
         </p:nvSpPr>
@@ -15050,7 +16682,7 @@
       </p:sp>
       <p:sp>
         <p:nvSpPr>
-          <p:cNvPr id="30" name="TextBox 29"/>
+          <p:cNvPr id="36" name="TextBox 35"/>
           <p:cNvSpPr txBox="1"/>
           <p:nvPr/>
         </p:nvSpPr>
@@ -15084,7 +16716,7 @@
       </p:sp>
       <p:sp>
         <p:nvSpPr>
-          <p:cNvPr id="31" name="TextBox 30"/>
+          <p:cNvPr id="37" name="TextBox 36"/>
           <p:cNvSpPr txBox="1"/>
           <p:nvPr/>
         </p:nvSpPr>
@@ -15758,16 +17390,84 @@
           </a:p>
         </p:txBody>
       </p:sp>
-      <p:sp>
-        <p:nvSpPr>
-          <p:cNvPr id="16" name="TextBox 15"/>
-          <p:cNvSpPr txBox="1"/>
-          <p:nvPr/>
-        </p:nvSpPr>
+      <p:pic>
+        <p:nvPicPr>
+          <p:cNvPr id="16" name="Picture 15" descr="_ph-russia-alikhanov.png"/>
+          <p:cNvPicPr>
+            <a:picLocks noChangeAspect="1"/>
+          </p:cNvPicPr>
+          <p:nvPr/>
+        </p:nvPicPr>
+        <p:blipFill>
+          <a:blip r:embed="rId3"/>
+          <a:stretch>
+            <a:fillRect/>
+          </a:stretch>
+        </p:blipFill>
         <p:spPr>
           <a:xfrm>
             <a:off x="3611880" y="1408176"/>
-            <a:ext cx="8028431" cy="256032"/>
+            <a:ext cx="731520" cy="914400"/>
+          </a:xfrm>
+          <a:prstGeom prst="rect">
+            <a:avLst/>
+          </a:prstGeom>
+        </p:spPr>
+      </p:pic>
+      <p:sp>
+        <p:nvSpPr>
+          <p:cNvPr id="17" name="Rectangle 16"/>
+          <p:cNvSpPr/>
+          <p:nvPr/>
+        </p:nvSpPr>
+        <p:spPr>
+          <a:xfrm>
+            <a:off x="3611880" y="1408176"/>
+            <a:ext cx="731520" cy="914400"/>
+          </a:xfrm>
+          <a:prstGeom prst="rect">
+            <a:avLst/>
+          </a:prstGeom>
+          <a:noFill/>
+          <a:ln w="12700">
+            <a:solidFill>
+              <a:srgbClr val="B1BBCA"/>
+            </a:solidFill>
+          </a:ln>
+          <a:effectLst/>
+        </p:spPr>
+        <p:style>
+          <a:lnRef idx="1">
+            <a:schemeClr val="accent1"/>
+          </a:lnRef>
+          <a:fillRef idx="3">
+            <a:schemeClr val="accent1"/>
+          </a:fillRef>
+          <a:effectRef idx="2">
+            <a:schemeClr val="accent1"/>
+          </a:effectRef>
+          <a:fontRef idx="minor">
+            <a:schemeClr val="lt1"/>
+          </a:fontRef>
+        </p:style>
+        <p:txBody>
+          <a:bodyPr rtlCol="0" anchor="ctr"/>
+          <a:lstStyle/>
+          <a:p>
+            <a:pPr algn="ctr"/>
+          </a:p>
+        </p:txBody>
+      </p:sp>
+      <p:sp>
+        <p:nvSpPr>
+          <p:cNvPr id="18" name="TextBox 17"/>
+          <p:cNvSpPr txBox="1"/>
+          <p:nvPr/>
+        </p:nvSpPr>
+        <p:spPr>
+          <a:xfrm>
+            <a:off x="4507992" y="1408176"/>
+            <a:ext cx="7132320" cy="256032"/>
           </a:xfrm>
           <a:prstGeom prst="rect">
             <a:avLst/>
@@ -15794,14 +17494,14 @@
       </p:sp>
       <p:sp>
         <p:nvSpPr>
-          <p:cNvPr id="17" name="TextBox 16"/>
-          <p:cNvSpPr txBox="1"/>
-          <p:nvPr/>
-        </p:nvSpPr>
-        <p:spPr>
-          <a:xfrm>
-            <a:off x="3611880" y="1682495"/>
-            <a:ext cx="8028431" cy="347472"/>
+          <p:cNvPr id="19" name="TextBox 18"/>
+          <p:cNvSpPr txBox="1"/>
+          <p:nvPr/>
+        </p:nvSpPr>
+        <p:spPr>
+          <a:xfrm>
+            <a:off x="4507992" y="1682495"/>
+            <a:ext cx="7132320" cy="347472"/>
           </a:xfrm>
           <a:prstGeom prst="rect">
             <a:avLst/>
@@ -15833,14 +17533,14 @@
       </p:sp>
       <p:sp>
         <p:nvSpPr>
-          <p:cNvPr id="18" name="TextBox 17"/>
-          <p:cNvSpPr txBox="1"/>
-          <p:nvPr/>
-        </p:nvSpPr>
-        <p:spPr>
-          <a:xfrm>
-            <a:off x="3611880" y="2048256"/>
-            <a:ext cx="8028431" cy="292608"/>
+          <p:cNvPr id="20" name="TextBox 19"/>
+          <p:cNvSpPr txBox="1"/>
+          <p:nvPr/>
+        </p:nvSpPr>
+        <p:spPr>
+          <a:xfrm>
+            <a:off x="4507992" y="2048256"/>
+            <a:ext cx="7132320" cy="292608"/>
           </a:xfrm>
           <a:prstGeom prst="rect">
             <a:avLst/>
@@ -15881,7 +17581,7 @@
       </p:sp>
       <p:sp>
         <p:nvSpPr>
-          <p:cNvPr id="19" name="TextBox 18"/>
+          <p:cNvPr id="21" name="TextBox 20"/>
           <p:cNvSpPr txBox="1"/>
           <p:nvPr/>
         </p:nvSpPr>
@@ -15920,7 +17620,7 @@
       </p:sp>
       <p:cxnSp>
         <p:nvCxnSpPr>
-          <p:cNvPr id="20" name="Connector 19"/>
+          <p:cNvPr id="22" name="Connector 21"/>
           <p:cNvCxnSpPr/>
           <p:nvPr/>
         </p:nvCxnSpPr>
@@ -15956,7 +17656,7 @@
       </p:cxnSp>
       <p:sp>
         <p:nvSpPr>
-          <p:cNvPr id="21" name="TextBox 20"/>
+          <p:cNvPr id="23" name="TextBox 22"/>
           <p:cNvSpPr txBox="1"/>
           <p:nvPr/>
         </p:nvSpPr>
@@ -15988,16 +17688,84 @@
           </a:p>
         </p:txBody>
       </p:sp>
-      <p:sp>
-        <p:nvSpPr>
-          <p:cNvPr id="22" name="TextBox 21"/>
-          <p:cNvSpPr txBox="1"/>
-          <p:nvPr/>
-        </p:nvSpPr>
+      <p:pic>
+        <p:nvPicPr>
+          <p:cNvPr id="24" name="Picture 23" descr="_ph-saudi-alqasabi.png"/>
+          <p:cNvPicPr>
+            <a:picLocks noChangeAspect="1"/>
+          </p:cNvPicPr>
+          <p:nvPr/>
+        </p:nvPicPr>
+        <p:blipFill>
+          <a:blip r:embed="rId4"/>
+          <a:stretch>
+            <a:fillRect/>
+          </a:stretch>
+        </p:blipFill>
         <p:spPr>
           <a:xfrm>
             <a:off x="3611880" y="4023359"/>
-            <a:ext cx="3849624" cy="914400"/>
+            <a:ext cx="585216" cy="731520"/>
+          </a:xfrm>
+          <a:prstGeom prst="rect">
+            <a:avLst/>
+          </a:prstGeom>
+        </p:spPr>
+      </p:pic>
+      <p:sp>
+        <p:nvSpPr>
+          <p:cNvPr id="25" name="Rectangle 24"/>
+          <p:cNvSpPr/>
+          <p:nvPr/>
+        </p:nvSpPr>
+        <p:spPr>
+          <a:xfrm>
+            <a:off x="3611880" y="4023359"/>
+            <a:ext cx="585216" cy="731520"/>
+          </a:xfrm>
+          <a:prstGeom prst="rect">
+            <a:avLst/>
+          </a:prstGeom>
+          <a:noFill/>
+          <a:ln w="12700">
+            <a:solidFill>
+              <a:srgbClr val="B1BBCA"/>
+            </a:solidFill>
+          </a:ln>
+          <a:effectLst/>
+        </p:spPr>
+        <p:style>
+          <a:lnRef idx="1">
+            <a:schemeClr val="accent1"/>
+          </a:lnRef>
+          <a:fillRef idx="3">
+            <a:schemeClr val="accent1"/>
+          </a:fillRef>
+          <a:effectRef idx="2">
+            <a:schemeClr val="accent1"/>
+          </a:effectRef>
+          <a:fontRef idx="minor">
+            <a:schemeClr val="lt1"/>
+          </a:fontRef>
+        </p:style>
+        <p:txBody>
+          <a:bodyPr rtlCol="0" anchor="ctr"/>
+          <a:lstStyle/>
+          <a:p>
+            <a:pPr algn="ctr"/>
+          </a:p>
+        </p:txBody>
+      </p:sp>
+      <p:sp>
+        <p:nvSpPr>
+          <p:cNvPr id="26" name="TextBox 25"/>
+          <p:cNvSpPr txBox="1"/>
+          <p:nvPr/>
+        </p:nvSpPr>
+        <p:spPr>
+          <a:xfrm>
+            <a:off x="4325112" y="4023359"/>
+            <a:ext cx="3136391" cy="914400"/>
           </a:xfrm>
           <a:prstGeom prst="rect">
             <a:avLst/>
@@ -16059,7 +17827,7 @@
       </p:sp>
       <p:sp>
         <p:nvSpPr>
-          <p:cNvPr id="23" name="TextBox 22"/>
+          <p:cNvPr id="27" name="TextBox 26"/>
           <p:cNvSpPr txBox="1"/>
           <p:nvPr/>
         </p:nvSpPr>
@@ -16107,7 +17875,7 @@
       </p:sp>
       <p:sp>
         <p:nvSpPr>
-          <p:cNvPr id="24" name="TextBox 23"/>
+          <p:cNvPr id="28" name="TextBox 27"/>
           <p:cNvSpPr txBox="1"/>
           <p:nvPr/>
         </p:nvSpPr>
@@ -16144,16 +17912,84 @@
           </a:p>
         </p:txBody>
       </p:sp>
-      <p:sp>
-        <p:nvSpPr>
-          <p:cNvPr id="25" name="TextBox 24"/>
-          <p:cNvSpPr txBox="1"/>
-          <p:nvPr/>
-        </p:nvSpPr>
+      <p:pic>
+        <p:nvPicPr>
+          <p:cNvPr id="29" name="Picture 28" descr="_ph-saudi-alqasabi.png"/>
+          <p:cNvPicPr>
+            <a:picLocks noChangeAspect="1"/>
+          </p:cNvPicPr>
+          <p:nvPr/>
+        </p:nvPicPr>
+        <p:blipFill>
+          <a:blip r:embed="rId4"/>
+          <a:stretch>
+            <a:fillRect/>
+          </a:stretch>
+        </p:blipFill>
         <p:spPr>
           <a:xfrm>
             <a:off x="7790688" y="4023359"/>
-            <a:ext cx="3849624" cy="914400"/>
+            <a:ext cx="585216" cy="731520"/>
+          </a:xfrm>
+          <a:prstGeom prst="rect">
+            <a:avLst/>
+          </a:prstGeom>
+        </p:spPr>
+      </p:pic>
+      <p:sp>
+        <p:nvSpPr>
+          <p:cNvPr id="30" name="Rectangle 29"/>
+          <p:cNvSpPr/>
+          <p:nvPr/>
+        </p:nvSpPr>
+        <p:spPr>
+          <a:xfrm>
+            <a:off x="7790688" y="4023359"/>
+            <a:ext cx="585216" cy="731520"/>
+          </a:xfrm>
+          <a:prstGeom prst="rect">
+            <a:avLst/>
+          </a:prstGeom>
+          <a:noFill/>
+          <a:ln w="12700">
+            <a:solidFill>
+              <a:srgbClr val="B1BBCA"/>
+            </a:solidFill>
+          </a:ln>
+          <a:effectLst/>
+        </p:spPr>
+        <p:style>
+          <a:lnRef idx="1">
+            <a:schemeClr val="accent1"/>
+          </a:lnRef>
+          <a:fillRef idx="3">
+            <a:schemeClr val="accent1"/>
+          </a:fillRef>
+          <a:effectRef idx="2">
+            <a:schemeClr val="accent1"/>
+          </a:effectRef>
+          <a:fontRef idx="minor">
+            <a:schemeClr val="lt1"/>
+          </a:fontRef>
+        </p:style>
+        <p:txBody>
+          <a:bodyPr rtlCol="0" anchor="ctr"/>
+          <a:lstStyle/>
+          <a:p>
+            <a:pPr algn="ctr"/>
+          </a:p>
+        </p:txBody>
+      </p:sp>
+      <p:sp>
+        <p:nvSpPr>
+          <p:cNvPr id="31" name="TextBox 30"/>
+          <p:cNvSpPr txBox="1"/>
+          <p:nvPr/>
+        </p:nvSpPr>
+        <p:spPr>
+          <a:xfrm>
+            <a:off x="8503920" y="4023359"/>
+            <a:ext cx="3136391" cy="914400"/>
           </a:xfrm>
           <a:prstGeom prst="rect">
             <a:avLst/>
@@ -16224,7 +18060,7 @@
       </p:sp>
       <p:sp>
         <p:nvSpPr>
-          <p:cNvPr id="26" name="TextBox 25"/>
+          <p:cNvPr id="32" name="TextBox 31"/>
           <p:cNvSpPr txBox="1"/>
           <p:nvPr/>
         </p:nvSpPr>
@@ -16263,7 +18099,7 @@
       </p:sp>
       <p:sp>
         <p:nvSpPr>
-          <p:cNvPr id="27" name="TextBox 26"/>
+          <p:cNvPr id="33" name="TextBox 32"/>
           <p:cNvSpPr txBox="1"/>
           <p:nvPr/>
         </p:nvSpPr>
@@ -16302,7 +18138,7 @@
       </p:sp>
       <p:cxnSp>
         <p:nvCxnSpPr>
-          <p:cNvPr id="28" name="Connector 27"/>
+          <p:cNvPr id="34" name="Connector 33"/>
           <p:cNvCxnSpPr/>
           <p:nvPr/>
         </p:nvCxnSpPr>
@@ -16338,7 +18174,7 @@
       </p:cxnSp>
       <p:sp>
         <p:nvSpPr>
-          <p:cNvPr id="29" name="TextBox 28"/>
+          <p:cNvPr id="35" name="TextBox 34"/>
           <p:cNvSpPr txBox="1"/>
           <p:nvPr/>
         </p:nvSpPr>
@@ -16372,7 +18208,7 @@
       </p:sp>
       <p:sp>
         <p:nvSpPr>
-          <p:cNvPr id="30" name="TextBox 29"/>
+          <p:cNvPr id="36" name="TextBox 35"/>
           <p:cNvSpPr txBox="1"/>
           <p:nvPr/>
         </p:nvSpPr>
@@ -16406,7 +18242,7 @@
       </p:sp>
       <p:sp>
         <p:nvSpPr>
-          <p:cNvPr id="31" name="TextBox 30"/>
+          <p:cNvPr id="37" name="TextBox 36"/>
           <p:cNvSpPr txBox="1"/>
           <p:nvPr/>
         </p:nvSpPr>
@@ -17566,16 +19402,84 @@
           </a:p>
         </p:txBody>
       </p:sp>
-      <p:sp>
-        <p:nvSpPr>
-          <p:cNvPr id="16" name="TextBox 15"/>
-          <p:cNvSpPr txBox="1"/>
-          <p:nvPr/>
-        </p:nvSpPr>
+      <p:pic>
+        <p:nvPicPr>
+          <p:cNvPr id="16" name="Picture 15" descr="_ph-korea-bae.png"/>
+          <p:cNvPicPr>
+            <a:picLocks noChangeAspect="1"/>
+          </p:cNvPicPr>
+          <p:nvPr/>
+        </p:nvPicPr>
+        <p:blipFill>
+          <a:blip r:embed="rId3"/>
+          <a:stretch>
+            <a:fillRect/>
+          </a:stretch>
+        </p:blipFill>
         <p:spPr>
           <a:xfrm>
             <a:off x="3611880" y="1408176"/>
-            <a:ext cx="8028431" cy="256032"/>
+            <a:ext cx="731520" cy="914400"/>
+          </a:xfrm>
+          <a:prstGeom prst="rect">
+            <a:avLst/>
+          </a:prstGeom>
+        </p:spPr>
+      </p:pic>
+      <p:sp>
+        <p:nvSpPr>
+          <p:cNvPr id="17" name="Rectangle 16"/>
+          <p:cNvSpPr/>
+          <p:nvPr/>
+        </p:nvSpPr>
+        <p:spPr>
+          <a:xfrm>
+            <a:off x="3611880" y="1408176"/>
+            <a:ext cx="731520" cy="914400"/>
+          </a:xfrm>
+          <a:prstGeom prst="rect">
+            <a:avLst/>
+          </a:prstGeom>
+          <a:noFill/>
+          <a:ln w="12700">
+            <a:solidFill>
+              <a:srgbClr val="B1BBCA"/>
+            </a:solidFill>
+          </a:ln>
+          <a:effectLst/>
+        </p:spPr>
+        <p:style>
+          <a:lnRef idx="1">
+            <a:schemeClr val="accent1"/>
+          </a:lnRef>
+          <a:fillRef idx="3">
+            <a:schemeClr val="accent1"/>
+          </a:fillRef>
+          <a:effectRef idx="2">
+            <a:schemeClr val="accent1"/>
+          </a:effectRef>
+          <a:fontRef idx="minor">
+            <a:schemeClr val="lt1"/>
+          </a:fontRef>
+        </p:style>
+        <p:txBody>
+          <a:bodyPr rtlCol="0" anchor="ctr"/>
+          <a:lstStyle/>
+          <a:p>
+            <a:pPr algn="ctr"/>
+          </a:p>
+        </p:txBody>
+      </p:sp>
+      <p:sp>
+        <p:nvSpPr>
+          <p:cNvPr id="18" name="TextBox 17"/>
+          <p:cNvSpPr txBox="1"/>
+          <p:nvPr/>
+        </p:nvSpPr>
+        <p:spPr>
+          <a:xfrm>
+            <a:off x="4507992" y="1408176"/>
+            <a:ext cx="7132320" cy="256032"/>
           </a:xfrm>
           <a:prstGeom prst="rect">
             <a:avLst/>
@@ -17602,14 +19506,14 @@
       </p:sp>
       <p:sp>
         <p:nvSpPr>
-          <p:cNvPr id="17" name="TextBox 16"/>
-          <p:cNvSpPr txBox="1"/>
-          <p:nvPr/>
-        </p:nvSpPr>
-        <p:spPr>
-          <a:xfrm>
-            <a:off x="3611880" y="1682495"/>
-            <a:ext cx="8028431" cy="347472"/>
+          <p:cNvPr id="19" name="TextBox 18"/>
+          <p:cNvSpPr txBox="1"/>
+          <p:nvPr/>
+        </p:nvSpPr>
+        <p:spPr>
+          <a:xfrm>
+            <a:off x="4507992" y="1682495"/>
+            <a:ext cx="7132320" cy="347472"/>
           </a:xfrm>
           <a:prstGeom prst="rect">
             <a:avLst/>
@@ -17641,14 +19545,14 @@
       </p:sp>
       <p:sp>
         <p:nvSpPr>
-          <p:cNvPr id="18" name="TextBox 17"/>
-          <p:cNvSpPr txBox="1"/>
-          <p:nvPr/>
-        </p:nvSpPr>
-        <p:spPr>
-          <a:xfrm>
-            <a:off x="3611880" y="2048256"/>
-            <a:ext cx="8028431" cy="292608"/>
+          <p:cNvPr id="20" name="TextBox 19"/>
+          <p:cNvSpPr txBox="1"/>
+          <p:nvPr/>
+        </p:nvSpPr>
+        <p:spPr>
+          <a:xfrm>
+            <a:off x="4507992" y="2048256"/>
+            <a:ext cx="7132320" cy="292608"/>
           </a:xfrm>
           <a:prstGeom prst="rect">
             <a:avLst/>
@@ -17689,7 +19593,7 @@
       </p:sp>
       <p:sp>
         <p:nvSpPr>
-          <p:cNvPr id="19" name="TextBox 18"/>
+          <p:cNvPr id="21" name="TextBox 20"/>
           <p:cNvSpPr txBox="1"/>
           <p:nvPr/>
         </p:nvSpPr>
@@ -17728,7 +19632,7 @@
       </p:sp>
       <p:cxnSp>
         <p:nvCxnSpPr>
-          <p:cNvPr id="20" name="Connector 19"/>
+          <p:cNvPr id="22" name="Connector 21"/>
           <p:cNvCxnSpPr/>
           <p:nvPr/>
         </p:nvCxnSpPr>
@@ -17764,7 +19668,7 @@
       </p:cxnSp>
       <p:sp>
         <p:nvSpPr>
-          <p:cNvPr id="21" name="TextBox 20"/>
+          <p:cNvPr id="23" name="TextBox 22"/>
           <p:cNvSpPr txBox="1"/>
           <p:nvPr/>
         </p:nvSpPr>
@@ -17796,16 +19700,84 @@
           </a:p>
         </p:txBody>
       </p:sp>
-      <p:sp>
-        <p:nvSpPr>
-          <p:cNvPr id="22" name="TextBox 21"/>
-          <p:cNvSpPr txBox="1"/>
-          <p:nvPr/>
-        </p:nvSpPr>
+      <p:pic>
+        <p:nvPicPr>
+          <p:cNvPr id="24" name="Picture 23" descr="_ph-korea-kim.png"/>
+          <p:cNvPicPr>
+            <a:picLocks noChangeAspect="1"/>
+          </p:cNvPicPr>
+          <p:nvPr/>
+        </p:nvPicPr>
+        <p:blipFill>
+          <a:blip r:embed="rId4"/>
+          <a:stretch>
+            <a:fillRect/>
+          </a:stretch>
+        </p:blipFill>
         <p:spPr>
           <a:xfrm>
             <a:off x="3611880" y="4023359"/>
-            <a:ext cx="3849624" cy="914400"/>
+            <a:ext cx="585216" cy="731520"/>
+          </a:xfrm>
+          <a:prstGeom prst="rect">
+            <a:avLst/>
+          </a:prstGeom>
+        </p:spPr>
+      </p:pic>
+      <p:sp>
+        <p:nvSpPr>
+          <p:cNvPr id="25" name="Rectangle 24"/>
+          <p:cNvSpPr/>
+          <p:nvPr/>
+        </p:nvSpPr>
+        <p:spPr>
+          <a:xfrm>
+            <a:off x="3611880" y="4023359"/>
+            <a:ext cx="585216" cy="731520"/>
+          </a:xfrm>
+          <a:prstGeom prst="rect">
+            <a:avLst/>
+          </a:prstGeom>
+          <a:noFill/>
+          <a:ln w="12700">
+            <a:solidFill>
+              <a:srgbClr val="B1BBCA"/>
+            </a:solidFill>
+          </a:ln>
+          <a:effectLst/>
+        </p:spPr>
+        <p:style>
+          <a:lnRef idx="1">
+            <a:schemeClr val="accent1"/>
+          </a:lnRef>
+          <a:fillRef idx="3">
+            <a:schemeClr val="accent1"/>
+          </a:fillRef>
+          <a:effectRef idx="2">
+            <a:schemeClr val="accent1"/>
+          </a:effectRef>
+          <a:fontRef idx="minor">
+            <a:schemeClr val="lt1"/>
+          </a:fontRef>
+        </p:style>
+        <p:txBody>
+          <a:bodyPr rtlCol="0" anchor="ctr"/>
+          <a:lstStyle/>
+          <a:p>
+            <a:pPr algn="ctr"/>
+          </a:p>
+        </p:txBody>
+      </p:sp>
+      <p:sp>
+        <p:nvSpPr>
+          <p:cNvPr id="26" name="TextBox 25"/>
+          <p:cNvSpPr txBox="1"/>
+          <p:nvPr/>
+        </p:nvSpPr>
+        <p:spPr>
+          <a:xfrm>
+            <a:off x="4325112" y="4023359"/>
+            <a:ext cx="3136391" cy="914400"/>
           </a:xfrm>
           <a:prstGeom prst="rect">
             <a:avLst/>
@@ -17867,7 +19839,7 @@
       </p:sp>
       <p:sp>
         <p:nvSpPr>
-          <p:cNvPr id="23" name="TextBox 22"/>
+          <p:cNvPr id="27" name="TextBox 26"/>
           <p:cNvSpPr txBox="1"/>
           <p:nvPr/>
         </p:nvSpPr>
@@ -17915,7 +19887,7 @@
       </p:sp>
       <p:sp>
         <p:nvSpPr>
-          <p:cNvPr id="24" name="TextBox 23"/>
+          <p:cNvPr id="28" name="TextBox 27"/>
           <p:cNvSpPr txBox="1"/>
           <p:nvPr/>
         </p:nvSpPr>
@@ -17952,16 +19924,84 @@
           </a:p>
         </p:txBody>
       </p:sp>
-      <p:sp>
-        <p:nvSpPr>
-          <p:cNvPr id="25" name="TextBox 24"/>
-          <p:cNvSpPr txBox="1"/>
-          <p:nvPr/>
-        </p:nvSpPr>
+      <p:pic>
+        <p:nvPicPr>
+          <p:cNvPr id="29" name="Picture 28" descr="_ph-china-hejun.png"/>
+          <p:cNvPicPr>
+            <a:picLocks noChangeAspect="1"/>
+          </p:cNvPicPr>
+          <p:nvPr/>
+        </p:nvPicPr>
+        <p:blipFill>
+          <a:blip r:embed="rId5"/>
+          <a:stretch>
+            <a:fillRect/>
+          </a:stretch>
+        </p:blipFill>
         <p:spPr>
           <a:xfrm>
             <a:off x="7790688" y="4023359"/>
-            <a:ext cx="3849624" cy="914400"/>
+            <a:ext cx="585216" cy="731520"/>
+          </a:xfrm>
+          <a:prstGeom prst="rect">
+            <a:avLst/>
+          </a:prstGeom>
+        </p:spPr>
+      </p:pic>
+      <p:sp>
+        <p:nvSpPr>
+          <p:cNvPr id="30" name="Rectangle 29"/>
+          <p:cNvSpPr/>
+          <p:nvPr/>
+        </p:nvSpPr>
+        <p:spPr>
+          <a:xfrm>
+            <a:off x="7790688" y="4023359"/>
+            <a:ext cx="585216" cy="731520"/>
+          </a:xfrm>
+          <a:prstGeom prst="rect">
+            <a:avLst/>
+          </a:prstGeom>
+          <a:noFill/>
+          <a:ln w="12700">
+            <a:solidFill>
+              <a:srgbClr val="B1BBCA"/>
+            </a:solidFill>
+          </a:ln>
+          <a:effectLst/>
+        </p:spPr>
+        <p:style>
+          <a:lnRef idx="1">
+            <a:schemeClr val="accent1"/>
+          </a:lnRef>
+          <a:fillRef idx="3">
+            <a:schemeClr val="accent1"/>
+          </a:fillRef>
+          <a:effectRef idx="2">
+            <a:schemeClr val="accent1"/>
+          </a:effectRef>
+          <a:fontRef idx="minor">
+            <a:schemeClr val="lt1"/>
+          </a:fontRef>
+        </p:style>
+        <p:txBody>
+          <a:bodyPr rtlCol="0" anchor="ctr"/>
+          <a:lstStyle/>
+          <a:p>
+            <a:pPr algn="ctr"/>
+          </a:p>
+        </p:txBody>
+      </p:sp>
+      <p:sp>
+        <p:nvSpPr>
+          <p:cNvPr id="31" name="TextBox 30"/>
+          <p:cNvSpPr txBox="1"/>
+          <p:nvPr/>
+        </p:nvSpPr>
+        <p:spPr>
+          <a:xfrm>
+            <a:off x="8503920" y="4023359"/>
+            <a:ext cx="3136391" cy="914400"/>
           </a:xfrm>
           <a:prstGeom prst="rect">
             <a:avLst/>
@@ -18023,7 +20063,7 @@
       </p:sp>
       <p:sp>
         <p:nvSpPr>
-          <p:cNvPr id="26" name="TextBox 25"/>
+          <p:cNvPr id="32" name="TextBox 31"/>
           <p:cNvSpPr txBox="1"/>
           <p:nvPr/>
         </p:nvSpPr>
@@ -18071,7 +20111,7 @@
       </p:sp>
       <p:sp>
         <p:nvSpPr>
-          <p:cNvPr id="27" name="TextBox 26"/>
+          <p:cNvPr id="33" name="TextBox 32"/>
           <p:cNvSpPr txBox="1"/>
           <p:nvPr/>
         </p:nvSpPr>
@@ -18110,7 +20150,7 @@
       </p:sp>
       <p:cxnSp>
         <p:nvCxnSpPr>
-          <p:cNvPr id="28" name="Connector 27"/>
+          <p:cNvPr id="34" name="Connector 33"/>
           <p:cNvCxnSpPr/>
           <p:nvPr/>
         </p:nvCxnSpPr>
@@ -18146,7 +20186,7 @@
       </p:cxnSp>
       <p:sp>
         <p:nvSpPr>
-          <p:cNvPr id="29" name="TextBox 28"/>
+          <p:cNvPr id="35" name="TextBox 34"/>
           <p:cNvSpPr txBox="1"/>
           <p:nvPr/>
         </p:nvSpPr>
@@ -18180,7 +20220,7 @@
       </p:sp>
       <p:sp>
         <p:nvSpPr>
-          <p:cNvPr id="30" name="TextBox 29"/>
+          <p:cNvPr id="36" name="TextBox 35"/>
           <p:cNvSpPr txBox="1"/>
           <p:nvPr/>
         </p:nvSpPr>
@@ -18214,7 +20254,7 @@
       </p:sp>
       <p:sp>
         <p:nvSpPr>
-          <p:cNvPr id="31" name="TextBox 30"/>
+          <p:cNvPr id="37" name="TextBox 36"/>
           <p:cNvSpPr txBox="1"/>
           <p:nvPr/>
         </p:nvSpPr>
@@ -18888,16 +20928,84 @@
           </a:p>
         </p:txBody>
       </p:sp>
-      <p:sp>
-        <p:nvSpPr>
-          <p:cNvPr id="16" name="TextBox 15"/>
-          <p:cNvSpPr txBox="1"/>
-          <p:nvPr/>
-        </p:nvSpPr>
+      <p:pic>
+        <p:nvPicPr>
+          <p:cNvPr id="16" name="Picture 15" descr="_ph-brazil-rosa.png"/>
+          <p:cNvPicPr>
+            <a:picLocks noChangeAspect="1"/>
+          </p:cNvPicPr>
+          <p:nvPr/>
+        </p:nvPicPr>
+        <p:blipFill>
+          <a:blip r:embed="rId3"/>
+          <a:stretch>
+            <a:fillRect/>
+          </a:stretch>
+        </p:blipFill>
         <p:spPr>
           <a:xfrm>
             <a:off x="3611880" y="1408176"/>
-            <a:ext cx="8028431" cy="256032"/>
+            <a:ext cx="731520" cy="914400"/>
+          </a:xfrm>
+          <a:prstGeom prst="rect">
+            <a:avLst/>
+          </a:prstGeom>
+        </p:spPr>
+      </p:pic>
+      <p:sp>
+        <p:nvSpPr>
+          <p:cNvPr id="17" name="Rectangle 16"/>
+          <p:cNvSpPr/>
+          <p:nvPr/>
+        </p:nvSpPr>
+        <p:spPr>
+          <a:xfrm>
+            <a:off x="3611880" y="1408176"/>
+            <a:ext cx="731520" cy="914400"/>
+          </a:xfrm>
+          <a:prstGeom prst="rect">
+            <a:avLst/>
+          </a:prstGeom>
+          <a:noFill/>
+          <a:ln w="12700">
+            <a:solidFill>
+              <a:srgbClr val="B1BBCA"/>
+            </a:solidFill>
+          </a:ln>
+          <a:effectLst/>
+        </p:spPr>
+        <p:style>
+          <a:lnRef idx="1">
+            <a:schemeClr val="accent1"/>
+          </a:lnRef>
+          <a:fillRef idx="3">
+            <a:schemeClr val="accent1"/>
+          </a:fillRef>
+          <a:effectRef idx="2">
+            <a:schemeClr val="accent1"/>
+          </a:effectRef>
+          <a:fontRef idx="minor">
+            <a:schemeClr val="lt1"/>
+          </a:fontRef>
+        </p:style>
+        <p:txBody>
+          <a:bodyPr rtlCol="0" anchor="ctr"/>
+          <a:lstStyle/>
+          <a:p>
+            <a:pPr algn="ctr"/>
+          </a:p>
+        </p:txBody>
+      </p:sp>
+      <p:sp>
+        <p:nvSpPr>
+          <p:cNvPr id="18" name="TextBox 17"/>
+          <p:cNvSpPr txBox="1"/>
+          <p:nvPr/>
+        </p:nvSpPr>
+        <p:spPr>
+          <a:xfrm>
+            <a:off x="4507992" y="1408176"/>
+            <a:ext cx="7132320" cy="256032"/>
           </a:xfrm>
           <a:prstGeom prst="rect">
             <a:avLst/>
@@ -18924,14 +21032,14 @@
       </p:sp>
       <p:sp>
         <p:nvSpPr>
-          <p:cNvPr id="17" name="TextBox 16"/>
-          <p:cNvSpPr txBox="1"/>
-          <p:nvPr/>
-        </p:nvSpPr>
-        <p:spPr>
-          <a:xfrm>
-            <a:off x="3611880" y="1682495"/>
-            <a:ext cx="8028431" cy="347472"/>
+          <p:cNvPr id="19" name="TextBox 18"/>
+          <p:cNvSpPr txBox="1"/>
+          <p:nvPr/>
+        </p:nvSpPr>
+        <p:spPr>
+          <a:xfrm>
+            <a:off x="4507992" y="1682495"/>
+            <a:ext cx="7132320" cy="347472"/>
           </a:xfrm>
           <a:prstGeom prst="rect">
             <a:avLst/>
@@ -18963,14 +21071,14 @@
       </p:sp>
       <p:sp>
         <p:nvSpPr>
-          <p:cNvPr id="18" name="TextBox 17"/>
-          <p:cNvSpPr txBox="1"/>
-          <p:nvPr/>
-        </p:nvSpPr>
-        <p:spPr>
-          <a:xfrm>
-            <a:off x="3611880" y="2048256"/>
-            <a:ext cx="8028431" cy="292608"/>
+          <p:cNvPr id="20" name="TextBox 19"/>
+          <p:cNvSpPr txBox="1"/>
+          <p:nvPr/>
+        </p:nvSpPr>
+        <p:spPr>
+          <a:xfrm>
+            <a:off x="4507992" y="2048256"/>
+            <a:ext cx="7132320" cy="292608"/>
           </a:xfrm>
           <a:prstGeom prst="rect">
             <a:avLst/>
@@ -19011,7 +21119,7 @@
       </p:sp>
       <p:sp>
         <p:nvSpPr>
-          <p:cNvPr id="19" name="TextBox 18"/>
+          <p:cNvPr id="21" name="TextBox 20"/>
           <p:cNvSpPr txBox="1"/>
           <p:nvPr/>
         </p:nvSpPr>
@@ -19066,7 +21174,7 @@
       </p:sp>
       <p:cxnSp>
         <p:nvCxnSpPr>
-          <p:cNvPr id="20" name="Connector 19"/>
+          <p:cNvPr id="22" name="Connector 21"/>
           <p:cNvCxnSpPr/>
           <p:nvPr/>
         </p:nvCxnSpPr>
@@ -19102,7 +21210,7 @@
       </p:cxnSp>
       <p:sp>
         <p:nvSpPr>
-          <p:cNvPr id="21" name="TextBox 20"/>
+          <p:cNvPr id="23" name="TextBox 22"/>
           <p:cNvSpPr txBox="1"/>
           <p:nvPr/>
         </p:nvSpPr>
@@ -19134,16 +21242,84 @@
           </a:p>
         </p:txBody>
       </p:sp>
-      <p:sp>
-        <p:nvSpPr>
-          <p:cNvPr id="22" name="TextBox 21"/>
-          <p:cNvSpPr txBox="1"/>
-          <p:nvPr/>
-        </p:nvSpPr>
+      <p:pic>
+        <p:nvPicPr>
+          <p:cNvPr id="24" name="Picture 23" descr="_ph-turkiye-bolat.png"/>
+          <p:cNvPicPr>
+            <a:picLocks noChangeAspect="1"/>
+          </p:cNvPicPr>
+          <p:nvPr/>
+        </p:nvPicPr>
+        <p:blipFill>
+          <a:blip r:embed="rId4"/>
+          <a:stretch>
+            <a:fillRect/>
+          </a:stretch>
+        </p:blipFill>
         <p:spPr>
           <a:xfrm>
             <a:off x="3611880" y="4041648"/>
-            <a:ext cx="8028431" cy="256032"/>
+            <a:ext cx="731520" cy="914400"/>
+          </a:xfrm>
+          <a:prstGeom prst="rect">
+            <a:avLst/>
+          </a:prstGeom>
+        </p:spPr>
+      </p:pic>
+      <p:sp>
+        <p:nvSpPr>
+          <p:cNvPr id="25" name="Rectangle 24"/>
+          <p:cNvSpPr/>
+          <p:nvPr/>
+        </p:nvSpPr>
+        <p:spPr>
+          <a:xfrm>
+            <a:off x="3611880" y="4041648"/>
+            <a:ext cx="731520" cy="914400"/>
+          </a:xfrm>
+          <a:prstGeom prst="rect">
+            <a:avLst/>
+          </a:prstGeom>
+          <a:noFill/>
+          <a:ln w="12700">
+            <a:solidFill>
+              <a:srgbClr val="B1BBCA"/>
+            </a:solidFill>
+          </a:ln>
+          <a:effectLst/>
+        </p:spPr>
+        <p:style>
+          <a:lnRef idx="1">
+            <a:schemeClr val="accent1"/>
+          </a:lnRef>
+          <a:fillRef idx="3">
+            <a:schemeClr val="accent1"/>
+          </a:fillRef>
+          <a:effectRef idx="2">
+            <a:schemeClr val="accent1"/>
+          </a:effectRef>
+          <a:fontRef idx="minor">
+            <a:schemeClr val="lt1"/>
+          </a:fontRef>
+        </p:style>
+        <p:txBody>
+          <a:bodyPr rtlCol="0" anchor="ctr"/>
+          <a:lstStyle/>
+          <a:p>
+            <a:pPr algn="ctr"/>
+          </a:p>
+        </p:txBody>
+      </p:sp>
+      <p:sp>
+        <p:nvSpPr>
+          <p:cNvPr id="26" name="TextBox 25"/>
+          <p:cNvSpPr txBox="1"/>
+          <p:nvPr/>
+        </p:nvSpPr>
+        <p:spPr>
+          <a:xfrm>
+            <a:off x="4507992" y="4041648"/>
+            <a:ext cx="7132320" cy="256032"/>
           </a:xfrm>
           <a:prstGeom prst="rect">
             <a:avLst/>
@@ -19170,14 +21346,14 @@
       </p:sp>
       <p:sp>
         <p:nvSpPr>
-          <p:cNvPr id="23" name="TextBox 22"/>
-          <p:cNvSpPr txBox="1"/>
-          <p:nvPr/>
-        </p:nvSpPr>
-        <p:spPr>
-          <a:xfrm>
-            <a:off x="3611880" y="4315968"/>
-            <a:ext cx="8028431" cy="347472"/>
+          <p:cNvPr id="27" name="TextBox 26"/>
+          <p:cNvSpPr txBox="1"/>
+          <p:nvPr/>
+        </p:nvSpPr>
+        <p:spPr>
+          <a:xfrm>
+            <a:off x="4507992" y="4315968"/>
+            <a:ext cx="7132320" cy="347472"/>
           </a:xfrm>
           <a:prstGeom prst="rect">
             <a:avLst/>
@@ -19209,14 +21385,14 @@
       </p:sp>
       <p:sp>
         <p:nvSpPr>
-          <p:cNvPr id="24" name="TextBox 23"/>
-          <p:cNvSpPr txBox="1"/>
-          <p:nvPr/>
-        </p:nvSpPr>
-        <p:spPr>
-          <a:xfrm>
-            <a:off x="3611880" y="4681727"/>
-            <a:ext cx="8028431" cy="292608"/>
+          <p:cNvPr id="28" name="TextBox 27"/>
+          <p:cNvSpPr txBox="1"/>
+          <p:nvPr/>
+        </p:nvSpPr>
+        <p:spPr>
+          <a:xfrm>
+            <a:off x="4507992" y="4681727"/>
+            <a:ext cx="7132320" cy="292608"/>
           </a:xfrm>
           <a:prstGeom prst="rect">
             <a:avLst/>
@@ -19257,7 +21433,7 @@
       </p:sp>
       <p:sp>
         <p:nvSpPr>
-          <p:cNvPr id="25" name="TextBox 24"/>
+          <p:cNvPr id="29" name="TextBox 28"/>
           <p:cNvSpPr txBox="1"/>
           <p:nvPr/>
         </p:nvSpPr>
@@ -19296,7 +21472,7 @@
       </p:sp>
       <p:cxnSp>
         <p:nvCxnSpPr>
-          <p:cNvPr id="26" name="Connector 25"/>
+          <p:cNvPr id="30" name="Connector 29"/>
           <p:cNvCxnSpPr/>
           <p:nvPr/>
         </p:nvCxnSpPr>
@@ -19332,7 +21508,7 @@
       </p:cxnSp>
       <p:sp>
         <p:nvSpPr>
-          <p:cNvPr id="27" name="TextBox 26"/>
+          <p:cNvPr id="31" name="TextBox 30"/>
           <p:cNvSpPr txBox="1"/>
           <p:nvPr/>
         </p:nvSpPr>
@@ -19366,7 +21542,7 @@
       </p:sp>
       <p:sp>
         <p:nvSpPr>
-          <p:cNvPr id="28" name="TextBox 27"/>
+          <p:cNvPr id="32" name="TextBox 31"/>
           <p:cNvSpPr txBox="1"/>
           <p:nvPr/>
         </p:nvSpPr>
@@ -19400,7 +21576,7 @@
       </p:sp>
       <p:sp>
         <p:nvSpPr>
-          <p:cNvPr id="29" name="TextBox 28"/>
+          <p:cNvPr id="33" name="TextBox 32"/>
           <p:cNvSpPr txBox="1"/>
           <p:nvPr/>
         </p:nvSpPr>
@@ -20074,16 +22250,84 @@
           </a:p>
         </p:txBody>
       </p:sp>
-      <p:sp>
-        <p:nvSpPr>
-          <p:cNvPr id="16" name="TextBox 15"/>
-          <p:cNvSpPr txBox="1"/>
-          <p:nvPr/>
-        </p:nvSpPr>
+      <p:pic>
+        <p:nvPicPr>
+          <p:cNvPr id="16" name="Picture 15" descr="_ph-uk-kendall.png"/>
+          <p:cNvPicPr>
+            <a:picLocks noChangeAspect="1"/>
+          </p:cNvPicPr>
+          <p:nvPr/>
+        </p:nvPicPr>
+        <p:blipFill>
+          <a:blip r:embed="rId3"/>
+          <a:stretch>
+            <a:fillRect/>
+          </a:stretch>
+        </p:blipFill>
         <p:spPr>
           <a:xfrm>
             <a:off x="3611880" y="1408176"/>
-            <a:ext cx="8028431" cy="256032"/>
+            <a:ext cx="731520" cy="914400"/>
+          </a:xfrm>
+          <a:prstGeom prst="rect">
+            <a:avLst/>
+          </a:prstGeom>
+        </p:spPr>
+      </p:pic>
+      <p:sp>
+        <p:nvSpPr>
+          <p:cNvPr id="17" name="Rectangle 16"/>
+          <p:cNvSpPr/>
+          <p:nvPr/>
+        </p:nvSpPr>
+        <p:spPr>
+          <a:xfrm>
+            <a:off x="3611880" y="1408176"/>
+            <a:ext cx="731520" cy="914400"/>
+          </a:xfrm>
+          <a:prstGeom prst="rect">
+            <a:avLst/>
+          </a:prstGeom>
+          <a:noFill/>
+          <a:ln w="12700">
+            <a:solidFill>
+              <a:srgbClr val="B1BBCA"/>
+            </a:solidFill>
+          </a:ln>
+          <a:effectLst/>
+        </p:spPr>
+        <p:style>
+          <a:lnRef idx="1">
+            <a:schemeClr val="accent1"/>
+          </a:lnRef>
+          <a:fillRef idx="3">
+            <a:schemeClr val="accent1"/>
+          </a:fillRef>
+          <a:effectRef idx="2">
+            <a:schemeClr val="accent1"/>
+          </a:effectRef>
+          <a:fontRef idx="minor">
+            <a:schemeClr val="lt1"/>
+          </a:fontRef>
+        </p:style>
+        <p:txBody>
+          <a:bodyPr rtlCol="0" anchor="ctr"/>
+          <a:lstStyle/>
+          <a:p>
+            <a:pPr algn="ctr"/>
+          </a:p>
+        </p:txBody>
+      </p:sp>
+      <p:sp>
+        <p:nvSpPr>
+          <p:cNvPr id="18" name="TextBox 17"/>
+          <p:cNvSpPr txBox="1"/>
+          <p:nvPr/>
+        </p:nvSpPr>
+        <p:spPr>
+          <a:xfrm>
+            <a:off x="4507992" y="1408176"/>
+            <a:ext cx="7132320" cy="256032"/>
           </a:xfrm>
           <a:prstGeom prst="rect">
             <a:avLst/>
@@ -20110,14 +22354,14 @@
       </p:sp>
       <p:sp>
         <p:nvSpPr>
-          <p:cNvPr id="17" name="TextBox 16"/>
-          <p:cNvSpPr txBox="1"/>
-          <p:nvPr/>
-        </p:nvSpPr>
-        <p:spPr>
-          <a:xfrm>
-            <a:off x="3611880" y="1682495"/>
-            <a:ext cx="8028431" cy="347472"/>
+          <p:cNvPr id="19" name="TextBox 18"/>
+          <p:cNvSpPr txBox="1"/>
+          <p:nvPr/>
+        </p:nvSpPr>
+        <p:spPr>
+          <a:xfrm>
+            <a:off x="4507992" y="1682495"/>
+            <a:ext cx="7132320" cy="347472"/>
           </a:xfrm>
           <a:prstGeom prst="rect">
             <a:avLst/>
@@ -20149,14 +22393,14 @@
       </p:sp>
       <p:sp>
         <p:nvSpPr>
-          <p:cNvPr id="18" name="TextBox 17"/>
-          <p:cNvSpPr txBox="1"/>
-          <p:nvPr/>
-        </p:nvSpPr>
-        <p:spPr>
-          <a:xfrm>
-            <a:off x="3611880" y="2048256"/>
-            <a:ext cx="8028431" cy="292608"/>
+          <p:cNvPr id="20" name="TextBox 19"/>
+          <p:cNvSpPr txBox="1"/>
+          <p:nvPr/>
+        </p:nvSpPr>
+        <p:spPr>
+          <a:xfrm>
+            <a:off x="4507992" y="2048256"/>
+            <a:ext cx="7132320" cy="292608"/>
           </a:xfrm>
           <a:prstGeom prst="rect">
             <a:avLst/>
@@ -20197,7 +22441,7 @@
       </p:sp>
       <p:sp>
         <p:nvSpPr>
-          <p:cNvPr id="19" name="TextBox 18"/>
+          <p:cNvPr id="21" name="TextBox 20"/>
           <p:cNvSpPr txBox="1"/>
           <p:nvPr/>
         </p:nvSpPr>
@@ -20252,7 +22496,7 @@
       </p:sp>
       <p:cxnSp>
         <p:nvCxnSpPr>
-          <p:cNvPr id="20" name="Connector 19"/>
+          <p:cNvPr id="22" name="Connector 21"/>
           <p:cNvCxnSpPr/>
           <p:nvPr/>
         </p:nvCxnSpPr>
@@ -20288,7 +22532,7 @@
       </p:cxnSp>
       <p:sp>
         <p:nvSpPr>
-          <p:cNvPr id="21" name="TextBox 20"/>
+          <p:cNvPr id="23" name="TextBox 22"/>
           <p:cNvSpPr txBox="1"/>
           <p:nvPr/>
         </p:nvSpPr>
@@ -20320,16 +22564,84 @@
           </a:p>
         </p:txBody>
       </p:sp>
-      <p:sp>
-        <p:nvSpPr>
-          <p:cNvPr id="22" name="TextBox 21"/>
-          <p:cNvSpPr txBox="1"/>
-          <p:nvPr/>
-        </p:nvSpPr>
+      <p:pic>
+        <p:nvPicPr>
+          <p:cNvPr id="24" name="Picture 23" descr="_ph-uk-kyle.png"/>
+          <p:cNvPicPr>
+            <a:picLocks noChangeAspect="1"/>
+          </p:cNvPicPr>
+          <p:nvPr/>
+        </p:nvPicPr>
+        <p:blipFill>
+          <a:blip r:embed="rId4"/>
+          <a:stretch>
+            <a:fillRect/>
+          </a:stretch>
+        </p:blipFill>
         <p:spPr>
           <a:xfrm>
             <a:off x="3611880" y="4023359"/>
-            <a:ext cx="3849624" cy="914400"/>
+            <a:ext cx="585216" cy="731520"/>
+          </a:xfrm>
+          <a:prstGeom prst="rect">
+            <a:avLst/>
+          </a:prstGeom>
+        </p:spPr>
+      </p:pic>
+      <p:sp>
+        <p:nvSpPr>
+          <p:cNvPr id="25" name="Rectangle 24"/>
+          <p:cNvSpPr/>
+          <p:nvPr/>
+        </p:nvSpPr>
+        <p:spPr>
+          <a:xfrm>
+            <a:off x="3611880" y="4023359"/>
+            <a:ext cx="585216" cy="731520"/>
+          </a:xfrm>
+          <a:prstGeom prst="rect">
+            <a:avLst/>
+          </a:prstGeom>
+          <a:noFill/>
+          <a:ln w="12700">
+            <a:solidFill>
+              <a:srgbClr val="B1BBCA"/>
+            </a:solidFill>
+          </a:ln>
+          <a:effectLst/>
+        </p:spPr>
+        <p:style>
+          <a:lnRef idx="1">
+            <a:schemeClr val="accent1"/>
+          </a:lnRef>
+          <a:fillRef idx="3">
+            <a:schemeClr val="accent1"/>
+          </a:fillRef>
+          <a:effectRef idx="2">
+            <a:schemeClr val="accent1"/>
+          </a:effectRef>
+          <a:fontRef idx="minor">
+            <a:schemeClr val="lt1"/>
+          </a:fontRef>
+        </p:style>
+        <p:txBody>
+          <a:bodyPr rtlCol="0" anchor="ctr"/>
+          <a:lstStyle/>
+          <a:p>
+            <a:pPr algn="ctr"/>
+          </a:p>
+        </p:txBody>
+      </p:sp>
+      <p:sp>
+        <p:nvSpPr>
+          <p:cNvPr id="26" name="TextBox 25"/>
+          <p:cNvSpPr txBox="1"/>
+          <p:nvPr/>
+        </p:nvSpPr>
+        <p:spPr>
+          <a:xfrm>
+            <a:off x="4325112" y="4023359"/>
+            <a:ext cx="3136391" cy="914400"/>
           </a:xfrm>
           <a:prstGeom prst="rect">
             <a:avLst/>
@@ -20391,7 +22703,7 @@
       </p:sp>
       <p:sp>
         <p:nvSpPr>
-          <p:cNvPr id="23" name="TextBox 22"/>
+          <p:cNvPr id="27" name="TextBox 26"/>
           <p:cNvSpPr txBox="1"/>
           <p:nvPr/>
         </p:nvSpPr>
@@ -20439,7 +22751,7 @@
       </p:sp>
       <p:sp>
         <p:nvSpPr>
-          <p:cNvPr id="24" name="TextBox 23"/>
+          <p:cNvPr id="28" name="TextBox 27"/>
           <p:cNvSpPr txBox="1"/>
           <p:nvPr/>
         </p:nvSpPr>
@@ -20476,16 +22788,84 @@
           </a:p>
         </p:txBody>
       </p:sp>
-      <p:sp>
-        <p:nvSpPr>
-          <p:cNvPr id="25" name="TextBox 24"/>
-          <p:cNvSpPr txBox="1"/>
-          <p:nvPr/>
-        </p:nvSpPr>
+      <p:pic>
+        <p:nvPicPr>
+          <p:cNvPr id="29" name="Picture 28" descr="_ph-uk-bryant.png"/>
+          <p:cNvPicPr>
+            <a:picLocks noChangeAspect="1"/>
+          </p:cNvPicPr>
+          <p:nvPr/>
+        </p:nvPicPr>
+        <p:blipFill>
+          <a:blip r:embed="rId5"/>
+          <a:stretch>
+            <a:fillRect/>
+          </a:stretch>
+        </p:blipFill>
         <p:spPr>
           <a:xfrm>
             <a:off x="7790688" y="4023359"/>
-            <a:ext cx="3849624" cy="914400"/>
+            <a:ext cx="585216" cy="731520"/>
+          </a:xfrm>
+          <a:prstGeom prst="rect">
+            <a:avLst/>
+          </a:prstGeom>
+        </p:spPr>
+      </p:pic>
+      <p:sp>
+        <p:nvSpPr>
+          <p:cNvPr id="30" name="Rectangle 29"/>
+          <p:cNvSpPr/>
+          <p:nvPr/>
+        </p:nvSpPr>
+        <p:spPr>
+          <a:xfrm>
+            <a:off x="7790688" y="4023359"/>
+            <a:ext cx="585216" cy="731520"/>
+          </a:xfrm>
+          <a:prstGeom prst="rect">
+            <a:avLst/>
+          </a:prstGeom>
+          <a:noFill/>
+          <a:ln w="12700">
+            <a:solidFill>
+              <a:srgbClr val="B1BBCA"/>
+            </a:solidFill>
+          </a:ln>
+          <a:effectLst/>
+        </p:spPr>
+        <p:style>
+          <a:lnRef idx="1">
+            <a:schemeClr val="accent1"/>
+          </a:lnRef>
+          <a:fillRef idx="3">
+            <a:schemeClr val="accent1"/>
+          </a:fillRef>
+          <a:effectRef idx="2">
+            <a:schemeClr val="accent1"/>
+          </a:effectRef>
+          <a:fontRef idx="minor">
+            <a:schemeClr val="lt1"/>
+          </a:fontRef>
+        </p:style>
+        <p:txBody>
+          <a:bodyPr rtlCol="0" anchor="ctr"/>
+          <a:lstStyle/>
+          <a:p>
+            <a:pPr algn="ctr"/>
+          </a:p>
+        </p:txBody>
+      </p:sp>
+      <p:sp>
+        <p:nvSpPr>
+          <p:cNvPr id="31" name="TextBox 30"/>
+          <p:cNvSpPr txBox="1"/>
+          <p:nvPr/>
+        </p:nvSpPr>
+        <p:spPr>
+          <a:xfrm>
+            <a:off x="8503920" y="4023359"/>
+            <a:ext cx="3136391" cy="914400"/>
           </a:xfrm>
           <a:prstGeom prst="rect">
             <a:avLst/>
@@ -20547,7 +22927,7 @@
       </p:sp>
       <p:sp>
         <p:nvSpPr>
-          <p:cNvPr id="26" name="TextBox 25"/>
+          <p:cNvPr id="32" name="TextBox 31"/>
           <p:cNvSpPr txBox="1"/>
           <p:nvPr/>
         </p:nvSpPr>
@@ -20595,7 +22975,7 @@
       </p:sp>
       <p:sp>
         <p:nvSpPr>
-          <p:cNvPr id="27" name="TextBox 26"/>
+          <p:cNvPr id="33" name="TextBox 32"/>
           <p:cNvSpPr txBox="1"/>
           <p:nvPr/>
         </p:nvSpPr>
@@ -20634,7 +23014,7 @@
       </p:sp>
       <p:cxnSp>
         <p:nvCxnSpPr>
-          <p:cNvPr id="28" name="Connector 27"/>
+          <p:cNvPr id="34" name="Connector 33"/>
           <p:cNvCxnSpPr/>
           <p:nvPr/>
         </p:nvCxnSpPr>
@@ -20670,7 +23050,7 @@
       </p:cxnSp>
       <p:sp>
         <p:nvSpPr>
-          <p:cNvPr id="29" name="TextBox 28"/>
+          <p:cNvPr id="35" name="TextBox 34"/>
           <p:cNvSpPr txBox="1"/>
           <p:nvPr/>
         </p:nvSpPr>
@@ -20704,7 +23084,7 @@
       </p:sp>
       <p:sp>
         <p:nvSpPr>
-          <p:cNvPr id="30" name="TextBox 29"/>
+          <p:cNvPr id="36" name="TextBox 35"/>
           <p:cNvSpPr txBox="1"/>
           <p:nvPr/>
         </p:nvSpPr>
@@ -20738,7 +23118,7 @@
       </p:sp>
       <p:sp>
         <p:nvSpPr>
-          <p:cNvPr id="31" name="TextBox 30"/>
+          <p:cNvPr id="37" name="TextBox 36"/>
           <p:cNvSpPr txBox="1"/>
           <p:nvPr/>
         </p:nvSpPr>
@@ -21412,16 +23792,84 @@
           </a:p>
         </p:txBody>
       </p:sp>
-      <p:sp>
-        <p:nvSpPr>
-          <p:cNvPr id="16" name="TextBox 15"/>
-          <p:cNvSpPr txBox="1"/>
-          <p:nvPr/>
-        </p:nvSpPr>
+      <p:pic>
+        <p:nvPicPr>
+          <p:cNvPr id="16" name="Picture 15" descr="_ph-us-kratsios.png"/>
+          <p:cNvPicPr>
+            <a:picLocks noChangeAspect="1"/>
+          </p:cNvPicPr>
+          <p:nvPr/>
+        </p:nvPicPr>
+        <p:blipFill>
+          <a:blip r:embed="rId3"/>
+          <a:stretch>
+            <a:fillRect/>
+          </a:stretch>
+        </p:blipFill>
         <p:spPr>
           <a:xfrm>
             <a:off x="3611880" y="1389888"/>
-            <a:ext cx="3849624" cy="914400"/>
+            <a:ext cx="585216" cy="731520"/>
+          </a:xfrm>
+          <a:prstGeom prst="rect">
+            <a:avLst/>
+          </a:prstGeom>
+        </p:spPr>
+      </p:pic>
+      <p:sp>
+        <p:nvSpPr>
+          <p:cNvPr id="17" name="Rectangle 16"/>
+          <p:cNvSpPr/>
+          <p:nvPr/>
+        </p:nvSpPr>
+        <p:spPr>
+          <a:xfrm>
+            <a:off x="3611880" y="1389888"/>
+            <a:ext cx="585216" cy="731520"/>
+          </a:xfrm>
+          <a:prstGeom prst="rect">
+            <a:avLst/>
+          </a:prstGeom>
+          <a:noFill/>
+          <a:ln w="12700">
+            <a:solidFill>
+              <a:srgbClr val="B1BBCA"/>
+            </a:solidFill>
+          </a:ln>
+          <a:effectLst/>
+        </p:spPr>
+        <p:style>
+          <a:lnRef idx="1">
+            <a:schemeClr val="accent1"/>
+          </a:lnRef>
+          <a:fillRef idx="3">
+            <a:schemeClr val="accent1"/>
+          </a:fillRef>
+          <a:effectRef idx="2">
+            <a:schemeClr val="accent1"/>
+          </a:effectRef>
+          <a:fontRef idx="minor">
+            <a:schemeClr val="lt1"/>
+          </a:fontRef>
+        </p:style>
+        <p:txBody>
+          <a:bodyPr rtlCol="0" anchor="ctr"/>
+          <a:lstStyle/>
+          <a:p>
+            <a:pPr algn="ctr"/>
+          </a:p>
+        </p:txBody>
+      </p:sp>
+      <p:sp>
+        <p:nvSpPr>
+          <p:cNvPr id="18" name="TextBox 17"/>
+          <p:cNvSpPr txBox="1"/>
+          <p:nvPr/>
+        </p:nvSpPr>
+        <p:spPr>
+          <a:xfrm>
+            <a:off x="4325112" y="1389888"/>
+            <a:ext cx="3136391" cy="914400"/>
           </a:xfrm>
           <a:prstGeom prst="rect">
             <a:avLst/>
@@ -21483,7 +23931,7 @@
       </p:sp>
       <p:sp>
         <p:nvSpPr>
-          <p:cNvPr id="17" name="TextBox 16"/>
+          <p:cNvPr id="19" name="TextBox 18"/>
           <p:cNvSpPr txBox="1"/>
           <p:nvPr/>
         </p:nvSpPr>
@@ -21531,7 +23979,7 @@
       </p:sp>
       <p:sp>
         <p:nvSpPr>
-          <p:cNvPr id="18" name="TextBox 17"/>
+          <p:cNvPr id="20" name="TextBox 19"/>
           <p:cNvSpPr txBox="1"/>
           <p:nvPr/>
         </p:nvSpPr>
@@ -21568,16 +24016,84 @@
           </a:p>
         </p:txBody>
       </p:sp>
-      <p:sp>
-        <p:nvSpPr>
-          <p:cNvPr id="19" name="TextBox 18"/>
-          <p:cNvSpPr txBox="1"/>
-          <p:nvPr/>
-        </p:nvSpPr>
+      <p:pic>
+        <p:nvPicPr>
+          <p:cNvPr id="21" name="Picture 20" descr="_ph-japan-akazawa.png"/>
+          <p:cNvPicPr>
+            <a:picLocks noChangeAspect="1"/>
+          </p:cNvPicPr>
+          <p:nvPr/>
+        </p:nvPicPr>
+        <p:blipFill>
+          <a:blip r:embed="rId4"/>
+          <a:stretch>
+            <a:fillRect/>
+          </a:stretch>
+        </p:blipFill>
         <p:spPr>
           <a:xfrm>
             <a:off x="7790688" y="1389888"/>
-            <a:ext cx="3849624" cy="914400"/>
+            <a:ext cx="585216" cy="731520"/>
+          </a:xfrm>
+          <a:prstGeom prst="rect">
+            <a:avLst/>
+          </a:prstGeom>
+        </p:spPr>
+      </p:pic>
+      <p:sp>
+        <p:nvSpPr>
+          <p:cNvPr id="22" name="Rectangle 21"/>
+          <p:cNvSpPr/>
+          <p:nvPr/>
+        </p:nvSpPr>
+        <p:spPr>
+          <a:xfrm>
+            <a:off x="7790688" y="1389888"/>
+            <a:ext cx="585216" cy="731520"/>
+          </a:xfrm>
+          <a:prstGeom prst="rect">
+            <a:avLst/>
+          </a:prstGeom>
+          <a:noFill/>
+          <a:ln w="12700">
+            <a:solidFill>
+              <a:srgbClr val="B1BBCA"/>
+            </a:solidFill>
+          </a:ln>
+          <a:effectLst/>
+        </p:spPr>
+        <p:style>
+          <a:lnRef idx="1">
+            <a:schemeClr val="accent1"/>
+          </a:lnRef>
+          <a:fillRef idx="3">
+            <a:schemeClr val="accent1"/>
+          </a:fillRef>
+          <a:effectRef idx="2">
+            <a:schemeClr val="accent1"/>
+          </a:effectRef>
+          <a:fontRef idx="minor">
+            <a:schemeClr val="lt1"/>
+          </a:fontRef>
+        </p:style>
+        <p:txBody>
+          <a:bodyPr rtlCol="0" anchor="ctr"/>
+          <a:lstStyle/>
+          <a:p>
+            <a:pPr algn="ctr"/>
+          </a:p>
+        </p:txBody>
+      </p:sp>
+      <p:sp>
+        <p:nvSpPr>
+          <p:cNvPr id="23" name="TextBox 22"/>
+          <p:cNvSpPr txBox="1"/>
+          <p:nvPr/>
+        </p:nvSpPr>
+        <p:spPr>
+          <a:xfrm>
+            <a:off x="8503920" y="1389888"/>
+            <a:ext cx="3136391" cy="914400"/>
           </a:xfrm>
           <a:prstGeom prst="rect">
             <a:avLst/>
@@ -21639,7 +24155,7 @@
       </p:sp>
       <p:sp>
         <p:nvSpPr>
-          <p:cNvPr id="20" name="TextBox 19"/>
+          <p:cNvPr id="24" name="TextBox 23"/>
           <p:cNvSpPr txBox="1"/>
           <p:nvPr/>
         </p:nvSpPr>
@@ -21687,7 +24203,7 @@
       </p:sp>
       <p:sp>
         <p:nvSpPr>
-          <p:cNvPr id="21" name="TextBox 20"/>
+          <p:cNvPr id="25" name="TextBox 24"/>
           <p:cNvSpPr txBox="1"/>
           <p:nvPr/>
         </p:nvSpPr>
@@ -21726,7 +24242,7 @@
       </p:sp>
       <p:cxnSp>
         <p:nvCxnSpPr>
-          <p:cNvPr id="22" name="Connector 21"/>
+          <p:cNvPr id="26" name="Connector 25"/>
           <p:cNvCxnSpPr/>
           <p:nvPr/>
         </p:nvCxnSpPr>
@@ -21762,7 +24278,7 @@
       </p:cxnSp>
       <p:sp>
         <p:nvSpPr>
-          <p:cNvPr id="23" name="TextBox 22"/>
+          <p:cNvPr id="27" name="TextBox 26"/>
           <p:cNvSpPr txBox="1"/>
           <p:nvPr/>
         </p:nvSpPr>
@@ -21794,16 +24310,84 @@
           </a:p>
         </p:txBody>
       </p:sp>
-      <p:sp>
-        <p:nvSpPr>
-          <p:cNvPr id="24" name="TextBox 23"/>
-          <p:cNvSpPr txBox="1"/>
-          <p:nvPr/>
-        </p:nvSpPr>
+      <p:pic>
+        <p:nvPicPr>
+          <p:cNvPr id="28" name="Picture 27" descr="_ph-us-lutnick.png"/>
+          <p:cNvPicPr>
+            <a:picLocks noChangeAspect="1"/>
+          </p:cNvPicPr>
+          <p:nvPr/>
+        </p:nvPicPr>
+        <p:blipFill>
+          <a:blip r:embed="rId5"/>
+          <a:stretch>
+            <a:fillRect/>
+          </a:stretch>
+        </p:blipFill>
         <p:spPr>
           <a:xfrm>
             <a:off x="3611880" y="4023359"/>
-            <a:ext cx="3849624" cy="914400"/>
+            <a:ext cx="585216" cy="731520"/>
+          </a:xfrm>
+          <a:prstGeom prst="rect">
+            <a:avLst/>
+          </a:prstGeom>
+        </p:spPr>
+      </p:pic>
+      <p:sp>
+        <p:nvSpPr>
+          <p:cNvPr id="29" name="Rectangle 28"/>
+          <p:cNvSpPr/>
+          <p:nvPr/>
+        </p:nvSpPr>
+        <p:spPr>
+          <a:xfrm>
+            <a:off x="3611880" y="4023359"/>
+            <a:ext cx="585216" cy="731520"/>
+          </a:xfrm>
+          <a:prstGeom prst="rect">
+            <a:avLst/>
+          </a:prstGeom>
+          <a:noFill/>
+          <a:ln w="12700">
+            <a:solidFill>
+              <a:srgbClr val="B1BBCA"/>
+            </a:solidFill>
+          </a:ln>
+          <a:effectLst/>
+        </p:spPr>
+        <p:style>
+          <a:lnRef idx="1">
+            <a:schemeClr val="accent1"/>
+          </a:lnRef>
+          <a:fillRef idx="3">
+            <a:schemeClr val="accent1"/>
+          </a:fillRef>
+          <a:effectRef idx="2">
+            <a:schemeClr val="accent1"/>
+          </a:effectRef>
+          <a:fontRef idx="minor">
+            <a:schemeClr val="lt1"/>
+          </a:fontRef>
+        </p:style>
+        <p:txBody>
+          <a:bodyPr rtlCol="0" anchor="ctr"/>
+          <a:lstStyle/>
+          <a:p>
+            <a:pPr algn="ctr"/>
+          </a:p>
+        </p:txBody>
+      </p:sp>
+      <p:sp>
+        <p:nvSpPr>
+          <p:cNvPr id="30" name="TextBox 29"/>
+          <p:cNvSpPr txBox="1"/>
+          <p:nvPr/>
+        </p:nvSpPr>
+        <p:spPr>
+          <a:xfrm>
+            <a:off x="4325112" y="4023359"/>
+            <a:ext cx="3136391" cy="914400"/>
           </a:xfrm>
           <a:prstGeom prst="rect">
             <a:avLst/>
@@ -21865,7 +24449,7 @@
       </p:sp>
       <p:sp>
         <p:nvSpPr>
-          <p:cNvPr id="25" name="TextBox 24"/>
+          <p:cNvPr id="31" name="TextBox 30"/>
           <p:cNvSpPr txBox="1"/>
           <p:nvPr/>
         </p:nvSpPr>
@@ -21913,7 +24497,7 @@
       </p:sp>
       <p:sp>
         <p:nvSpPr>
-          <p:cNvPr id="26" name="TextBox 25"/>
+          <p:cNvPr id="32" name="TextBox 31"/>
           <p:cNvSpPr txBox="1"/>
           <p:nvPr/>
         </p:nvSpPr>
@@ -21950,16 +24534,84 @@
           </a:p>
         </p:txBody>
       </p:sp>
-      <p:sp>
-        <p:nvSpPr>
-          <p:cNvPr id="27" name="TextBox 26"/>
-          <p:cNvSpPr txBox="1"/>
-          <p:nvPr/>
-        </p:nvSpPr>
+      <p:pic>
+        <p:nvPicPr>
+          <p:cNvPr id="33" name="Picture 32" descr="_ph-us-greer.png"/>
+          <p:cNvPicPr>
+            <a:picLocks noChangeAspect="1"/>
+          </p:cNvPicPr>
+          <p:nvPr/>
+        </p:nvPicPr>
+        <p:blipFill>
+          <a:blip r:embed="rId6"/>
+          <a:stretch>
+            <a:fillRect/>
+          </a:stretch>
+        </p:blipFill>
         <p:spPr>
           <a:xfrm>
             <a:off x="7790688" y="4023359"/>
-            <a:ext cx="3849624" cy="914400"/>
+            <a:ext cx="585216" cy="731520"/>
+          </a:xfrm>
+          <a:prstGeom prst="rect">
+            <a:avLst/>
+          </a:prstGeom>
+        </p:spPr>
+      </p:pic>
+      <p:sp>
+        <p:nvSpPr>
+          <p:cNvPr id="34" name="Rectangle 33"/>
+          <p:cNvSpPr/>
+          <p:nvPr/>
+        </p:nvSpPr>
+        <p:spPr>
+          <a:xfrm>
+            <a:off x="7790688" y="4023359"/>
+            <a:ext cx="585216" cy="731520"/>
+          </a:xfrm>
+          <a:prstGeom prst="rect">
+            <a:avLst/>
+          </a:prstGeom>
+          <a:noFill/>
+          <a:ln w="12700">
+            <a:solidFill>
+              <a:srgbClr val="B1BBCA"/>
+            </a:solidFill>
+          </a:ln>
+          <a:effectLst/>
+        </p:spPr>
+        <p:style>
+          <a:lnRef idx="1">
+            <a:schemeClr val="accent1"/>
+          </a:lnRef>
+          <a:fillRef idx="3">
+            <a:schemeClr val="accent1"/>
+          </a:fillRef>
+          <a:effectRef idx="2">
+            <a:schemeClr val="accent1"/>
+          </a:effectRef>
+          <a:fontRef idx="minor">
+            <a:schemeClr val="lt1"/>
+          </a:fontRef>
+        </p:style>
+        <p:txBody>
+          <a:bodyPr rtlCol="0" anchor="ctr"/>
+          <a:lstStyle/>
+          <a:p>
+            <a:pPr algn="ctr"/>
+          </a:p>
+        </p:txBody>
+      </p:sp>
+      <p:sp>
+        <p:nvSpPr>
+          <p:cNvPr id="35" name="TextBox 34"/>
+          <p:cNvSpPr txBox="1"/>
+          <p:nvPr/>
+        </p:nvSpPr>
+        <p:spPr>
+          <a:xfrm>
+            <a:off x="8503920" y="4023359"/>
+            <a:ext cx="3136391" cy="914400"/>
           </a:xfrm>
           <a:prstGeom prst="rect">
             <a:avLst/>
@@ -22021,7 +24673,7 @@
       </p:sp>
       <p:sp>
         <p:nvSpPr>
-          <p:cNvPr id="28" name="TextBox 27"/>
+          <p:cNvPr id="36" name="TextBox 35"/>
           <p:cNvSpPr txBox="1"/>
           <p:nvPr/>
         </p:nvSpPr>
@@ -22069,7 +24721,7 @@
       </p:sp>
       <p:sp>
         <p:nvSpPr>
-          <p:cNvPr id="29" name="TextBox 28"/>
+          <p:cNvPr id="37" name="TextBox 36"/>
           <p:cNvSpPr txBox="1"/>
           <p:nvPr/>
         </p:nvSpPr>
@@ -22108,7 +24760,7 @@
       </p:sp>
       <p:cxnSp>
         <p:nvCxnSpPr>
-          <p:cNvPr id="30" name="Connector 29"/>
+          <p:cNvPr id="38" name="Connector 37"/>
           <p:cNvCxnSpPr/>
           <p:nvPr/>
         </p:nvCxnSpPr>
@@ -22144,7 +24796,7 @@
       </p:cxnSp>
       <p:sp>
         <p:nvSpPr>
-          <p:cNvPr id="31" name="TextBox 30"/>
+          <p:cNvPr id="39" name="TextBox 38"/>
           <p:cNvSpPr txBox="1"/>
           <p:nvPr/>
         </p:nvSpPr>
@@ -22178,7 +24830,7 @@
       </p:sp>
       <p:sp>
         <p:nvSpPr>
-          <p:cNvPr id="32" name="TextBox 31"/>
+          <p:cNvPr id="40" name="TextBox 39"/>
           <p:cNvSpPr txBox="1"/>
           <p:nvPr/>
         </p:nvSpPr>
@@ -22212,7 +24864,7 @@
       </p:sp>
       <p:sp>
         <p:nvSpPr>
-          <p:cNvPr id="33" name="TextBox 32"/>
+          <p:cNvPr id="41" name="TextBox 40"/>
           <p:cNvSpPr txBox="1"/>
           <p:nvPr/>
         </p:nvSpPr>
@@ -22929,16 +25581,84 @@
           </a:p>
         </p:txBody>
       </p:sp>
-      <p:sp>
-        <p:nvSpPr>
-          <p:cNvPr id="17" name="TextBox 16"/>
-          <p:cNvSpPr txBox="1"/>
-          <p:nvPr/>
-        </p:nvSpPr>
+      <p:pic>
+        <p:nvPicPr>
+          <p:cNvPr id="17" name="Picture 16" descr="_ph-bloc-virkkunen.png"/>
+          <p:cNvPicPr>
+            <a:picLocks noChangeAspect="1"/>
+          </p:cNvPicPr>
+          <p:nvPr/>
+        </p:nvPicPr>
+        <p:blipFill>
+          <a:blip r:embed="rId3"/>
+          <a:stretch>
+            <a:fillRect/>
+          </a:stretch>
+        </p:blipFill>
         <p:spPr>
           <a:xfrm>
             <a:off x="3611880" y="1408176"/>
-            <a:ext cx="8028431" cy="256032"/>
+            <a:ext cx="731520" cy="914400"/>
+          </a:xfrm>
+          <a:prstGeom prst="rect">
+            <a:avLst/>
+          </a:prstGeom>
+        </p:spPr>
+      </p:pic>
+      <p:sp>
+        <p:nvSpPr>
+          <p:cNvPr id="18" name="Rectangle 17"/>
+          <p:cNvSpPr/>
+          <p:nvPr/>
+        </p:nvSpPr>
+        <p:spPr>
+          <a:xfrm>
+            <a:off x="3611880" y="1408176"/>
+            <a:ext cx="731520" cy="914400"/>
+          </a:xfrm>
+          <a:prstGeom prst="rect">
+            <a:avLst/>
+          </a:prstGeom>
+          <a:noFill/>
+          <a:ln w="12700">
+            <a:solidFill>
+              <a:srgbClr val="B1BBCA"/>
+            </a:solidFill>
+          </a:ln>
+          <a:effectLst/>
+        </p:spPr>
+        <p:style>
+          <a:lnRef idx="1">
+            <a:schemeClr val="accent1"/>
+          </a:lnRef>
+          <a:fillRef idx="3">
+            <a:schemeClr val="accent1"/>
+          </a:fillRef>
+          <a:effectRef idx="2">
+            <a:schemeClr val="accent1"/>
+          </a:effectRef>
+          <a:fontRef idx="minor">
+            <a:schemeClr val="lt1"/>
+          </a:fontRef>
+        </p:style>
+        <p:txBody>
+          <a:bodyPr rtlCol="0" anchor="ctr"/>
+          <a:lstStyle/>
+          <a:p>
+            <a:pPr algn="ctr"/>
+          </a:p>
+        </p:txBody>
+      </p:sp>
+      <p:sp>
+        <p:nvSpPr>
+          <p:cNvPr id="19" name="TextBox 18"/>
+          <p:cNvSpPr txBox="1"/>
+          <p:nvPr/>
+        </p:nvSpPr>
+        <p:spPr>
+          <a:xfrm>
+            <a:off x="4507992" y="1408176"/>
+            <a:ext cx="7132320" cy="256032"/>
           </a:xfrm>
           <a:prstGeom prst="rect">
             <a:avLst/>
@@ -22965,14 +25685,14 @@
       </p:sp>
       <p:sp>
         <p:nvSpPr>
-          <p:cNvPr id="18" name="TextBox 17"/>
-          <p:cNvSpPr txBox="1"/>
-          <p:nvPr/>
-        </p:nvSpPr>
-        <p:spPr>
-          <a:xfrm>
-            <a:off x="3611880" y="1682495"/>
-            <a:ext cx="8028431" cy="347472"/>
+          <p:cNvPr id="20" name="TextBox 19"/>
+          <p:cNvSpPr txBox="1"/>
+          <p:nvPr/>
+        </p:nvSpPr>
+        <p:spPr>
+          <a:xfrm>
+            <a:off x="4507992" y="1682495"/>
+            <a:ext cx="7132320" cy="347472"/>
           </a:xfrm>
           <a:prstGeom prst="rect">
             <a:avLst/>
@@ -23004,14 +25724,14 @@
       </p:sp>
       <p:sp>
         <p:nvSpPr>
-          <p:cNvPr id="19" name="TextBox 18"/>
-          <p:cNvSpPr txBox="1"/>
-          <p:nvPr/>
-        </p:nvSpPr>
-        <p:spPr>
-          <a:xfrm>
-            <a:off x="3611880" y="2048256"/>
-            <a:ext cx="8028431" cy="292608"/>
+          <p:cNvPr id="21" name="TextBox 20"/>
+          <p:cNvSpPr txBox="1"/>
+          <p:nvPr/>
+        </p:nvSpPr>
+        <p:spPr>
+          <a:xfrm>
+            <a:off x="4507992" y="2048256"/>
+            <a:ext cx="7132320" cy="292608"/>
           </a:xfrm>
           <a:prstGeom prst="rect">
             <a:avLst/>
@@ -23052,7 +25772,7 @@
       </p:sp>
       <p:sp>
         <p:nvSpPr>
-          <p:cNvPr id="20" name="TextBox 19"/>
+          <p:cNvPr id="22" name="TextBox 21"/>
           <p:cNvSpPr txBox="1"/>
           <p:nvPr/>
         </p:nvSpPr>
@@ -23091,7 +25811,7 @@
       </p:sp>
       <p:cxnSp>
         <p:nvCxnSpPr>
-          <p:cNvPr id="21" name="Connector 20"/>
+          <p:cNvPr id="23" name="Connector 22"/>
           <p:cNvCxnSpPr/>
           <p:nvPr/>
         </p:nvCxnSpPr>
@@ -23127,7 +25847,7 @@
       </p:cxnSp>
       <p:sp>
         <p:nvSpPr>
-          <p:cNvPr id="22" name="TextBox 21"/>
+          <p:cNvPr id="24" name="TextBox 23"/>
           <p:cNvSpPr txBox="1"/>
           <p:nvPr/>
         </p:nvSpPr>
@@ -23159,16 +25879,84 @@
           </a:p>
         </p:txBody>
       </p:sp>
-      <p:sp>
-        <p:nvSpPr>
-          <p:cNvPr id="23" name="TextBox 22"/>
-          <p:cNvSpPr txBox="1"/>
-          <p:nvPr/>
-        </p:nvSpPr>
+      <p:pic>
+        <p:nvPicPr>
+          <p:cNvPr id="25" name="Picture 24" descr="_ph-bloc-sefcovic.png"/>
+          <p:cNvPicPr>
+            <a:picLocks noChangeAspect="1"/>
+          </p:cNvPicPr>
+          <p:nvPr/>
+        </p:nvPicPr>
+        <p:blipFill>
+          <a:blip r:embed="rId4"/>
+          <a:stretch>
+            <a:fillRect/>
+          </a:stretch>
+        </p:blipFill>
         <p:spPr>
           <a:xfrm>
             <a:off x="3611880" y="4041648"/>
-            <a:ext cx="8028431" cy="256032"/>
+            <a:ext cx="731520" cy="914400"/>
+          </a:xfrm>
+          <a:prstGeom prst="rect">
+            <a:avLst/>
+          </a:prstGeom>
+        </p:spPr>
+      </p:pic>
+      <p:sp>
+        <p:nvSpPr>
+          <p:cNvPr id="26" name="Rectangle 25"/>
+          <p:cNvSpPr/>
+          <p:nvPr/>
+        </p:nvSpPr>
+        <p:spPr>
+          <a:xfrm>
+            <a:off x="3611880" y="4041648"/>
+            <a:ext cx="731520" cy="914400"/>
+          </a:xfrm>
+          <a:prstGeom prst="rect">
+            <a:avLst/>
+          </a:prstGeom>
+          <a:noFill/>
+          <a:ln w="12700">
+            <a:solidFill>
+              <a:srgbClr val="B1BBCA"/>
+            </a:solidFill>
+          </a:ln>
+          <a:effectLst/>
+        </p:spPr>
+        <p:style>
+          <a:lnRef idx="1">
+            <a:schemeClr val="accent1"/>
+          </a:lnRef>
+          <a:fillRef idx="3">
+            <a:schemeClr val="accent1"/>
+          </a:fillRef>
+          <a:effectRef idx="2">
+            <a:schemeClr val="accent1"/>
+          </a:effectRef>
+          <a:fontRef idx="minor">
+            <a:schemeClr val="lt1"/>
+          </a:fontRef>
+        </p:style>
+        <p:txBody>
+          <a:bodyPr rtlCol="0" anchor="ctr"/>
+          <a:lstStyle/>
+          <a:p>
+            <a:pPr algn="ctr"/>
+          </a:p>
+        </p:txBody>
+      </p:sp>
+      <p:sp>
+        <p:nvSpPr>
+          <p:cNvPr id="27" name="TextBox 26"/>
+          <p:cNvSpPr txBox="1"/>
+          <p:nvPr/>
+        </p:nvSpPr>
+        <p:spPr>
+          <a:xfrm>
+            <a:off x="4507992" y="4041648"/>
+            <a:ext cx="7132320" cy="256032"/>
           </a:xfrm>
           <a:prstGeom prst="rect">
             <a:avLst/>
@@ -23195,14 +25983,14 @@
       </p:sp>
       <p:sp>
         <p:nvSpPr>
-          <p:cNvPr id="24" name="TextBox 23"/>
-          <p:cNvSpPr txBox="1"/>
-          <p:nvPr/>
-        </p:nvSpPr>
-        <p:spPr>
-          <a:xfrm>
-            <a:off x="3611880" y="4315968"/>
-            <a:ext cx="8028431" cy="347472"/>
+          <p:cNvPr id="28" name="TextBox 27"/>
+          <p:cNvSpPr txBox="1"/>
+          <p:nvPr/>
+        </p:nvSpPr>
+        <p:spPr>
+          <a:xfrm>
+            <a:off x="4507992" y="4315968"/>
+            <a:ext cx="7132320" cy="347472"/>
           </a:xfrm>
           <a:prstGeom prst="rect">
             <a:avLst/>
@@ -23234,14 +26022,14 @@
       </p:sp>
       <p:sp>
         <p:nvSpPr>
-          <p:cNvPr id="25" name="TextBox 24"/>
-          <p:cNvSpPr txBox="1"/>
-          <p:nvPr/>
-        </p:nvSpPr>
-        <p:spPr>
-          <a:xfrm>
-            <a:off x="3611880" y="4681727"/>
-            <a:ext cx="8028431" cy="292608"/>
+          <p:cNvPr id="29" name="TextBox 28"/>
+          <p:cNvSpPr txBox="1"/>
+          <p:nvPr/>
+        </p:nvSpPr>
+        <p:spPr>
+          <a:xfrm>
+            <a:off x="4507992" y="4681727"/>
+            <a:ext cx="7132320" cy="292608"/>
           </a:xfrm>
           <a:prstGeom prst="rect">
             <a:avLst/>
@@ -23282,7 +26070,7 @@
       </p:sp>
       <p:sp>
         <p:nvSpPr>
-          <p:cNvPr id="26" name="TextBox 25"/>
+          <p:cNvPr id="30" name="TextBox 29"/>
           <p:cNvSpPr txBox="1"/>
           <p:nvPr/>
         </p:nvSpPr>
@@ -23321,7 +26109,7 @@
       </p:sp>
       <p:cxnSp>
         <p:nvCxnSpPr>
-          <p:cNvPr id="27" name="Connector 26"/>
+          <p:cNvPr id="31" name="Connector 30"/>
           <p:cNvCxnSpPr/>
           <p:nvPr/>
         </p:nvCxnSpPr>
@@ -23357,7 +26145,7 @@
       </p:cxnSp>
       <p:sp>
         <p:nvSpPr>
-          <p:cNvPr id="28" name="TextBox 27"/>
+          <p:cNvPr id="32" name="TextBox 31"/>
           <p:cNvSpPr txBox="1"/>
           <p:nvPr/>
         </p:nvSpPr>
@@ -23391,7 +26179,7 @@
       </p:sp>
       <p:sp>
         <p:nvSpPr>
-          <p:cNvPr id="29" name="TextBox 28"/>
+          <p:cNvPr id="33" name="TextBox 32"/>
           <p:cNvSpPr txBox="1"/>
           <p:nvPr/>
         </p:nvSpPr>
@@ -23425,7 +26213,7 @@
       </p:sp>
       <p:sp>
         <p:nvSpPr>
-          <p:cNvPr id="30" name="TextBox 29"/>
+          <p:cNvPr id="34" name="TextBox 33"/>
           <p:cNvSpPr txBox="1"/>
           <p:nvPr/>
         </p:nvSpPr>
@@ -24172,16 +26960,84 @@
           </a:p>
         </p:txBody>
       </p:sp>
-      <p:sp>
-        <p:nvSpPr>
-          <p:cNvPr id="18" name="TextBox 17"/>
-          <p:cNvSpPr txBox="1"/>
-          <p:nvPr/>
-        </p:nvSpPr>
+      <p:pic>
+        <p:nvPicPr>
+          <p:cNvPr id="18" name="Picture 17" descr="_ph-bloc-mataboge.png"/>
+          <p:cNvPicPr>
+            <a:picLocks noChangeAspect="1"/>
+          </p:cNvPicPr>
+          <p:nvPr/>
+        </p:nvPicPr>
+        <p:blipFill>
+          <a:blip r:embed="rId3"/>
+          <a:stretch>
+            <a:fillRect/>
+          </a:stretch>
+        </p:blipFill>
         <p:spPr>
           <a:xfrm>
             <a:off x="3611880" y="1408176"/>
-            <a:ext cx="8028431" cy="256032"/>
+            <a:ext cx="731520" cy="914400"/>
+          </a:xfrm>
+          <a:prstGeom prst="rect">
+            <a:avLst/>
+          </a:prstGeom>
+        </p:spPr>
+      </p:pic>
+      <p:sp>
+        <p:nvSpPr>
+          <p:cNvPr id="19" name="Rectangle 18"/>
+          <p:cNvSpPr/>
+          <p:nvPr/>
+        </p:nvSpPr>
+        <p:spPr>
+          <a:xfrm>
+            <a:off x="3611880" y="1408176"/>
+            <a:ext cx="731520" cy="914400"/>
+          </a:xfrm>
+          <a:prstGeom prst="rect">
+            <a:avLst/>
+          </a:prstGeom>
+          <a:noFill/>
+          <a:ln w="12700">
+            <a:solidFill>
+              <a:srgbClr val="B1BBCA"/>
+            </a:solidFill>
+          </a:ln>
+          <a:effectLst/>
+        </p:spPr>
+        <p:style>
+          <a:lnRef idx="1">
+            <a:schemeClr val="accent1"/>
+          </a:lnRef>
+          <a:fillRef idx="3">
+            <a:schemeClr val="accent1"/>
+          </a:fillRef>
+          <a:effectRef idx="2">
+            <a:schemeClr val="accent1"/>
+          </a:effectRef>
+          <a:fontRef idx="minor">
+            <a:schemeClr val="lt1"/>
+          </a:fontRef>
+        </p:style>
+        <p:txBody>
+          <a:bodyPr rtlCol="0" anchor="ctr"/>
+          <a:lstStyle/>
+          <a:p>
+            <a:pPr algn="ctr"/>
+          </a:p>
+        </p:txBody>
+      </p:sp>
+      <p:sp>
+        <p:nvSpPr>
+          <p:cNvPr id="20" name="TextBox 19"/>
+          <p:cNvSpPr txBox="1"/>
+          <p:nvPr/>
+        </p:nvSpPr>
+        <p:spPr>
+          <a:xfrm>
+            <a:off x="4507992" y="1408176"/>
+            <a:ext cx="7132320" cy="256032"/>
           </a:xfrm>
           <a:prstGeom prst="rect">
             <a:avLst/>
@@ -24208,14 +27064,14 @@
       </p:sp>
       <p:sp>
         <p:nvSpPr>
-          <p:cNvPr id="19" name="TextBox 18"/>
-          <p:cNvSpPr txBox="1"/>
-          <p:nvPr/>
-        </p:nvSpPr>
-        <p:spPr>
-          <a:xfrm>
-            <a:off x="3611880" y="1682495"/>
-            <a:ext cx="8028431" cy="347472"/>
+          <p:cNvPr id="21" name="TextBox 20"/>
+          <p:cNvSpPr txBox="1"/>
+          <p:nvPr/>
+        </p:nvSpPr>
+        <p:spPr>
+          <a:xfrm>
+            <a:off x="4507992" y="1682495"/>
+            <a:ext cx="7132320" cy="347472"/>
           </a:xfrm>
           <a:prstGeom prst="rect">
             <a:avLst/>
@@ -24247,14 +27103,14 @@
       </p:sp>
       <p:sp>
         <p:nvSpPr>
-          <p:cNvPr id="20" name="TextBox 19"/>
-          <p:cNvSpPr txBox="1"/>
-          <p:nvPr/>
-        </p:nvSpPr>
-        <p:spPr>
-          <a:xfrm>
-            <a:off x="3611880" y="2048256"/>
-            <a:ext cx="8028431" cy="292608"/>
+          <p:cNvPr id="22" name="TextBox 21"/>
+          <p:cNvSpPr txBox="1"/>
+          <p:nvPr/>
+        </p:nvSpPr>
+        <p:spPr>
+          <a:xfrm>
+            <a:off x="4507992" y="2048256"/>
+            <a:ext cx="7132320" cy="292608"/>
           </a:xfrm>
           <a:prstGeom prst="rect">
             <a:avLst/>
@@ -24295,7 +27151,7 @@
       </p:sp>
       <p:sp>
         <p:nvSpPr>
-          <p:cNvPr id="21" name="TextBox 20"/>
+          <p:cNvPr id="23" name="TextBox 22"/>
           <p:cNvSpPr txBox="1"/>
           <p:nvPr/>
         </p:nvSpPr>
@@ -24334,7 +27190,7 @@
       </p:sp>
       <p:cxnSp>
         <p:nvCxnSpPr>
-          <p:cNvPr id="22" name="Connector 21"/>
+          <p:cNvPr id="24" name="Connector 23"/>
           <p:cNvCxnSpPr/>
           <p:nvPr/>
         </p:nvCxnSpPr>
@@ -24370,7 +27226,7 @@
       </p:cxnSp>
       <p:sp>
         <p:nvSpPr>
-          <p:cNvPr id="23" name="TextBox 22"/>
+          <p:cNvPr id="25" name="TextBox 24"/>
           <p:cNvSpPr txBox="1"/>
           <p:nvPr/>
         </p:nvSpPr>
@@ -24402,16 +27258,84 @@
           </a:p>
         </p:txBody>
       </p:sp>
-      <p:sp>
-        <p:nvSpPr>
-          <p:cNvPr id="24" name="TextBox 23"/>
-          <p:cNvSpPr txBox="1"/>
-          <p:nvPr/>
-        </p:nvSpPr>
+      <p:pic>
+        <p:nvPicPr>
+          <p:cNvPr id="26" name="Picture 25" descr="_ph-bloc-belobe.png"/>
+          <p:cNvPicPr>
+            <a:picLocks noChangeAspect="1"/>
+          </p:cNvPicPr>
+          <p:nvPr/>
+        </p:nvPicPr>
+        <p:blipFill>
+          <a:blip r:embed="rId4"/>
+          <a:stretch>
+            <a:fillRect/>
+          </a:stretch>
+        </p:blipFill>
         <p:spPr>
           <a:xfrm>
             <a:off x="3611880" y="4041648"/>
-            <a:ext cx="8028431" cy="256032"/>
+            <a:ext cx="731520" cy="914400"/>
+          </a:xfrm>
+          <a:prstGeom prst="rect">
+            <a:avLst/>
+          </a:prstGeom>
+        </p:spPr>
+      </p:pic>
+      <p:sp>
+        <p:nvSpPr>
+          <p:cNvPr id="27" name="Rectangle 26"/>
+          <p:cNvSpPr/>
+          <p:nvPr/>
+        </p:nvSpPr>
+        <p:spPr>
+          <a:xfrm>
+            <a:off x="3611880" y="4041648"/>
+            <a:ext cx="731520" cy="914400"/>
+          </a:xfrm>
+          <a:prstGeom prst="rect">
+            <a:avLst/>
+          </a:prstGeom>
+          <a:noFill/>
+          <a:ln w="12700">
+            <a:solidFill>
+              <a:srgbClr val="B1BBCA"/>
+            </a:solidFill>
+          </a:ln>
+          <a:effectLst/>
+        </p:spPr>
+        <p:style>
+          <a:lnRef idx="1">
+            <a:schemeClr val="accent1"/>
+          </a:lnRef>
+          <a:fillRef idx="3">
+            <a:schemeClr val="accent1"/>
+          </a:fillRef>
+          <a:effectRef idx="2">
+            <a:schemeClr val="accent1"/>
+          </a:effectRef>
+          <a:fontRef idx="minor">
+            <a:schemeClr val="lt1"/>
+          </a:fontRef>
+        </p:style>
+        <p:txBody>
+          <a:bodyPr rtlCol="0" anchor="ctr"/>
+          <a:lstStyle/>
+          <a:p>
+            <a:pPr algn="ctr"/>
+          </a:p>
+        </p:txBody>
+      </p:sp>
+      <p:sp>
+        <p:nvSpPr>
+          <p:cNvPr id="28" name="TextBox 27"/>
+          <p:cNvSpPr txBox="1"/>
+          <p:nvPr/>
+        </p:nvSpPr>
+        <p:spPr>
+          <a:xfrm>
+            <a:off x="4507992" y="4041648"/>
+            <a:ext cx="7132320" cy="256032"/>
           </a:xfrm>
           <a:prstGeom prst="rect">
             <a:avLst/>
@@ -24438,14 +27362,14 @@
       </p:sp>
       <p:sp>
         <p:nvSpPr>
-          <p:cNvPr id="25" name="TextBox 24"/>
-          <p:cNvSpPr txBox="1"/>
-          <p:nvPr/>
-        </p:nvSpPr>
-        <p:spPr>
-          <a:xfrm>
-            <a:off x="3611880" y="4315968"/>
-            <a:ext cx="8028431" cy="347472"/>
+          <p:cNvPr id="29" name="TextBox 28"/>
+          <p:cNvSpPr txBox="1"/>
+          <p:nvPr/>
+        </p:nvSpPr>
+        <p:spPr>
+          <a:xfrm>
+            <a:off x="4507992" y="4315968"/>
+            <a:ext cx="7132320" cy="347472"/>
           </a:xfrm>
           <a:prstGeom prst="rect">
             <a:avLst/>
@@ -24477,14 +27401,14 @@
       </p:sp>
       <p:sp>
         <p:nvSpPr>
-          <p:cNvPr id="26" name="TextBox 25"/>
-          <p:cNvSpPr txBox="1"/>
-          <p:nvPr/>
-        </p:nvSpPr>
-        <p:spPr>
-          <a:xfrm>
-            <a:off x="3611880" y="4681727"/>
-            <a:ext cx="8028431" cy="292608"/>
+          <p:cNvPr id="30" name="TextBox 29"/>
+          <p:cNvSpPr txBox="1"/>
+          <p:nvPr/>
+        </p:nvSpPr>
+        <p:spPr>
+          <a:xfrm>
+            <a:off x="4507992" y="4681727"/>
+            <a:ext cx="7132320" cy="292608"/>
           </a:xfrm>
           <a:prstGeom prst="rect">
             <a:avLst/>
@@ -24525,7 +27449,7 @@
       </p:sp>
       <p:sp>
         <p:nvSpPr>
-          <p:cNvPr id="27" name="TextBox 26"/>
+          <p:cNvPr id="31" name="TextBox 30"/>
           <p:cNvSpPr txBox="1"/>
           <p:nvPr/>
         </p:nvSpPr>
@@ -24580,7 +27504,7 @@
       </p:sp>
       <p:cxnSp>
         <p:nvCxnSpPr>
-          <p:cNvPr id="28" name="Connector 27"/>
+          <p:cNvPr id="32" name="Connector 31"/>
           <p:cNvCxnSpPr/>
           <p:nvPr/>
         </p:nvCxnSpPr>
@@ -24616,7 +27540,7 @@
       </p:cxnSp>
       <p:sp>
         <p:nvSpPr>
-          <p:cNvPr id="29" name="TextBox 28"/>
+          <p:cNvPr id="33" name="TextBox 32"/>
           <p:cNvSpPr txBox="1"/>
           <p:nvPr/>
         </p:nvSpPr>
@@ -24650,7 +27574,7 @@
       </p:sp>
       <p:sp>
         <p:nvSpPr>
-          <p:cNvPr id="30" name="TextBox 29"/>
+          <p:cNvPr id="34" name="TextBox 33"/>
           <p:cNvSpPr txBox="1"/>
           <p:nvPr/>
         </p:nvSpPr>
@@ -24684,7 +27608,7 @@
       </p:sp>
       <p:sp>
         <p:nvSpPr>
-          <p:cNvPr id="31" name="TextBox 30"/>
+          <p:cNvPr id="35" name="TextBox 34"/>
           <p:cNvSpPr txBox="1"/>
           <p:nvPr/>
         </p:nvSpPr>
@@ -30952,16 +33876,84 @@
           </a:p>
         </p:txBody>
       </p:sp>
-      <p:sp>
-        <p:nvSpPr>
-          <p:cNvPr id="16" name="TextBox 15"/>
-          <p:cNvSpPr txBox="1"/>
-          <p:nvPr/>
-        </p:nvSpPr>
+      <p:pic>
+        <p:nvPicPr>
+          <p:cNvPr id="16" name="Picture 15" descr="_ph-argentina-genua.png"/>
+          <p:cNvPicPr>
+            <a:picLocks noChangeAspect="1"/>
+          </p:cNvPicPr>
+          <p:nvPr/>
+        </p:nvPicPr>
+        <p:blipFill>
+          <a:blip r:embed="rId3"/>
+          <a:stretch>
+            <a:fillRect/>
+          </a:stretch>
+        </p:blipFill>
         <p:spPr>
           <a:xfrm>
             <a:off x="3611880" y="1408176"/>
-            <a:ext cx="8028431" cy="256032"/>
+            <a:ext cx="731520" cy="914400"/>
+          </a:xfrm>
+          <a:prstGeom prst="rect">
+            <a:avLst/>
+          </a:prstGeom>
+        </p:spPr>
+      </p:pic>
+      <p:sp>
+        <p:nvSpPr>
+          <p:cNvPr id="17" name="Rectangle 16"/>
+          <p:cNvSpPr/>
+          <p:nvPr/>
+        </p:nvSpPr>
+        <p:spPr>
+          <a:xfrm>
+            <a:off x="3611880" y="1408176"/>
+            <a:ext cx="731520" cy="914400"/>
+          </a:xfrm>
+          <a:prstGeom prst="rect">
+            <a:avLst/>
+          </a:prstGeom>
+          <a:noFill/>
+          <a:ln w="12700">
+            <a:solidFill>
+              <a:srgbClr val="B1BBCA"/>
+            </a:solidFill>
+          </a:ln>
+          <a:effectLst/>
+        </p:spPr>
+        <p:style>
+          <a:lnRef idx="1">
+            <a:schemeClr val="accent1"/>
+          </a:lnRef>
+          <a:fillRef idx="3">
+            <a:schemeClr val="accent1"/>
+          </a:fillRef>
+          <a:effectRef idx="2">
+            <a:schemeClr val="accent1"/>
+          </a:effectRef>
+          <a:fontRef idx="minor">
+            <a:schemeClr val="lt1"/>
+          </a:fontRef>
+        </p:style>
+        <p:txBody>
+          <a:bodyPr rtlCol="0" anchor="ctr"/>
+          <a:lstStyle/>
+          <a:p>
+            <a:pPr algn="ctr"/>
+          </a:p>
+        </p:txBody>
+      </p:sp>
+      <p:sp>
+        <p:nvSpPr>
+          <p:cNvPr id="18" name="TextBox 17"/>
+          <p:cNvSpPr txBox="1"/>
+          <p:nvPr/>
+        </p:nvSpPr>
+        <p:spPr>
+          <a:xfrm>
+            <a:off x="4507992" y="1408176"/>
+            <a:ext cx="7132320" cy="256032"/>
           </a:xfrm>
           <a:prstGeom prst="rect">
             <a:avLst/>
@@ -30988,14 +33980,14 @@
       </p:sp>
       <p:sp>
         <p:nvSpPr>
-          <p:cNvPr id="17" name="TextBox 16"/>
-          <p:cNvSpPr txBox="1"/>
-          <p:nvPr/>
-        </p:nvSpPr>
-        <p:spPr>
-          <a:xfrm>
-            <a:off x="3611880" y="1682495"/>
-            <a:ext cx="8028431" cy="347472"/>
+          <p:cNvPr id="19" name="TextBox 18"/>
+          <p:cNvSpPr txBox="1"/>
+          <p:nvPr/>
+        </p:nvSpPr>
+        <p:spPr>
+          <a:xfrm>
+            <a:off x="4507992" y="1682495"/>
+            <a:ext cx="7132320" cy="347472"/>
           </a:xfrm>
           <a:prstGeom prst="rect">
             <a:avLst/>
@@ -31027,14 +34019,14 @@
       </p:sp>
       <p:sp>
         <p:nvSpPr>
-          <p:cNvPr id="18" name="TextBox 17"/>
-          <p:cNvSpPr txBox="1"/>
-          <p:nvPr/>
-        </p:nvSpPr>
-        <p:spPr>
-          <a:xfrm>
-            <a:off x="3611880" y="2048256"/>
-            <a:ext cx="8028431" cy="292608"/>
+          <p:cNvPr id="20" name="TextBox 19"/>
+          <p:cNvSpPr txBox="1"/>
+          <p:nvPr/>
+        </p:nvSpPr>
+        <p:spPr>
+          <a:xfrm>
+            <a:off x="4507992" y="2048256"/>
+            <a:ext cx="7132320" cy="292608"/>
           </a:xfrm>
           <a:prstGeom prst="rect">
             <a:avLst/>
@@ -31075,7 +34067,7 @@
       </p:sp>
       <p:sp>
         <p:nvSpPr>
-          <p:cNvPr id="19" name="TextBox 18"/>
+          <p:cNvPr id="21" name="TextBox 20"/>
           <p:cNvSpPr txBox="1"/>
           <p:nvPr/>
         </p:nvSpPr>
@@ -31130,7 +34122,7 @@
       </p:sp>
       <p:cxnSp>
         <p:nvCxnSpPr>
-          <p:cNvPr id="20" name="Connector 19"/>
+          <p:cNvPr id="22" name="Connector 21"/>
           <p:cNvCxnSpPr/>
           <p:nvPr/>
         </p:nvCxnSpPr>
@@ -31166,7 +34158,7 @@
       </p:cxnSp>
       <p:sp>
         <p:nvSpPr>
-          <p:cNvPr id="21" name="TextBox 20"/>
+          <p:cNvPr id="23" name="TextBox 22"/>
           <p:cNvSpPr txBox="1"/>
           <p:nvPr/>
         </p:nvSpPr>
@@ -31198,16 +34190,84 @@
           </a:p>
         </p:txBody>
       </p:sp>
-      <p:sp>
-        <p:nvSpPr>
-          <p:cNvPr id="22" name="TextBox 21"/>
-          <p:cNvSpPr txBox="1"/>
-          <p:nvPr/>
-        </p:nvSpPr>
+      <p:pic>
+        <p:nvPicPr>
+          <p:cNvPr id="24" name="Picture 23" descr="_ph-argentina-quirno.png"/>
+          <p:cNvPicPr>
+            <a:picLocks noChangeAspect="1"/>
+          </p:cNvPicPr>
+          <p:nvPr/>
+        </p:nvPicPr>
+        <p:blipFill>
+          <a:blip r:embed="rId4"/>
+          <a:stretch>
+            <a:fillRect/>
+          </a:stretch>
+        </p:blipFill>
         <p:spPr>
           <a:xfrm>
             <a:off x="3611880" y="4023359"/>
-            <a:ext cx="3849624" cy="914400"/>
+            <a:ext cx="585216" cy="731520"/>
+          </a:xfrm>
+          <a:prstGeom prst="rect">
+            <a:avLst/>
+          </a:prstGeom>
+        </p:spPr>
+      </p:pic>
+      <p:sp>
+        <p:nvSpPr>
+          <p:cNvPr id="25" name="Rectangle 24"/>
+          <p:cNvSpPr/>
+          <p:nvPr/>
+        </p:nvSpPr>
+        <p:spPr>
+          <a:xfrm>
+            <a:off x="3611880" y="4023359"/>
+            <a:ext cx="585216" cy="731520"/>
+          </a:xfrm>
+          <a:prstGeom prst="rect">
+            <a:avLst/>
+          </a:prstGeom>
+          <a:noFill/>
+          <a:ln w="12700">
+            <a:solidFill>
+              <a:srgbClr val="B1BBCA"/>
+            </a:solidFill>
+          </a:ln>
+          <a:effectLst/>
+        </p:spPr>
+        <p:style>
+          <a:lnRef idx="1">
+            <a:schemeClr val="accent1"/>
+          </a:lnRef>
+          <a:fillRef idx="3">
+            <a:schemeClr val="accent1"/>
+          </a:fillRef>
+          <a:effectRef idx="2">
+            <a:schemeClr val="accent1"/>
+          </a:effectRef>
+          <a:fontRef idx="minor">
+            <a:schemeClr val="lt1"/>
+          </a:fontRef>
+        </p:style>
+        <p:txBody>
+          <a:bodyPr rtlCol="0" anchor="ctr"/>
+          <a:lstStyle/>
+          <a:p>
+            <a:pPr algn="ctr"/>
+          </a:p>
+        </p:txBody>
+      </p:sp>
+      <p:sp>
+        <p:nvSpPr>
+          <p:cNvPr id="26" name="TextBox 25"/>
+          <p:cNvSpPr txBox="1"/>
+          <p:nvPr/>
+        </p:nvSpPr>
+        <p:spPr>
+          <a:xfrm>
+            <a:off x="4325112" y="4023359"/>
+            <a:ext cx="3136391" cy="914400"/>
           </a:xfrm>
           <a:prstGeom prst="rect">
             <a:avLst/>
@@ -31269,7 +34329,7 @@
       </p:sp>
       <p:sp>
         <p:nvSpPr>
-          <p:cNvPr id="23" name="TextBox 22"/>
+          <p:cNvPr id="27" name="TextBox 26"/>
           <p:cNvSpPr txBox="1"/>
           <p:nvPr/>
         </p:nvSpPr>
@@ -31317,7 +34377,7 @@
       </p:sp>
       <p:sp>
         <p:nvSpPr>
-          <p:cNvPr id="24" name="TextBox 23"/>
+          <p:cNvPr id="28" name="TextBox 27"/>
           <p:cNvSpPr txBox="1"/>
           <p:nvPr/>
         </p:nvSpPr>
@@ -31354,16 +34414,84 @@
           </a:p>
         </p:txBody>
       </p:sp>
-      <p:sp>
-        <p:nvSpPr>
-          <p:cNvPr id="25" name="TextBox 24"/>
-          <p:cNvSpPr txBox="1"/>
-          <p:nvPr/>
-        </p:nvSpPr>
+      <p:pic>
+        <p:nvPicPr>
+          <p:cNvPr id="29" name="Picture 28" descr="_ph-argentina-lavigne.png"/>
+          <p:cNvPicPr>
+            <a:picLocks noChangeAspect="1"/>
+          </p:cNvPicPr>
+          <p:nvPr/>
+        </p:nvPicPr>
+        <p:blipFill>
+          <a:blip r:embed="rId5"/>
+          <a:stretch>
+            <a:fillRect/>
+          </a:stretch>
+        </p:blipFill>
         <p:spPr>
           <a:xfrm>
             <a:off x="7790688" y="4023359"/>
-            <a:ext cx="3849624" cy="914400"/>
+            <a:ext cx="585216" cy="731520"/>
+          </a:xfrm>
+          <a:prstGeom prst="rect">
+            <a:avLst/>
+          </a:prstGeom>
+        </p:spPr>
+      </p:pic>
+      <p:sp>
+        <p:nvSpPr>
+          <p:cNvPr id="30" name="Rectangle 29"/>
+          <p:cNvSpPr/>
+          <p:nvPr/>
+        </p:nvSpPr>
+        <p:spPr>
+          <a:xfrm>
+            <a:off x="7790688" y="4023359"/>
+            <a:ext cx="585216" cy="731520"/>
+          </a:xfrm>
+          <a:prstGeom prst="rect">
+            <a:avLst/>
+          </a:prstGeom>
+          <a:noFill/>
+          <a:ln w="12700">
+            <a:solidFill>
+              <a:srgbClr val="B1BBCA"/>
+            </a:solidFill>
+          </a:ln>
+          <a:effectLst/>
+        </p:spPr>
+        <p:style>
+          <a:lnRef idx="1">
+            <a:schemeClr val="accent1"/>
+          </a:lnRef>
+          <a:fillRef idx="3">
+            <a:schemeClr val="accent1"/>
+          </a:fillRef>
+          <a:effectRef idx="2">
+            <a:schemeClr val="accent1"/>
+          </a:effectRef>
+          <a:fontRef idx="minor">
+            <a:schemeClr val="lt1"/>
+          </a:fontRef>
+        </p:style>
+        <p:txBody>
+          <a:bodyPr rtlCol="0" anchor="ctr"/>
+          <a:lstStyle/>
+          <a:p>
+            <a:pPr algn="ctr"/>
+          </a:p>
+        </p:txBody>
+      </p:sp>
+      <p:sp>
+        <p:nvSpPr>
+          <p:cNvPr id="31" name="TextBox 30"/>
+          <p:cNvSpPr txBox="1"/>
+          <p:nvPr/>
+        </p:nvSpPr>
+        <p:spPr>
+          <a:xfrm>
+            <a:off x="8503920" y="4023359"/>
+            <a:ext cx="3136391" cy="914400"/>
           </a:xfrm>
           <a:prstGeom prst="rect">
             <a:avLst/>
@@ -31434,7 +34562,7 @@
       </p:sp>
       <p:sp>
         <p:nvSpPr>
-          <p:cNvPr id="26" name="TextBox 25"/>
+          <p:cNvPr id="32" name="TextBox 31"/>
           <p:cNvSpPr txBox="1"/>
           <p:nvPr/>
         </p:nvSpPr>
@@ -31482,7 +34610,7 @@
       </p:sp>
       <p:sp>
         <p:nvSpPr>
-          <p:cNvPr id="27" name="TextBox 26"/>
+          <p:cNvPr id="33" name="TextBox 32"/>
           <p:cNvSpPr txBox="1"/>
           <p:nvPr/>
         </p:nvSpPr>
@@ -31521,7 +34649,7 @@
       </p:sp>
       <p:cxnSp>
         <p:nvCxnSpPr>
-          <p:cNvPr id="28" name="Connector 27"/>
+          <p:cNvPr id="34" name="Connector 33"/>
           <p:cNvCxnSpPr/>
           <p:nvPr/>
         </p:nvCxnSpPr>
@@ -31557,7 +34685,7 @@
       </p:cxnSp>
       <p:sp>
         <p:nvSpPr>
-          <p:cNvPr id="29" name="TextBox 28"/>
+          <p:cNvPr id="35" name="TextBox 34"/>
           <p:cNvSpPr txBox="1"/>
           <p:nvPr/>
         </p:nvSpPr>
@@ -31591,7 +34719,7 @@
       </p:sp>
       <p:sp>
         <p:nvSpPr>
-          <p:cNvPr id="30" name="TextBox 29"/>
+          <p:cNvPr id="36" name="TextBox 35"/>
           <p:cNvSpPr txBox="1"/>
           <p:nvPr/>
         </p:nvSpPr>
@@ -31625,7 +34753,7 @@
       </p:sp>
       <p:sp>
         <p:nvSpPr>
-          <p:cNvPr id="31" name="TextBox 30"/>
+          <p:cNvPr id="37" name="TextBox 36"/>
           <p:cNvSpPr txBox="1"/>
           <p:nvPr/>
         </p:nvSpPr>
@@ -32299,16 +35427,84 @@
           </a:p>
         </p:txBody>
       </p:sp>
-      <p:sp>
-        <p:nvSpPr>
-          <p:cNvPr id="16" name="TextBox 15"/>
-          <p:cNvSpPr txBox="1"/>
-          <p:nvPr/>
-        </p:nvSpPr>
+      <p:pic>
+        <p:nvPicPr>
+          <p:cNvPr id="16" name="Picture 15" descr="_ph-australia-charlton.png"/>
+          <p:cNvPicPr>
+            <a:picLocks noChangeAspect="1"/>
+          </p:cNvPicPr>
+          <p:nvPr/>
+        </p:nvPicPr>
+        <p:blipFill>
+          <a:blip r:embed="rId3"/>
+          <a:stretch>
+            <a:fillRect/>
+          </a:stretch>
+        </p:blipFill>
         <p:spPr>
           <a:xfrm>
             <a:off x="3611880" y="1389888"/>
-            <a:ext cx="3849624" cy="914400"/>
+            <a:ext cx="585216" cy="731520"/>
+          </a:xfrm>
+          <a:prstGeom prst="rect">
+            <a:avLst/>
+          </a:prstGeom>
+        </p:spPr>
+      </p:pic>
+      <p:sp>
+        <p:nvSpPr>
+          <p:cNvPr id="17" name="Rectangle 16"/>
+          <p:cNvSpPr/>
+          <p:nvPr/>
+        </p:nvSpPr>
+        <p:spPr>
+          <a:xfrm>
+            <a:off x="3611880" y="1389888"/>
+            <a:ext cx="585216" cy="731520"/>
+          </a:xfrm>
+          <a:prstGeom prst="rect">
+            <a:avLst/>
+          </a:prstGeom>
+          <a:noFill/>
+          <a:ln w="12700">
+            <a:solidFill>
+              <a:srgbClr val="B1BBCA"/>
+            </a:solidFill>
+          </a:ln>
+          <a:effectLst/>
+        </p:spPr>
+        <p:style>
+          <a:lnRef idx="1">
+            <a:schemeClr val="accent1"/>
+          </a:lnRef>
+          <a:fillRef idx="3">
+            <a:schemeClr val="accent1"/>
+          </a:fillRef>
+          <a:effectRef idx="2">
+            <a:schemeClr val="accent1"/>
+          </a:effectRef>
+          <a:fontRef idx="minor">
+            <a:schemeClr val="lt1"/>
+          </a:fontRef>
+        </p:style>
+        <p:txBody>
+          <a:bodyPr rtlCol="0" anchor="ctr"/>
+          <a:lstStyle/>
+          <a:p>
+            <a:pPr algn="ctr"/>
+          </a:p>
+        </p:txBody>
+      </p:sp>
+      <p:sp>
+        <p:nvSpPr>
+          <p:cNvPr id="18" name="TextBox 17"/>
+          <p:cNvSpPr txBox="1"/>
+          <p:nvPr/>
+        </p:nvSpPr>
+        <p:spPr>
+          <a:xfrm>
+            <a:off x="4325112" y="1389888"/>
+            <a:ext cx="3136391" cy="914400"/>
           </a:xfrm>
           <a:prstGeom prst="rect">
             <a:avLst/>
@@ -32370,7 +35566,7 @@
       </p:sp>
       <p:sp>
         <p:nvSpPr>
-          <p:cNvPr id="17" name="TextBox 16"/>
+          <p:cNvPr id="19" name="TextBox 18"/>
           <p:cNvSpPr txBox="1"/>
           <p:nvPr/>
         </p:nvSpPr>
@@ -32418,7 +35614,7 @@
       </p:sp>
       <p:sp>
         <p:nvSpPr>
-          <p:cNvPr id="18" name="TextBox 17"/>
+          <p:cNvPr id="20" name="TextBox 19"/>
           <p:cNvSpPr txBox="1"/>
           <p:nvPr/>
         </p:nvSpPr>
@@ -32455,16 +35651,84 @@
           </a:p>
         </p:txBody>
       </p:sp>
-      <p:sp>
-        <p:nvSpPr>
-          <p:cNvPr id="19" name="TextBox 18"/>
-          <p:cNvSpPr txBox="1"/>
-          <p:nvPr/>
-        </p:nvSpPr>
+      <p:pic>
+        <p:nvPicPr>
+          <p:cNvPr id="21" name="Picture 20" descr="_ph-australia-ayres.png"/>
+          <p:cNvPicPr>
+            <a:picLocks noChangeAspect="1"/>
+          </p:cNvPicPr>
+          <p:nvPr/>
+        </p:nvPicPr>
+        <p:blipFill>
+          <a:blip r:embed="rId4"/>
+          <a:stretch>
+            <a:fillRect/>
+          </a:stretch>
+        </p:blipFill>
         <p:spPr>
           <a:xfrm>
             <a:off x="7790688" y="1389888"/>
-            <a:ext cx="3849624" cy="914400"/>
+            <a:ext cx="585216" cy="731520"/>
+          </a:xfrm>
+          <a:prstGeom prst="rect">
+            <a:avLst/>
+          </a:prstGeom>
+        </p:spPr>
+      </p:pic>
+      <p:sp>
+        <p:nvSpPr>
+          <p:cNvPr id="22" name="Rectangle 21"/>
+          <p:cNvSpPr/>
+          <p:nvPr/>
+        </p:nvSpPr>
+        <p:spPr>
+          <a:xfrm>
+            <a:off x="7790688" y="1389888"/>
+            <a:ext cx="585216" cy="731520"/>
+          </a:xfrm>
+          <a:prstGeom prst="rect">
+            <a:avLst/>
+          </a:prstGeom>
+          <a:noFill/>
+          <a:ln w="12700">
+            <a:solidFill>
+              <a:srgbClr val="B1BBCA"/>
+            </a:solidFill>
+          </a:ln>
+          <a:effectLst/>
+        </p:spPr>
+        <p:style>
+          <a:lnRef idx="1">
+            <a:schemeClr val="accent1"/>
+          </a:lnRef>
+          <a:fillRef idx="3">
+            <a:schemeClr val="accent1"/>
+          </a:fillRef>
+          <a:effectRef idx="2">
+            <a:schemeClr val="accent1"/>
+          </a:effectRef>
+          <a:fontRef idx="minor">
+            <a:schemeClr val="lt1"/>
+          </a:fontRef>
+        </p:style>
+        <p:txBody>
+          <a:bodyPr rtlCol="0" anchor="ctr"/>
+          <a:lstStyle/>
+          <a:p>
+            <a:pPr algn="ctr"/>
+          </a:p>
+        </p:txBody>
+      </p:sp>
+      <p:sp>
+        <p:nvSpPr>
+          <p:cNvPr id="23" name="TextBox 22"/>
+          <p:cNvSpPr txBox="1"/>
+          <p:nvPr/>
+        </p:nvSpPr>
+        <p:spPr>
+          <a:xfrm>
+            <a:off x="8503920" y="1389888"/>
+            <a:ext cx="3136391" cy="914400"/>
           </a:xfrm>
           <a:prstGeom prst="rect">
             <a:avLst/>
@@ -32526,7 +35790,7 @@
       </p:sp>
       <p:sp>
         <p:nvSpPr>
-          <p:cNvPr id="20" name="TextBox 19"/>
+          <p:cNvPr id="24" name="TextBox 23"/>
           <p:cNvSpPr txBox="1"/>
           <p:nvPr/>
         </p:nvSpPr>
@@ -32574,7 +35838,7 @@
       </p:sp>
       <p:sp>
         <p:nvSpPr>
-          <p:cNvPr id="21" name="TextBox 20"/>
+          <p:cNvPr id="25" name="TextBox 24"/>
           <p:cNvSpPr txBox="1"/>
           <p:nvPr/>
         </p:nvSpPr>
@@ -32613,7 +35877,7 @@
       </p:sp>
       <p:cxnSp>
         <p:nvCxnSpPr>
-          <p:cNvPr id="22" name="Connector 21"/>
+          <p:cNvPr id="26" name="Connector 25"/>
           <p:cNvCxnSpPr/>
           <p:nvPr/>
         </p:nvCxnSpPr>
@@ -32649,7 +35913,7 @@
       </p:cxnSp>
       <p:sp>
         <p:nvSpPr>
-          <p:cNvPr id="23" name="TextBox 22"/>
+          <p:cNvPr id="27" name="TextBox 26"/>
           <p:cNvSpPr txBox="1"/>
           <p:nvPr/>
         </p:nvSpPr>
@@ -32681,16 +35945,84 @@
           </a:p>
         </p:txBody>
       </p:sp>
-      <p:sp>
-        <p:nvSpPr>
-          <p:cNvPr id="24" name="TextBox 23"/>
-          <p:cNvSpPr txBox="1"/>
-          <p:nvPr/>
-        </p:nvSpPr>
+      <p:pic>
+        <p:nvPicPr>
+          <p:cNvPr id="28" name="Picture 27" descr="_ph-australia-farrell.png"/>
+          <p:cNvPicPr>
+            <a:picLocks noChangeAspect="1"/>
+          </p:cNvPicPr>
+          <p:nvPr/>
+        </p:nvPicPr>
+        <p:blipFill>
+          <a:blip r:embed="rId5"/>
+          <a:stretch>
+            <a:fillRect/>
+          </a:stretch>
+        </p:blipFill>
         <p:spPr>
           <a:xfrm>
             <a:off x="3611880" y="4041648"/>
-            <a:ext cx="8028431" cy="256032"/>
+            <a:ext cx="731520" cy="914400"/>
+          </a:xfrm>
+          <a:prstGeom prst="rect">
+            <a:avLst/>
+          </a:prstGeom>
+        </p:spPr>
+      </p:pic>
+      <p:sp>
+        <p:nvSpPr>
+          <p:cNvPr id="29" name="Rectangle 28"/>
+          <p:cNvSpPr/>
+          <p:nvPr/>
+        </p:nvSpPr>
+        <p:spPr>
+          <a:xfrm>
+            <a:off x="3611880" y="4041648"/>
+            <a:ext cx="731520" cy="914400"/>
+          </a:xfrm>
+          <a:prstGeom prst="rect">
+            <a:avLst/>
+          </a:prstGeom>
+          <a:noFill/>
+          <a:ln w="12700">
+            <a:solidFill>
+              <a:srgbClr val="B1BBCA"/>
+            </a:solidFill>
+          </a:ln>
+          <a:effectLst/>
+        </p:spPr>
+        <p:style>
+          <a:lnRef idx="1">
+            <a:schemeClr val="accent1"/>
+          </a:lnRef>
+          <a:fillRef idx="3">
+            <a:schemeClr val="accent1"/>
+          </a:fillRef>
+          <a:effectRef idx="2">
+            <a:schemeClr val="accent1"/>
+          </a:effectRef>
+          <a:fontRef idx="minor">
+            <a:schemeClr val="lt1"/>
+          </a:fontRef>
+        </p:style>
+        <p:txBody>
+          <a:bodyPr rtlCol="0" anchor="ctr"/>
+          <a:lstStyle/>
+          <a:p>
+            <a:pPr algn="ctr"/>
+          </a:p>
+        </p:txBody>
+      </p:sp>
+      <p:sp>
+        <p:nvSpPr>
+          <p:cNvPr id="30" name="TextBox 29"/>
+          <p:cNvSpPr txBox="1"/>
+          <p:nvPr/>
+        </p:nvSpPr>
+        <p:spPr>
+          <a:xfrm>
+            <a:off x="4507992" y="4041648"/>
+            <a:ext cx="7132320" cy="256032"/>
           </a:xfrm>
           <a:prstGeom prst="rect">
             <a:avLst/>
@@ -32717,14 +36049,14 @@
       </p:sp>
       <p:sp>
         <p:nvSpPr>
-          <p:cNvPr id="25" name="TextBox 24"/>
-          <p:cNvSpPr txBox="1"/>
-          <p:nvPr/>
-        </p:nvSpPr>
-        <p:spPr>
-          <a:xfrm>
-            <a:off x="3611880" y="4315968"/>
-            <a:ext cx="8028431" cy="347472"/>
+          <p:cNvPr id="31" name="TextBox 30"/>
+          <p:cNvSpPr txBox="1"/>
+          <p:nvPr/>
+        </p:nvSpPr>
+        <p:spPr>
+          <a:xfrm>
+            <a:off x="4507992" y="4315968"/>
+            <a:ext cx="7132320" cy="347472"/>
           </a:xfrm>
           <a:prstGeom prst="rect">
             <a:avLst/>
@@ -32756,14 +36088,14 @@
       </p:sp>
       <p:sp>
         <p:nvSpPr>
-          <p:cNvPr id="26" name="TextBox 25"/>
-          <p:cNvSpPr txBox="1"/>
-          <p:nvPr/>
-        </p:nvSpPr>
-        <p:spPr>
-          <a:xfrm>
-            <a:off x="3611880" y="4681727"/>
-            <a:ext cx="8028431" cy="292608"/>
+          <p:cNvPr id="32" name="TextBox 31"/>
+          <p:cNvSpPr txBox="1"/>
+          <p:nvPr/>
+        </p:nvSpPr>
+        <p:spPr>
+          <a:xfrm>
+            <a:off x="4507992" y="4681727"/>
+            <a:ext cx="7132320" cy="292608"/>
           </a:xfrm>
           <a:prstGeom prst="rect">
             <a:avLst/>
@@ -32804,7 +36136,7 @@
       </p:sp>
       <p:sp>
         <p:nvSpPr>
-          <p:cNvPr id="27" name="TextBox 26"/>
+          <p:cNvPr id="33" name="TextBox 32"/>
           <p:cNvSpPr txBox="1"/>
           <p:nvPr/>
         </p:nvSpPr>
@@ -32859,7 +36191,7 @@
       </p:sp>
       <p:cxnSp>
         <p:nvCxnSpPr>
-          <p:cNvPr id="28" name="Connector 27"/>
+          <p:cNvPr id="34" name="Connector 33"/>
           <p:cNvCxnSpPr/>
           <p:nvPr/>
         </p:nvCxnSpPr>
@@ -32895,7 +36227,7 @@
       </p:cxnSp>
       <p:sp>
         <p:nvSpPr>
-          <p:cNvPr id="29" name="TextBox 28"/>
+          <p:cNvPr id="35" name="TextBox 34"/>
           <p:cNvSpPr txBox="1"/>
           <p:nvPr/>
         </p:nvSpPr>
@@ -32929,7 +36261,7 @@
       </p:sp>
       <p:sp>
         <p:nvSpPr>
-          <p:cNvPr id="30" name="TextBox 29"/>
+          <p:cNvPr id="36" name="TextBox 35"/>
           <p:cNvSpPr txBox="1"/>
           <p:nvPr/>
         </p:nvSpPr>
@@ -32963,7 +36295,7 @@
       </p:sp>
       <p:sp>
         <p:nvSpPr>
-          <p:cNvPr id="31" name="TextBox 30"/>
+          <p:cNvPr id="37" name="TextBox 36"/>
           <p:cNvSpPr txBox="1"/>
           <p:nvPr/>
         </p:nvSpPr>
@@ -33637,16 +36969,84 @@
           </a:p>
         </p:txBody>
       </p:sp>
-      <p:sp>
-        <p:nvSpPr>
-          <p:cNvPr id="16" name="TextBox 15"/>
-          <p:cNvSpPr txBox="1"/>
-          <p:nvPr/>
-        </p:nvSpPr>
+      <p:pic>
+        <p:nvPicPr>
+          <p:cNvPr id="16" name="Picture 15" descr="_ph-brazil-siqueira.png"/>
+          <p:cNvPicPr>
+            <a:picLocks noChangeAspect="1"/>
+          </p:cNvPicPr>
+          <p:nvPr/>
+        </p:nvPicPr>
+        <p:blipFill>
+          <a:blip r:embed="rId3"/>
+          <a:stretch>
+            <a:fillRect/>
+          </a:stretch>
+        </p:blipFill>
         <p:spPr>
           <a:xfrm>
             <a:off x="3611880" y="1389888"/>
-            <a:ext cx="3849624" cy="914400"/>
+            <a:ext cx="585216" cy="731520"/>
+          </a:xfrm>
+          <a:prstGeom prst="rect">
+            <a:avLst/>
+          </a:prstGeom>
+        </p:spPr>
+      </p:pic>
+      <p:sp>
+        <p:nvSpPr>
+          <p:cNvPr id="17" name="Rectangle 16"/>
+          <p:cNvSpPr/>
+          <p:nvPr/>
+        </p:nvSpPr>
+        <p:spPr>
+          <a:xfrm>
+            <a:off x="3611880" y="1389888"/>
+            <a:ext cx="585216" cy="731520"/>
+          </a:xfrm>
+          <a:prstGeom prst="rect">
+            <a:avLst/>
+          </a:prstGeom>
+          <a:noFill/>
+          <a:ln w="12700">
+            <a:solidFill>
+              <a:srgbClr val="B1BBCA"/>
+            </a:solidFill>
+          </a:ln>
+          <a:effectLst/>
+        </p:spPr>
+        <p:style>
+          <a:lnRef idx="1">
+            <a:schemeClr val="accent1"/>
+          </a:lnRef>
+          <a:fillRef idx="3">
+            <a:schemeClr val="accent1"/>
+          </a:fillRef>
+          <a:effectRef idx="2">
+            <a:schemeClr val="accent1"/>
+          </a:effectRef>
+          <a:fontRef idx="minor">
+            <a:schemeClr val="lt1"/>
+          </a:fontRef>
+        </p:style>
+        <p:txBody>
+          <a:bodyPr rtlCol="0" anchor="ctr"/>
+          <a:lstStyle/>
+          <a:p>
+            <a:pPr algn="ctr"/>
+          </a:p>
+        </p:txBody>
+      </p:sp>
+      <p:sp>
+        <p:nvSpPr>
+          <p:cNvPr id="18" name="TextBox 17"/>
+          <p:cNvSpPr txBox="1"/>
+          <p:nvPr/>
+        </p:nvSpPr>
+        <p:spPr>
+          <a:xfrm>
+            <a:off x="4325112" y="1389888"/>
+            <a:ext cx="3136391" cy="914400"/>
           </a:xfrm>
           <a:prstGeom prst="rect">
             <a:avLst/>
@@ -33708,7 +37108,7 @@
       </p:sp>
       <p:sp>
         <p:nvSpPr>
-          <p:cNvPr id="17" name="TextBox 16"/>
+          <p:cNvPr id="19" name="TextBox 18"/>
           <p:cNvSpPr txBox="1"/>
           <p:nvPr/>
         </p:nvSpPr>
@@ -33756,7 +37156,7 @@
       </p:sp>
       <p:sp>
         <p:nvSpPr>
-          <p:cNvPr id="18" name="TextBox 17"/>
+          <p:cNvPr id="20" name="TextBox 19"/>
           <p:cNvSpPr txBox="1"/>
           <p:nvPr/>
         </p:nvSpPr>
@@ -33793,16 +37193,84 @@
           </a:p>
         </p:txBody>
       </p:sp>
-      <p:sp>
-        <p:nvSpPr>
-          <p:cNvPr id="19" name="TextBox 18"/>
-          <p:cNvSpPr txBox="1"/>
-          <p:nvPr/>
-        </p:nvSpPr>
+      <p:pic>
+        <p:nvPicPr>
+          <p:cNvPr id="21" name="Picture 20" descr="_ph-brazil-santos.png"/>
+          <p:cNvPicPr>
+            <a:picLocks noChangeAspect="1"/>
+          </p:cNvPicPr>
+          <p:nvPr/>
+        </p:nvPicPr>
+        <p:blipFill>
+          <a:blip r:embed="rId4"/>
+          <a:stretch>
+            <a:fillRect/>
+          </a:stretch>
+        </p:blipFill>
         <p:spPr>
           <a:xfrm>
             <a:off x="7790688" y="1389888"/>
-            <a:ext cx="3849624" cy="914400"/>
+            <a:ext cx="585216" cy="731520"/>
+          </a:xfrm>
+          <a:prstGeom prst="rect">
+            <a:avLst/>
+          </a:prstGeom>
+        </p:spPr>
+      </p:pic>
+      <p:sp>
+        <p:nvSpPr>
+          <p:cNvPr id="22" name="Rectangle 21"/>
+          <p:cNvSpPr/>
+          <p:nvPr/>
+        </p:nvSpPr>
+        <p:spPr>
+          <a:xfrm>
+            <a:off x="7790688" y="1389888"/>
+            <a:ext cx="585216" cy="731520"/>
+          </a:xfrm>
+          <a:prstGeom prst="rect">
+            <a:avLst/>
+          </a:prstGeom>
+          <a:noFill/>
+          <a:ln w="12700">
+            <a:solidFill>
+              <a:srgbClr val="B1BBCA"/>
+            </a:solidFill>
+          </a:ln>
+          <a:effectLst/>
+        </p:spPr>
+        <p:style>
+          <a:lnRef idx="1">
+            <a:schemeClr val="accent1"/>
+          </a:lnRef>
+          <a:fillRef idx="3">
+            <a:schemeClr val="accent1"/>
+          </a:fillRef>
+          <a:effectRef idx="2">
+            <a:schemeClr val="accent1"/>
+          </a:effectRef>
+          <a:fontRef idx="minor">
+            <a:schemeClr val="lt1"/>
+          </a:fontRef>
+        </p:style>
+        <p:txBody>
+          <a:bodyPr rtlCol="0" anchor="ctr"/>
+          <a:lstStyle/>
+          <a:p>
+            <a:pPr algn="ctr"/>
+          </a:p>
+        </p:txBody>
+      </p:sp>
+      <p:sp>
+        <p:nvSpPr>
+          <p:cNvPr id="23" name="TextBox 22"/>
+          <p:cNvSpPr txBox="1"/>
+          <p:nvPr/>
+        </p:nvSpPr>
+        <p:spPr>
+          <a:xfrm>
+            <a:off x="8503920" y="1389888"/>
+            <a:ext cx="3136391" cy="914400"/>
           </a:xfrm>
           <a:prstGeom prst="rect">
             <a:avLst/>
@@ -33864,7 +37332,7 @@
       </p:sp>
       <p:sp>
         <p:nvSpPr>
-          <p:cNvPr id="20" name="TextBox 19"/>
+          <p:cNvPr id="24" name="TextBox 23"/>
           <p:cNvSpPr txBox="1"/>
           <p:nvPr/>
         </p:nvSpPr>
@@ -33912,7 +37380,7 @@
       </p:sp>
       <p:sp>
         <p:nvSpPr>
-          <p:cNvPr id="21" name="TextBox 20"/>
+          <p:cNvPr id="25" name="TextBox 24"/>
           <p:cNvSpPr txBox="1"/>
           <p:nvPr/>
         </p:nvSpPr>
@@ -33951,7 +37419,7 @@
       </p:sp>
       <p:cxnSp>
         <p:nvCxnSpPr>
-          <p:cNvPr id="22" name="Connector 21"/>
+          <p:cNvPr id="26" name="Connector 25"/>
           <p:cNvCxnSpPr/>
           <p:nvPr/>
         </p:nvCxnSpPr>
@@ -33987,7 +37455,7 @@
       </p:cxnSp>
       <p:sp>
         <p:nvSpPr>
-          <p:cNvPr id="23" name="TextBox 22"/>
+          <p:cNvPr id="27" name="TextBox 26"/>
           <p:cNvSpPr txBox="1"/>
           <p:nvPr/>
         </p:nvSpPr>
@@ -34019,16 +37487,84 @@
           </a:p>
         </p:txBody>
       </p:sp>
-      <p:sp>
-        <p:nvSpPr>
-          <p:cNvPr id="24" name="TextBox 23"/>
-          <p:cNvSpPr txBox="1"/>
-          <p:nvPr/>
-        </p:nvSpPr>
+      <p:pic>
+        <p:nvPicPr>
+          <p:cNvPr id="28" name="Picture 27" descr="_ph-brazil-rosa.png"/>
+          <p:cNvPicPr>
+            <a:picLocks noChangeAspect="1"/>
+          </p:cNvPicPr>
+          <p:nvPr/>
+        </p:nvPicPr>
+        <p:blipFill>
+          <a:blip r:embed="rId5"/>
+          <a:stretch>
+            <a:fillRect/>
+          </a:stretch>
+        </p:blipFill>
         <p:spPr>
           <a:xfrm>
             <a:off x="3611880" y="4041648"/>
-            <a:ext cx="8028431" cy="256032"/>
+            <a:ext cx="731520" cy="914400"/>
+          </a:xfrm>
+          <a:prstGeom prst="rect">
+            <a:avLst/>
+          </a:prstGeom>
+        </p:spPr>
+      </p:pic>
+      <p:sp>
+        <p:nvSpPr>
+          <p:cNvPr id="29" name="Rectangle 28"/>
+          <p:cNvSpPr/>
+          <p:nvPr/>
+        </p:nvSpPr>
+        <p:spPr>
+          <a:xfrm>
+            <a:off x="3611880" y="4041648"/>
+            <a:ext cx="731520" cy="914400"/>
+          </a:xfrm>
+          <a:prstGeom prst="rect">
+            <a:avLst/>
+          </a:prstGeom>
+          <a:noFill/>
+          <a:ln w="12700">
+            <a:solidFill>
+              <a:srgbClr val="B1BBCA"/>
+            </a:solidFill>
+          </a:ln>
+          <a:effectLst/>
+        </p:spPr>
+        <p:style>
+          <a:lnRef idx="1">
+            <a:schemeClr val="accent1"/>
+          </a:lnRef>
+          <a:fillRef idx="3">
+            <a:schemeClr val="accent1"/>
+          </a:fillRef>
+          <a:effectRef idx="2">
+            <a:schemeClr val="accent1"/>
+          </a:effectRef>
+          <a:fontRef idx="minor">
+            <a:schemeClr val="lt1"/>
+          </a:fontRef>
+        </p:style>
+        <p:txBody>
+          <a:bodyPr rtlCol="0" anchor="ctr"/>
+          <a:lstStyle/>
+          <a:p>
+            <a:pPr algn="ctr"/>
+          </a:p>
+        </p:txBody>
+      </p:sp>
+      <p:sp>
+        <p:nvSpPr>
+          <p:cNvPr id="30" name="TextBox 29"/>
+          <p:cNvSpPr txBox="1"/>
+          <p:nvPr/>
+        </p:nvSpPr>
+        <p:spPr>
+          <a:xfrm>
+            <a:off x="4507992" y="4041648"/>
+            <a:ext cx="7132320" cy="256032"/>
           </a:xfrm>
           <a:prstGeom prst="rect">
             <a:avLst/>
@@ -34055,14 +37591,14 @@
       </p:sp>
       <p:sp>
         <p:nvSpPr>
-          <p:cNvPr id="25" name="TextBox 24"/>
-          <p:cNvSpPr txBox="1"/>
-          <p:nvPr/>
-        </p:nvSpPr>
-        <p:spPr>
-          <a:xfrm>
-            <a:off x="3611880" y="4315968"/>
-            <a:ext cx="8028431" cy="347472"/>
+          <p:cNvPr id="31" name="TextBox 30"/>
+          <p:cNvSpPr txBox="1"/>
+          <p:nvPr/>
+        </p:nvSpPr>
+        <p:spPr>
+          <a:xfrm>
+            <a:off x="4507992" y="4315968"/>
+            <a:ext cx="7132320" cy="347472"/>
           </a:xfrm>
           <a:prstGeom prst="rect">
             <a:avLst/>
@@ -34094,14 +37630,14 @@
       </p:sp>
       <p:sp>
         <p:nvSpPr>
-          <p:cNvPr id="26" name="TextBox 25"/>
-          <p:cNvSpPr txBox="1"/>
-          <p:nvPr/>
-        </p:nvSpPr>
-        <p:spPr>
-          <a:xfrm>
-            <a:off x="3611880" y="4681727"/>
-            <a:ext cx="8028431" cy="292608"/>
+          <p:cNvPr id="32" name="TextBox 31"/>
+          <p:cNvSpPr txBox="1"/>
+          <p:nvPr/>
+        </p:nvSpPr>
+        <p:spPr>
+          <a:xfrm>
+            <a:off x="4507992" y="4681727"/>
+            <a:ext cx="7132320" cy="292608"/>
           </a:xfrm>
           <a:prstGeom prst="rect">
             <a:avLst/>
@@ -34142,7 +37678,7 @@
       </p:sp>
       <p:sp>
         <p:nvSpPr>
-          <p:cNvPr id="27" name="TextBox 26"/>
+          <p:cNvPr id="33" name="TextBox 32"/>
           <p:cNvSpPr txBox="1"/>
           <p:nvPr/>
         </p:nvSpPr>
@@ -34181,7 +37717,7 @@
       </p:sp>
       <p:cxnSp>
         <p:nvCxnSpPr>
-          <p:cNvPr id="28" name="Connector 27"/>
+          <p:cNvPr id="34" name="Connector 33"/>
           <p:cNvCxnSpPr/>
           <p:nvPr/>
         </p:nvCxnSpPr>
@@ -34217,7 +37753,7 @@
       </p:cxnSp>
       <p:sp>
         <p:nvSpPr>
-          <p:cNvPr id="29" name="TextBox 28"/>
+          <p:cNvPr id="35" name="TextBox 34"/>
           <p:cNvSpPr txBox="1"/>
           <p:nvPr/>
         </p:nvSpPr>
@@ -34251,7 +37787,7 @@
       </p:sp>
       <p:sp>
         <p:nvSpPr>
-          <p:cNvPr id="30" name="TextBox 29"/>
+          <p:cNvPr id="36" name="TextBox 35"/>
           <p:cNvSpPr txBox="1"/>
           <p:nvPr/>
         </p:nvSpPr>
@@ -34285,7 +37821,7 @@
       </p:sp>
       <p:sp>
         <p:nvSpPr>
-          <p:cNvPr id="31" name="TextBox 30"/>
+          <p:cNvPr id="37" name="TextBox 36"/>
           <p:cNvSpPr txBox="1"/>
           <p:nvPr/>
         </p:nvSpPr>
@@ -34959,16 +38495,84 @@
           </a:p>
         </p:txBody>
       </p:sp>
-      <p:sp>
-        <p:nvSpPr>
-          <p:cNvPr id="16" name="TextBox 15"/>
-          <p:cNvSpPr txBox="1"/>
-          <p:nvPr/>
-        </p:nvSpPr>
+      <p:pic>
+        <p:nvPicPr>
+          <p:cNvPr id="16" name="Picture 15" descr="_ph-canada-solomon.png"/>
+          <p:cNvPicPr>
+            <a:picLocks noChangeAspect="1"/>
+          </p:cNvPicPr>
+          <p:nvPr/>
+        </p:nvPicPr>
+        <p:blipFill>
+          <a:blip r:embed="rId3"/>
+          <a:stretch>
+            <a:fillRect/>
+          </a:stretch>
+        </p:blipFill>
         <p:spPr>
           <a:xfrm>
             <a:off x="3611880" y="1408176"/>
-            <a:ext cx="8028431" cy="256032"/>
+            <a:ext cx="731520" cy="914400"/>
+          </a:xfrm>
+          <a:prstGeom prst="rect">
+            <a:avLst/>
+          </a:prstGeom>
+        </p:spPr>
+      </p:pic>
+      <p:sp>
+        <p:nvSpPr>
+          <p:cNvPr id="17" name="Rectangle 16"/>
+          <p:cNvSpPr/>
+          <p:nvPr/>
+        </p:nvSpPr>
+        <p:spPr>
+          <a:xfrm>
+            <a:off x="3611880" y="1408176"/>
+            <a:ext cx="731520" cy="914400"/>
+          </a:xfrm>
+          <a:prstGeom prst="rect">
+            <a:avLst/>
+          </a:prstGeom>
+          <a:noFill/>
+          <a:ln w="12700">
+            <a:solidFill>
+              <a:srgbClr val="B1BBCA"/>
+            </a:solidFill>
+          </a:ln>
+          <a:effectLst/>
+        </p:spPr>
+        <p:style>
+          <a:lnRef idx="1">
+            <a:schemeClr val="accent1"/>
+          </a:lnRef>
+          <a:fillRef idx="3">
+            <a:schemeClr val="accent1"/>
+          </a:fillRef>
+          <a:effectRef idx="2">
+            <a:schemeClr val="accent1"/>
+          </a:effectRef>
+          <a:fontRef idx="minor">
+            <a:schemeClr val="lt1"/>
+          </a:fontRef>
+        </p:style>
+        <p:txBody>
+          <a:bodyPr rtlCol="0" anchor="ctr"/>
+          <a:lstStyle/>
+          <a:p>
+            <a:pPr algn="ctr"/>
+          </a:p>
+        </p:txBody>
+      </p:sp>
+      <p:sp>
+        <p:nvSpPr>
+          <p:cNvPr id="18" name="TextBox 17"/>
+          <p:cNvSpPr txBox="1"/>
+          <p:nvPr/>
+        </p:nvSpPr>
+        <p:spPr>
+          <a:xfrm>
+            <a:off x="4507992" y="1408176"/>
+            <a:ext cx="7132320" cy="256032"/>
           </a:xfrm>
           <a:prstGeom prst="rect">
             <a:avLst/>
@@ -34995,14 +38599,14 @@
       </p:sp>
       <p:sp>
         <p:nvSpPr>
-          <p:cNvPr id="17" name="TextBox 16"/>
-          <p:cNvSpPr txBox="1"/>
-          <p:nvPr/>
-        </p:nvSpPr>
-        <p:spPr>
-          <a:xfrm>
-            <a:off x="3611880" y="1682495"/>
-            <a:ext cx="8028431" cy="347472"/>
+          <p:cNvPr id="19" name="TextBox 18"/>
+          <p:cNvSpPr txBox="1"/>
+          <p:nvPr/>
+        </p:nvSpPr>
+        <p:spPr>
+          <a:xfrm>
+            <a:off x="4507992" y="1682495"/>
+            <a:ext cx="7132320" cy="347472"/>
           </a:xfrm>
           <a:prstGeom prst="rect">
             <a:avLst/>
@@ -35034,14 +38638,14 @@
       </p:sp>
       <p:sp>
         <p:nvSpPr>
-          <p:cNvPr id="18" name="TextBox 17"/>
-          <p:cNvSpPr txBox="1"/>
-          <p:nvPr/>
-        </p:nvSpPr>
-        <p:spPr>
-          <a:xfrm>
-            <a:off x="3611880" y="2048256"/>
-            <a:ext cx="8028431" cy="292608"/>
+          <p:cNvPr id="20" name="TextBox 19"/>
+          <p:cNvSpPr txBox="1"/>
+          <p:nvPr/>
+        </p:nvSpPr>
+        <p:spPr>
+          <a:xfrm>
+            <a:off x="4507992" y="2048256"/>
+            <a:ext cx="7132320" cy="292608"/>
           </a:xfrm>
           <a:prstGeom prst="rect">
             <a:avLst/>
@@ -35082,7 +38686,7 @@
       </p:sp>
       <p:sp>
         <p:nvSpPr>
-          <p:cNvPr id="19" name="TextBox 18"/>
+          <p:cNvPr id="21" name="TextBox 20"/>
           <p:cNvSpPr txBox="1"/>
           <p:nvPr/>
         </p:nvSpPr>
@@ -35121,7 +38725,7 @@
       </p:sp>
       <p:cxnSp>
         <p:nvCxnSpPr>
-          <p:cNvPr id="20" name="Connector 19"/>
+          <p:cNvPr id="22" name="Connector 21"/>
           <p:cNvCxnSpPr/>
           <p:nvPr/>
         </p:nvCxnSpPr>
@@ -35157,7 +38761,7 @@
       </p:cxnSp>
       <p:sp>
         <p:nvSpPr>
-          <p:cNvPr id="21" name="TextBox 20"/>
+          <p:cNvPr id="23" name="TextBox 22"/>
           <p:cNvSpPr txBox="1"/>
           <p:nvPr/>
         </p:nvSpPr>
@@ -35189,16 +38793,84 @@
           </a:p>
         </p:txBody>
       </p:sp>
-      <p:sp>
-        <p:nvSpPr>
-          <p:cNvPr id="22" name="TextBox 21"/>
-          <p:cNvSpPr txBox="1"/>
-          <p:nvPr/>
-        </p:nvSpPr>
+      <p:pic>
+        <p:nvPicPr>
+          <p:cNvPr id="24" name="Picture 23" descr="_ph-canada-sidhu.png"/>
+          <p:cNvPicPr>
+            <a:picLocks noChangeAspect="1"/>
+          </p:cNvPicPr>
+          <p:nvPr/>
+        </p:nvPicPr>
+        <p:blipFill>
+          <a:blip r:embed="rId4"/>
+          <a:stretch>
+            <a:fillRect/>
+          </a:stretch>
+        </p:blipFill>
         <p:spPr>
           <a:xfrm>
             <a:off x="3611880" y="4023359"/>
-            <a:ext cx="3849624" cy="914400"/>
+            <a:ext cx="585216" cy="731520"/>
+          </a:xfrm>
+          <a:prstGeom prst="rect">
+            <a:avLst/>
+          </a:prstGeom>
+        </p:spPr>
+      </p:pic>
+      <p:sp>
+        <p:nvSpPr>
+          <p:cNvPr id="25" name="Rectangle 24"/>
+          <p:cNvSpPr/>
+          <p:nvPr/>
+        </p:nvSpPr>
+        <p:spPr>
+          <a:xfrm>
+            <a:off x="3611880" y="4023359"/>
+            <a:ext cx="585216" cy="731520"/>
+          </a:xfrm>
+          <a:prstGeom prst="rect">
+            <a:avLst/>
+          </a:prstGeom>
+          <a:noFill/>
+          <a:ln w="12700">
+            <a:solidFill>
+              <a:srgbClr val="B1BBCA"/>
+            </a:solidFill>
+          </a:ln>
+          <a:effectLst/>
+        </p:spPr>
+        <p:style>
+          <a:lnRef idx="1">
+            <a:schemeClr val="accent1"/>
+          </a:lnRef>
+          <a:fillRef idx="3">
+            <a:schemeClr val="accent1"/>
+          </a:fillRef>
+          <a:effectRef idx="2">
+            <a:schemeClr val="accent1"/>
+          </a:effectRef>
+          <a:fontRef idx="minor">
+            <a:schemeClr val="lt1"/>
+          </a:fontRef>
+        </p:style>
+        <p:txBody>
+          <a:bodyPr rtlCol="0" anchor="ctr"/>
+          <a:lstStyle/>
+          <a:p>
+            <a:pPr algn="ctr"/>
+          </a:p>
+        </p:txBody>
+      </p:sp>
+      <p:sp>
+        <p:nvSpPr>
+          <p:cNvPr id="26" name="TextBox 25"/>
+          <p:cNvSpPr txBox="1"/>
+          <p:nvPr/>
+        </p:nvSpPr>
+        <p:spPr>
+          <a:xfrm>
+            <a:off x="4325112" y="4023359"/>
+            <a:ext cx="3136391" cy="914400"/>
           </a:xfrm>
           <a:prstGeom prst="rect">
             <a:avLst/>
@@ -35260,7 +38932,7 @@
       </p:sp>
       <p:sp>
         <p:nvSpPr>
-          <p:cNvPr id="23" name="TextBox 22"/>
+          <p:cNvPr id="27" name="TextBox 26"/>
           <p:cNvSpPr txBox="1"/>
           <p:nvPr/>
         </p:nvSpPr>
@@ -35308,7 +38980,7 @@
       </p:sp>
       <p:sp>
         <p:nvSpPr>
-          <p:cNvPr id="24" name="TextBox 23"/>
+          <p:cNvPr id="28" name="TextBox 27"/>
           <p:cNvSpPr txBox="1"/>
           <p:nvPr/>
         </p:nvSpPr>
@@ -35345,16 +39017,84 @@
           </a:p>
         </p:txBody>
       </p:sp>
-      <p:sp>
-        <p:nvSpPr>
-          <p:cNvPr id="25" name="TextBox 24"/>
-          <p:cNvSpPr txBox="1"/>
-          <p:nvPr/>
-        </p:nvSpPr>
+      <p:pic>
+        <p:nvPicPr>
+          <p:cNvPr id="29" name="Picture 28" descr="_ph-argentina-genua.png"/>
+          <p:cNvPicPr>
+            <a:picLocks noChangeAspect="1"/>
+          </p:cNvPicPr>
+          <p:nvPr/>
+        </p:nvPicPr>
+        <p:blipFill>
+          <a:blip r:embed="rId5"/>
+          <a:stretch>
+            <a:fillRect/>
+          </a:stretch>
+        </p:blipFill>
         <p:spPr>
           <a:xfrm>
             <a:off x="7790688" y="4023359"/>
-            <a:ext cx="3849624" cy="914400"/>
+            <a:ext cx="585216" cy="731520"/>
+          </a:xfrm>
+          <a:prstGeom prst="rect">
+            <a:avLst/>
+          </a:prstGeom>
+        </p:spPr>
+      </p:pic>
+      <p:sp>
+        <p:nvSpPr>
+          <p:cNvPr id="30" name="Rectangle 29"/>
+          <p:cNvSpPr/>
+          <p:nvPr/>
+        </p:nvSpPr>
+        <p:spPr>
+          <a:xfrm>
+            <a:off x="7790688" y="4023359"/>
+            <a:ext cx="585216" cy="731520"/>
+          </a:xfrm>
+          <a:prstGeom prst="rect">
+            <a:avLst/>
+          </a:prstGeom>
+          <a:noFill/>
+          <a:ln w="12700">
+            <a:solidFill>
+              <a:srgbClr val="B1BBCA"/>
+            </a:solidFill>
+          </a:ln>
+          <a:effectLst/>
+        </p:spPr>
+        <p:style>
+          <a:lnRef idx="1">
+            <a:schemeClr val="accent1"/>
+          </a:lnRef>
+          <a:fillRef idx="3">
+            <a:schemeClr val="accent1"/>
+          </a:fillRef>
+          <a:effectRef idx="2">
+            <a:schemeClr val="accent1"/>
+          </a:effectRef>
+          <a:fontRef idx="minor">
+            <a:schemeClr val="lt1"/>
+          </a:fontRef>
+        </p:style>
+        <p:txBody>
+          <a:bodyPr rtlCol="0" anchor="ctr"/>
+          <a:lstStyle/>
+          <a:p>
+            <a:pPr algn="ctr"/>
+          </a:p>
+        </p:txBody>
+      </p:sp>
+      <p:sp>
+        <p:nvSpPr>
+          <p:cNvPr id="31" name="TextBox 30"/>
+          <p:cNvSpPr txBox="1"/>
+          <p:nvPr/>
+        </p:nvSpPr>
+        <p:spPr>
+          <a:xfrm>
+            <a:off x="8503920" y="4023359"/>
+            <a:ext cx="3136391" cy="914400"/>
           </a:xfrm>
           <a:prstGeom prst="rect">
             <a:avLst/>
@@ -35416,7 +39156,7 @@
       </p:sp>
       <p:sp>
         <p:nvSpPr>
-          <p:cNvPr id="26" name="TextBox 25"/>
+          <p:cNvPr id="32" name="TextBox 31"/>
           <p:cNvSpPr txBox="1"/>
           <p:nvPr/>
         </p:nvSpPr>
@@ -35464,7 +39204,7 @@
       </p:sp>
       <p:sp>
         <p:nvSpPr>
-          <p:cNvPr id="27" name="TextBox 26"/>
+          <p:cNvPr id="33" name="TextBox 32"/>
           <p:cNvSpPr txBox="1"/>
           <p:nvPr/>
         </p:nvSpPr>
@@ -35503,7 +39243,7 @@
       </p:sp>
       <p:cxnSp>
         <p:nvCxnSpPr>
-          <p:cNvPr id="28" name="Connector 27"/>
+          <p:cNvPr id="34" name="Connector 33"/>
           <p:cNvCxnSpPr/>
           <p:nvPr/>
         </p:nvCxnSpPr>
@@ -35539,7 +39279,7 @@
       </p:cxnSp>
       <p:sp>
         <p:nvSpPr>
-          <p:cNvPr id="29" name="TextBox 28"/>
+          <p:cNvPr id="35" name="TextBox 34"/>
           <p:cNvSpPr txBox="1"/>
           <p:nvPr/>
         </p:nvSpPr>
@@ -35573,7 +39313,7 @@
       </p:sp>
       <p:sp>
         <p:nvSpPr>
-          <p:cNvPr id="30" name="TextBox 29"/>
+          <p:cNvPr id="36" name="TextBox 35"/>
           <p:cNvSpPr txBox="1"/>
           <p:nvPr/>
         </p:nvSpPr>
@@ -35607,7 +39347,7 @@
       </p:sp>
       <p:sp>
         <p:nvSpPr>
-          <p:cNvPr id="31" name="TextBox 30"/>
+          <p:cNvPr id="37" name="TextBox 36"/>
           <p:cNvSpPr txBox="1"/>
           <p:nvPr/>
         </p:nvSpPr>
@@ -36281,16 +40021,84 @@
           </a:p>
         </p:txBody>
       </p:sp>
-      <p:sp>
-        <p:nvSpPr>
-          <p:cNvPr id="16" name="TextBox 15"/>
-          <p:cNvSpPr txBox="1"/>
-          <p:nvPr/>
-        </p:nvSpPr>
+      <p:pic>
+        <p:nvPicPr>
+          <p:cNvPr id="16" name="Picture 15" descr="_ph-china-lilecheng.png"/>
+          <p:cNvPicPr>
+            <a:picLocks noChangeAspect="1"/>
+          </p:cNvPicPr>
+          <p:nvPr/>
+        </p:nvPicPr>
+        <p:blipFill>
+          <a:blip r:embed="rId3"/>
+          <a:stretch>
+            <a:fillRect/>
+          </a:stretch>
+        </p:blipFill>
         <p:spPr>
           <a:xfrm>
             <a:off x="3611880" y="1389888"/>
-            <a:ext cx="3849624" cy="914400"/>
+            <a:ext cx="585216" cy="731520"/>
+          </a:xfrm>
+          <a:prstGeom prst="rect">
+            <a:avLst/>
+          </a:prstGeom>
+        </p:spPr>
+      </p:pic>
+      <p:sp>
+        <p:nvSpPr>
+          <p:cNvPr id="17" name="Rectangle 16"/>
+          <p:cNvSpPr/>
+          <p:nvPr/>
+        </p:nvSpPr>
+        <p:spPr>
+          <a:xfrm>
+            <a:off x="3611880" y="1389888"/>
+            <a:ext cx="585216" cy="731520"/>
+          </a:xfrm>
+          <a:prstGeom prst="rect">
+            <a:avLst/>
+          </a:prstGeom>
+          <a:noFill/>
+          <a:ln w="12700">
+            <a:solidFill>
+              <a:srgbClr val="B1BBCA"/>
+            </a:solidFill>
+          </a:ln>
+          <a:effectLst/>
+        </p:spPr>
+        <p:style>
+          <a:lnRef idx="1">
+            <a:schemeClr val="accent1"/>
+          </a:lnRef>
+          <a:fillRef idx="3">
+            <a:schemeClr val="accent1"/>
+          </a:fillRef>
+          <a:effectRef idx="2">
+            <a:schemeClr val="accent1"/>
+          </a:effectRef>
+          <a:fontRef idx="minor">
+            <a:schemeClr val="lt1"/>
+          </a:fontRef>
+        </p:style>
+        <p:txBody>
+          <a:bodyPr rtlCol="0" anchor="ctr"/>
+          <a:lstStyle/>
+          <a:p>
+            <a:pPr algn="ctr"/>
+          </a:p>
+        </p:txBody>
+      </p:sp>
+      <p:sp>
+        <p:nvSpPr>
+          <p:cNvPr id="18" name="TextBox 17"/>
+          <p:cNvSpPr txBox="1"/>
+          <p:nvPr/>
+        </p:nvSpPr>
+        <p:spPr>
+          <a:xfrm>
+            <a:off x="4325112" y="1389888"/>
+            <a:ext cx="3136391" cy="914400"/>
           </a:xfrm>
           <a:prstGeom prst="rect">
             <a:avLst/>
@@ -36352,7 +40160,7 @@
       </p:sp>
       <p:sp>
         <p:nvSpPr>
-          <p:cNvPr id="17" name="TextBox 16"/>
+          <p:cNvPr id="19" name="TextBox 18"/>
           <p:cNvSpPr txBox="1"/>
           <p:nvPr/>
         </p:nvSpPr>
@@ -36400,7 +40208,7 @@
       </p:sp>
       <p:sp>
         <p:nvSpPr>
-          <p:cNvPr id="18" name="TextBox 17"/>
+          <p:cNvPr id="20" name="TextBox 19"/>
           <p:cNvSpPr txBox="1"/>
           <p:nvPr/>
         </p:nvSpPr>
@@ -36437,16 +40245,84 @@
           </a:p>
         </p:txBody>
       </p:sp>
-      <p:sp>
-        <p:nvSpPr>
-          <p:cNvPr id="19" name="TextBox 18"/>
-          <p:cNvSpPr txBox="1"/>
-          <p:nvPr/>
-        </p:nvSpPr>
+      <p:pic>
+        <p:nvPicPr>
+          <p:cNvPr id="21" name="Picture 20" descr="_ph-china-hejun.png"/>
+          <p:cNvPicPr>
+            <a:picLocks noChangeAspect="1"/>
+          </p:cNvPicPr>
+          <p:nvPr/>
+        </p:nvPicPr>
+        <p:blipFill>
+          <a:blip r:embed="rId4"/>
+          <a:stretch>
+            <a:fillRect/>
+          </a:stretch>
+        </p:blipFill>
         <p:spPr>
           <a:xfrm>
             <a:off x="7790688" y="1389888"/>
-            <a:ext cx="3849624" cy="914400"/>
+            <a:ext cx="585216" cy="731520"/>
+          </a:xfrm>
+          <a:prstGeom prst="rect">
+            <a:avLst/>
+          </a:prstGeom>
+        </p:spPr>
+      </p:pic>
+      <p:sp>
+        <p:nvSpPr>
+          <p:cNvPr id="22" name="Rectangle 21"/>
+          <p:cNvSpPr/>
+          <p:nvPr/>
+        </p:nvSpPr>
+        <p:spPr>
+          <a:xfrm>
+            <a:off x="7790688" y="1389888"/>
+            <a:ext cx="585216" cy="731520"/>
+          </a:xfrm>
+          <a:prstGeom prst="rect">
+            <a:avLst/>
+          </a:prstGeom>
+          <a:noFill/>
+          <a:ln w="12700">
+            <a:solidFill>
+              <a:srgbClr val="B1BBCA"/>
+            </a:solidFill>
+          </a:ln>
+          <a:effectLst/>
+        </p:spPr>
+        <p:style>
+          <a:lnRef idx="1">
+            <a:schemeClr val="accent1"/>
+          </a:lnRef>
+          <a:fillRef idx="3">
+            <a:schemeClr val="accent1"/>
+          </a:fillRef>
+          <a:effectRef idx="2">
+            <a:schemeClr val="accent1"/>
+          </a:effectRef>
+          <a:fontRef idx="minor">
+            <a:schemeClr val="lt1"/>
+          </a:fontRef>
+        </p:style>
+        <p:txBody>
+          <a:bodyPr rtlCol="0" anchor="ctr"/>
+          <a:lstStyle/>
+          <a:p>
+            <a:pPr algn="ctr"/>
+          </a:p>
+        </p:txBody>
+      </p:sp>
+      <p:sp>
+        <p:nvSpPr>
+          <p:cNvPr id="23" name="TextBox 22"/>
+          <p:cNvSpPr txBox="1"/>
+          <p:nvPr/>
+        </p:nvSpPr>
+        <p:spPr>
+          <a:xfrm>
+            <a:off x="8503920" y="1389888"/>
+            <a:ext cx="3136391" cy="914400"/>
           </a:xfrm>
           <a:prstGeom prst="rect">
             <a:avLst/>
@@ -36508,7 +40384,7 @@
       </p:sp>
       <p:sp>
         <p:nvSpPr>
-          <p:cNvPr id="20" name="TextBox 19"/>
+          <p:cNvPr id="24" name="TextBox 23"/>
           <p:cNvSpPr txBox="1"/>
           <p:nvPr/>
         </p:nvSpPr>
@@ -36556,7 +40432,7 @@
       </p:sp>
       <p:sp>
         <p:nvSpPr>
-          <p:cNvPr id="21" name="TextBox 20"/>
+          <p:cNvPr id="25" name="TextBox 24"/>
           <p:cNvSpPr txBox="1"/>
           <p:nvPr/>
         </p:nvSpPr>
@@ -36595,7 +40471,7 @@
       </p:sp>
       <p:cxnSp>
         <p:nvCxnSpPr>
-          <p:cNvPr id="22" name="Connector 21"/>
+          <p:cNvPr id="26" name="Connector 25"/>
           <p:cNvCxnSpPr/>
           <p:nvPr/>
         </p:nvCxnSpPr>
@@ -36631,7 +40507,7 @@
       </p:cxnSp>
       <p:sp>
         <p:nvSpPr>
-          <p:cNvPr id="23" name="TextBox 22"/>
+          <p:cNvPr id="27" name="TextBox 26"/>
           <p:cNvSpPr txBox="1"/>
           <p:nvPr/>
         </p:nvSpPr>
@@ -36663,16 +40539,84 @@
           </a:p>
         </p:txBody>
       </p:sp>
-      <p:sp>
-        <p:nvSpPr>
-          <p:cNvPr id="24" name="TextBox 23"/>
-          <p:cNvSpPr txBox="1"/>
-          <p:nvPr/>
-        </p:nvSpPr>
+      <p:pic>
+        <p:nvPicPr>
+          <p:cNvPr id="28" name="Picture 27" descr="_ph-china-wangwentao.png"/>
+          <p:cNvPicPr>
+            <a:picLocks noChangeAspect="1"/>
+          </p:cNvPicPr>
+          <p:nvPr/>
+        </p:nvPicPr>
+        <p:blipFill>
+          <a:blip r:embed="rId5"/>
+          <a:stretch>
+            <a:fillRect/>
+          </a:stretch>
+        </p:blipFill>
         <p:spPr>
           <a:xfrm>
             <a:off x="3611880" y="4023359"/>
-            <a:ext cx="3849624" cy="914400"/>
+            <a:ext cx="585216" cy="731520"/>
+          </a:xfrm>
+          <a:prstGeom prst="rect">
+            <a:avLst/>
+          </a:prstGeom>
+        </p:spPr>
+      </p:pic>
+      <p:sp>
+        <p:nvSpPr>
+          <p:cNvPr id="29" name="Rectangle 28"/>
+          <p:cNvSpPr/>
+          <p:nvPr/>
+        </p:nvSpPr>
+        <p:spPr>
+          <a:xfrm>
+            <a:off x="3611880" y="4023359"/>
+            <a:ext cx="585216" cy="731520"/>
+          </a:xfrm>
+          <a:prstGeom prst="rect">
+            <a:avLst/>
+          </a:prstGeom>
+          <a:noFill/>
+          <a:ln w="12700">
+            <a:solidFill>
+              <a:srgbClr val="B1BBCA"/>
+            </a:solidFill>
+          </a:ln>
+          <a:effectLst/>
+        </p:spPr>
+        <p:style>
+          <a:lnRef idx="1">
+            <a:schemeClr val="accent1"/>
+          </a:lnRef>
+          <a:fillRef idx="3">
+            <a:schemeClr val="accent1"/>
+          </a:fillRef>
+          <a:effectRef idx="2">
+            <a:schemeClr val="accent1"/>
+          </a:effectRef>
+          <a:fontRef idx="minor">
+            <a:schemeClr val="lt1"/>
+          </a:fontRef>
+        </p:style>
+        <p:txBody>
+          <a:bodyPr rtlCol="0" anchor="ctr"/>
+          <a:lstStyle/>
+          <a:p>
+            <a:pPr algn="ctr"/>
+          </a:p>
+        </p:txBody>
+      </p:sp>
+      <p:sp>
+        <p:nvSpPr>
+          <p:cNvPr id="30" name="TextBox 29"/>
+          <p:cNvSpPr txBox="1"/>
+          <p:nvPr/>
+        </p:nvSpPr>
+        <p:spPr>
+          <a:xfrm>
+            <a:off x="4325112" y="4023359"/>
+            <a:ext cx="3136391" cy="914400"/>
           </a:xfrm>
           <a:prstGeom prst="rect">
             <a:avLst/>
@@ -36734,7 +40678,7 @@
       </p:sp>
       <p:sp>
         <p:nvSpPr>
-          <p:cNvPr id="25" name="TextBox 24"/>
+          <p:cNvPr id="31" name="TextBox 30"/>
           <p:cNvSpPr txBox="1"/>
           <p:nvPr/>
         </p:nvSpPr>
@@ -36782,7 +40726,7 @@
       </p:sp>
       <p:sp>
         <p:nvSpPr>
-          <p:cNvPr id="26" name="TextBox 25"/>
+          <p:cNvPr id="32" name="TextBox 31"/>
           <p:cNvSpPr txBox="1"/>
           <p:nvPr/>
         </p:nvSpPr>
@@ -36819,16 +40763,84 @@
           </a:p>
         </p:txBody>
       </p:sp>
-      <p:sp>
-        <p:nvSpPr>
-          <p:cNvPr id="27" name="TextBox 26"/>
-          <p:cNvSpPr txBox="1"/>
-          <p:nvPr/>
-        </p:nvSpPr>
+      <p:pic>
+        <p:nvPicPr>
+          <p:cNvPr id="33" name="Picture 32" descr="_ph-china-lichenggang.png"/>
+          <p:cNvPicPr>
+            <a:picLocks noChangeAspect="1"/>
+          </p:cNvPicPr>
+          <p:nvPr/>
+        </p:nvPicPr>
+        <p:blipFill>
+          <a:blip r:embed="rId6"/>
+          <a:stretch>
+            <a:fillRect/>
+          </a:stretch>
+        </p:blipFill>
         <p:spPr>
           <a:xfrm>
             <a:off x="7790688" y="4023359"/>
-            <a:ext cx="3849624" cy="914400"/>
+            <a:ext cx="585216" cy="731520"/>
+          </a:xfrm>
+          <a:prstGeom prst="rect">
+            <a:avLst/>
+          </a:prstGeom>
+        </p:spPr>
+      </p:pic>
+      <p:sp>
+        <p:nvSpPr>
+          <p:cNvPr id="34" name="Rectangle 33"/>
+          <p:cNvSpPr/>
+          <p:nvPr/>
+        </p:nvSpPr>
+        <p:spPr>
+          <a:xfrm>
+            <a:off x="7790688" y="4023359"/>
+            <a:ext cx="585216" cy="731520"/>
+          </a:xfrm>
+          <a:prstGeom prst="rect">
+            <a:avLst/>
+          </a:prstGeom>
+          <a:noFill/>
+          <a:ln w="12700">
+            <a:solidFill>
+              <a:srgbClr val="B1BBCA"/>
+            </a:solidFill>
+          </a:ln>
+          <a:effectLst/>
+        </p:spPr>
+        <p:style>
+          <a:lnRef idx="1">
+            <a:schemeClr val="accent1"/>
+          </a:lnRef>
+          <a:fillRef idx="3">
+            <a:schemeClr val="accent1"/>
+          </a:fillRef>
+          <a:effectRef idx="2">
+            <a:schemeClr val="accent1"/>
+          </a:effectRef>
+          <a:fontRef idx="minor">
+            <a:schemeClr val="lt1"/>
+          </a:fontRef>
+        </p:style>
+        <p:txBody>
+          <a:bodyPr rtlCol="0" anchor="ctr"/>
+          <a:lstStyle/>
+          <a:p>
+            <a:pPr algn="ctr"/>
+          </a:p>
+        </p:txBody>
+      </p:sp>
+      <p:sp>
+        <p:nvSpPr>
+          <p:cNvPr id="35" name="TextBox 34"/>
+          <p:cNvSpPr txBox="1"/>
+          <p:nvPr/>
+        </p:nvSpPr>
+        <p:spPr>
+          <a:xfrm>
+            <a:off x="8503920" y="4023359"/>
+            <a:ext cx="3136391" cy="914400"/>
           </a:xfrm>
           <a:prstGeom prst="rect">
             <a:avLst/>
@@ -36890,7 +40902,7 @@
       </p:sp>
       <p:sp>
         <p:nvSpPr>
-          <p:cNvPr id="28" name="TextBox 27"/>
+          <p:cNvPr id="36" name="TextBox 35"/>
           <p:cNvSpPr txBox="1"/>
           <p:nvPr/>
         </p:nvSpPr>
@@ -36938,7 +40950,7 @@
       </p:sp>
       <p:sp>
         <p:nvSpPr>
-          <p:cNvPr id="29" name="TextBox 28"/>
+          <p:cNvPr id="37" name="TextBox 36"/>
           <p:cNvSpPr txBox="1"/>
           <p:nvPr/>
         </p:nvSpPr>
@@ -36977,7 +40989,7 @@
       </p:sp>
       <p:cxnSp>
         <p:nvCxnSpPr>
-          <p:cNvPr id="30" name="Connector 29"/>
+          <p:cNvPr id="38" name="Connector 37"/>
           <p:cNvCxnSpPr/>
           <p:nvPr/>
         </p:nvCxnSpPr>
@@ -37013,7 +41025,7 @@
       </p:cxnSp>
       <p:sp>
         <p:nvSpPr>
-          <p:cNvPr id="31" name="TextBox 30"/>
+          <p:cNvPr id="39" name="TextBox 38"/>
           <p:cNvSpPr txBox="1"/>
           <p:nvPr/>
         </p:nvSpPr>
@@ -37047,7 +41059,7 @@
       </p:sp>
       <p:sp>
         <p:nvSpPr>
-          <p:cNvPr id="32" name="TextBox 31"/>
+          <p:cNvPr id="40" name="TextBox 39"/>
           <p:cNvSpPr txBox="1"/>
           <p:nvPr/>
         </p:nvSpPr>
@@ -37081,7 +41093,7 @@
       </p:sp>
       <p:sp>
         <p:nvSpPr>
-          <p:cNvPr id="33" name="TextBox 32"/>
+          <p:cNvPr id="41" name="TextBox 40"/>
           <p:cNvSpPr txBox="1"/>
           <p:nvPr/>
         </p:nvSpPr>

--- a/output/g20-ministers-trade-deck.pptx
+++ b/output/g20-ministers-trade-deck.pptx
@@ -12782,7 +12782,7 @@
       </p:sp>
       <p:pic>
         <p:nvPicPr>
-          <p:cNvPr id="16" name="Picture 15" descr="_ph-mexico-pena.png"/>
+          <p:cNvPr id="16" name="Picture 15" descr="mexico-pena.png"/>
           <p:cNvPicPr>
             <a:picLocks noChangeAspect="1"/>
           </p:cNvPicPr>
@@ -12797,7 +12797,7 @@
         <p:spPr>
           <a:xfrm>
             <a:off x="3611880" y="1408176"/>
-            <a:ext cx="731520" cy="914400"/>
+            <a:ext cx="730601" cy="914400"/>
           </a:xfrm>
           <a:prstGeom prst="rect">
             <a:avLst/>
@@ -12813,7 +12813,7 @@
         <p:spPr>
           <a:xfrm>
             <a:off x="3611880" y="1408176"/>
-            <a:ext cx="731520" cy="914400"/>
+            <a:ext cx="730601" cy="914400"/>
           </a:xfrm>
           <a:prstGeom prst="rect">
             <a:avLst/>
@@ -12856,8 +12856,8 @@
         </p:nvSpPr>
         <p:spPr>
           <a:xfrm>
-            <a:off x="4507992" y="1408176"/>
-            <a:ext cx="7132320" cy="256032"/>
+            <a:off x="4507073" y="1408176"/>
+            <a:ext cx="7133238" cy="256032"/>
           </a:xfrm>
           <a:prstGeom prst="rect">
             <a:avLst/>
@@ -12890,8 +12890,8 @@
         </p:nvSpPr>
         <p:spPr>
           <a:xfrm>
-            <a:off x="4507992" y="1682495"/>
-            <a:ext cx="7132320" cy="347472"/>
+            <a:off x="4507073" y="1682495"/>
+            <a:ext cx="7133238" cy="347472"/>
           </a:xfrm>
           <a:prstGeom prst="rect">
             <a:avLst/>
@@ -12929,8 +12929,8 @@
         </p:nvSpPr>
         <p:spPr>
           <a:xfrm>
-            <a:off x="4507992" y="2048256"/>
-            <a:ext cx="7132320" cy="292608"/>
+            <a:off x="4507073" y="2048256"/>
+            <a:ext cx="7133238" cy="292608"/>
           </a:xfrm>
           <a:prstGeom prst="rect">
             <a:avLst/>
@@ -14308,7 +14308,7 @@
       </p:sp>
       <p:pic>
         <p:nvPicPr>
-          <p:cNvPr id="16" name="Picture 15" descr="_ph-poland-gawkowski.png"/>
+          <p:cNvPr id="16" name="Picture 15" descr="poland-gawkowski.png"/>
           <p:cNvPicPr>
             <a:picLocks noChangeAspect="1"/>
           </p:cNvPicPr>
@@ -14323,7 +14323,7 @@
         <p:spPr>
           <a:xfrm>
             <a:off x="3611880" y="1408176"/>
-            <a:ext cx="731520" cy="914400"/>
+            <a:ext cx="730601" cy="914400"/>
           </a:xfrm>
           <a:prstGeom prst="rect">
             <a:avLst/>
@@ -14339,7 +14339,7 @@
         <p:spPr>
           <a:xfrm>
             <a:off x="3611880" y="1408176"/>
-            <a:ext cx="731520" cy="914400"/>
+            <a:ext cx="730601" cy="914400"/>
           </a:xfrm>
           <a:prstGeom prst="rect">
             <a:avLst/>
@@ -14382,8 +14382,8 @@
         </p:nvSpPr>
         <p:spPr>
           <a:xfrm>
-            <a:off x="4507992" y="1408176"/>
-            <a:ext cx="7132320" cy="256032"/>
+            <a:off x="4507073" y="1408176"/>
+            <a:ext cx="7133238" cy="256032"/>
           </a:xfrm>
           <a:prstGeom prst="rect">
             <a:avLst/>
@@ -14416,8 +14416,8 @@
         </p:nvSpPr>
         <p:spPr>
           <a:xfrm>
-            <a:off x="4507992" y="1682495"/>
-            <a:ext cx="7132320" cy="347472"/>
+            <a:off x="4507073" y="1682495"/>
+            <a:ext cx="7133238" cy="347472"/>
           </a:xfrm>
           <a:prstGeom prst="rect">
             <a:avLst/>
@@ -14455,8 +14455,8 @@
         </p:nvSpPr>
         <p:spPr>
           <a:xfrm>
-            <a:off x="4507992" y="2048256"/>
-            <a:ext cx="7132320" cy="292608"/>
+            <a:off x="4507073" y="2048256"/>
+            <a:ext cx="7133238" cy="292608"/>
           </a:xfrm>
           <a:prstGeom prst="rect">
             <a:avLst/>
@@ -14622,7 +14622,7 @@
       </p:sp>
       <p:pic>
         <p:nvPicPr>
-          <p:cNvPr id="24" name="Picture 23" descr="_ph-poland-domanski.png"/>
+          <p:cNvPr id="24" name="Picture 23" descr="poland-domanski.png"/>
           <p:cNvPicPr>
             <a:picLocks noChangeAspect="1"/>
           </p:cNvPicPr>
@@ -14846,7 +14846,7 @@
       </p:sp>
       <p:pic>
         <p:nvPicPr>
-          <p:cNvPr id="29" name="Picture 28" descr="_ph-poland-baranowski.png"/>
+          <p:cNvPr id="29" name="Picture 28" descr="poland-baranowski.png"/>
           <p:cNvPicPr>
             <a:picLocks noChangeAspect="1"/>
           </p:cNvPicPr>
@@ -14861,7 +14861,7 @@
         <p:spPr>
           <a:xfrm>
             <a:off x="7790688" y="4023359"/>
-            <a:ext cx="585216" cy="731520"/>
+            <a:ext cx="584481" cy="731520"/>
           </a:xfrm>
           <a:prstGeom prst="rect">
             <a:avLst/>
@@ -14877,7 +14877,7 @@
         <p:spPr>
           <a:xfrm>
             <a:off x="7790688" y="4023359"/>
-            <a:ext cx="585216" cy="731520"/>
+            <a:ext cx="584480" cy="731520"/>
           </a:xfrm>
           <a:prstGeom prst="rect">
             <a:avLst/>
@@ -14920,8 +14920,8 @@
         </p:nvSpPr>
         <p:spPr>
           <a:xfrm>
-            <a:off x="8503920" y="4023359"/>
-            <a:ext cx="3136391" cy="914400"/>
+            <a:off x="8503184" y="4023359"/>
+            <a:ext cx="3137127" cy="914400"/>
           </a:xfrm>
           <a:prstGeom prst="rect">
             <a:avLst/>
@@ -15850,7 +15850,7 @@
       </p:sp>
       <p:pic>
         <p:nvPicPr>
-          <p:cNvPr id="16" name="Picture 15" descr="_ph-canada-sidhu.png"/>
+          <p:cNvPr id="16" name="Picture 15" descr="russia-shadayev.png"/>
           <p:cNvPicPr>
             <a:picLocks noChangeAspect="1"/>
           </p:cNvPicPr>
@@ -15865,7 +15865,7 @@
         <p:spPr>
           <a:xfrm>
             <a:off x="3611880" y="1408176"/>
-            <a:ext cx="731520" cy="914400"/>
+            <a:ext cx="723900" cy="914400"/>
           </a:xfrm>
           <a:prstGeom prst="rect">
             <a:avLst/>
@@ -15881,7 +15881,7 @@
         <p:spPr>
           <a:xfrm>
             <a:off x="3611880" y="1408176"/>
-            <a:ext cx="731520" cy="914400"/>
+            <a:ext cx="723900" cy="914400"/>
           </a:xfrm>
           <a:prstGeom prst="rect">
             <a:avLst/>
@@ -15924,8 +15924,8 @@
         </p:nvSpPr>
         <p:spPr>
           <a:xfrm>
-            <a:off x="4507992" y="1408176"/>
-            <a:ext cx="7132320" cy="256032"/>
+            <a:off x="4500372" y="1408176"/>
+            <a:ext cx="7139939" cy="256032"/>
           </a:xfrm>
           <a:prstGeom prst="rect">
             <a:avLst/>
@@ -15958,8 +15958,8 @@
         </p:nvSpPr>
         <p:spPr>
           <a:xfrm>
-            <a:off x="4507992" y="1682495"/>
-            <a:ext cx="7132320" cy="347472"/>
+            <a:off x="4500372" y="1682495"/>
+            <a:ext cx="7139939" cy="347472"/>
           </a:xfrm>
           <a:prstGeom prst="rect">
             <a:avLst/>
@@ -15997,8 +15997,8 @@
         </p:nvSpPr>
         <p:spPr>
           <a:xfrm>
-            <a:off x="4507992" y="2048256"/>
-            <a:ext cx="7132320" cy="292608"/>
+            <a:off x="4500372" y="2048256"/>
+            <a:ext cx="7139939" cy="292608"/>
           </a:xfrm>
           <a:prstGeom prst="rect">
             <a:avLst/>
@@ -16164,7 +16164,7 @@
       </p:sp>
       <p:pic>
         <p:nvPicPr>
-          <p:cNvPr id="24" name="Picture 23" descr="_ph-russia-alikhanov.png"/>
+          <p:cNvPr id="24" name="Picture 23" descr="russia-alikhanov.png"/>
           <p:cNvPicPr>
             <a:picLocks noChangeAspect="1"/>
           </p:cNvPicPr>
@@ -16388,7 +16388,7 @@
       </p:sp>
       <p:pic>
         <p:nvPicPr>
-          <p:cNvPr id="29" name="Picture 28" descr="_ph-russia-reshetnikov.png"/>
+          <p:cNvPr id="29" name="Picture 28" descr="russia-reshetnikov.png"/>
           <p:cNvPicPr>
             <a:picLocks noChangeAspect="1"/>
           </p:cNvPicPr>
@@ -16403,7 +16403,7 @@
         <p:spPr>
           <a:xfrm>
             <a:off x="7790688" y="4023359"/>
-            <a:ext cx="585216" cy="731520"/>
+            <a:ext cx="579120" cy="731520"/>
           </a:xfrm>
           <a:prstGeom prst="rect">
             <a:avLst/>
@@ -16419,7 +16419,7 @@
         <p:spPr>
           <a:xfrm>
             <a:off x="7790688" y="4023359"/>
-            <a:ext cx="585216" cy="731520"/>
+            <a:ext cx="579120" cy="731520"/>
           </a:xfrm>
           <a:prstGeom prst="rect">
             <a:avLst/>
@@ -16462,8 +16462,8 @@
         </p:nvSpPr>
         <p:spPr>
           <a:xfrm>
-            <a:off x="8503920" y="4023359"/>
-            <a:ext cx="3136391" cy="914400"/>
+            <a:off x="8497824" y="4023359"/>
+            <a:ext cx="3142488" cy="914400"/>
           </a:xfrm>
           <a:prstGeom prst="rect">
             <a:avLst/>
@@ -17392,7 +17392,7 @@
       </p:sp>
       <p:pic>
         <p:nvPicPr>
-          <p:cNvPr id="16" name="Picture 15" descr="_ph-russia-alikhanov.png"/>
+          <p:cNvPr id="16" name="Picture 15" descr="saudi-alswaha.png"/>
           <p:cNvPicPr>
             <a:picLocks noChangeAspect="1"/>
           </p:cNvPicPr>
@@ -17407,7 +17407,7 @@
         <p:spPr>
           <a:xfrm>
             <a:off x="3611880" y="1408176"/>
-            <a:ext cx="731520" cy="914400"/>
+            <a:ext cx="723900" cy="914400"/>
           </a:xfrm>
           <a:prstGeom prst="rect">
             <a:avLst/>
@@ -17423,7 +17423,7 @@
         <p:spPr>
           <a:xfrm>
             <a:off x="3611880" y="1408176"/>
-            <a:ext cx="731520" cy="914400"/>
+            <a:ext cx="723900" cy="914400"/>
           </a:xfrm>
           <a:prstGeom prst="rect">
             <a:avLst/>
@@ -17466,8 +17466,8 @@
         </p:nvSpPr>
         <p:spPr>
           <a:xfrm>
-            <a:off x="4507992" y="1408176"/>
-            <a:ext cx="7132320" cy="256032"/>
+            <a:off x="4500372" y="1408176"/>
+            <a:ext cx="7139939" cy="256032"/>
           </a:xfrm>
           <a:prstGeom prst="rect">
             <a:avLst/>
@@ -17500,8 +17500,8 @@
         </p:nvSpPr>
         <p:spPr>
           <a:xfrm>
-            <a:off x="4507992" y="1682495"/>
-            <a:ext cx="7132320" cy="347472"/>
+            <a:off x="4500372" y="1682495"/>
+            <a:ext cx="7139939" cy="347472"/>
           </a:xfrm>
           <a:prstGeom prst="rect">
             <a:avLst/>
@@ -17539,8 +17539,8 @@
         </p:nvSpPr>
         <p:spPr>
           <a:xfrm>
-            <a:off x="4507992" y="2048256"/>
-            <a:ext cx="7132320" cy="292608"/>
+            <a:off x="4500372" y="2048256"/>
+            <a:ext cx="7139939" cy="292608"/>
           </a:xfrm>
           <a:prstGeom prst="rect">
             <a:avLst/>
@@ -17914,14 +17914,14 @@
       </p:sp>
       <p:pic>
         <p:nvPicPr>
-          <p:cNvPr id="29" name="Picture 28" descr="_ph-saudi-alqasabi.png"/>
+          <p:cNvPr id="29" name="Picture 28" descr="saudi-abduljabbar.png"/>
           <p:cNvPicPr>
             <a:picLocks noChangeAspect="1"/>
           </p:cNvPicPr>
           <p:nvPr/>
         </p:nvPicPr>
         <p:blipFill>
-          <a:blip r:embed="rId4"/>
+          <a:blip r:embed="rId5"/>
           <a:stretch>
             <a:fillRect/>
           </a:stretch>
@@ -17929,7 +17929,7 @@
         <p:spPr>
           <a:xfrm>
             <a:off x="7790688" y="4023359"/>
-            <a:ext cx="585216" cy="731520"/>
+            <a:ext cx="584481" cy="731520"/>
           </a:xfrm>
           <a:prstGeom prst="rect">
             <a:avLst/>
@@ -17945,7 +17945,7 @@
         <p:spPr>
           <a:xfrm>
             <a:off x="7790688" y="4023359"/>
-            <a:ext cx="585216" cy="731520"/>
+            <a:ext cx="584480" cy="731520"/>
           </a:xfrm>
           <a:prstGeom prst="rect">
             <a:avLst/>
@@ -17988,8 +17988,8 @@
         </p:nvSpPr>
         <p:spPr>
           <a:xfrm>
-            <a:off x="8503920" y="4023359"/>
-            <a:ext cx="3136391" cy="914400"/>
+            <a:off x="8503184" y="4023359"/>
+            <a:ext cx="3137127" cy="914400"/>
           </a:xfrm>
           <a:prstGeom prst="rect">
             <a:avLst/>
@@ -19404,7 +19404,7 @@
       </p:sp>
       <p:pic>
         <p:nvPicPr>
-          <p:cNvPr id="16" name="Picture 15" descr="_ph-korea-bae.png"/>
+          <p:cNvPr id="16" name="Picture 15" descr="korea-bae.png"/>
           <p:cNvPicPr>
             <a:picLocks noChangeAspect="1"/>
           </p:cNvPicPr>
@@ -19419,7 +19419,7 @@
         <p:spPr>
           <a:xfrm>
             <a:off x="3611880" y="1408176"/>
-            <a:ext cx="731520" cy="914400"/>
+            <a:ext cx="735496" cy="914400"/>
           </a:xfrm>
           <a:prstGeom prst="rect">
             <a:avLst/>
@@ -19435,7 +19435,7 @@
         <p:spPr>
           <a:xfrm>
             <a:off x="3611880" y="1408176"/>
-            <a:ext cx="731520" cy="914400"/>
+            <a:ext cx="735495" cy="914400"/>
           </a:xfrm>
           <a:prstGeom prst="rect">
             <a:avLst/>
@@ -19478,8 +19478,8 @@
         </p:nvSpPr>
         <p:spPr>
           <a:xfrm>
-            <a:off x="4507992" y="1408176"/>
-            <a:ext cx="7132320" cy="256032"/>
+            <a:off x="4511967" y="1408176"/>
+            <a:ext cx="7128344" cy="256032"/>
           </a:xfrm>
           <a:prstGeom prst="rect">
             <a:avLst/>
@@ -19512,8 +19512,8 @@
         </p:nvSpPr>
         <p:spPr>
           <a:xfrm>
-            <a:off x="4507992" y="1682495"/>
-            <a:ext cx="7132320" cy="347472"/>
+            <a:off x="4511967" y="1682495"/>
+            <a:ext cx="7128344" cy="347472"/>
           </a:xfrm>
           <a:prstGeom prst="rect">
             <a:avLst/>
@@ -19551,8 +19551,8 @@
         </p:nvSpPr>
         <p:spPr>
           <a:xfrm>
-            <a:off x="4507992" y="2048256"/>
-            <a:ext cx="7132320" cy="292608"/>
+            <a:off x="4511967" y="2048256"/>
+            <a:ext cx="7128344" cy="292608"/>
           </a:xfrm>
           <a:prstGeom prst="rect">
             <a:avLst/>
@@ -19702,7 +19702,7 @@
       </p:sp>
       <p:pic>
         <p:nvPicPr>
-          <p:cNvPr id="24" name="Picture 23" descr="_ph-korea-kim.png"/>
+          <p:cNvPr id="24" name="Picture 23" descr="korea-kim.png"/>
           <p:cNvPicPr>
             <a:picLocks noChangeAspect="1"/>
           </p:cNvPicPr>
@@ -19717,7 +19717,7 @@
         <p:spPr>
           <a:xfrm>
             <a:off x="3611880" y="4023359"/>
-            <a:ext cx="585216" cy="731520"/>
+            <a:ext cx="579120" cy="731520"/>
           </a:xfrm>
           <a:prstGeom prst="rect">
             <a:avLst/>
@@ -19733,7 +19733,7 @@
         <p:spPr>
           <a:xfrm>
             <a:off x="3611880" y="4023359"/>
-            <a:ext cx="585216" cy="731520"/>
+            <a:ext cx="579120" cy="731520"/>
           </a:xfrm>
           <a:prstGeom prst="rect">
             <a:avLst/>
@@ -19776,8 +19776,8 @@
         </p:nvSpPr>
         <p:spPr>
           <a:xfrm>
-            <a:off x="4325112" y="4023359"/>
-            <a:ext cx="3136391" cy="914400"/>
+            <a:off x="4319016" y="4023359"/>
+            <a:ext cx="3142488" cy="914400"/>
           </a:xfrm>
           <a:prstGeom prst="rect">
             <a:avLst/>
@@ -19926,7 +19926,7 @@
       </p:sp>
       <p:pic>
         <p:nvPicPr>
-          <p:cNvPr id="29" name="Picture 28" descr="_ph-china-hejun.png"/>
+          <p:cNvPr id="29" name="Picture 28" descr="korea-yeo.png"/>
           <p:cNvPicPr>
             <a:picLocks noChangeAspect="1"/>
           </p:cNvPicPr>
@@ -19941,7 +19941,7 @@
         <p:spPr>
           <a:xfrm>
             <a:off x="7790688" y="4023359"/>
-            <a:ext cx="585216" cy="731520"/>
+            <a:ext cx="579120" cy="731520"/>
           </a:xfrm>
           <a:prstGeom prst="rect">
             <a:avLst/>
@@ -19957,7 +19957,7 @@
         <p:spPr>
           <a:xfrm>
             <a:off x="7790688" y="4023359"/>
-            <a:ext cx="585216" cy="731520"/>
+            <a:ext cx="579120" cy="731520"/>
           </a:xfrm>
           <a:prstGeom prst="rect">
             <a:avLst/>
@@ -20000,8 +20000,8 @@
         </p:nvSpPr>
         <p:spPr>
           <a:xfrm>
-            <a:off x="8503920" y="4023359"/>
-            <a:ext cx="3136391" cy="914400"/>
+            <a:off x="8497824" y="4023359"/>
+            <a:ext cx="3142488" cy="914400"/>
           </a:xfrm>
           <a:prstGeom prst="rect">
             <a:avLst/>
@@ -20930,7 +20930,7 @@
       </p:sp>
       <p:pic>
         <p:nvPicPr>
-          <p:cNvPr id="16" name="Picture 15" descr="_ph-brazil-rosa.png"/>
+          <p:cNvPr id="16" name="Picture 15" descr="turkiye-kacir.png"/>
           <p:cNvPicPr>
             <a:picLocks noChangeAspect="1"/>
           </p:cNvPicPr>
@@ -20945,7 +20945,7 @@
         <p:spPr>
           <a:xfrm>
             <a:off x="3611880" y="1408176"/>
-            <a:ext cx="731520" cy="914400"/>
+            <a:ext cx="723900" cy="914400"/>
           </a:xfrm>
           <a:prstGeom prst="rect">
             <a:avLst/>
@@ -20961,7 +20961,7 @@
         <p:spPr>
           <a:xfrm>
             <a:off x="3611880" y="1408176"/>
-            <a:ext cx="731520" cy="914400"/>
+            <a:ext cx="723900" cy="914400"/>
           </a:xfrm>
           <a:prstGeom prst="rect">
             <a:avLst/>
@@ -21004,8 +21004,8 @@
         </p:nvSpPr>
         <p:spPr>
           <a:xfrm>
-            <a:off x="4507992" y="1408176"/>
-            <a:ext cx="7132320" cy="256032"/>
+            <a:off x="4500372" y="1408176"/>
+            <a:ext cx="7139939" cy="256032"/>
           </a:xfrm>
           <a:prstGeom prst="rect">
             <a:avLst/>
@@ -21038,8 +21038,8 @@
         </p:nvSpPr>
         <p:spPr>
           <a:xfrm>
-            <a:off x="4507992" y="1682495"/>
-            <a:ext cx="7132320" cy="347472"/>
+            <a:off x="4500372" y="1682495"/>
+            <a:ext cx="7139939" cy="347472"/>
           </a:xfrm>
           <a:prstGeom prst="rect">
             <a:avLst/>
@@ -21077,8 +21077,8 @@
         </p:nvSpPr>
         <p:spPr>
           <a:xfrm>
-            <a:off x="4507992" y="2048256"/>
-            <a:ext cx="7132320" cy="292608"/>
+            <a:off x="4500372" y="2048256"/>
+            <a:ext cx="7139939" cy="292608"/>
           </a:xfrm>
           <a:prstGeom prst="rect">
             <a:avLst/>
@@ -21244,7 +21244,7 @@
       </p:sp>
       <p:pic>
         <p:nvPicPr>
-          <p:cNvPr id="24" name="Picture 23" descr="_ph-turkiye-bolat.png"/>
+          <p:cNvPr id="24" name="Picture 23" descr="turkiye-bolat.png"/>
           <p:cNvPicPr>
             <a:picLocks noChangeAspect="1"/>
           </p:cNvPicPr>
@@ -22252,7 +22252,7 @@
       </p:sp>
       <p:pic>
         <p:nvPicPr>
-          <p:cNvPr id="16" name="Picture 15" descr="_ph-uk-kendall.png"/>
+          <p:cNvPr id="16" name="Picture 15" descr="uk-kendall.png"/>
           <p:cNvPicPr>
             <a:picLocks noChangeAspect="1"/>
           </p:cNvPicPr>
@@ -22566,7 +22566,7 @@
       </p:sp>
       <p:pic>
         <p:nvPicPr>
-          <p:cNvPr id="24" name="Picture 23" descr="_ph-uk-kyle.png"/>
+          <p:cNvPr id="24" name="Picture 23" descr="uk-kyle.png"/>
           <p:cNvPicPr>
             <a:picLocks noChangeAspect="1"/>
           </p:cNvPicPr>
@@ -22790,7 +22790,7 @@
       </p:sp>
       <p:pic>
         <p:nvPicPr>
-          <p:cNvPr id="29" name="Picture 28" descr="_ph-uk-bryant.png"/>
+          <p:cNvPr id="29" name="Picture 28" descr="uk-bryant.png"/>
           <p:cNvPicPr>
             <a:picLocks noChangeAspect="1"/>
           </p:cNvPicPr>
@@ -23794,7 +23794,7 @@
       </p:sp>
       <p:pic>
         <p:nvPicPr>
-          <p:cNvPr id="16" name="Picture 15" descr="_ph-us-kratsios.png"/>
+          <p:cNvPr id="16" name="Picture 15" descr="us-kratsios.png"/>
           <p:cNvPicPr>
             <a:picLocks noChangeAspect="1"/>
           </p:cNvPicPr>
@@ -23809,7 +23809,7 @@
         <p:spPr>
           <a:xfrm>
             <a:off x="3611880" y="1389888"/>
-            <a:ext cx="585216" cy="731520"/>
+            <a:ext cx="588397" cy="731520"/>
           </a:xfrm>
           <a:prstGeom prst="rect">
             <a:avLst/>
@@ -23825,7 +23825,7 @@
         <p:spPr>
           <a:xfrm>
             <a:off x="3611880" y="1389888"/>
-            <a:ext cx="585216" cy="731520"/>
+            <a:ext cx="588396" cy="731520"/>
           </a:xfrm>
           <a:prstGeom prst="rect">
             <a:avLst/>
@@ -23868,8 +23868,8 @@
         </p:nvSpPr>
         <p:spPr>
           <a:xfrm>
-            <a:off x="4325112" y="1389888"/>
-            <a:ext cx="3136391" cy="914400"/>
+            <a:off x="4328292" y="1389888"/>
+            <a:ext cx="3133211" cy="914400"/>
           </a:xfrm>
           <a:prstGeom prst="rect">
             <a:avLst/>
@@ -24018,7 +24018,7 @@
       </p:sp>
       <p:pic>
         <p:nvPicPr>
-          <p:cNvPr id="21" name="Picture 20" descr="_ph-japan-akazawa.png"/>
+          <p:cNvPr id="21" name="Picture 20" descr="us-roth.png"/>
           <p:cNvPicPr>
             <a:picLocks noChangeAspect="1"/>
           </p:cNvPicPr>
@@ -24033,7 +24033,7 @@
         <p:spPr>
           <a:xfrm>
             <a:off x="7790688" y="1389888"/>
-            <a:ext cx="585216" cy="731520"/>
+            <a:ext cx="579120" cy="731520"/>
           </a:xfrm>
           <a:prstGeom prst="rect">
             <a:avLst/>
@@ -24049,7 +24049,7 @@
         <p:spPr>
           <a:xfrm>
             <a:off x="7790688" y="1389888"/>
-            <a:ext cx="585216" cy="731520"/>
+            <a:ext cx="579120" cy="731520"/>
           </a:xfrm>
           <a:prstGeom prst="rect">
             <a:avLst/>
@@ -24092,8 +24092,8 @@
         </p:nvSpPr>
         <p:spPr>
           <a:xfrm>
-            <a:off x="8503920" y="1389888"/>
-            <a:ext cx="3136391" cy="914400"/>
+            <a:off x="8497824" y="1389888"/>
+            <a:ext cx="3142488" cy="914400"/>
           </a:xfrm>
           <a:prstGeom prst="rect">
             <a:avLst/>
@@ -24312,7 +24312,7 @@
       </p:sp>
       <p:pic>
         <p:nvPicPr>
-          <p:cNvPr id="28" name="Picture 27" descr="_ph-us-lutnick.png"/>
+          <p:cNvPr id="28" name="Picture 27" descr="us-lutnick.png"/>
           <p:cNvPicPr>
             <a:picLocks noChangeAspect="1"/>
           </p:cNvPicPr>
@@ -24327,7 +24327,7 @@
         <p:spPr>
           <a:xfrm>
             <a:off x="3611880" y="4023359"/>
-            <a:ext cx="585216" cy="731520"/>
+            <a:ext cx="579120" cy="731520"/>
           </a:xfrm>
           <a:prstGeom prst="rect">
             <a:avLst/>
@@ -24343,7 +24343,7 @@
         <p:spPr>
           <a:xfrm>
             <a:off x="3611880" y="4023359"/>
-            <a:ext cx="585216" cy="731520"/>
+            <a:ext cx="579120" cy="731520"/>
           </a:xfrm>
           <a:prstGeom prst="rect">
             <a:avLst/>
@@ -24386,8 +24386,8 @@
         </p:nvSpPr>
         <p:spPr>
           <a:xfrm>
-            <a:off x="4325112" y="4023359"/>
-            <a:ext cx="3136391" cy="914400"/>
+            <a:off x="4319016" y="4023359"/>
+            <a:ext cx="3142488" cy="914400"/>
           </a:xfrm>
           <a:prstGeom prst="rect">
             <a:avLst/>
@@ -24536,7 +24536,7 @@
       </p:sp>
       <p:pic>
         <p:nvPicPr>
-          <p:cNvPr id="33" name="Picture 32" descr="_ph-us-greer.png"/>
+          <p:cNvPr id="33" name="Picture 32" descr="us-greer.png"/>
           <p:cNvPicPr>
             <a:picLocks noChangeAspect="1"/>
           </p:cNvPicPr>
@@ -24551,7 +24551,7 @@
         <p:spPr>
           <a:xfrm>
             <a:off x="7790688" y="4023359"/>
-            <a:ext cx="585216" cy="731520"/>
+            <a:ext cx="579120" cy="731520"/>
           </a:xfrm>
           <a:prstGeom prst="rect">
             <a:avLst/>
@@ -24567,7 +24567,7 @@
         <p:spPr>
           <a:xfrm>
             <a:off x="7790688" y="4023359"/>
-            <a:ext cx="585216" cy="731520"/>
+            <a:ext cx="579120" cy="731520"/>
           </a:xfrm>
           <a:prstGeom prst="rect">
             <a:avLst/>
@@ -24610,8 +24610,8 @@
         </p:nvSpPr>
         <p:spPr>
           <a:xfrm>
-            <a:off x="8503920" y="4023359"/>
-            <a:ext cx="3136391" cy="914400"/>
+            <a:off x="8497824" y="4023359"/>
+            <a:ext cx="3142488" cy="914400"/>
           </a:xfrm>
           <a:prstGeom prst="rect">
             <a:avLst/>

--- a/output/g20-ministers-trade-deck.pptx
+++ b/output/g20-ministers-trade-deck.pptx
@@ -4238,7 +4238,7 @@
       </p:sp>
       <p:pic>
         <p:nvPicPr>
-          <p:cNvPr id="16" name="Picture 15" descr="_ph-france-lehenanff.png"/>
+          <p:cNvPr id="16" name="Picture 15" descr="france-lehenanff.png"/>
           <p:cNvPicPr>
             <a:picLocks noChangeAspect="1"/>
           </p:cNvPicPr>
@@ -4253,7 +4253,7 @@
         <p:spPr>
           <a:xfrm>
             <a:off x="3611880" y="1408176"/>
-            <a:ext cx="731520" cy="914400"/>
+            <a:ext cx="730601" cy="914400"/>
           </a:xfrm>
           <a:prstGeom prst="rect">
             <a:avLst/>
@@ -4269,7 +4269,7 @@
         <p:spPr>
           <a:xfrm>
             <a:off x="3611880" y="1408176"/>
-            <a:ext cx="731520" cy="914400"/>
+            <a:ext cx="730601" cy="914400"/>
           </a:xfrm>
           <a:prstGeom prst="rect">
             <a:avLst/>
@@ -4312,8 +4312,8 @@
         </p:nvSpPr>
         <p:spPr>
           <a:xfrm>
-            <a:off x="4507992" y="1408176"/>
-            <a:ext cx="7132320" cy="256032"/>
+            <a:off x="4507073" y="1408176"/>
+            <a:ext cx="7133238" cy="256032"/>
           </a:xfrm>
           <a:prstGeom prst="rect">
             <a:avLst/>
@@ -4346,8 +4346,8 @@
         </p:nvSpPr>
         <p:spPr>
           <a:xfrm>
-            <a:off x="4507992" y="1682495"/>
-            <a:ext cx="7132320" cy="347472"/>
+            <a:off x="4507073" y="1682495"/>
+            <a:ext cx="7133238" cy="347472"/>
           </a:xfrm>
           <a:prstGeom prst="rect">
             <a:avLst/>
@@ -4385,8 +4385,8 @@
         </p:nvSpPr>
         <p:spPr>
           <a:xfrm>
-            <a:off x="4507992" y="2048256"/>
-            <a:ext cx="7132320" cy="292608"/>
+            <a:off x="4507073" y="2048256"/>
+            <a:ext cx="7133238" cy="292608"/>
           </a:xfrm>
           <a:prstGeom prst="rect">
             <a:avLst/>
@@ -4536,7 +4536,7 @@
       </p:sp>
       <p:pic>
         <p:nvPicPr>
-          <p:cNvPr id="24" name="Picture 23" descr="_ph-france-forissier.png"/>
+          <p:cNvPr id="24" name="Picture 23" descr="france-forissier.png"/>
           <p:cNvPicPr>
             <a:picLocks noChangeAspect="1"/>
           </p:cNvPicPr>
@@ -4551,7 +4551,7 @@
         <p:spPr>
           <a:xfrm>
             <a:off x="3611880" y="4041648"/>
-            <a:ext cx="731520" cy="914400"/>
+            <a:ext cx="732503" cy="914400"/>
           </a:xfrm>
           <a:prstGeom prst="rect">
             <a:avLst/>
@@ -4567,7 +4567,7 @@
         <p:spPr>
           <a:xfrm>
             <a:off x="3611880" y="4041648"/>
-            <a:ext cx="731520" cy="914400"/>
+            <a:ext cx="732503" cy="914400"/>
           </a:xfrm>
           <a:prstGeom prst="rect">
             <a:avLst/>
@@ -4610,8 +4610,8 @@
         </p:nvSpPr>
         <p:spPr>
           <a:xfrm>
-            <a:off x="4507992" y="4041648"/>
-            <a:ext cx="7132320" cy="256032"/>
+            <a:off x="4508975" y="4041648"/>
+            <a:ext cx="7131336" cy="256032"/>
           </a:xfrm>
           <a:prstGeom prst="rect">
             <a:avLst/>
@@ -4644,8 +4644,8 @@
         </p:nvSpPr>
         <p:spPr>
           <a:xfrm>
-            <a:off x="4507992" y="4315968"/>
-            <a:ext cx="7132320" cy="347472"/>
+            <a:off x="4508975" y="4315968"/>
+            <a:ext cx="7131336" cy="347472"/>
           </a:xfrm>
           <a:prstGeom prst="rect">
             <a:avLst/>
@@ -4683,8 +4683,8 @@
         </p:nvSpPr>
         <p:spPr>
           <a:xfrm>
-            <a:off x="4507992" y="4681727"/>
-            <a:ext cx="7132320" cy="292608"/>
+            <a:off x="4508975" y="4681727"/>
+            <a:ext cx="7131336" cy="292608"/>
           </a:xfrm>
           <a:prstGeom prst="rect">
             <a:avLst/>
@@ -5544,7 +5544,7 @@
       </p:sp>
       <p:pic>
         <p:nvPicPr>
-          <p:cNvPr id="16" name="Picture 15" descr="_ph-germany-wildberger.png"/>
+          <p:cNvPr id="16" name="Picture 15" descr="germany-wildberger.png"/>
           <p:cNvPicPr>
             <a:picLocks noChangeAspect="1"/>
           </p:cNvPicPr>
@@ -5559,7 +5559,7 @@
         <p:spPr>
           <a:xfrm>
             <a:off x="3611880" y="1408176"/>
-            <a:ext cx="731520" cy="914400"/>
+            <a:ext cx="730601" cy="914400"/>
           </a:xfrm>
           <a:prstGeom prst="rect">
             <a:avLst/>
@@ -5575,7 +5575,7 @@
         <p:spPr>
           <a:xfrm>
             <a:off x="3611880" y="1408176"/>
-            <a:ext cx="731520" cy="914400"/>
+            <a:ext cx="730601" cy="914400"/>
           </a:xfrm>
           <a:prstGeom prst="rect">
             <a:avLst/>
@@ -5618,8 +5618,8 @@
         </p:nvSpPr>
         <p:spPr>
           <a:xfrm>
-            <a:off x="4507992" y="1408176"/>
-            <a:ext cx="7132320" cy="256032"/>
+            <a:off x="4507073" y="1408176"/>
+            <a:ext cx="7133238" cy="256032"/>
           </a:xfrm>
           <a:prstGeom prst="rect">
             <a:avLst/>
@@ -5652,8 +5652,8 @@
         </p:nvSpPr>
         <p:spPr>
           <a:xfrm>
-            <a:off x="4507992" y="1682495"/>
-            <a:ext cx="7132320" cy="347472"/>
+            <a:off x="4507073" y="1682495"/>
+            <a:ext cx="7133238" cy="347472"/>
           </a:xfrm>
           <a:prstGeom prst="rect">
             <a:avLst/>
@@ -5691,8 +5691,8 @@
         </p:nvSpPr>
         <p:spPr>
           <a:xfrm>
-            <a:off x="4507992" y="2048256"/>
-            <a:ext cx="7132320" cy="292608"/>
+            <a:off x="4507073" y="2048256"/>
+            <a:ext cx="7133238" cy="292608"/>
           </a:xfrm>
           <a:prstGeom prst="rect">
             <a:avLst/>
@@ -5842,7 +5842,7 @@
       </p:sp>
       <p:pic>
         <p:nvPicPr>
-          <p:cNvPr id="24" name="Picture 23" descr="_ph-germany-reiche.png"/>
+          <p:cNvPr id="24" name="Picture 23" descr="germany-reiche.png"/>
           <p:cNvPicPr>
             <a:picLocks noChangeAspect="1"/>
           </p:cNvPicPr>
@@ -5857,7 +5857,7 @@
         <p:spPr>
           <a:xfrm>
             <a:off x="3611880" y="4041648"/>
-            <a:ext cx="731520" cy="914400"/>
+            <a:ext cx="730601" cy="914400"/>
           </a:xfrm>
           <a:prstGeom prst="rect">
             <a:avLst/>
@@ -5873,7 +5873,7 @@
         <p:spPr>
           <a:xfrm>
             <a:off x="3611880" y="4041648"/>
-            <a:ext cx="731520" cy="914400"/>
+            <a:ext cx="730601" cy="914400"/>
           </a:xfrm>
           <a:prstGeom prst="rect">
             <a:avLst/>
@@ -5916,8 +5916,8 @@
         </p:nvSpPr>
         <p:spPr>
           <a:xfrm>
-            <a:off x="4507992" y="4041648"/>
-            <a:ext cx="7132320" cy="256032"/>
+            <a:off x="4507073" y="4041648"/>
+            <a:ext cx="7133238" cy="256032"/>
           </a:xfrm>
           <a:prstGeom prst="rect">
             <a:avLst/>
@@ -5950,8 +5950,8 @@
         </p:nvSpPr>
         <p:spPr>
           <a:xfrm>
-            <a:off x="4507992" y="4315968"/>
-            <a:ext cx="7132320" cy="347472"/>
+            <a:off x="4507073" y="4315968"/>
+            <a:ext cx="7133238" cy="347472"/>
           </a:xfrm>
           <a:prstGeom prst="rect">
             <a:avLst/>
@@ -5989,8 +5989,8 @@
         </p:nvSpPr>
         <p:spPr>
           <a:xfrm>
-            <a:off x="4507992" y="4681727"/>
-            <a:ext cx="7132320" cy="292608"/>
+            <a:off x="4507073" y="4681727"/>
+            <a:ext cx="7133238" cy="292608"/>
           </a:xfrm>
           <a:prstGeom prst="rect">
             <a:avLst/>
@@ -6866,7 +6866,7 @@
       </p:sp>
       <p:pic>
         <p:nvPicPr>
-          <p:cNvPr id="16" name="Picture 15" descr="_ph-india-vaishnaw.png"/>
+          <p:cNvPr id="16" name="Picture 15" descr="india-vaishnaw.png"/>
           <p:cNvPicPr>
             <a:picLocks noChangeAspect="1"/>
           </p:cNvPicPr>
@@ -7180,7 +7180,7 @@
       </p:sp>
       <p:pic>
         <p:nvPicPr>
-          <p:cNvPr id="24" name="Picture 23" descr="_ph-india-goyal.png"/>
+          <p:cNvPr id="24" name="Picture 23" descr="india-goyal.png"/>
           <p:cNvPicPr>
             <a:picLocks noChangeAspect="1"/>
           </p:cNvPicPr>
@@ -7195,7 +7195,7 @@
         <p:spPr>
           <a:xfrm>
             <a:off x="3611880" y="4023359"/>
-            <a:ext cx="585216" cy="731520"/>
+            <a:ext cx="582884" cy="731520"/>
           </a:xfrm>
           <a:prstGeom prst="rect">
             <a:avLst/>
@@ -7211,7 +7211,7 @@
         <p:spPr>
           <a:xfrm>
             <a:off x="3611880" y="4023359"/>
-            <a:ext cx="585216" cy="731520"/>
+            <a:ext cx="582884" cy="731520"/>
           </a:xfrm>
           <a:prstGeom prst="rect">
             <a:avLst/>
@@ -7254,8 +7254,8 @@
         </p:nvSpPr>
         <p:spPr>
           <a:xfrm>
-            <a:off x="4325112" y="4023359"/>
-            <a:ext cx="3136391" cy="914400"/>
+            <a:off x="4322780" y="4023359"/>
+            <a:ext cx="3138723" cy="914400"/>
           </a:xfrm>
           <a:prstGeom prst="rect">
             <a:avLst/>
@@ -7404,7 +7404,7 @@
       </p:sp>
       <p:pic>
         <p:nvPicPr>
-          <p:cNvPr id="29" name="Picture 28" descr="_ph-india-agrawal.png"/>
+          <p:cNvPr id="29" name="Picture 28" descr="india-agrawal.png"/>
           <p:cNvPicPr>
             <a:picLocks noChangeAspect="1"/>
           </p:cNvPicPr>
@@ -7419,7 +7419,7 @@
         <p:spPr>
           <a:xfrm>
             <a:off x="7790688" y="4023359"/>
-            <a:ext cx="585216" cy="731520"/>
+            <a:ext cx="584481" cy="731520"/>
           </a:xfrm>
           <a:prstGeom prst="rect">
             <a:avLst/>
@@ -7435,7 +7435,7 @@
         <p:spPr>
           <a:xfrm>
             <a:off x="7790688" y="4023359"/>
-            <a:ext cx="585216" cy="731520"/>
+            <a:ext cx="584480" cy="731520"/>
           </a:xfrm>
           <a:prstGeom prst="rect">
             <a:avLst/>
@@ -7478,8 +7478,8 @@
         </p:nvSpPr>
         <p:spPr>
           <a:xfrm>
-            <a:off x="8503920" y="4023359"/>
-            <a:ext cx="3136391" cy="914400"/>
+            <a:off x="8503184" y="4023359"/>
+            <a:ext cx="3137127" cy="914400"/>
           </a:xfrm>
           <a:prstGeom prst="rect">
             <a:avLst/>
@@ -8408,7 +8408,7 @@
       </p:sp>
       <p:pic>
         <p:nvPicPr>
-          <p:cNvPr id="16" name="Picture 15" descr="_ph-indonesia-hafid.png"/>
+          <p:cNvPr id="16" name="Picture 15" descr="indonesia-hafid.png"/>
           <p:cNvPicPr>
             <a:picLocks noChangeAspect="1"/>
           </p:cNvPicPr>
@@ -8423,7 +8423,7 @@
         <p:spPr>
           <a:xfrm>
             <a:off x="3611880" y="1408176"/>
-            <a:ext cx="731520" cy="914400"/>
+            <a:ext cx="730601" cy="914400"/>
           </a:xfrm>
           <a:prstGeom prst="rect">
             <a:avLst/>
@@ -8439,7 +8439,7 @@
         <p:spPr>
           <a:xfrm>
             <a:off x="3611880" y="1408176"/>
-            <a:ext cx="731520" cy="914400"/>
+            <a:ext cx="730601" cy="914400"/>
           </a:xfrm>
           <a:prstGeom prst="rect">
             <a:avLst/>
@@ -8482,8 +8482,8 @@
         </p:nvSpPr>
         <p:spPr>
           <a:xfrm>
-            <a:off x="4507992" y="1408176"/>
-            <a:ext cx="7132320" cy="256032"/>
+            <a:off x="4507073" y="1408176"/>
+            <a:ext cx="7133238" cy="256032"/>
           </a:xfrm>
           <a:prstGeom prst="rect">
             <a:avLst/>
@@ -8516,8 +8516,8 @@
         </p:nvSpPr>
         <p:spPr>
           <a:xfrm>
-            <a:off x="4507992" y="1682495"/>
-            <a:ext cx="7132320" cy="347472"/>
+            <a:off x="4507073" y="1682495"/>
+            <a:ext cx="7133238" cy="347472"/>
           </a:xfrm>
           <a:prstGeom prst="rect">
             <a:avLst/>
@@ -8555,8 +8555,8 @@
         </p:nvSpPr>
         <p:spPr>
           <a:xfrm>
-            <a:off x="4507992" y="2048256"/>
-            <a:ext cx="7132320" cy="292608"/>
+            <a:off x="4507073" y="2048256"/>
+            <a:ext cx="7133238" cy="292608"/>
           </a:xfrm>
           <a:prstGeom prst="rect">
             <a:avLst/>
@@ -8706,7 +8706,7 @@
       </p:sp>
       <p:pic>
         <p:nvPicPr>
-          <p:cNvPr id="24" name="Picture 23" descr="_ph-indonesia-santoso.png"/>
+          <p:cNvPr id="24" name="Picture 23" descr="indonesia-santoso.png"/>
           <p:cNvPicPr>
             <a:picLocks noChangeAspect="1"/>
           </p:cNvPicPr>
@@ -8721,7 +8721,7 @@
         <p:spPr>
           <a:xfrm>
             <a:off x="3611880" y="4023359"/>
-            <a:ext cx="585216" cy="731520"/>
+            <a:ext cx="587433" cy="731520"/>
           </a:xfrm>
           <a:prstGeom prst="rect">
             <a:avLst/>
@@ -8737,7 +8737,7 @@
         <p:spPr>
           <a:xfrm>
             <a:off x="3611880" y="4023359"/>
-            <a:ext cx="585216" cy="731520"/>
+            <a:ext cx="587432" cy="731520"/>
           </a:xfrm>
           <a:prstGeom prst="rect">
             <a:avLst/>
@@ -8780,8 +8780,8 @@
         </p:nvSpPr>
         <p:spPr>
           <a:xfrm>
-            <a:off x="4325112" y="4023359"/>
-            <a:ext cx="3136391" cy="914400"/>
+            <a:off x="4327328" y="4023359"/>
+            <a:ext cx="3134175" cy="914400"/>
           </a:xfrm>
           <a:prstGeom prst="rect">
             <a:avLst/>
@@ -8930,7 +8930,7 @@
       </p:sp>
       <p:pic>
         <p:nvPicPr>
-          <p:cNvPr id="29" name="Picture 28" descr="_ph-indonesia-airlangga.png"/>
+          <p:cNvPr id="29" name="Picture 28" descr="indonesia-airlangga.png"/>
           <p:cNvPicPr>
             <a:picLocks noChangeAspect="1"/>
           </p:cNvPicPr>
@@ -8945,7 +8945,7 @@
         <p:spPr>
           <a:xfrm>
             <a:off x="7790688" y="4023359"/>
-            <a:ext cx="585216" cy="731520"/>
+            <a:ext cx="584481" cy="731520"/>
           </a:xfrm>
           <a:prstGeom prst="rect">
             <a:avLst/>
@@ -8961,7 +8961,7 @@
         <p:spPr>
           <a:xfrm>
             <a:off x="7790688" y="4023359"/>
-            <a:ext cx="585216" cy="731520"/>
+            <a:ext cx="584480" cy="731520"/>
           </a:xfrm>
           <a:prstGeom prst="rect">
             <a:avLst/>
@@ -9004,8 +9004,8 @@
         </p:nvSpPr>
         <p:spPr>
           <a:xfrm>
-            <a:off x="8503920" y="4023359"/>
-            <a:ext cx="3136391" cy="914400"/>
+            <a:off x="8503184" y="4023359"/>
+            <a:ext cx="3137127" cy="914400"/>
           </a:xfrm>
           <a:prstGeom prst="rect">
             <a:avLst/>
@@ -9934,7 +9934,7 @@
       </p:sp>
       <p:pic>
         <p:nvPicPr>
-          <p:cNvPr id="16" name="Picture 15" descr="_ph-italy-butti.png"/>
+          <p:cNvPr id="16" name="Picture 15" descr="italy-butti.png"/>
           <p:cNvPicPr>
             <a:picLocks noChangeAspect="1"/>
           </p:cNvPicPr>
@@ -9949,7 +9949,7 @@
         <p:spPr>
           <a:xfrm>
             <a:off x="3611880" y="1408176"/>
-            <a:ext cx="731520" cy="914400"/>
+            <a:ext cx="730601" cy="914400"/>
           </a:xfrm>
           <a:prstGeom prst="rect">
             <a:avLst/>
@@ -9965,7 +9965,7 @@
         <p:spPr>
           <a:xfrm>
             <a:off x="3611880" y="1408176"/>
-            <a:ext cx="731520" cy="914400"/>
+            <a:ext cx="730601" cy="914400"/>
           </a:xfrm>
           <a:prstGeom prst="rect">
             <a:avLst/>
@@ -10008,8 +10008,8 @@
         </p:nvSpPr>
         <p:spPr>
           <a:xfrm>
-            <a:off x="4507992" y="1408176"/>
-            <a:ext cx="7132320" cy="256032"/>
+            <a:off x="4507073" y="1408176"/>
+            <a:ext cx="7133238" cy="256032"/>
           </a:xfrm>
           <a:prstGeom prst="rect">
             <a:avLst/>
@@ -10042,8 +10042,8 @@
         </p:nvSpPr>
         <p:spPr>
           <a:xfrm>
-            <a:off x="4507992" y="1682495"/>
-            <a:ext cx="7132320" cy="347472"/>
+            <a:off x="4507073" y="1682495"/>
+            <a:ext cx="7133238" cy="347472"/>
           </a:xfrm>
           <a:prstGeom prst="rect">
             <a:avLst/>
@@ -10081,8 +10081,8 @@
         </p:nvSpPr>
         <p:spPr>
           <a:xfrm>
-            <a:off x="4507992" y="2048256"/>
-            <a:ext cx="7132320" cy="292608"/>
+            <a:off x="4507073" y="2048256"/>
+            <a:ext cx="7133238" cy="292608"/>
           </a:xfrm>
           <a:prstGeom prst="rect">
             <a:avLst/>
@@ -10232,7 +10232,7 @@
       </p:sp>
       <p:pic>
         <p:nvPicPr>
-          <p:cNvPr id="24" name="Picture 23" descr="_ph-italy-tajani.png"/>
+          <p:cNvPr id="24" name="Picture 23" descr="italy-tajani.png"/>
           <p:cNvPicPr>
             <a:picLocks noChangeAspect="1"/>
           </p:cNvPicPr>
@@ -10247,7 +10247,7 @@
         <p:spPr>
           <a:xfrm>
             <a:off x="3611880" y="4023359"/>
-            <a:ext cx="585216" cy="731520"/>
+            <a:ext cx="584481" cy="731520"/>
           </a:xfrm>
           <a:prstGeom prst="rect">
             <a:avLst/>
@@ -10263,7 +10263,7 @@
         <p:spPr>
           <a:xfrm>
             <a:off x="3611880" y="4023359"/>
-            <a:ext cx="585216" cy="731520"/>
+            <a:ext cx="584480" cy="731520"/>
           </a:xfrm>
           <a:prstGeom prst="rect">
             <a:avLst/>
@@ -10306,8 +10306,8 @@
         </p:nvSpPr>
         <p:spPr>
           <a:xfrm>
-            <a:off x="4325112" y="4023359"/>
-            <a:ext cx="3136391" cy="914400"/>
+            <a:off x="4324376" y="4023359"/>
+            <a:ext cx="3137127" cy="914400"/>
           </a:xfrm>
           <a:prstGeom prst="rect">
             <a:avLst/>
@@ -10456,7 +10456,7 @@
       </p:sp>
       <p:pic>
         <p:nvPicPr>
-          <p:cNvPr id="29" name="Picture 28" descr="_ph-italy-urso.png"/>
+          <p:cNvPr id="29" name="Picture 28" descr="italy-urso.png"/>
           <p:cNvPicPr>
             <a:picLocks noChangeAspect="1"/>
           </p:cNvPicPr>
@@ -10471,7 +10471,7 @@
         <p:spPr>
           <a:xfrm>
             <a:off x="7790688" y="4023359"/>
-            <a:ext cx="585216" cy="731520"/>
+            <a:ext cx="586740" cy="731520"/>
           </a:xfrm>
           <a:prstGeom prst="rect">
             <a:avLst/>
@@ -10487,7 +10487,7 @@
         <p:spPr>
           <a:xfrm>
             <a:off x="7790688" y="4023359"/>
-            <a:ext cx="585216" cy="731520"/>
+            <a:ext cx="586740" cy="731520"/>
           </a:xfrm>
           <a:prstGeom prst="rect">
             <a:avLst/>
@@ -10530,8 +10530,8 @@
         </p:nvSpPr>
         <p:spPr>
           <a:xfrm>
-            <a:off x="8503920" y="4023359"/>
-            <a:ext cx="3136391" cy="914400"/>
+            <a:off x="8505444" y="4023359"/>
+            <a:ext cx="3134868" cy="914400"/>
           </a:xfrm>
           <a:prstGeom prst="rect">
             <a:avLst/>
@@ -11460,7 +11460,7 @@
       </p:sp>
       <p:pic>
         <p:nvPicPr>
-          <p:cNvPr id="16" name="Picture 15" descr="_ph-japan-matsumoto.png"/>
+          <p:cNvPr id="16" name="Picture 15" descr="japan-matsumoto.png"/>
           <p:cNvPicPr>
             <a:picLocks noChangeAspect="1"/>
           </p:cNvPicPr>
@@ -11475,7 +11475,7 @@
         <p:spPr>
           <a:xfrm>
             <a:off x="3611880" y="1408176"/>
-            <a:ext cx="731520" cy="914400"/>
+            <a:ext cx="733710" cy="914400"/>
           </a:xfrm>
           <a:prstGeom prst="rect">
             <a:avLst/>
@@ -11491,7 +11491,7 @@
         <p:spPr>
           <a:xfrm>
             <a:off x="3611880" y="1408176"/>
-            <a:ext cx="731520" cy="914400"/>
+            <a:ext cx="733710" cy="914400"/>
           </a:xfrm>
           <a:prstGeom prst="rect">
             <a:avLst/>
@@ -11534,8 +11534,8 @@
         </p:nvSpPr>
         <p:spPr>
           <a:xfrm>
-            <a:off x="4507992" y="1408176"/>
-            <a:ext cx="7132320" cy="256032"/>
+            <a:off x="4510182" y="1408176"/>
+            <a:ext cx="7130129" cy="256032"/>
           </a:xfrm>
           <a:prstGeom prst="rect">
             <a:avLst/>
@@ -11568,8 +11568,8 @@
         </p:nvSpPr>
         <p:spPr>
           <a:xfrm>
-            <a:off x="4507992" y="1682495"/>
-            <a:ext cx="7132320" cy="347472"/>
+            <a:off x="4510182" y="1682495"/>
+            <a:ext cx="7130129" cy="347472"/>
           </a:xfrm>
           <a:prstGeom prst="rect">
             <a:avLst/>
@@ -11607,8 +11607,8 @@
         </p:nvSpPr>
         <p:spPr>
           <a:xfrm>
-            <a:off x="4507992" y="2048256"/>
-            <a:ext cx="7132320" cy="292608"/>
+            <a:off x="4510182" y="2048256"/>
+            <a:ext cx="7130129" cy="292608"/>
           </a:xfrm>
           <a:prstGeom prst="rect">
             <a:avLst/>
@@ -11758,7 +11758,7 @@
       </p:sp>
       <p:pic>
         <p:nvPicPr>
-          <p:cNvPr id="24" name="Picture 23" descr="_ph-japan-akazawa.png"/>
+          <p:cNvPr id="24" name="Picture 23" descr="japan-akazawa.png"/>
           <p:cNvPicPr>
             <a:picLocks noChangeAspect="1"/>
           </p:cNvPicPr>
@@ -11773,7 +11773,7 @@
         <p:spPr>
           <a:xfrm>
             <a:off x="3611880" y="4041648"/>
-            <a:ext cx="731520" cy="914400"/>
+            <a:ext cx="732503" cy="914400"/>
           </a:xfrm>
           <a:prstGeom prst="rect">
             <a:avLst/>
@@ -11789,7 +11789,7 @@
         <p:spPr>
           <a:xfrm>
             <a:off x="3611880" y="4041648"/>
-            <a:ext cx="731520" cy="914400"/>
+            <a:ext cx="732503" cy="914400"/>
           </a:xfrm>
           <a:prstGeom prst="rect">
             <a:avLst/>
@@ -11832,8 +11832,8 @@
         </p:nvSpPr>
         <p:spPr>
           <a:xfrm>
-            <a:off x="4507992" y="4041648"/>
-            <a:ext cx="7132320" cy="256032"/>
+            <a:off x="4508975" y="4041648"/>
+            <a:ext cx="7131336" cy="256032"/>
           </a:xfrm>
           <a:prstGeom prst="rect">
             <a:avLst/>
@@ -11866,8 +11866,8 @@
         </p:nvSpPr>
         <p:spPr>
           <a:xfrm>
-            <a:off x="4507992" y="4315968"/>
-            <a:ext cx="7132320" cy="347472"/>
+            <a:off x="4508975" y="4315968"/>
+            <a:ext cx="7131336" cy="347472"/>
           </a:xfrm>
           <a:prstGeom prst="rect">
             <a:avLst/>
@@ -11905,8 +11905,8 @@
         </p:nvSpPr>
         <p:spPr>
           <a:xfrm>
-            <a:off x="4507992" y="4681727"/>
-            <a:ext cx="7132320" cy="292608"/>
+            <a:off x="4508975" y="4681727"/>
+            <a:ext cx="7131336" cy="292608"/>
           </a:xfrm>
           <a:prstGeom prst="rect">
             <a:avLst/>
@@ -12797,7 +12797,7 @@
         <p:spPr>
           <a:xfrm>
             <a:off x="3611880" y="1408176"/>
-            <a:ext cx="730601" cy="914400"/>
+            <a:ext cx="734291" cy="914400"/>
           </a:xfrm>
           <a:prstGeom prst="rect">
             <a:avLst/>
@@ -12813,7 +12813,7 @@
         <p:spPr>
           <a:xfrm>
             <a:off x="3611880" y="1408176"/>
-            <a:ext cx="730601" cy="914400"/>
+            <a:ext cx="734290" cy="914400"/>
           </a:xfrm>
           <a:prstGeom prst="rect">
             <a:avLst/>
@@ -12856,8 +12856,8 @@
         </p:nvSpPr>
         <p:spPr>
           <a:xfrm>
-            <a:off x="4507073" y="1408176"/>
-            <a:ext cx="7133238" cy="256032"/>
+            <a:off x="4510762" y="1408176"/>
+            <a:ext cx="7129549" cy="256032"/>
           </a:xfrm>
           <a:prstGeom prst="rect">
             <a:avLst/>
@@ -12890,8 +12890,8 @@
         </p:nvSpPr>
         <p:spPr>
           <a:xfrm>
-            <a:off x="4507073" y="1682495"/>
-            <a:ext cx="7133238" cy="347472"/>
+            <a:off x="4510762" y="1682495"/>
+            <a:ext cx="7129549" cy="347472"/>
           </a:xfrm>
           <a:prstGeom prst="rect">
             <a:avLst/>
@@ -12929,8 +12929,8 @@
         </p:nvSpPr>
         <p:spPr>
           <a:xfrm>
-            <a:off x="4507073" y="2048256"/>
-            <a:ext cx="7133238" cy="292608"/>
+            <a:off x="4510762" y="2048256"/>
+            <a:ext cx="7129549" cy="292608"/>
           </a:xfrm>
           <a:prstGeom prst="rect">
             <a:avLst/>
@@ -13080,7 +13080,7 @@
       </p:sp>
       <p:pic>
         <p:nvPicPr>
-          <p:cNvPr id="24" name="Picture 23" descr="_ph-mexico-ebrard.png"/>
+          <p:cNvPr id="24" name="Picture 23" descr="mexico-ebrard.png"/>
           <p:cNvPicPr>
             <a:picLocks noChangeAspect="1"/>
           </p:cNvPicPr>
@@ -13095,7 +13095,7 @@
         <p:spPr>
           <a:xfrm>
             <a:off x="3611880" y="4023359"/>
-            <a:ext cx="585216" cy="731520"/>
+            <a:ext cx="587433" cy="731520"/>
           </a:xfrm>
           <a:prstGeom prst="rect">
             <a:avLst/>
@@ -13111,7 +13111,7 @@
         <p:spPr>
           <a:xfrm>
             <a:off x="3611880" y="4023359"/>
-            <a:ext cx="585216" cy="731520"/>
+            <a:ext cx="587432" cy="731520"/>
           </a:xfrm>
           <a:prstGeom prst="rect">
             <a:avLst/>
@@ -13154,8 +13154,8 @@
         </p:nvSpPr>
         <p:spPr>
           <a:xfrm>
-            <a:off x="4325112" y="4023359"/>
-            <a:ext cx="3136391" cy="914400"/>
+            <a:off x="4327328" y="4023359"/>
+            <a:ext cx="3134175" cy="914400"/>
           </a:xfrm>
           <a:prstGeom prst="rect">
             <a:avLst/>
@@ -13304,7 +13304,7 @@
       </p:sp>
       <p:pic>
         <p:nvPicPr>
-          <p:cNvPr id="29" name="Picture 28" descr="_ph-mexico-gutierrez.png"/>
+          <p:cNvPr id="29" name="Picture 28" descr="mexico-gutierrez.png"/>
           <p:cNvPicPr>
             <a:picLocks noChangeAspect="1"/>
           </p:cNvPicPr>
@@ -13319,7 +13319,7 @@
         <p:spPr>
           <a:xfrm>
             <a:off x="7790688" y="4023359"/>
-            <a:ext cx="585216" cy="731520"/>
+            <a:ext cx="584481" cy="731520"/>
           </a:xfrm>
           <a:prstGeom prst="rect">
             <a:avLst/>
@@ -13335,7 +13335,7 @@
         <p:spPr>
           <a:xfrm>
             <a:off x="7790688" y="4023359"/>
-            <a:ext cx="585216" cy="731520"/>
+            <a:ext cx="584480" cy="731520"/>
           </a:xfrm>
           <a:prstGeom prst="rect">
             <a:avLst/>
@@ -13378,8 +13378,8 @@
         </p:nvSpPr>
         <p:spPr>
           <a:xfrm>
-            <a:off x="8503920" y="4023359"/>
-            <a:ext cx="3136391" cy="914400"/>
+            <a:off x="8503184" y="4023359"/>
+            <a:ext cx="3137127" cy="914400"/>
           </a:xfrm>
           <a:prstGeom prst="rect">
             <a:avLst/>
@@ -14323,7 +14323,7 @@
         <p:spPr>
           <a:xfrm>
             <a:off x="3611880" y="1408176"/>
-            <a:ext cx="730601" cy="914400"/>
+            <a:ext cx="734291" cy="914400"/>
           </a:xfrm>
           <a:prstGeom prst="rect">
             <a:avLst/>
@@ -14339,7 +14339,7 @@
         <p:spPr>
           <a:xfrm>
             <a:off x="3611880" y="1408176"/>
-            <a:ext cx="730601" cy="914400"/>
+            <a:ext cx="734290" cy="914400"/>
           </a:xfrm>
           <a:prstGeom prst="rect">
             <a:avLst/>
@@ -14382,8 +14382,8 @@
         </p:nvSpPr>
         <p:spPr>
           <a:xfrm>
-            <a:off x="4507073" y="1408176"/>
-            <a:ext cx="7133238" cy="256032"/>
+            <a:off x="4510762" y="1408176"/>
+            <a:ext cx="7129549" cy="256032"/>
           </a:xfrm>
           <a:prstGeom prst="rect">
             <a:avLst/>
@@ -14416,8 +14416,8 @@
         </p:nvSpPr>
         <p:spPr>
           <a:xfrm>
-            <a:off x="4507073" y="1682495"/>
-            <a:ext cx="7133238" cy="347472"/>
+            <a:off x="4510762" y="1682495"/>
+            <a:ext cx="7129549" cy="347472"/>
           </a:xfrm>
           <a:prstGeom prst="rect">
             <a:avLst/>
@@ -14455,8 +14455,8 @@
         </p:nvSpPr>
         <p:spPr>
           <a:xfrm>
-            <a:off x="4507073" y="2048256"/>
-            <a:ext cx="7133238" cy="292608"/>
+            <a:off x="4510762" y="2048256"/>
+            <a:ext cx="7129549" cy="292608"/>
           </a:xfrm>
           <a:prstGeom prst="rect">
             <a:avLst/>
@@ -14861,7 +14861,7 @@
         <p:spPr>
           <a:xfrm>
             <a:off x="7790688" y="4023359"/>
-            <a:ext cx="584481" cy="731520"/>
+            <a:ext cx="587433" cy="731520"/>
           </a:xfrm>
           <a:prstGeom prst="rect">
             <a:avLst/>
@@ -14877,7 +14877,7 @@
         <p:spPr>
           <a:xfrm>
             <a:off x="7790688" y="4023359"/>
-            <a:ext cx="584480" cy="731520"/>
+            <a:ext cx="587432" cy="731520"/>
           </a:xfrm>
           <a:prstGeom prst="rect">
             <a:avLst/>
@@ -14920,8 +14920,8 @@
         </p:nvSpPr>
         <p:spPr>
           <a:xfrm>
-            <a:off x="8503184" y="4023359"/>
-            <a:ext cx="3137127" cy="914400"/>
+            <a:off x="8506136" y="4023359"/>
+            <a:ext cx="3134175" cy="914400"/>
           </a:xfrm>
           <a:prstGeom prst="rect">
             <a:avLst/>
@@ -15865,7 +15865,7 @@
         <p:spPr>
           <a:xfrm>
             <a:off x="3611880" y="1408176"/>
-            <a:ext cx="723900" cy="914400"/>
+            <a:ext cx="731520" cy="914400"/>
           </a:xfrm>
           <a:prstGeom prst="rect">
             <a:avLst/>
@@ -15881,7 +15881,7 @@
         <p:spPr>
           <a:xfrm>
             <a:off x="3611880" y="1408176"/>
-            <a:ext cx="723900" cy="914400"/>
+            <a:ext cx="731520" cy="914400"/>
           </a:xfrm>
           <a:prstGeom prst="rect">
             <a:avLst/>
@@ -15924,8 +15924,8 @@
         </p:nvSpPr>
         <p:spPr>
           <a:xfrm>
-            <a:off x="4500372" y="1408176"/>
-            <a:ext cx="7139939" cy="256032"/>
+            <a:off x="4507992" y="1408176"/>
+            <a:ext cx="7132320" cy="256032"/>
           </a:xfrm>
           <a:prstGeom prst="rect">
             <a:avLst/>
@@ -15958,8 +15958,8 @@
         </p:nvSpPr>
         <p:spPr>
           <a:xfrm>
-            <a:off x="4500372" y="1682495"/>
-            <a:ext cx="7139939" cy="347472"/>
+            <a:off x="4507992" y="1682495"/>
+            <a:ext cx="7132320" cy="347472"/>
           </a:xfrm>
           <a:prstGeom prst="rect">
             <a:avLst/>
@@ -15997,8 +15997,8 @@
         </p:nvSpPr>
         <p:spPr>
           <a:xfrm>
-            <a:off x="4500372" y="2048256"/>
-            <a:ext cx="7139939" cy="292608"/>
+            <a:off x="4507992" y="2048256"/>
+            <a:ext cx="7132320" cy="292608"/>
           </a:xfrm>
           <a:prstGeom prst="rect">
             <a:avLst/>
@@ -16403,7 +16403,7 @@
         <p:spPr>
           <a:xfrm>
             <a:off x="7790688" y="4023359"/>
-            <a:ext cx="579120" cy="731520"/>
+            <a:ext cx="585216" cy="731520"/>
           </a:xfrm>
           <a:prstGeom prst="rect">
             <a:avLst/>
@@ -16419,7 +16419,7 @@
         <p:spPr>
           <a:xfrm>
             <a:off x="7790688" y="4023359"/>
-            <a:ext cx="579120" cy="731520"/>
+            <a:ext cx="585216" cy="731520"/>
           </a:xfrm>
           <a:prstGeom prst="rect">
             <a:avLst/>
@@ -16462,8 +16462,8 @@
         </p:nvSpPr>
         <p:spPr>
           <a:xfrm>
-            <a:off x="8497824" y="4023359"/>
-            <a:ext cx="3142488" cy="914400"/>
+            <a:off x="8503920" y="4023359"/>
+            <a:ext cx="3136391" cy="914400"/>
           </a:xfrm>
           <a:prstGeom prst="rect">
             <a:avLst/>
@@ -17407,7 +17407,7 @@
         <p:spPr>
           <a:xfrm>
             <a:off x="3611880" y="1408176"/>
-            <a:ext cx="723900" cy="914400"/>
+            <a:ext cx="731520" cy="914400"/>
           </a:xfrm>
           <a:prstGeom prst="rect">
             <a:avLst/>
@@ -17423,7 +17423,7 @@
         <p:spPr>
           <a:xfrm>
             <a:off x="3611880" y="1408176"/>
-            <a:ext cx="723900" cy="914400"/>
+            <a:ext cx="731520" cy="914400"/>
           </a:xfrm>
           <a:prstGeom prst="rect">
             <a:avLst/>
@@ -17466,8 +17466,8 @@
         </p:nvSpPr>
         <p:spPr>
           <a:xfrm>
-            <a:off x="4500372" y="1408176"/>
-            <a:ext cx="7139939" cy="256032"/>
+            <a:off x="4507992" y="1408176"/>
+            <a:ext cx="7132320" cy="256032"/>
           </a:xfrm>
           <a:prstGeom prst="rect">
             <a:avLst/>
@@ -17500,8 +17500,8 @@
         </p:nvSpPr>
         <p:spPr>
           <a:xfrm>
-            <a:off x="4500372" y="1682495"/>
-            <a:ext cx="7139939" cy="347472"/>
+            <a:off x="4507992" y="1682495"/>
+            <a:ext cx="7132320" cy="347472"/>
           </a:xfrm>
           <a:prstGeom prst="rect">
             <a:avLst/>
@@ -17539,8 +17539,8 @@
         </p:nvSpPr>
         <p:spPr>
           <a:xfrm>
-            <a:off x="4500372" y="2048256"/>
-            <a:ext cx="7139939" cy="292608"/>
+            <a:off x="4507992" y="2048256"/>
+            <a:ext cx="7132320" cy="292608"/>
           </a:xfrm>
           <a:prstGeom prst="rect">
             <a:avLst/>
@@ -17929,7 +17929,7 @@
         <p:spPr>
           <a:xfrm>
             <a:off x="7790688" y="4023359"/>
-            <a:ext cx="584481" cy="731520"/>
+            <a:ext cx="587433" cy="731520"/>
           </a:xfrm>
           <a:prstGeom prst="rect">
             <a:avLst/>
@@ -17945,7 +17945,7 @@
         <p:spPr>
           <a:xfrm>
             <a:off x="7790688" y="4023359"/>
-            <a:ext cx="584480" cy="731520"/>
+            <a:ext cx="587432" cy="731520"/>
           </a:xfrm>
           <a:prstGeom prst="rect">
             <a:avLst/>
@@ -17988,8 +17988,8 @@
         </p:nvSpPr>
         <p:spPr>
           <a:xfrm>
-            <a:off x="8503184" y="4023359"/>
-            <a:ext cx="3137127" cy="914400"/>
+            <a:off x="8506136" y="4023359"/>
+            <a:ext cx="3134175" cy="914400"/>
           </a:xfrm>
           <a:prstGeom prst="rect">
             <a:avLst/>
@@ -19419,7 +19419,7 @@
         <p:spPr>
           <a:xfrm>
             <a:off x="3611880" y="1408176"/>
-            <a:ext cx="735496" cy="914400"/>
+            <a:ext cx="725557" cy="914400"/>
           </a:xfrm>
           <a:prstGeom prst="rect">
             <a:avLst/>
@@ -19435,7 +19435,7 @@
         <p:spPr>
           <a:xfrm>
             <a:off x="3611880" y="1408176"/>
-            <a:ext cx="735495" cy="914400"/>
+            <a:ext cx="725556" cy="914400"/>
           </a:xfrm>
           <a:prstGeom prst="rect">
             <a:avLst/>
@@ -19478,8 +19478,8 @@
         </p:nvSpPr>
         <p:spPr>
           <a:xfrm>
-            <a:off x="4511967" y="1408176"/>
-            <a:ext cx="7128344" cy="256032"/>
+            <a:off x="4502028" y="1408176"/>
+            <a:ext cx="7138283" cy="256032"/>
           </a:xfrm>
           <a:prstGeom prst="rect">
             <a:avLst/>
@@ -19512,8 +19512,8 @@
         </p:nvSpPr>
         <p:spPr>
           <a:xfrm>
-            <a:off x="4511967" y="1682495"/>
-            <a:ext cx="7128344" cy="347472"/>
+            <a:off x="4502028" y="1682495"/>
+            <a:ext cx="7138283" cy="347472"/>
           </a:xfrm>
           <a:prstGeom prst="rect">
             <a:avLst/>
@@ -19551,8 +19551,8 @@
         </p:nvSpPr>
         <p:spPr>
           <a:xfrm>
-            <a:off x="4511967" y="2048256"/>
-            <a:ext cx="7128344" cy="292608"/>
+            <a:off x="4502028" y="2048256"/>
+            <a:ext cx="7138283" cy="292608"/>
           </a:xfrm>
           <a:prstGeom prst="rect">
             <a:avLst/>
@@ -19717,7 +19717,7 @@
         <p:spPr>
           <a:xfrm>
             <a:off x="3611880" y="4023359"/>
-            <a:ext cx="579120" cy="731520"/>
+            <a:ext cx="585216" cy="731520"/>
           </a:xfrm>
           <a:prstGeom prst="rect">
             <a:avLst/>
@@ -19733,7 +19733,7 @@
         <p:spPr>
           <a:xfrm>
             <a:off x="3611880" y="4023359"/>
-            <a:ext cx="579120" cy="731520"/>
+            <a:ext cx="585216" cy="731520"/>
           </a:xfrm>
           <a:prstGeom prst="rect">
             <a:avLst/>
@@ -19776,8 +19776,8 @@
         </p:nvSpPr>
         <p:spPr>
           <a:xfrm>
-            <a:off x="4319016" y="4023359"/>
-            <a:ext cx="3142488" cy="914400"/>
+            <a:off x="4325112" y="4023359"/>
+            <a:ext cx="3136391" cy="914400"/>
           </a:xfrm>
           <a:prstGeom prst="rect">
             <a:avLst/>
@@ -19941,7 +19941,7 @@
         <p:spPr>
           <a:xfrm>
             <a:off x="7790688" y="4023359"/>
-            <a:ext cx="579120" cy="731520"/>
+            <a:ext cx="585216" cy="731520"/>
           </a:xfrm>
           <a:prstGeom prst="rect">
             <a:avLst/>
@@ -19957,7 +19957,7 @@
         <p:spPr>
           <a:xfrm>
             <a:off x="7790688" y="4023359"/>
-            <a:ext cx="579120" cy="731520"/>
+            <a:ext cx="585216" cy="731520"/>
           </a:xfrm>
           <a:prstGeom prst="rect">
             <a:avLst/>
@@ -20000,8 +20000,8 @@
         </p:nvSpPr>
         <p:spPr>
           <a:xfrm>
-            <a:off x="8497824" y="4023359"/>
-            <a:ext cx="3142488" cy="914400"/>
+            <a:off x="8503920" y="4023359"/>
+            <a:ext cx="3136391" cy="914400"/>
           </a:xfrm>
           <a:prstGeom prst="rect">
             <a:avLst/>
@@ -20945,7 +20945,7 @@
         <p:spPr>
           <a:xfrm>
             <a:off x="3611880" y="1408176"/>
-            <a:ext cx="723900" cy="914400"/>
+            <a:ext cx="731520" cy="914400"/>
           </a:xfrm>
           <a:prstGeom prst="rect">
             <a:avLst/>
@@ -20961,7 +20961,7 @@
         <p:spPr>
           <a:xfrm>
             <a:off x="3611880" y="1408176"/>
-            <a:ext cx="723900" cy="914400"/>
+            <a:ext cx="731520" cy="914400"/>
           </a:xfrm>
           <a:prstGeom prst="rect">
             <a:avLst/>
@@ -21004,8 +21004,8 @@
         </p:nvSpPr>
         <p:spPr>
           <a:xfrm>
-            <a:off x="4500372" y="1408176"/>
-            <a:ext cx="7139939" cy="256032"/>
+            <a:off x="4507992" y="1408176"/>
+            <a:ext cx="7132320" cy="256032"/>
           </a:xfrm>
           <a:prstGeom prst="rect">
             <a:avLst/>
@@ -21038,8 +21038,8 @@
         </p:nvSpPr>
         <p:spPr>
           <a:xfrm>
-            <a:off x="4500372" y="1682495"/>
-            <a:ext cx="7139939" cy="347472"/>
+            <a:off x="4507992" y="1682495"/>
+            <a:ext cx="7132320" cy="347472"/>
           </a:xfrm>
           <a:prstGeom prst="rect">
             <a:avLst/>
@@ -21077,8 +21077,8 @@
         </p:nvSpPr>
         <p:spPr>
           <a:xfrm>
-            <a:off x="4500372" y="2048256"/>
-            <a:ext cx="7139939" cy="292608"/>
+            <a:off x="4507992" y="2048256"/>
+            <a:ext cx="7132320" cy="292608"/>
           </a:xfrm>
           <a:prstGeom prst="rect">
             <a:avLst/>
@@ -23809,7 +23809,7 @@
         <p:spPr>
           <a:xfrm>
             <a:off x="3611880" y="1389888"/>
-            <a:ext cx="588397" cy="731520"/>
+            <a:ext cx="580445" cy="731520"/>
           </a:xfrm>
           <a:prstGeom prst="rect">
             <a:avLst/>
@@ -23825,7 +23825,7 @@
         <p:spPr>
           <a:xfrm>
             <a:off x="3611880" y="1389888"/>
-            <a:ext cx="588396" cy="731520"/>
+            <a:ext cx="580445" cy="731520"/>
           </a:xfrm>
           <a:prstGeom prst="rect">
             <a:avLst/>
@@ -23868,8 +23868,8 @@
         </p:nvSpPr>
         <p:spPr>
           <a:xfrm>
-            <a:off x="4328292" y="1389888"/>
-            <a:ext cx="3133211" cy="914400"/>
+            <a:off x="4320341" y="1389888"/>
+            <a:ext cx="3141162" cy="914400"/>
           </a:xfrm>
           <a:prstGeom prst="rect">
             <a:avLst/>
@@ -24033,7 +24033,7 @@
         <p:spPr>
           <a:xfrm>
             <a:off x="7790688" y="1389888"/>
-            <a:ext cx="579120" cy="731520"/>
+            <a:ext cx="585216" cy="731520"/>
           </a:xfrm>
           <a:prstGeom prst="rect">
             <a:avLst/>
@@ -24049,7 +24049,7 @@
         <p:spPr>
           <a:xfrm>
             <a:off x="7790688" y="1389888"/>
-            <a:ext cx="579120" cy="731520"/>
+            <a:ext cx="585216" cy="731520"/>
           </a:xfrm>
           <a:prstGeom prst="rect">
             <a:avLst/>
@@ -24092,8 +24092,8 @@
         </p:nvSpPr>
         <p:spPr>
           <a:xfrm>
-            <a:off x="8497824" y="1389888"/>
-            <a:ext cx="3142488" cy="914400"/>
+            <a:off x="8503920" y="1389888"/>
+            <a:ext cx="3136391" cy="914400"/>
           </a:xfrm>
           <a:prstGeom prst="rect">
             <a:avLst/>
@@ -24327,7 +24327,7 @@
         <p:spPr>
           <a:xfrm>
             <a:off x="3611880" y="4023359"/>
-            <a:ext cx="579120" cy="731520"/>
+            <a:ext cx="585216" cy="731520"/>
           </a:xfrm>
           <a:prstGeom prst="rect">
             <a:avLst/>
@@ -24343,7 +24343,7 @@
         <p:spPr>
           <a:xfrm>
             <a:off x="3611880" y="4023359"/>
-            <a:ext cx="579120" cy="731520"/>
+            <a:ext cx="585216" cy="731520"/>
           </a:xfrm>
           <a:prstGeom prst="rect">
             <a:avLst/>
@@ -24386,8 +24386,8 @@
         </p:nvSpPr>
         <p:spPr>
           <a:xfrm>
-            <a:off x="4319016" y="4023359"/>
-            <a:ext cx="3142488" cy="914400"/>
+            <a:off x="4325112" y="4023359"/>
+            <a:ext cx="3136391" cy="914400"/>
           </a:xfrm>
           <a:prstGeom prst="rect">
             <a:avLst/>
@@ -24551,7 +24551,7 @@
         <p:spPr>
           <a:xfrm>
             <a:off x="7790688" y="4023359"/>
-            <a:ext cx="579120" cy="731520"/>
+            <a:ext cx="585216" cy="731520"/>
           </a:xfrm>
           <a:prstGeom prst="rect">
             <a:avLst/>
@@ -24567,7 +24567,7 @@
         <p:spPr>
           <a:xfrm>
             <a:off x="7790688" y="4023359"/>
-            <a:ext cx="579120" cy="731520"/>
+            <a:ext cx="585216" cy="731520"/>
           </a:xfrm>
           <a:prstGeom prst="rect">
             <a:avLst/>
@@ -24610,8 +24610,8 @@
         </p:nvSpPr>
         <p:spPr>
           <a:xfrm>
-            <a:off x="8497824" y="4023359"/>
-            <a:ext cx="3142488" cy="914400"/>
+            <a:off x="8503920" y="4023359"/>
+            <a:ext cx="3136391" cy="914400"/>
           </a:xfrm>
           <a:prstGeom prst="rect">
             <a:avLst/>
@@ -38497,7 +38497,7 @@
       </p:sp>
       <p:pic>
         <p:nvPicPr>
-          <p:cNvPr id="16" name="Picture 15" descr="_ph-canada-solomon.png"/>
+          <p:cNvPr id="16" name="Picture 15" descr="canada-solomon.png"/>
           <p:cNvPicPr>
             <a:picLocks noChangeAspect="1"/>
           </p:cNvPicPr>
@@ -38512,7 +38512,7 @@
         <p:spPr>
           <a:xfrm>
             <a:off x="3611880" y="1408176"/>
-            <a:ext cx="731520" cy="914400"/>
+            <a:ext cx="732622" cy="914400"/>
           </a:xfrm>
           <a:prstGeom prst="rect">
             <a:avLst/>
@@ -38528,7 +38528,7 @@
         <p:spPr>
           <a:xfrm>
             <a:off x="3611880" y="1408176"/>
-            <a:ext cx="731520" cy="914400"/>
+            <a:ext cx="732621" cy="914400"/>
           </a:xfrm>
           <a:prstGeom prst="rect">
             <a:avLst/>
@@ -38571,8 +38571,8 @@
         </p:nvSpPr>
         <p:spPr>
           <a:xfrm>
-            <a:off x="4507992" y="1408176"/>
-            <a:ext cx="7132320" cy="256032"/>
+            <a:off x="4509093" y="1408176"/>
+            <a:ext cx="7131218" cy="256032"/>
           </a:xfrm>
           <a:prstGeom prst="rect">
             <a:avLst/>
@@ -38605,8 +38605,8 @@
         </p:nvSpPr>
         <p:spPr>
           <a:xfrm>
-            <a:off x="4507992" y="1682495"/>
-            <a:ext cx="7132320" cy="347472"/>
+            <a:off x="4509093" y="1682495"/>
+            <a:ext cx="7131218" cy="347472"/>
           </a:xfrm>
           <a:prstGeom prst="rect">
             <a:avLst/>
@@ -38644,8 +38644,8 @@
         </p:nvSpPr>
         <p:spPr>
           <a:xfrm>
-            <a:off x="4507992" y="2048256"/>
-            <a:ext cx="7132320" cy="292608"/>
+            <a:off x="4509093" y="2048256"/>
+            <a:ext cx="7131218" cy="292608"/>
           </a:xfrm>
           <a:prstGeom prst="rect">
             <a:avLst/>
@@ -40023,7 +40023,7 @@
       </p:sp>
       <p:pic>
         <p:nvPicPr>
-          <p:cNvPr id="16" name="Picture 15" descr="_ph-china-lilecheng.png"/>
+          <p:cNvPr id="16" name="Picture 15" descr="china-lilecheng.png"/>
           <p:cNvPicPr>
             <a:picLocks noChangeAspect="1"/>
           </p:cNvPicPr>
@@ -40038,7 +40038,7 @@
         <p:spPr>
           <a:xfrm>
             <a:off x="3611880" y="1389888"/>
-            <a:ext cx="585216" cy="731520"/>
+            <a:ext cx="586003" cy="731520"/>
           </a:xfrm>
           <a:prstGeom prst="rect">
             <a:avLst/>
@@ -40054,7 +40054,7 @@
         <p:spPr>
           <a:xfrm>
             <a:off x="3611880" y="1389888"/>
-            <a:ext cx="585216" cy="731520"/>
+            <a:ext cx="586002" cy="731520"/>
           </a:xfrm>
           <a:prstGeom prst="rect">
             <a:avLst/>
@@ -40097,8 +40097,8 @@
         </p:nvSpPr>
         <p:spPr>
           <a:xfrm>
-            <a:off x="4325112" y="1389888"/>
-            <a:ext cx="3136391" cy="914400"/>
+            <a:off x="4325898" y="1389888"/>
+            <a:ext cx="3135605" cy="914400"/>
           </a:xfrm>
           <a:prstGeom prst="rect">
             <a:avLst/>
@@ -40247,7 +40247,7 @@
       </p:sp>
       <p:pic>
         <p:nvPicPr>
-          <p:cNvPr id="21" name="Picture 20" descr="_ph-china-hejun.png"/>
+          <p:cNvPr id="21" name="Picture 20" descr="china-hejun.png"/>
           <p:cNvPicPr>
             <a:picLocks noChangeAspect="1"/>
           </p:cNvPicPr>
@@ -40262,7 +40262,7 @@
         <p:spPr>
           <a:xfrm>
             <a:off x="7790688" y="1389888"/>
-            <a:ext cx="585216" cy="731520"/>
+            <a:ext cx="587614" cy="731520"/>
           </a:xfrm>
           <a:prstGeom prst="rect">
             <a:avLst/>
@@ -40278,7 +40278,7 @@
         <p:spPr>
           <a:xfrm>
             <a:off x="7790688" y="1389888"/>
-            <a:ext cx="585216" cy="731520"/>
+            <a:ext cx="587614" cy="731520"/>
           </a:xfrm>
           <a:prstGeom prst="rect">
             <a:avLst/>
@@ -40321,8 +40321,8 @@
         </p:nvSpPr>
         <p:spPr>
           <a:xfrm>
-            <a:off x="8503920" y="1389888"/>
-            <a:ext cx="3136391" cy="914400"/>
+            <a:off x="8506318" y="1389888"/>
+            <a:ext cx="3133993" cy="914400"/>
           </a:xfrm>
           <a:prstGeom prst="rect">
             <a:avLst/>
@@ -40541,7 +40541,7 @@
       </p:sp>
       <p:pic>
         <p:nvPicPr>
-          <p:cNvPr id="28" name="Picture 27" descr="_ph-china-wangwentao.png"/>
+          <p:cNvPr id="28" name="Picture 27" descr="china-wangwentao.png"/>
           <p:cNvPicPr>
             <a:picLocks noChangeAspect="1"/>
           </p:cNvPicPr>
@@ -40556,7 +40556,7 @@
         <p:spPr>
           <a:xfrm>
             <a:off x="3611880" y="4023359"/>
-            <a:ext cx="585216" cy="731520"/>
+            <a:ext cx="587433" cy="731520"/>
           </a:xfrm>
           <a:prstGeom prst="rect">
             <a:avLst/>
@@ -40572,7 +40572,7 @@
         <p:spPr>
           <a:xfrm>
             <a:off x="3611880" y="4023359"/>
-            <a:ext cx="585216" cy="731520"/>
+            <a:ext cx="587432" cy="731520"/>
           </a:xfrm>
           <a:prstGeom prst="rect">
             <a:avLst/>
@@ -40615,8 +40615,8 @@
         </p:nvSpPr>
         <p:spPr>
           <a:xfrm>
-            <a:off x="4325112" y="4023359"/>
-            <a:ext cx="3136391" cy="914400"/>
+            <a:off x="4327328" y="4023359"/>
+            <a:ext cx="3134175" cy="914400"/>
           </a:xfrm>
           <a:prstGeom prst="rect">
             <a:avLst/>
@@ -40765,7 +40765,7 @@
       </p:sp>
       <p:pic>
         <p:nvPicPr>
-          <p:cNvPr id="33" name="Picture 32" descr="_ph-china-lichenggang.png"/>
+          <p:cNvPr id="33" name="Picture 32" descr="china-lichenggang.png"/>
           <p:cNvPicPr>
             <a:picLocks noChangeAspect="1"/>
           </p:cNvPicPr>
@@ -40780,7 +40780,7 @@
         <p:spPr>
           <a:xfrm>
             <a:off x="7790688" y="4023359"/>
-            <a:ext cx="585216" cy="731520"/>
+            <a:ext cx="584481" cy="731520"/>
           </a:xfrm>
           <a:prstGeom prst="rect">
             <a:avLst/>
@@ -40796,7 +40796,7 @@
         <p:spPr>
           <a:xfrm>
             <a:off x="7790688" y="4023359"/>
-            <a:ext cx="585216" cy="731520"/>
+            <a:ext cx="584480" cy="731520"/>
           </a:xfrm>
           <a:prstGeom prst="rect">
             <a:avLst/>
@@ -40839,8 +40839,8 @@
         </p:nvSpPr>
         <p:spPr>
           <a:xfrm>
-            <a:off x="8503920" y="4023359"/>
-            <a:ext cx="3136391" cy="914400"/>
+            <a:off x="8503184" y="4023359"/>
+            <a:ext cx="3137127" cy="914400"/>
           </a:xfrm>
           <a:prstGeom prst="rect">
             <a:avLst/>

--- a/output/g20-ministers-trade-deck.pptx
+++ b/output/g20-ministers-trade-deck.pptx
@@ -4253,7 +4253,7 @@
         <p:spPr>
           <a:xfrm>
             <a:off x="3611880" y="1408176"/>
-            <a:ext cx="730601" cy="914400"/>
+            <a:ext cx="734291" cy="914400"/>
           </a:xfrm>
           <a:prstGeom prst="rect">
             <a:avLst/>
@@ -4269,7 +4269,7 @@
         <p:spPr>
           <a:xfrm>
             <a:off x="3611880" y="1408176"/>
-            <a:ext cx="730601" cy="914400"/>
+            <a:ext cx="734290" cy="914400"/>
           </a:xfrm>
           <a:prstGeom prst="rect">
             <a:avLst/>
@@ -4312,8 +4312,8 @@
         </p:nvSpPr>
         <p:spPr>
           <a:xfrm>
-            <a:off x="4507073" y="1408176"/>
-            <a:ext cx="7133238" cy="256032"/>
+            <a:off x="4510762" y="1408176"/>
+            <a:ext cx="7129549" cy="256032"/>
           </a:xfrm>
           <a:prstGeom prst="rect">
             <a:avLst/>
@@ -4346,8 +4346,8 @@
         </p:nvSpPr>
         <p:spPr>
           <a:xfrm>
-            <a:off x="4507073" y="1682495"/>
-            <a:ext cx="7133238" cy="347472"/>
+            <a:off x="4510762" y="1682495"/>
+            <a:ext cx="7129549" cy="347472"/>
           </a:xfrm>
           <a:prstGeom prst="rect">
             <a:avLst/>
@@ -4385,8 +4385,8 @@
         </p:nvSpPr>
         <p:spPr>
           <a:xfrm>
-            <a:off x="4507073" y="2048256"/>
-            <a:ext cx="7133238" cy="292608"/>
+            <a:off x="4510762" y="2048256"/>
+            <a:ext cx="7129549" cy="292608"/>
           </a:xfrm>
           <a:prstGeom prst="rect">
             <a:avLst/>
@@ -4551,7 +4551,7 @@
         <p:spPr>
           <a:xfrm>
             <a:off x="3611880" y="4041648"/>
-            <a:ext cx="732503" cy="914400"/>
+            <a:ext cx="727587" cy="914400"/>
           </a:xfrm>
           <a:prstGeom prst="rect">
             <a:avLst/>
@@ -4567,7 +4567,7 @@
         <p:spPr>
           <a:xfrm>
             <a:off x="3611880" y="4041648"/>
-            <a:ext cx="732503" cy="914400"/>
+            <a:ext cx="727587" cy="914400"/>
           </a:xfrm>
           <a:prstGeom prst="rect">
             <a:avLst/>
@@ -4610,8 +4610,8 @@
         </p:nvSpPr>
         <p:spPr>
           <a:xfrm>
-            <a:off x="4508975" y="4041648"/>
-            <a:ext cx="7131336" cy="256032"/>
+            <a:off x="4504059" y="4041648"/>
+            <a:ext cx="7136252" cy="256032"/>
           </a:xfrm>
           <a:prstGeom prst="rect">
             <a:avLst/>
@@ -4644,8 +4644,8 @@
         </p:nvSpPr>
         <p:spPr>
           <a:xfrm>
-            <a:off x="4508975" y="4315968"/>
-            <a:ext cx="7131336" cy="347472"/>
+            <a:off x="4504059" y="4315968"/>
+            <a:ext cx="7136252" cy="347472"/>
           </a:xfrm>
           <a:prstGeom prst="rect">
             <a:avLst/>
@@ -4683,8 +4683,8 @@
         </p:nvSpPr>
         <p:spPr>
           <a:xfrm>
-            <a:off x="4508975" y="4681727"/>
-            <a:ext cx="7131336" cy="292608"/>
+            <a:off x="4504059" y="4681727"/>
+            <a:ext cx="7136252" cy="292608"/>
           </a:xfrm>
           <a:prstGeom prst="rect">
             <a:avLst/>
@@ -5559,7 +5559,7 @@
         <p:spPr>
           <a:xfrm>
             <a:off x="3611880" y="1408176"/>
-            <a:ext cx="730601" cy="914400"/>
+            <a:ext cx="734291" cy="914400"/>
           </a:xfrm>
           <a:prstGeom prst="rect">
             <a:avLst/>
@@ -5575,7 +5575,7 @@
         <p:spPr>
           <a:xfrm>
             <a:off x="3611880" y="1408176"/>
-            <a:ext cx="730601" cy="914400"/>
+            <a:ext cx="734290" cy="914400"/>
           </a:xfrm>
           <a:prstGeom prst="rect">
             <a:avLst/>
@@ -5618,8 +5618,8 @@
         </p:nvSpPr>
         <p:spPr>
           <a:xfrm>
-            <a:off x="4507073" y="1408176"/>
-            <a:ext cx="7133238" cy="256032"/>
+            <a:off x="4510762" y="1408176"/>
+            <a:ext cx="7129549" cy="256032"/>
           </a:xfrm>
           <a:prstGeom prst="rect">
             <a:avLst/>
@@ -5652,8 +5652,8 @@
         </p:nvSpPr>
         <p:spPr>
           <a:xfrm>
-            <a:off x="4507073" y="1682495"/>
-            <a:ext cx="7133238" cy="347472"/>
+            <a:off x="4510762" y="1682495"/>
+            <a:ext cx="7129549" cy="347472"/>
           </a:xfrm>
           <a:prstGeom prst="rect">
             <a:avLst/>
@@ -5691,8 +5691,8 @@
         </p:nvSpPr>
         <p:spPr>
           <a:xfrm>
-            <a:off x="4507073" y="2048256"/>
-            <a:ext cx="7133238" cy="292608"/>
+            <a:off x="4510762" y="2048256"/>
+            <a:ext cx="7129549" cy="292608"/>
           </a:xfrm>
           <a:prstGeom prst="rect">
             <a:avLst/>
@@ -5857,7 +5857,7 @@
         <p:spPr>
           <a:xfrm>
             <a:off x="3611880" y="4041648"/>
-            <a:ext cx="730601" cy="914400"/>
+            <a:ext cx="734291" cy="914400"/>
           </a:xfrm>
           <a:prstGeom prst="rect">
             <a:avLst/>
@@ -5873,7 +5873,7 @@
         <p:spPr>
           <a:xfrm>
             <a:off x="3611880" y="4041648"/>
-            <a:ext cx="730601" cy="914400"/>
+            <a:ext cx="734290" cy="914400"/>
           </a:xfrm>
           <a:prstGeom prst="rect">
             <a:avLst/>
@@ -5916,8 +5916,8 @@
         </p:nvSpPr>
         <p:spPr>
           <a:xfrm>
-            <a:off x="4507073" y="4041648"/>
-            <a:ext cx="7133238" cy="256032"/>
+            <a:off x="4510762" y="4041648"/>
+            <a:ext cx="7129549" cy="256032"/>
           </a:xfrm>
           <a:prstGeom prst="rect">
             <a:avLst/>
@@ -5950,8 +5950,8 @@
         </p:nvSpPr>
         <p:spPr>
           <a:xfrm>
-            <a:off x="4507073" y="4315968"/>
-            <a:ext cx="7133238" cy="347472"/>
+            <a:off x="4510762" y="4315968"/>
+            <a:ext cx="7129549" cy="347472"/>
           </a:xfrm>
           <a:prstGeom prst="rect">
             <a:avLst/>
@@ -5989,8 +5989,8 @@
         </p:nvSpPr>
         <p:spPr>
           <a:xfrm>
-            <a:off x="4507073" y="4681727"/>
-            <a:ext cx="7133238" cy="292608"/>
+            <a:off x="4510762" y="4681727"/>
+            <a:ext cx="7129549" cy="292608"/>
           </a:xfrm>
           <a:prstGeom prst="rect">
             <a:avLst/>
@@ -7195,7 +7195,7 @@
         <p:spPr>
           <a:xfrm>
             <a:off x="3611880" y="4023359"/>
-            <a:ext cx="582884" cy="731520"/>
+            <a:ext cx="585216" cy="731520"/>
           </a:xfrm>
           <a:prstGeom prst="rect">
             <a:avLst/>
@@ -7211,7 +7211,7 @@
         <p:spPr>
           <a:xfrm>
             <a:off x="3611880" y="4023359"/>
-            <a:ext cx="582884" cy="731520"/>
+            <a:ext cx="585216" cy="731520"/>
           </a:xfrm>
           <a:prstGeom prst="rect">
             <a:avLst/>
@@ -7254,8 +7254,8 @@
         </p:nvSpPr>
         <p:spPr>
           <a:xfrm>
-            <a:off x="4322780" y="4023359"/>
-            <a:ext cx="3138723" cy="914400"/>
+            <a:off x="4325112" y="4023359"/>
+            <a:ext cx="3136391" cy="914400"/>
           </a:xfrm>
           <a:prstGeom prst="rect">
             <a:avLst/>
@@ -7419,7 +7419,7 @@
         <p:spPr>
           <a:xfrm>
             <a:off x="7790688" y="4023359"/>
-            <a:ext cx="584481" cy="731520"/>
+            <a:ext cx="587433" cy="731520"/>
           </a:xfrm>
           <a:prstGeom prst="rect">
             <a:avLst/>
@@ -7435,7 +7435,7 @@
         <p:spPr>
           <a:xfrm>
             <a:off x="7790688" y="4023359"/>
-            <a:ext cx="584480" cy="731520"/>
+            <a:ext cx="587432" cy="731520"/>
           </a:xfrm>
           <a:prstGeom prst="rect">
             <a:avLst/>
@@ -7478,8 +7478,8 @@
         </p:nvSpPr>
         <p:spPr>
           <a:xfrm>
-            <a:off x="8503184" y="4023359"/>
-            <a:ext cx="3137127" cy="914400"/>
+            <a:off x="8506136" y="4023359"/>
+            <a:ext cx="3134175" cy="914400"/>
           </a:xfrm>
           <a:prstGeom prst="rect">
             <a:avLst/>
@@ -8423,7 +8423,7 @@
         <p:spPr>
           <a:xfrm>
             <a:off x="3611880" y="1408176"/>
-            <a:ext cx="730601" cy="914400"/>
+            <a:ext cx="734291" cy="914400"/>
           </a:xfrm>
           <a:prstGeom prst="rect">
             <a:avLst/>
@@ -8439,7 +8439,7 @@
         <p:spPr>
           <a:xfrm>
             <a:off x="3611880" y="1408176"/>
-            <a:ext cx="730601" cy="914400"/>
+            <a:ext cx="734290" cy="914400"/>
           </a:xfrm>
           <a:prstGeom prst="rect">
             <a:avLst/>
@@ -8482,8 +8482,8 @@
         </p:nvSpPr>
         <p:spPr>
           <a:xfrm>
-            <a:off x="4507073" y="1408176"/>
-            <a:ext cx="7133238" cy="256032"/>
+            <a:off x="4510762" y="1408176"/>
+            <a:ext cx="7129549" cy="256032"/>
           </a:xfrm>
           <a:prstGeom prst="rect">
             <a:avLst/>
@@ -8516,8 +8516,8 @@
         </p:nvSpPr>
         <p:spPr>
           <a:xfrm>
-            <a:off x="4507073" y="1682495"/>
-            <a:ext cx="7133238" cy="347472"/>
+            <a:off x="4510762" y="1682495"/>
+            <a:ext cx="7129549" cy="347472"/>
           </a:xfrm>
           <a:prstGeom prst="rect">
             <a:avLst/>
@@ -8555,8 +8555,8 @@
         </p:nvSpPr>
         <p:spPr>
           <a:xfrm>
-            <a:off x="4507073" y="2048256"/>
-            <a:ext cx="7133238" cy="292608"/>
+            <a:off x="4510762" y="2048256"/>
+            <a:ext cx="7129549" cy="292608"/>
           </a:xfrm>
           <a:prstGeom prst="rect">
             <a:avLst/>
@@ -8721,7 +8721,7 @@
         <p:spPr>
           <a:xfrm>
             <a:off x="3611880" y="4023359"/>
-            <a:ext cx="587433" cy="731520"/>
+            <a:ext cx="583738" cy="731520"/>
           </a:xfrm>
           <a:prstGeom prst="rect">
             <a:avLst/>
@@ -8737,7 +8737,7 @@
         <p:spPr>
           <a:xfrm>
             <a:off x="3611880" y="4023359"/>
-            <a:ext cx="587432" cy="731520"/>
+            <a:ext cx="583738" cy="731520"/>
           </a:xfrm>
           <a:prstGeom prst="rect">
             <a:avLst/>
@@ -8780,8 +8780,8 @@
         </p:nvSpPr>
         <p:spPr>
           <a:xfrm>
-            <a:off x="4327328" y="4023359"/>
-            <a:ext cx="3134175" cy="914400"/>
+            <a:off x="4323634" y="4023359"/>
+            <a:ext cx="3137869" cy="914400"/>
           </a:xfrm>
           <a:prstGeom prst="rect">
             <a:avLst/>
@@ -8945,7 +8945,7 @@
         <p:spPr>
           <a:xfrm>
             <a:off x="7790688" y="4023359"/>
-            <a:ext cx="584481" cy="731520"/>
+            <a:ext cx="587433" cy="731520"/>
           </a:xfrm>
           <a:prstGeom prst="rect">
             <a:avLst/>
@@ -8961,7 +8961,7 @@
         <p:spPr>
           <a:xfrm>
             <a:off x="7790688" y="4023359"/>
-            <a:ext cx="584480" cy="731520"/>
+            <a:ext cx="587432" cy="731520"/>
           </a:xfrm>
           <a:prstGeom prst="rect">
             <a:avLst/>
@@ -9004,8 +9004,8 @@
         </p:nvSpPr>
         <p:spPr>
           <a:xfrm>
-            <a:off x="8503184" y="4023359"/>
-            <a:ext cx="3137127" cy="914400"/>
+            <a:off x="8506136" y="4023359"/>
+            <a:ext cx="3134175" cy="914400"/>
           </a:xfrm>
           <a:prstGeom prst="rect">
             <a:avLst/>
@@ -9949,7 +9949,7 @@
         <p:spPr>
           <a:xfrm>
             <a:off x="3611880" y="1408176"/>
-            <a:ext cx="730601" cy="914400"/>
+            <a:ext cx="734291" cy="914400"/>
           </a:xfrm>
           <a:prstGeom prst="rect">
             <a:avLst/>
@@ -9965,7 +9965,7 @@
         <p:spPr>
           <a:xfrm>
             <a:off x="3611880" y="1408176"/>
-            <a:ext cx="730601" cy="914400"/>
+            <a:ext cx="734290" cy="914400"/>
           </a:xfrm>
           <a:prstGeom prst="rect">
             <a:avLst/>
@@ -10008,8 +10008,8 @@
         </p:nvSpPr>
         <p:spPr>
           <a:xfrm>
-            <a:off x="4507073" y="1408176"/>
-            <a:ext cx="7133238" cy="256032"/>
+            <a:off x="4510762" y="1408176"/>
+            <a:ext cx="7129549" cy="256032"/>
           </a:xfrm>
           <a:prstGeom prst="rect">
             <a:avLst/>
@@ -10042,8 +10042,8 @@
         </p:nvSpPr>
         <p:spPr>
           <a:xfrm>
-            <a:off x="4507073" y="1682495"/>
-            <a:ext cx="7133238" cy="347472"/>
+            <a:off x="4510762" y="1682495"/>
+            <a:ext cx="7129549" cy="347472"/>
           </a:xfrm>
           <a:prstGeom prst="rect">
             <a:avLst/>
@@ -10081,8 +10081,8 @@
         </p:nvSpPr>
         <p:spPr>
           <a:xfrm>
-            <a:off x="4507073" y="2048256"/>
-            <a:ext cx="7133238" cy="292608"/>
+            <a:off x="4510762" y="2048256"/>
+            <a:ext cx="7129549" cy="292608"/>
           </a:xfrm>
           <a:prstGeom prst="rect">
             <a:avLst/>
@@ -10247,7 +10247,7 @@
         <p:spPr>
           <a:xfrm>
             <a:off x="3611880" y="4023359"/>
-            <a:ext cx="584481" cy="731520"/>
+            <a:ext cx="587433" cy="731520"/>
           </a:xfrm>
           <a:prstGeom prst="rect">
             <a:avLst/>
@@ -10263,7 +10263,7 @@
         <p:spPr>
           <a:xfrm>
             <a:off x="3611880" y="4023359"/>
-            <a:ext cx="584480" cy="731520"/>
+            <a:ext cx="587432" cy="731520"/>
           </a:xfrm>
           <a:prstGeom prst="rect">
             <a:avLst/>
@@ -10306,8 +10306,8 @@
         </p:nvSpPr>
         <p:spPr>
           <a:xfrm>
-            <a:off x="4324376" y="4023359"/>
-            <a:ext cx="3137127" cy="914400"/>
+            <a:off x="4327328" y="4023359"/>
+            <a:ext cx="3134175" cy="914400"/>
           </a:xfrm>
           <a:prstGeom prst="rect">
             <a:avLst/>
@@ -10471,7 +10471,7 @@
         <p:spPr>
           <a:xfrm>
             <a:off x="7790688" y="4023359"/>
-            <a:ext cx="586740" cy="731520"/>
+            <a:ext cx="582930" cy="731520"/>
           </a:xfrm>
           <a:prstGeom prst="rect">
             <a:avLst/>
@@ -10487,7 +10487,7 @@
         <p:spPr>
           <a:xfrm>
             <a:off x="7790688" y="4023359"/>
-            <a:ext cx="586740" cy="731520"/>
+            <a:ext cx="582930" cy="731520"/>
           </a:xfrm>
           <a:prstGeom prst="rect">
             <a:avLst/>
@@ -10530,8 +10530,8 @@
         </p:nvSpPr>
         <p:spPr>
           <a:xfrm>
-            <a:off x="8505444" y="4023359"/>
-            <a:ext cx="3134868" cy="914400"/>
+            <a:off x="8501634" y="4023359"/>
+            <a:ext cx="3138677" cy="914400"/>
           </a:xfrm>
           <a:prstGeom prst="rect">
             <a:avLst/>
@@ -11475,7 +11475,7 @@
         <p:spPr>
           <a:xfrm>
             <a:off x="3611880" y="1408176"/>
-            <a:ext cx="733710" cy="914400"/>
+            <a:ext cx="728235" cy="914400"/>
           </a:xfrm>
           <a:prstGeom prst="rect">
             <a:avLst/>
@@ -11491,7 +11491,7 @@
         <p:spPr>
           <a:xfrm>
             <a:off x="3611880" y="1408176"/>
-            <a:ext cx="733710" cy="914400"/>
+            <a:ext cx="728234" cy="914400"/>
           </a:xfrm>
           <a:prstGeom prst="rect">
             <a:avLst/>
@@ -11534,8 +11534,8 @@
         </p:nvSpPr>
         <p:spPr>
           <a:xfrm>
-            <a:off x="4510182" y="1408176"/>
-            <a:ext cx="7130129" cy="256032"/>
+            <a:off x="4504706" y="1408176"/>
+            <a:ext cx="7135605" cy="256032"/>
           </a:xfrm>
           <a:prstGeom prst="rect">
             <a:avLst/>
@@ -11568,8 +11568,8 @@
         </p:nvSpPr>
         <p:spPr>
           <a:xfrm>
-            <a:off x="4510182" y="1682495"/>
-            <a:ext cx="7130129" cy="347472"/>
+            <a:off x="4504706" y="1682495"/>
+            <a:ext cx="7135605" cy="347472"/>
           </a:xfrm>
           <a:prstGeom prst="rect">
             <a:avLst/>
@@ -11607,8 +11607,8 @@
         </p:nvSpPr>
         <p:spPr>
           <a:xfrm>
-            <a:off x="4510182" y="2048256"/>
-            <a:ext cx="7130129" cy="292608"/>
+            <a:off x="4504706" y="2048256"/>
+            <a:ext cx="7135605" cy="292608"/>
           </a:xfrm>
           <a:prstGeom prst="rect">
             <a:avLst/>
@@ -11773,7 +11773,7 @@
         <p:spPr>
           <a:xfrm>
             <a:off x="3611880" y="4041648"/>
-            <a:ext cx="732503" cy="914400"/>
+            <a:ext cx="727587" cy="914400"/>
           </a:xfrm>
           <a:prstGeom prst="rect">
             <a:avLst/>
@@ -11789,7 +11789,7 @@
         <p:spPr>
           <a:xfrm>
             <a:off x="3611880" y="4041648"/>
-            <a:ext cx="732503" cy="914400"/>
+            <a:ext cx="727587" cy="914400"/>
           </a:xfrm>
           <a:prstGeom prst="rect">
             <a:avLst/>
@@ -11832,8 +11832,8 @@
         </p:nvSpPr>
         <p:spPr>
           <a:xfrm>
-            <a:off x="4508975" y="4041648"/>
-            <a:ext cx="7131336" cy="256032"/>
+            <a:off x="4504059" y="4041648"/>
+            <a:ext cx="7136252" cy="256032"/>
           </a:xfrm>
           <a:prstGeom prst="rect">
             <a:avLst/>
@@ -11866,8 +11866,8 @@
         </p:nvSpPr>
         <p:spPr>
           <a:xfrm>
-            <a:off x="4508975" y="4315968"/>
-            <a:ext cx="7131336" cy="347472"/>
+            <a:off x="4504059" y="4315968"/>
+            <a:ext cx="7136252" cy="347472"/>
           </a:xfrm>
           <a:prstGeom prst="rect">
             <a:avLst/>
@@ -11905,8 +11905,8 @@
         </p:nvSpPr>
         <p:spPr>
           <a:xfrm>
-            <a:off x="4508975" y="4681727"/>
-            <a:ext cx="7131336" cy="292608"/>
+            <a:off x="4504059" y="4681727"/>
+            <a:ext cx="7136252" cy="292608"/>
           </a:xfrm>
           <a:prstGeom prst="rect">
             <a:avLst/>
@@ -12797,7 +12797,7 @@
         <p:spPr>
           <a:xfrm>
             <a:off x="3611880" y="1408176"/>
-            <a:ext cx="734291" cy="914400"/>
+            <a:ext cx="729673" cy="914400"/>
           </a:xfrm>
           <a:prstGeom prst="rect">
             <a:avLst/>
@@ -12813,7 +12813,7 @@
         <p:spPr>
           <a:xfrm>
             <a:off x="3611880" y="1408176"/>
-            <a:ext cx="734290" cy="914400"/>
+            <a:ext cx="729672" cy="914400"/>
           </a:xfrm>
           <a:prstGeom prst="rect">
             <a:avLst/>
@@ -12856,8 +12856,8 @@
         </p:nvSpPr>
         <p:spPr>
           <a:xfrm>
-            <a:off x="4510762" y="1408176"/>
-            <a:ext cx="7129549" cy="256032"/>
+            <a:off x="4506144" y="1408176"/>
+            <a:ext cx="7134167" cy="256032"/>
           </a:xfrm>
           <a:prstGeom prst="rect">
             <a:avLst/>
@@ -12890,8 +12890,8 @@
         </p:nvSpPr>
         <p:spPr>
           <a:xfrm>
-            <a:off x="4510762" y="1682495"/>
-            <a:ext cx="7129549" cy="347472"/>
+            <a:off x="4506144" y="1682495"/>
+            <a:ext cx="7134167" cy="347472"/>
           </a:xfrm>
           <a:prstGeom prst="rect">
             <a:avLst/>
@@ -12929,8 +12929,8 @@
         </p:nvSpPr>
         <p:spPr>
           <a:xfrm>
-            <a:off x="4510762" y="2048256"/>
-            <a:ext cx="7129549" cy="292608"/>
+            <a:off x="4506144" y="2048256"/>
+            <a:ext cx="7134167" cy="292608"/>
           </a:xfrm>
           <a:prstGeom prst="rect">
             <a:avLst/>
@@ -13095,7 +13095,7 @@
         <p:spPr>
           <a:xfrm>
             <a:off x="3611880" y="4023359"/>
-            <a:ext cx="587433" cy="731520"/>
+            <a:ext cx="583738" cy="731520"/>
           </a:xfrm>
           <a:prstGeom prst="rect">
             <a:avLst/>
@@ -13111,7 +13111,7 @@
         <p:spPr>
           <a:xfrm>
             <a:off x="3611880" y="4023359"/>
-            <a:ext cx="587432" cy="731520"/>
+            <a:ext cx="583738" cy="731520"/>
           </a:xfrm>
           <a:prstGeom prst="rect">
             <a:avLst/>
@@ -13154,8 +13154,8 @@
         </p:nvSpPr>
         <p:spPr>
           <a:xfrm>
-            <a:off x="4327328" y="4023359"/>
-            <a:ext cx="3134175" cy="914400"/>
+            <a:off x="4323634" y="4023359"/>
+            <a:ext cx="3137869" cy="914400"/>
           </a:xfrm>
           <a:prstGeom prst="rect">
             <a:avLst/>
@@ -13319,7 +13319,7 @@
         <p:spPr>
           <a:xfrm>
             <a:off x="7790688" y="4023359"/>
-            <a:ext cx="584481" cy="731520"/>
+            <a:ext cx="587433" cy="731520"/>
           </a:xfrm>
           <a:prstGeom prst="rect">
             <a:avLst/>
@@ -13335,7 +13335,7 @@
         <p:spPr>
           <a:xfrm>
             <a:off x="7790688" y="4023359"/>
-            <a:ext cx="584480" cy="731520"/>
+            <a:ext cx="587432" cy="731520"/>
           </a:xfrm>
           <a:prstGeom prst="rect">
             <a:avLst/>
@@ -13378,8 +13378,8 @@
         </p:nvSpPr>
         <p:spPr>
           <a:xfrm>
-            <a:off x="8503184" y="4023359"/>
-            <a:ext cx="3137127" cy="914400"/>
+            <a:off x="8506136" y="4023359"/>
+            <a:ext cx="3134175" cy="914400"/>
           </a:xfrm>
           <a:prstGeom prst="rect">
             <a:avLst/>
@@ -14323,7 +14323,7 @@
         <p:spPr>
           <a:xfrm>
             <a:off x="3611880" y="1408176"/>
-            <a:ext cx="734291" cy="914400"/>
+            <a:ext cx="729673" cy="914400"/>
           </a:xfrm>
           <a:prstGeom prst="rect">
             <a:avLst/>
@@ -14339,7 +14339,7 @@
         <p:spPr>
           <a:xfrm>
             <a:off x="3611880" y="1408176"/>
-            <a:ext cx="734290" cy="914400"/>
+            <a:ext cx="729672" cy="914400"/>
           </a:xfrm>
           <a:prstGeom prst="rect">
             <a:avLst/>
@@ -14382,8 +14382,8 @@
         </p:nvSpPr>
         <p:spPr>
           <a:xfrm>
-            <a:off x="4510762" y="1408176"/>
-            <a:ext cx="7129549" cy="256032"/>
+            <a:off x="4506144" y="1408176"/>
+            <a:ext cx="7134167" cy="256032"/>
           </a:xfrm>
           <a:prstGeom prst="rect">
             <a:avLst/>
@@ -14416,8 +14416,8 @@
         </p:nvSpPr>
         <p:spPr>
           <a:xfrm>
-            <a:off x="4510762" y="1682495"/>
-            <a:ext cx="7129549" cy="347472"/>
+            <a:off x="4506144" y="1682495"/>
+            <a:ext cx="7134167" cy="347472"/>
           </a:xfrm>
           <a:prstGeom prst="rect">
             <a:avLst/>
@@ -14455,8 +14455,8 @@
         </p:nvSpPr>
         <p:spPr>
           <a:xfrm>
-            <a:off x="4510762" y="2048256"/>
-            <a:ext cx="7129549" cy="292608"/>
+            <a:off x="4506144" y="2048256"/>
+            <a:ext cx="7134167" cy="292608"/>
           </a:xfrm>
           <a:prstGeom prst="rect">
             <a:avLst/>
@@ -14861,7 +14861,7 @@
         <p:spPr>
           <a:xfrm>
             <a:off x="7790688" y="4023359"/>
-            <a:ext cx="587433" cy="731520"/>
+            <a:ext cx="583738" cy="731520"/>
           </a:xfrm>
           <a:prstGeom prst="rect">
             <a:avLst/>
@@ -14877,7 +14877,7 @@
         <p:spPr>
           <a:xfrm>
             <a:off x="7790688" y="4023359"/>
-            <a:ext cx="587432" cy="731520"/>
+            <a:ext cx="583738" cy="731520"/>
           </a:xfrm>
           <a:prstGeom prst="rect">
             <a:avLst/>
@@ -14920,8 +14920,8 @@
         </p:nvSpPr>
         <p:spPr>
           <a:xfrm>
-            <a:off x="8506136" y="4023359"/>
-            <a:ext cx="3134175" cy="914400"/>
+            <a:off x="8502442" y="4023359"/>
+            <a:ext cx="3137869" cy="914400"/>
           </a:xfrm>
           <a:prstGeom prst="rect">
             <a:avLst/>
@@ -17929,7 +17929,7 @@
         <p:spPr>
           <a:xfrm>
             <a:off x="7790688" y="4023359"/>
-            <a:ext cx="587433" cy="731520"/>
+            <a:ext cx="583738" cy="731520"/>
           </a:xfrm>
           <a:prstGeom prst="rect">
             <a:avLst/>
@@ -17945,7 +17945,7 @@
         <p:spPr>
           <a:xfrm>
             <a:off x="7790688" y="4023359"/>
-            <a:ext cx="587432" cy="731520"/>
+            <a:ext cx="583738" cy="731520"/>
           </a:xfrm>
           <a:prstGeom prst="rect">
             <a:avLst/>
@@ -17988,8 +17988,8 @@
         </p:nvSpPr>
         <p:spPr>
           <a:xfrm>
-            <a:off x="8506136" y="4023359"/>
-            <a:ext cx="3134175" cy="914400"/>
+            <a:off x="8502442" y="4023359"/>
+            <a:ext cx="3137869" cy="914400"/>
           </a:xfrm>
           <a:prstGeom prst="rect">
             <a:avLst/>
@@ -19419,7 +19419,7 @@
         <p:spPr>
           <a:xfrm>
             <a:off x="3611880" y="1408176"/>
-            <a:ext cx="725557" cy="914400"/>
+            <a:ext cx="733530" cy="914400"/>
           </a:xfrm>
           <a:prstGeom prst="rect">
             <a:avLst/>
@@ -19435,7 +19435,7 @@
         <p:spPr>
           <a:xfrm>
             <a:off x="3611880" y="1408176"/>
-            <a:ext cx="725556" cy="914400"/>
+            <a:ext cx="733529" cy="914400"/>
           </a:xfrm>
           <a:prstGeom prst="rect">
             <a:avLst/>
@@ -19478,8 +19478,8 @@
         </p:nvSpPr>
         <p:spPr>
           <a:xfrm>
-            <a:off x="4502028" y="1408176"/>
-            <a:ext cx="7138283" cy="256032"/>
+            <a:off x="4510001" y="1408176"/>
+            <a:ext cx="7130310" cy="256032"/>
           </a:xfrm>
           <a:prstGeom prst="rect">
             <a:avLst/>
@@ -19512,8 +19512,8 @@
         </p:nvSpPr>
         <p:spPr>
           <a:xfrm>
-            <a:off x="4502028" y="1682495"/>
-            <a:ext cx="7138283" cy="347472"/>
+            <a:off x="4510001" y="1682495"/>
+            <a:ext cx="7130310" cy="347472"/>
           </a:xfrm>
           <a:prstGeom prst="rect">
             <a:avLst/>
@@ -19551,8 +19551,8 @@
         </p:nvSpPr>
         <p:spPr>
           <a:xfrm>
-            <a:off x="4502028" y="2048256"/>
-            <a:ext cx="7138283" cy="292608"/>
+            <a:off x="4510001" y="2048256"/>
+            <a:ext cx="7130310" cy="292608"/>
           </a:xfrm>
           <a:prstGeom prst="rect">
             <a:avLst/>
@@ -23809,7 +23809,7 @@
         <p:spPr>
           <a:xfrm>
             <a:off x="3611880" y="1389888"/>
-            <a:ext cx="580445" cy="731520"/>
+            <a:ext cx="586824" cy="731520"/>
           </a:xfrm>
           <a:prstGeom prst="rect">
             <a:avLst/>
@@ -23825,7 +23825,7 @@
         <p:spPr>
           <a:xfrm>
             <a:off x="3611880" y="1389888"/>
-            <a:ext cx="580445" cy="731520"/>
+            <a:ext cx="586823" cy="731520"/>
           </a:xfrm>
           <a:prstGeom prst="rect">
             <a:avLst/>
@@ -23868,8 +23868,8 @@
         </p:nvSpPr>
         <p:spPr>
           <a:xfrm>
-            <a:off x="4320341" y="1389888"/>
-            <a:ext cx="3141162" cy="914400"/>
+            <a:off x="4326719" y="1389888"/>
+            <a:ext cx="3134784" cy="914400"/>
           </a:xfrm>
           <a:prstGeom prst="rect">
             <a:avLst/>
@@ -34192,7 +34192,7 @@
       </p:sp>
       <p:pic>
         <p:nvPicPr>
-          <p:cNvPr id="24" name="Picture 23" descr="_ph-argentina-quirno.png"/>
+          <p:cNvPr id="24" name="Picture 23" descr="argentina-quirno.png"/>
           <p:cNvPicPr>
             <a:picLocks noChangeAspect="1"/>
           </p:cNvPicPr>
@@ -34207,7 +34207,7 @@
         <p:spPr>
           <a:xfrm>
             <a:off x="3611880" y="4023359"/>
-            <a:ext cx="585216" cy="731520"/>
+            <a:ext cx="584481" cy="731520"/>
           </a:xfrm>
           <a:prstGeom prst="rect">
             <a:avLst/>
@@ -34223,7 +34223,7 @@
         <p:spPr>
           <a:xfrm>
             <a:off x="3611880" y="4023359"/>
-            <a:ext cx="585216" cy="731520"/>
+            <a:ext cx="584480" cy="731520"/>
           </a:xfrm>
           <a:prstGeom prst="rect">
             <a:avLst/>
@@ -34266,8 +34266,8 @@
         </p:nvSpPr>
         <p:spPr>
           <a:xfrm>
-            <a:off x="4325112" y="4023359"/>
-            <a:ext cx="3136391" cy="914400"/>
+            <a:off x="4324376" y="4023359"/>
+            <a:ext cx="3137127" cy="914400"/>
           </a:xfrm>
           <a:prstGeom prst="rect">
             <a:avLst/>
@@ -35429,7 +35429,7 @@
       </p:sp>
       <p:pic>
         <p:nvPicPr>
-          <p:cNvPr id="16" name="Picture 15" descr="_ph-australia-charlton.png"/>
+          <p:cNvPr id="16" name="Picture 15" descr="australia-charlton.png"/>
           <p:cNvPicPr>
             <a:picLocks noChangeAspect="1"/>
           </p:cNvPicPr>
@@ -35444,7 +35444,7 @@
         <p:spPr>
           <a:xfrm>
             <a:off x="3611880" y="1389888"/>
-            <a:ext cx="585216" cy="731520"/>
+            <a:ext cx="586097" cy="731520"/>
           </a:xfrm>
           <a:prstGeom prst="rect">
             <a:avLst/>
@@ -35460,7 +35460,7 @@
         <p:spPr>
           <a:xfrm>
             <a:off x="3611880" y="1389888"/>
-            <a:ext cx="585216" cy="731520"/>
+            <a:ext cx="586097" cy="731520"/>
           </a:xfrm>
           <a:prstGeom prst="rect">
             <a:avLst/>
@@ -35503,8 +35503,8 @@
         </p:nvSpPr>
         <p:spPr>
           <a:xfrm>
-            <a:off x="4325112" y="1389888"/>
-            <a:ext cx="3136391" cy="914400"/>
+            <a:off x="4325993" y="1389888"/>
+            <a:ext cx="3135510" cy="914400"/>
           </a:xfrm>
           <a:prstGeom prst="rect">
             <a:avLst/>
@@ -35653,7 +35653,7 @@
       </p:sp>
       <p:pic>
         <p:nvPicPr>
-          <p:cNvPr id="21" name="Picture 20" descr="_ph-australia-ayres.png"/>
+          <p:cNvPr id="21" name="Picture 20" descr="australia-ayres.png"/>
           <p:cNvPicPr>
             <a:picLocks noChangeAspect="1"/>
           </p:cNvPicPr>
@@ -35668,7 +35668,7 @@
         <p:spPr>
           <a:xfrm>
             <a:off x="7790688" y="1389888"/>
-            <a:ext cx="585216" cy="731520"/>
+            <a:ext cx="584481" cy="731520"/>
           </a:xfrm>
           <a:prstGeom prst="rect">
             <a:avLst/>
@@ -35684,7 +35684,7 @@
         <p:spPr>
           <a:xfrm>
             <a:off x="7790688" y="1389888"/>
-            <a:ext cx="585216" cy="731520"/>
+            <a:ext cx="584480" cy="731520"/>
           </a:xfrm>
           <a:prstGeom prst="rect">
             <a:avLst/>
@@ -35727,8 +35727,8 @@
         </p:nvSpPr>
         <p:spPr>
           <a:xfrm>
-            <a:off x="8503920" y="1389888"/>
-            <a:ext cx="3136391" cy="914400"/>
+            <a:off x="8503184" y="1389888"/>
+            <a:ext cx="3137127" cy="914400"/>
           </a:xfrm>
           <a:prstGeom prst="rect">
             <a:avLst/>
@@ -35947,7 +35947,7 @@
       </p:sp>
       <p:pic>
         <p:nvPicPr>
-          <p:cNvPr id="28" name="Picture 27" descr="_ph-australia-farrell.png"/>
+          <p:cNvPr id="28" name="Picture 27" descr="australia-farrell.png"/>
           <p:cNvPicPr>
             <a:picLocks noChangeAspect="1"/>
           </p:cNvPicPr>
@@ -35962,7 +35962,7 @@
         <p:spPr>
           <a:xfrm>
             <a:off x="3611880" y="4041648"/>
-            <a:ext cx="731520" cy="914400"/>
+            <a:ext cx="733778" cy="914400"/>
           </a:xfrm>
           <a:prstGeom prst="rect">
             <a:avLst/>
@@ -35978,7 +35978,7 @@
         <p:spPr>
           <a:xfrm>
             <a:off x="3611880" y="4041648"/>
-            <a:ext cx="731520" cy="914400"/>
+            <a:ext cx="733777" cy="914400"/>
           </a:xfrm>
           <a:prstGeom prst="rect">
             <a:avLst/>
@@ -36021,8 +36021,8 @@
         </p:nvSpPr>
         <p:spPr>
           <a:xfrm>
-            <a:off x="4507992" y="4041648"/>
-            <a:ext cx="7132320" cy="256032"/>
+            <a:off x="4510249" y="4041648"/>
+            <a:ext cx="7130062" cy="256032"/>
           </a:xfrm>
           <a:prstGeom prst="rect">
             <a:avLst/>
@@ -36055,8 +36055,8 @@
         </p:nvSpPr>
         <p:spPr>
           <a:xfrm>
-            <a:off x="4507992" y="4315968"/>
-            <a:ext cx="7132320" cy="347472"/>
+            <a:off x="4510249" y="4315968"/>
+            <a:ext cx="7130062" cy="347472"/>
           </a:xfrm>
           <a:prstGeom prst="rect">
             <a:avLst/>
@@ -36094,8 +36094,8 @@
         </p:nvSpPr>
         <p:spPr>
           <a:xfrm>
-            <a:off x="4507992" y="4681727"/>
-            <a:ext cx="7132320" cy="292608"/>
+            <a:off x="4510249" y="4681727"/>
+            <a:ext cx="7130062" cy="292608"/>
           </a:xfrm>
           <a:prstGeom prst="rect">
             <a:avLst/>
@@ -36971,7 +36971,7 @@
       </p:sp>
       <p:pic>
         <p:nvPicPr>
-          <p:cNvPr id="16" name="Picture 15" descr="_ph-brazil-siqueira.png"/>
+          <p:cNvPr id="16" name="Picture 15" descr="brazil-siqueira.png"/>
           <p:cNvPicPr>
             <a:picLocks noChangeAspect="1"/>
           </p:cNvPicPr>
@@ -36986,7 +36986,7 @@
         <p:spPr>
           <a:xfrm>
             <a:off x="3611880" y="1389888"/>
-            <a:ext cx="585216" cy="731520"/>
+            <a:ext cx="586740" cy="731520"/>
           </a:xfrm>
           <a:prstGeom prst="rect">
             <a:avLst/>
@@ -37002,7 +37002,7 @@
         <p:spPr>
           <a:xfrm>
             <a:off x="3611880" y="1389888"/>
-            <a:ext cx="585216" cy="731520"/>
+            <a:ext cx="586740" cy="731520"/>
           </a:xfrm>
           <a:prstGeom prst="rect">
             <a:avLst/>
@@ -37045,8 +37045,8 @@
         </p:nvSpPr>
         <p:spPr>
           <a:xfrm>
-            <a:off x="4325112" y="1389888"/>
-            <a:ext cx="3136391" cy="914400"/>
+            <a:off x="4326636" y="1389888"/>
+            <a:ext cx="3134868" cy="914400"/>
           </a:xfrm>
           <a:prstGeom prst="rect">
             <a:avLst/>
@@ -37195,7 +37195,7 @@
       </p:sp>
       <p:pic>
         <p:nvPicPr>
-          <p:cNvPr id="21" name="Picture 20" descr="_ph-brazil-santos.png"/>
+          <p:cNvPr id="21" name="Picture 20" descr="brazil-santos.png"/>
           <p:cNvPicPr>
             <a:picLocks noChangeAspect="1"/>
           </p:cNvPicPr>
@@ -37210,7 +37210,7 @@
         <p:spPr>
           <a:xfrm>
             <a:off x="7790688" y="1389888"/>
-            <a:ext cx="585216" cy="731520"/>
+            <a:ext cx="582736" cy="731520"/>
           </a:xfrm>
           <a:prstGeom prst="rect">
             <a:avLst/>
@@ -37226,7 +37226,7 @@
         <p:spPr>
           <a:xfrm>
             <a:off x="7790688" y="1389888"/>
-            <a:ext cx="585216" cy="731520"/>
+            <a:ext cx="582736" cy="731520"/>
           </a:xfrm>
           <a:prstGeom prst="rect">
             <a:avLst/>
@@ -37269,8 +37269,8 @@
         </p:nvSpPr>
         <p:spPr>
           <a:xfrm>
-            <a:off x="8503920" y="1389888"/>
-            <a:ext cx="3136391" cy="914400"/>
+            <a:off x="8501440" y="1389888"/>
+            <a:ext cx="3138871" cy="914400"/>
           </a:xfrm>
           <a:prstGeom prst="rect">
             <a:avLst/>
@@ -37489,7 +37489,7 @@
       </p:sp>
       <p:pic>
         <p:nvPicPr>
-          <p:cNvPr id="28" name="Picture 27" descr="_ph-brazil-rosa.png"/>
+          <p:cNvPr id="28" name="Picture 27" descr="brazil-rosa.png"/>
           <p:cNvPicPr>
             <a:picLocks noChangeAspect="1"/>
           </p:cNvPicPr>
@@ -37504,7 +37504,7 @@
         <p:spPr>
           <a:xfrm>
             <a:off x="3611880" y="4041648"/>
-            <a:ext cx="731520" cy="914400"/>
+            <a:ext cx="730601" cy="914400"/>
           </a:xfrm>
           <a:prstGeom prst="rect">
             <a:avLst/>
@@ -37520,7 +37520,7 @@
         <p:spPr>
           <a:xfrm>
             <a:off x="3611880" y="4041648"/>
-            <a:ext cx="731520" cy="914400"/>
+            <a:ext cx="730601" cy="914400"/>
           </a:xfrm>
           <a:prstGeom prst="rect">
             <a:avLst/>
@@ -37563,8 +37563,8 @@
         </p:nvSpPr>
         <p:spPr>
           <a:xfrm>
-            <a:off x="4507992" y="4041648"/>
-            <a:ext cx="7132320" cy="256032"/>
+            <a:off x="4507073" y="4041648"/>
+            <a:ext cx="7133238" cy="256032"/>
           </a:xfrm>
           <a:prstGeom prst="rect">
             <a:avLst/>
@@ -37597,8 +37597,8 @@
         </p:nvSpPr>
         <p:spPr>
           <a:xfrm>
-            <a:off x="4507992" y="4315968"/>
-            <a:ext cx="7132320" cy="347472"/>
+            <a:off x="4507073" y="4315968"/>
+            <a:ext cx="7133238" cy="347472"/>
           </a:xfrm>
           <a:prstGeom prst="rect">
             <a:avLst/>
@@ -37636,8 +37636,8 @@
         </p:nvSpPr>
         <p:spPr>
           <a:xfrm>
-            <a:off x="4507992" y="4681727"/>
-            <a:ext cx="7132320" cy="292608"/>
+            <a:off x="4507073" y="4681727"/>
+            <a:ext cx="7133238" cy="292608"/>
           </a:xfrm>
           <a:prstGeom prst="rect">
             <a:avLst/>
@@ -38512,7 +38512,7 @@
         <p:spPr>
           <a:xfrm>
             <a:off x="3611880" y="1408176"/>
-            <a:ext cx="732622" cy="914400"/>
+            <a:ext cx="727113" cy="914400"/>
           </a:xfrm>
           <a:prstGeom prst="rect">
             <a:avLst/>
@@ -38528,7 +38528,7 @@
         <p:spPr>
           <a:xfrm>
             <a:off x="3611880" y="1408176"/>
-            <a:ext cx="732621" cy="914400"/>
+            <a:ext cx="727113" cy="914400"/>
           </a:xfrm>
           <a:prstGeom prst="rect">
             <a:avLst/>
@@ -38571,8 +38571,8 @@
         </p:nvSpPr>
         <p:spPr>
           <a:xfrm>
-            <a:off x="4509093" y="1408176"/>
-            <a:ext cx="7131218" cy="256032"/>
+            <a:off x="4503585" y="1408176"/>
+            <a:ext cx="7136726" cy="256032"/>
           </a:xfrm>
           <a:prstGeom prst="rect">
             <a:avLst/>
@@ -38605,8 +38605,8 @@
         </p:nvSpPr>
         <p:spPr>
           <a:xfrm>
-            <a:off x="4509093" y="1682495"/>
-            <a:ext cx="7131218" cy="347472"/>
+            <a:off x="4503585" y="1682495"/>
+            <a:ext cx="7136726" cy="347472"/>
           </a:xfrm>
           <a:prstGeom prst="rect">
             <a:avLst/>
@@ -38644,8 +38644,8 @@
         </p:nvSpPr>
         <p:spPr>
           <a:xfrm>
-            <a:off x="4509093" y="2048256"/>
-            <a:ext cx="7131218" cy="292608"/>
+            <a:off x="4503585" y="2048256"/>
+            <a:ext cx="7136726" cy="292608"/>
           </a:xfrm>
           <a:prstGeom prst="rect">
             <a:avLst/>
@@ -38795,7 +38795,7 @@
       </p:sp>
       <p:pic>
         <p:nvPicPr>
-          <p:cNvPr id="24" name="Picture 23" descr="_ph-canada-sidhu.png"/>
+          <p:cNvPr id="24" name="Picture 23" descr="canada-sidhu.png"/>
           <p:cNvPicPr>
             <a:picLocks noChangeAspect="1"/>
           </p:cNvPicPr>
@@ -39019,7 +39019,7 @@
       </p:sp>
       <p:pic>
         <p:nvPicPr>
-          <p:cNvPr id="29" name="Picture 28" descr="_ph-argentina-genua.png"/>
+          <p:cNvPr id="29" name="Picture 28" descr="canada-leblanc.png"/>
           <p:cNvPicPr>
             <a:picLocks noChangeAspect="1"/>
           </p:cNvPicPr>
@@ -39034,7 +39034,7 @@
         <p:spPr>
           <a:xfrm>
             <a:off x="7790688" y="4023359"/>
-            <a:ext cx="585216" cy="731520"/>
+            <a:ext cx="586097" cy="731520"/>
           </a:xfrm>
           <a:prstGeom prst="rect">
             <a:avLst/>
@@ -39050,7 +39050,7 @@
         <p:spPr>
           <a:xfrm>
             <a:off x="7790688" y="4023359"/>
-            <a:ext cx="585216" cy="731520"/>
+            <a:ext cx="586097" cy="731520"/>
           </a:xfrm>
           <a:prstGeom prst="rect">
             <a:avLst/>
@@ -39093,8 +39093,8 @@
         </p:nvSpPr>
         <p:spPr>
           <a:xfrm>
-            <a:off x="8503920" y="4023359"/>
-            <a:ext cx="3136391" cy="914400"/>
+            <a:off x="8504801" y="4023359"/>
+            <a:ext cx="3135510" cy="914400"/>
           </a:xfrm>
           <a:prstGeom prst="rect">
             <a:avLst/>
@@ -40038,7 +40038,7 @@
         <p:spPr>
           <a:xfrm>
             <a:off x="3611880" y="1389888"/>
-            <a:ext cx="586003" cy="731520"/>
+            <a:ext cx="582070" cy="731520"/>
           </a:xfrm>
           <a:prstGeom prst="rect">
             <a:avLst/>
@@ -40054,7 +40054,7 @@
         <p:spPr>
           <a:xfrm>
             <a:off x="3611880" y="1389888"/>
-            <a:ext cx="586002" cy="731520"/>
+            <a:ext cx="582069" cy="731520"/>
           </a:xfrm>
           <a:prstGeom prst="rect">
             <a:avLst/>
@@ -40097,8 +40097,8 @@
         </p:nvSpPr>
         <p:spPr>
           <a:xfrm>
-            <a:off x="4325898" y="1389888"/>
-            <a:ext cx="3135605" cy="914400"/>
+            <a:off x="4321965" y="1389888"/>
+            <a:ext cx="3139538" cy="914400"/>
           </a:xfrm>
           <a:prstGeom prst="rect">
             <a:avLst/>
@@ -40262,7 +40262,7 @@
         <p:spPr>
           <a:xfrm>
             <a:off x="7790688" y="1389888"/>
-            <a:ext cx="587614" cy="731520"/>
+            <a:ext cx="583617" cy="731520"/>
           </a:xfrm>
           <a:prstGeom prst="rect">
             <a:avLst/>
@@ -40278,7 +40278,7 @@
         <p:spPr>
           <a:xfrm>
             <a:off x="7790688" y="1389888"/>
-            <a:ext cx="587614" cy="731520"/>
+            <a:ext cx="583617" cy="731520"/>
           </a:xfrm>
           <a:prstGeom prst="rect">
             <a:avLst/>
@@ -40321,8 +40321,8 @@
         </p:nvSpPr>
         <p:spPr>
           <a:xfrm>
-            <a:off x="8506318" y="1389888"/>
-            <a:ext cx="3133993" cy="914400"/>
+            <a:off x="8502321" y="1389888"/>
+            <a:ext cx="3137990" cy="914400"/>
           </a:xfrm>
           <a:prstGeom prst="rect">
             <a:avLst/>
@@ -40556,7 +40556,7 @@
         <p:spPr>
           <a:xfrm>
             <a:off x="3611880" y="4023359"/>
-            <a:ext cx="587433" cy="731520"/>
+            <a:ext cx="583738" cy="731520"/>
           </a:xfrm>
           <a:prstGeom prst="rect">
             <a:avLst/>
@@ -40572,7 +40572,7 @@
         <p:spPr>
           <a:xfrm>
             <a:off x="3611880" y="4023359"/>
-            <a:ext cx="587432" cy="731520"/>
+            <a:ext cx="583738" cy="731520"/>
           </a:xfrm>
           <a:prstGeom prst="rect">
             <a:avLst/>
@@ -40615,8 +40615,8 @@
         </p:nvSpPr>
         <p:spPr>
           <a:xfrm>
-            <a:off x="4327328" y="4023359"/>
-            <a:ext cx="3134175" cy="914400"/>
+            <a:off x="4323634" y="4023359"/>
+            <a:ext cx="3137869" cy="914400"/>
           </a:xfrm>
           <a:prstGeom prst="rect">
             <a:avLst/>
@@ -40780,7 +40780,7 @@
         <p:spPr>
           <a:xfrm>
             <a:off x="7790688" y="4023359"/>
-            <a:ext cx="584481" cy="731520"/>
+            <a:ext cx="587433" cy="731520"/>
           </a:xfrm>
           <a:prstGeom prst="rect">
             <a:avLst/>
@@ -40796,7 +40796,7 @@
         <p:spPr>
           <a:xfrm>
             <a:off x="7790688" y="4023359"/>
-            <a:ext cx="584480" cy="731520"/>
+            <a:ext cx="587432" cy="731520"/>
           </a:xfrm>
           <a:prstGeom prst="rect">
             <a:avLst/>
@@ -40839,8 +40839,8 @@
         </p:nvSpPr>
         <p:spPr>
           <a:xfrm>
-            <a:off x="8503184" y="4023359"/>
-            <a:ext cx="3137127" cy="914400"/>
+            <a:off x="8506136" y="4023359"/>
+            <a:ext cx="3134175" cy="914400"/>
           </a:xfrm>
           <a:prstGeom prst="rect">
             <a:avLst/>

--- a/output/g20-ministers-trade-deck.pptx
+++ b/output/g20-ministers-trade-deck.pptx
@@ -4253,7 +4253,7 @@
         <p:spPr>
           <a:xfrm>
             <a:off x="3611880" y="1408176"/>
-            <a:ext cx="734291" cy="914400"/>
+            <a:ext cx="729673" cy="914400"/>
           </a:xfrm>
           <a:prstGeom prst="rect">
             <a:avLst/>
@@ -4269,7 +4269,7 @@
         <p:spPr>
           <a:xfrm>
             <a:off x="3611880" y="1408176"/>
-            <a:ext cx="734290" cy="914400"/>
+            <a:ext cx="729672" cy="914400"/>
           </a:xfrm>
           <a:prstGeom prst="rect">
             <a:avLst/>
@@ -4312,8 +4312,8 @@
         </p:nvSpPr>
         <p:spPr>
           <a:xfrm>
-            <a:off x="4510762" y="1408176"/>
-            <a:ext cx="7129549" cy="256032"/>
+            <a:off x="4506144" y="1408176"/>
+            <a:ext cx="7134167" cy="256032"/>
           </a:xfrm>
           <a:prstGeom prst="rect">
             <a:avLst/>
@@ -4346,8 +4346,8 @@
         </p:nvSpPr>
         <p:spPr>
           <a:xfrm>
-            <a:off x="4510762" y="1682495"/>
-            <a:ext cx="7129549" cy="347472"/>
+            <a:off x="4506144" y="1682495"/>
+            <a:ext cx="7134167" cy="347472"/>
           </a:xfrm>
           <a:prstGeom prst="rect">
             <a:avLst/>
@@ -4385,8 +4385,8 @@
         </p:nvSpPr>
         <p:spPr>
           <a:xfrm>
-            <a:off x="4510762" y="2048256"/>
-            <a:ext cx="7129549" cy="292608"/>
+            <a:off x="4506144" y="2048256"/>
+            <a:ext cx="7134167" cy="292608"/>
           </a:xfrm>
           <a:prstGeom prst="rect">
             <a:avLst/>
@@ -4551,7 +4551,7 @@
         <p:spPr>
           <a:xfrm>
             <a:off x="3611880" y="4041648"/>
-            <a:ext cx="727587" cy="914400"/>
+            <a:ext cx="731520" cy="914400"/>
           </a:xfrm>
           <a:prstGeom prst="rect">
             <a:avLst/>
@@ -4567,7 +4567,7 @@
         <p:spPr>
           <a:xfrm>
             <a:off x="3611880" y="4041648"/>
-            <a:ext cx="727587" cy="914400"/>
+            <a:ext cx="731520" cy="914400"/>
           </a:xfrm>
           <a:prstGeom prst="rect">
             <a:avLst/>
@@ -4610,8 +4610,8 @@
         </p:nvSpPr>
         <p:spPr>
           <a:xfrm>
-            <a:off x="4504059" y="4041648"/>
-            <a:ext cx="7136252" cy="256032"/>
+            <a:off x="4507992" y="4041648"/>
+            <a:ext cx="7132320" cy="256032"/>
           </a:xfrm>
           <a:prstGeom prst="rect">
             <a:avLst/>
@@ -4644,8 +4644,8 @@
         </p:nvSpPr>
         <p:spPr>
           <a:xfrm>
-            <a:off x="4504059" y="4315968"/>
-            <a:ext cx="7136252" cy="347472"/>
+            <a:off x="4507992" y="4315968"/>
+            <a:ext cx="7132320" cy="347472"/>
           </a:xfrm>
           <a:prstGeom prst="rect">
             <a:avLst/>
@@ -4683,8 +4683,8 @@
         </p:nvSpPr>
         <p:spPr>
           <a:xfrm>
-            <a:off x="4504059" y="4681727"/>
-            <a:ext cx="7136252" cy="292608"/>
+            <a:off x="4507992" y="4681727"/>
+            <a:ext cx="7132320" cy="292608"/>
           </a:xfrm>
           <a:prstGeom prst="rect">
             <a:avLst/>
@@ -5559,7 +5559,7 @@
         <p:spPr>
           <a:xfrm>
             <a:off x="3611880" y="1408176"/>
-            <a:ext cx="734291" cy="914400"/>
+            <a:ext cx="729673" cy="914400"/>
           </a:xfrm>
           <a:prstGeom prst="rect">
             <a:avLst/>
@@ -5575,7 +5575,7 @@
         <p:spPr>
           <a:xfrm>
             <a:off x="3611880" y="1408176"/>
-            <a:ext cx="734290" cy="914400"/>
+            <a:ext cx="729672" cy="914400"/>
           </a:xfrm>
           <a:prstGeom prst="rect">
             <a:avLst/>
@@ -5618,8 +5618,8 @@
         </p:nvSpPr>
         <p:spPr>
           <a:xfrm>
-            <a:off x="4510762" y="1408176"/>
-            <a:ext cx="7129549" cy="256032"/>
+            <a:off x="4506144" y="1408176"/>
+            <a:ext cx="7134167" cy="256032"/>
           </a:xfrm>
           <a:prstGeom prst="rect">
             <a:avLst/>
@@ -5652,8 +5652,8 @@
         </p:nvSpPr>
         <p:spPr>
           <a:xfrm>
-            <a:off x="4510762" y="1682495"/>
-            <a:ext cx="7129549" cy="347472"/>
+            <a:off x="4506144" y="1682495"/>
+            <a:ext cx="7134167" cy="347472"/>
           </a:xfrm>
           <a:prstGeom prst="rect">
             <a:avLst/>
@@ -5691,8 +5691,8 @@
         </p:nvSpPr>
         <p:spPr>
           <a:xfrm>
-            <a:off x="4510762" y="2048256"/>
-            <a:ext cx="7129549" cy="292608"/>
+            <a:off x="4506144" y="2048256"/>
+            <a:ext cx="7134167" cy="292608"/>
           </a:xfrm>
           <a:prstGeom prst="rect">
             <a:avLst/>
@@ -5857,7 +5857,7 @@
         <p:spPr>
           <a:xfrm>
             <a:off x="3611880" y="4041648"/>
-            <a:ext cx="734291" cy="914400"/>
+            <a:ext cx="729673" cy="914400"/>
           </a:xfrm>
           <a:prstGeom prst="rect">
             <a:avLst/>
@@ -5873,7 +5873,7 @@
         <p:spPr>
           <a:xfrm>
             <a:off x="3611880" y="4041648"/>
-            <a:ext cx="734290" cy="914400"/>
+            <a:ext cx="729672" cy="914400"/>
           </a:xfrm>
           <a:prstGeom prst="rect">
             <a:avLst/>
@@ -5916,8 +5916,8 @@
         </p:nvSpPr>
         <p:spPr>
           <a:xfrm>
-            <a:off x="4510762" y="4041648"/>
-            <a:ext cx="7129549" cy="256032"/>
+            <a:off x="4506144" y="4041648"/>
+            <a:ext cx="7134167" cy="256032"/>
           </a:xfrm>
           <a:prstGeom prst="rect">
             <a:avLst/>
@@ -5950,8 +5950,8 @@
         </p:nvSpPr>
         <p:spPr>
           <a:xfrm>
-            <a:off x="4510762" y="4315968"/>
-            <a:ext cx="7129549" cy="347472"/>
+            <a:off x="4506144" y="4315968"/>
+            <a:ext cx="7134167" cy="347472"/>
           </a:xfrm>
           <a:prstGeom prst="rect">
             <a:avLst/>
@@ -5989,8 +5989,8 @@
         </p:nvSpPr>
         <p:spPr>
           <a:xfrm>
-            <a:off x="4510762" y="4681727"/>
-            <a:ext cx="7129549" cy="292608"/>
+            <a:off x="4506144" y="4681727"/>
+            <a:ext cx="7134167" cy="292608"/>
           </a:xfrm>
           <a:prstGeom prst="rect">
             <a:avLst/>
@@ -7419,7 +7419,7 @@
         <p:spPr>
           <a:xfrm>
             <a:off x="7790688" y="4023359"/>
-            <a:ext cx="587433" cy="731520"/>
+            <a:ext cx="583738" cy="731520"/>
           </a:xfrm>
           <a:prstGeom prst="rect">
             <a:avLst/>
@@ -7435,7 +7435,7 @@
         <p:spPr>
           <a:xfrm>
             <a:off x="7790688" y="4023359"/>
-            <a:ext cx="587432" cy="731520"/>
+            <a:ext cx="583738" cy="731520"/>
           </a:xfrm>
           <a:prstGeom prst="rect">
             <a:avLst/>
@@ -7478,8 +7478,8 @@
         </p:nvSpPr>
         <p:spPr>
           <a:xfrm>
-            <a:off x="8506136" y="4023359"/>
-            <a:ext cx="3134175" cy="914400"/>
+            <a:off x="8502442" y="4023359"/>
+            <a:ext cx="3137869" cy="914400"/>
           </a:xfrm>
           <a:prstGeom prst="rect">
             <a:avLst/>
@@ -8423,7 +8423,7 @@
         <p:spPr>
           <a:xfrm>
             <a:off x="3611880" y="1408176"/>
-            <a:ext cx="734291" cy="914400"/>
+            <a:ext cx="729673" cy="914400"/>
           </a:xfrm>
           <a:prstGeom prst="rect">
             <a:avLst/>
@@ -8439,7 +8439,7 @@
         <p:spPr>
           <a:xfrm>
             <a:off x="3611880" y="1408176"/>
-            <a:ext cx="734290" cy="914400"/>
+            <a:ext cx="729672" cy="914400"/>
           </a:xfrm>
           <a:prstGeom prst="rect">
             <a:avLst/>
@@ -8482,8 +8482,8 @@
         </p:nvSpPr>
         <p:spPr>
           <a:xfrm>
-            <a:off x="4510762" y="1408176"/>
-            <a:ext cx="7129549" cy="256032"/>
+            <a:off x="4506144" y="1408176"/>
+            <a:ext cx="7134167" cy="256032"/>
           </a:xfrm>
           <a:prstGeom prst="rect">
             <a:avLst/>
@@ -8516,8 +8516,8 @@
         </p:nvSpPr>
         <p:spPr>
           <a:xfrm>
-            <a:off x="4510762" y="1682495"/>
-            <a:ext cx="7129549" cy="347472"/>
+            <a:off x="4506144" y="1682495"/>
+            <a:ext cx="7134167" cy="347472"/>
           </a:xfrm>
           <a:prstGeom prst="rect">
             <a:avLst/>
@@ -8555,8 +8555,8 @@
         </p:nvSpPr>
         <p:spPr>
           <a:xfrm>
-            <a:off x="4510762" y="2048256"/>
-            <a:ext cx="7129549" cy="292608"/>
+            <a:off x="4506144" y="2048256"/>
+            <a:ext cx="7134167" cy="292608"/>
           </a:xfrm>
           <a:prstGeom prst="rect">
             <a:avLst/>
@@ -8721,7 +8721,7 @@
         <p:spPr>
           <a:xfrm>
             <a:off x="3611880" y="4023359"/>
-            <a:ext cx="583738" cy="731520"/>
+            <a:ext cx="586701" cy="731520"/>
           </a:xfrm>
           <a:prstGeom prst="rect">
             <a:avLst/>
@@ -8737,7 +8737,7 @@
         <p:spPr>
           <a:xfrm>
             <a:off x="3611880" y="4023359"/>
-            <a:ext cx="583738" cy="731520"/>
+            <a:ext cx="586701" cy="731520"/>
           </a:xfrm>
           <a:prstGeom prst="rect">
             <a:avLst/>
@@ -8780,8 +8780,8 @@
         </p:nvSpPr>
         <p:spPr>
           <a:xfrm>
-            <a:off x="4323634" y="4023359"/>
-            <a:ext cx="3137869" cy="914400"/>
+            <a:off x="4326597" y="4023359"/>
+            <a:ext cx="3134906" cy="914400"/>
           </a:xfrm>
           <a:prstGeom prst="rect">
             <a:avLst/>
@@ -8945,7 +8945,7 @@
         <p:spPr>
           <a:xfrm>
             <a:off x="7790688" y="4023359"/>
-            <a:ext cx="587433" cy="731520"/>
+            <a:ext cx="583738" cy="731520"/>
           </a:xfrm>
           <a:prstGeom prst="rect">
             <a:avLst/>
@@ -8961,7 +8961,7 @@
         <p:spPr>
           <a:xfrm>
             <a:off x="7790688" y="4023359"/>
-            <a:ext cx="587432" cy="731520"/>
+            <a:ext cx="583738" cy="731520"/>
           </a:xfrm>
           <a:prstGeom prst="rect">
             <a:avLst/>
@@ -9004,8 +9004,8 @@
         </p:nvSpPr>
         <p:spPr>
           <a:xfrm>
-            <a:off x="8506136" y="4023359"/>
-            <a:ext cx="3134175" cy="914400"/>
+            <a:off x="8502442" y="4023359"/>
+            <a:ext cx="3137869" cy="914400"/>
           </a:xfrm>
           <a:prstGeom prst="rect">
             <a:avLst/>
@@ -9949,7 +9949,7 @@
         <p:spPr>
           <a:xfrm>
             <a:off x="3611880" y="1408176"/>
-            <a:ext cx="734291" cy="914400"/>
+            <a:ext cx="729673" cy="914400"/>
           </a:xfrm>
           <a:prstGeom prst="rect">
             <a:avLst/>
@@ -9965,7 +9965,7 @@
         <p:spPr>
           <a:xfrm>
             <a:off x="3611880" y="1408176"/>
-            <a:ext cx="734290" cy="914400"/>
+            <a:ext cx="729672" cy="914400"/>
           </a:xfrm>
           <a:prstGeom prst="rect">
             <a:avLst/>
@@ -10008,8 +10008,8 @@
         </p:nvSpPr>
         <p:spPr>
           <a:xfrm>
-            <a:off x="4510762" y="1408176"/>
-            <a:ext cx="7129549" cy="256032"/>
+            <a:off x="4506144" y="1408176"/>
+            <a:ext cx="7134167" cy="256032"/>
           </a:xfrm>
           <a:prstGeom prst="rect">
             <a:avLst/>
@@ -10042,8 +10042,8 @@
         </p:nvSpPr>
         <p:spPr>
           <a:xfrm>
-            <a:off x="4510762" y="1682495"/>
-            <a:ext cx="7129549" cy="347472"/>
+            <a:off x="4506144" y="1682495"/>
+            <a:ext cx="7134167" cy="347472"/>
           </a:xfrm>
           <a:prstGeom prst="rect">
             <a:avLst/>
@@ -10081,8 +10081,8 @@
         </p:nvSpPr>
         <p:spPr>
           <a:xfrm>
-            <a:off x="4510762" y="2048256"/>
-            <a:ext cx="7129549" cy="292608"/>
+            <a:off x="4506144" y="2048256"/>
+            <a:ext cx="7134167" cy="292608"/>
           </a:xfrm>
           <a:prstGeom prst="rect">
             <a:avLst/>
@@ -10247,7 +10247,7 @@
         <p:spPr>
           <a:xfrm>
             <a:off x="3611880" y="4023359"/>
-            <a:ext cx="587433" cy="731520"/>
+            <a:ext cx="583738" cy="731520"/>
           </a:xfrm>
           <a:prstGeom prst="rect">
             <a:avLst/>
@@ -10263,7 +10263,7 @@
         <p:spPr>
           <a:xfrm>
             <a:off x="3611880" y="4023359"/>
-            <a:ext cx="587432" cy="731520"/>
+            <a:ext cx="583738" cy="731520"/>
           </a:xfrm>
           <a:prstGeom prst="rect">
             <a:avLst/>
@@ -10306,8 +10306,8 @@
         </p:nvSpPr>
         <p:spPr>
           <a:xfrm>
-            <a:off x="4327328" y="4023359"/>
-            <a:ext cx="3134175" cy="914400"/>
+            <a:off x="4323634" y="4023359"/>
+            <a:ext cx="3137869" cy="914400"/>
           </a:xfrm>
           <a:prstGeom prst="rect">
             <a:avLst/>
@@ -10471,7 +10471,7 @@
         <p:spPr>
           <a:xfrm>
             <a:off x="7790688" y="4023359"/>
-            <a:ext cx="582930" cy="731520"/>
+            <a:ext cx="585982" cy="731520"/>
           </a:xfrm>
           <a:prstGeom prst="rect">
             <a:avLst/>
@@ -10487,7 +10487,7 @@
         <p:spPr>
           <a:xfrm>
             <a:off x="7790688" y="4023359"/>
-            <a:ext cx="582930" cy="731520"/>
+            <a:ext cx="585981" cy="731520"/>
           </a:xfrm>
           <a:prstGeom prst="rect">
             <a:avLst/>
@@ -10530,8 +10530,8 @@
         </p:nvSpPr>
         <p:spPr>
           <a:xfrm>
-            <a:off x="8501634" y="4023359"/>
-            <a:ext cx="3138677" cy="914400"/>
+            <a:off x="8504685" y="4023359"/>
+            <a:ext cx="3135626" cy="914400"/>
           </a:xfrm>
           <a:prstGeom prst="rect">
             <a:avLst/>
@@ -11475,7 +11475,7 @@
         <p:spPr>
           <a:xfrm>
             <a:off x="3611880" y="1408176"/>
-            <a:ext cx="728235" cy="914400"/>
+            <a:ext cx="732622" cy="914400"/>
           </a:xfrm>
           <a:prstGeom prst="rect">
             <a:avLst/>
@@ -11491,7 +11491,7 @@
         <p:spPr>
           <a:xfrm>
             <a:off x="3611880" y="1408176"/>
-            <a:ext cx="728234" cy="914400"/>
+            <a:ext cx="732621" cy="914400"/>
           </a:xfrm>
           <a:prstGeom prst="rect">
             <a:avLst/>
@@ -11534,8 +11534,8 @@
         </p:nvSpPr>
         <p:spPr>
           <a:xfrm>
-            <a:off x="4504706" y="1408176"/>
-            <a:ext cx="7135605" cy="256032"/>
+            <a:off x="4509093" y="1408176"/>
+            <a:ext cx="7131218" cy="256032"/>
           </a:xfrm>
           <a:prstGeom prst="rect">
             <a:avLst/>
@@ -11568,8 +11568,8 @@
         </p:nvSpPr>
         <p:spPr>
           <a:xfrm>
-            <a:off x="4504706" y="1682495"/>
-            <a:ext cx="7135605" cy="347472"/>
+            <a:off x="4509093" y="1682495"/>
+            <a:ext cx="7131218" cy="347472"/>
           </a:xfrm>
           <a:prstGeom prst="rect">
             <a:avLst/>
@@ -11607,8 +11607,8 @@
         </p:nvSpPr>
         <p:spPr>
           <a:xfrm>
-            <a:off x="4504706" y="2048256"/>
-            <a:ext cx="7135605" cy="292608"/>
+            <a:off x="4509093" y="2048256"/>
+            <a:ext cx="7131218" cy="292608"/>
           </a:xfrm>
           <a:prstGeom prst="rect">
             <a:avLst/>
@@ -11773,7 +11773,7 @@
         <p:spPr>
           <a:xfrm>
             <a:off x="3611880" y="4041648"/>
-            <a:ext cx="727587" cy="914400"/>
+            <a:ext cx="731520" cy="914400"/>
           </a:xfrm>
           <a:prstGeom prst="rect">
             <a:avLst/>
@@ -11789,7 +11789,7 @@
         <p:spPr>
           <a:xfrm>
             <a:off x="3611880" y="4041648"/>
-            <a:ext cx="727587" cy="914400"/>
+            <a:ext cx="731520" cy="914400"/>
           </a:xfrm>
           <a:prstGeom prst="rect">
             <a:avLst/>
@@ -11832,8 +11832,8 @@
         </p:nvSpPr>
         <p:spPr>
           <a:xfrm>
-            <a:off x="4504059" y="4041648"/>
-            <a:ext cx="7136252" cy="256032"/>
+            <a:off x="4507992" y="4041648"/>
+            <a:ext cx="7132320" cy="256032"/>
           </a:xfrm>
           <a:prstGeom prst="rect">
             <a:avLst/>
@@ -11866,8 +11866,8 @@
         </p:nvSpPr>
         <p:spPr>
           <a:xfrm>
-            <a:off x="4504059" y="4315968"/>
-            <a:ext cx="7136252" cy="347472"/>
+            <a:off x="4507992" y="4315968"/>
+            <a:ext cx="7132320" cy="347472"/>
           </a:xfrm>
           <a:prstGeom prst="rect">
             <a:avLst/>
@@ -11905,8 +11905,8 @@
         </p:nvSpPr>
         <p:spPr>
           <a:xfrm>
-            <a:off x="4504059" y="4681727"/>
-            <a:ext cx="7136252" cy="292608"/>
+            <a:off x="4507992" y="4681727"/>
+            <a:ext cx="7132320" cy="292608"/>
           </a:xfrm>
           <a:prstGeom prst="rect">
             <a:avLst/>
@@ -12797,7 +12797,7 @@
         <p:spPr>
           <a:xfrm>
             <a:off x="3611880" y="1408176"/>
-            <a:ext cx="729673" cy="914400"/>
+            <a:ext cx="733377" cy="914400"/>
           </a:xfrm>
           <a:prstGeom prst="rect">
             <a:avLst/>
@@ -12813,7 +12813,7 @@
         <p:spPr>
           <a:xfrm>
             <a:off x="3611880" y="1408176"/>
-            <a:ext cx="729672" cy="914400"/>
+            <a:ext cx="733376" cy="914400"/>
           </a:xfrm>
           <a:prstGeom prst="rect">
             <a:avLst/>
@@ -12856,8 +12856,8 @@
         </p:nvSpPr>
         <p:spPr>
           <a:xfrm>
-            <a:off x="4506144" y="1408176"/>
-            <a:ext cx="7134167" cy="256032"/>
+            <a:off x="4509848" y="1408176"/>
+            <a:ext cx="7130463" cy="256032"/>
           </a:xfrm>
           <a:prstGeom prst="rect">
             <a:avLst/>
@@ -12890,8 +12890,8 @@
         </p:nvSpPr>
         <p:spPr>
           <a:xfrm>
-            <a:off x="4506144" y="1682495"/>
-            <a:ext cx="7134167" cy="347472"/>
+            <a:off x="4509848" y="1682495"/>
+            <a:ext cx="7130463" cy="347472"/>
           </a:xfrm>
           <a:prstGeom prst="rect">
             <a:avLst/>
@@ -12929,8 +12929,8 @@
         </p:nvSpPr>
         <p:spPr>
           <a:xfrm>
-            <a:off x="4506144" y="2048256"/>
-            <a:ext cx="7134167" cy="292608"/>
+            <a:off x="4509848" y="2048256"/>
+            <a:ext cx="7130463" cy="292608"/>
           </a:xfrm>
           <a:prstGeom prst="rect">
             <a:avLst/>
@@ -13095,7 +13095,7 @@
         <p:spPr>
           <a:xfrm>
             <a:off x="3611880" y="4023359"/>
-            <a:ext cx="583738" cy="731520"/>
+            <a:ext cx="586701" cy="731520"/>
           </a:xfrm>
           <a:prstGeom prst="rect">
             <a:avLst/>
@@ -13111,7 +13111,7 @@
         <p:spPr>
           <a:xfrm>
             <a:off x="3611880" y="4023359"/>
-            <a:ext cx="583738" cy="731520"/>
+            <a:ext cx="586701" cy="731520"/>
           </a:xfrm>
           <a:prstGeom prst="rect">
             <a:avLst/>
@@ -13154,8 +13154,8 @@
         </p:nvSpPr>
         <p:spPr>
           <a:xfrm>
-            <a:off x="4323634" y="4023359"/>
-            <a:ext cx="3137869" cy="914400"/>
+            <a:off x="4326597" y="4023359"/>
+            <a:ext cx="3134906" cy="914400"/>
           </a:xfrm>
           <a:prstGeom prst="rect">
             <a:avLst/>
@@ -13319,7 +13319,7 @@
         <p:spPr>
           <a:xfrm>
             <a:off x="7790688" y="4023359"/>
-            <a:ext cx="587433" cy="731520"/>
+            <a:ext cx="583738" cy="731520"/>
           </a:xfrm>
           <a:prstGeom prst="rect">
             <a:avLst/>
@@ -13335,7 +13335,7 @@
         <p:spPr>
           <a:xfrm>
             <a:off x="7790688" y="4023359"/>
-            <a:ext cx="587432" cy="731520"/>
+            <a:ext cx="583738" cy="731520"/>
           </a:xfrm>
           <a:prstGeom prst="rect">
             <a:avLst/>
@@ -13378,8 +13378,8 @@
         </p:nvSpPr>
         <p:spPr>
           <a:xfrm>
-            <a:off x="8506136" y="4023359"/>
-            <a:ext cx="3134175" cy="914400"/>
+            <a:off x="8502442" y="4023359"/>
+            <a:ext cx="3137869" cy="914400"/>
           </a:xfrm>
           <a:prstGeom prst="rect">
             <a:avLst/>
@@ -14323,7 +14323,7 @@
         <p:spPr>
           <a:xfrm>
             <a:off x="3611880" y="1408176"/>
-            <a:ext cx="729673" cy="914400"/>
+            <a:ext cx="733377" cy="914400"/>
           </a:xfrm>
           <a:prstGeom prst="rect">
             <a:avLst/>
@@ -14339,7 +14339,7 @@
         <p:spPr>
           <a:xfrm>
             <a:off x="3611880" y="1408176"/>
-            <a:ext cx="729672" cy="914400"/>
+            <a:ext cx="733376" cy="914400"/>
           </a:xfrm>
           <a:prstGeom prst="rect">
             <a:avLst/>
@@ -14382,8 +14382,8 @@
         </p:nvSpPr>
         <p:spPr>
           <a:xfrm>
-            <a:off x="4506144" y="1408176"/>
-            <a:ext cx="7134167" cy="256032"/>
+            <a:off x="4509848" y="1408176"/>
+            <a:ext cx="7130463" cy="256032"/>
           </a:xfrm>
           <a:prstGeom prst="rect">
             <a:avLst/>
@@ -14416,8 +14416,8 @@
         </p:nvSpPr>
         <p:spPr>
           <a:xfrm>
-            <a:off x="4506144" y="1682495"/>
-            <a:ext cx="7134167" cy="347472"/>
+            <a:off x="4509848" y="1682495"/>
+            <a:ext cx="7130463" cy="347472"/>
           </a:xfrm>
           <a:prstGeom prst="rect">
             <a:avLst/>
@@ -14455,8 +14455,8 @@
         </p:nvSpPr>
         <p:spPr>
           <a:xfrm>
-            <a:off x="4506144" y="2048256"/>
-            <a:ext cx="7134167" cy="292608"/>
+            <a:off x="4509848" y="2048256"/>
+            <a:ext cx="7130463" cy="292608"/>
           </a:xfrm>
           <a:prstGeom prst="rect">
             <a:avLst/>
@@ -14861,7 +14861,7 @@
         <p:spPr>
           <a:xfrm>
             <a:off x="7790688" y="4023359"/>
-            <a:ext cx="583738" cy="731520"/>
+            <a:ext cx="586701" cy="731520"/>
           </a:xfrm>
           <a:prstGeom prst="rect">
             <a:avLst/>
@@ -14877,7 +14877,7 @@
         <p:spPr>
           <a:xfrm>
             <a:off x="7790688" y="4023359"/>
-            <a:ext cx="583738" cy="731520"/>
+            <a:ext cx="586701" cy="731520"/>
           </a:xfrm>
           <a:prstGeom prst="rect">
             <a:avLst/>
@@ -14920,8 +14920,8 @@
         </p:nvSpPr>
         <p:spPr>
           <a:xfrm>
-            <a:off x="8502442" y="4023359"/>
-            <a:ext cx="3137869" cy="914400"/>
+            <a:off x="8505405" y="4023359"/>
+            <a:ext cx="3134906" cy="914400"/>
           </a:xfrm>
           <a:prstGeom prst="rect">
             <a:avLst/>
@@ -17690,7 +17690,7 @@
       </p:sp>
       <p:pic>
         <p:nvPicPr>
-          <p:cNvPr id="24" name="Picture 23" descr="_ph-saudi-alqasabi.png"/>
+          <p:cNvPr id="24" name="Picture 23" descr="saudi-alqasabi.png"/>
           <p:cNvPicPr>
             <a:picLocks noChangeAspect="1"/>
           </p:cNvPicPr>
@@ -17929,7 +17929,7 @@
         <p:spPr>
           <a:xfrm>
             <a:off x="7790688" y="4023359"/>
-            <a:ext cx="583738" cy="731520"/>
+            <a:ext cx="586701" cy="731520"/>
           </a:xfrm>
           <a:prstGeom prst="rect">
             <a:avLst/>
@@ -17945,7 +17945,7 @@
         <p:spPr>
           <a:xfrm>
             <a:off x="7790688" y="4023359"/>
-            <a:ext cx="583738" cy="731520"/>
+            <a:ext cx="586701" cy="731520"/>
           </a:xfrm>
           <a:prstGeom prst="rect">
             <a:avLst/>
@@ -17988,8 +17988,8 @@
         </p:nvSpPr>
         <p:spPr>
           <a:xfrm>
-            <a:off x="8502442" y="4023359"/>
-            <a:ext cx="3137869" cy="914400"/>
+            <a:off x="8505405" y="4023359"/>
+            <a:ext cx="3134906" cy="914400"/>
           </a:xfrm>
           <a:prstGeom prst="rect">
             <a:avLst/>
@@ -19419,7 +19419,7 @@
         <p:spPr>
           <a:xfrm>
             <a:off x="3611880" y="1408176"/>
-            <a:ext cx="733530" cy="914400"/>
+            <a:ext cx="723481" cy="914400"/>
           </a:xfrm>
           <a:prstGeom prst="rect">
             <a:avLst/>
@@ -19435,7 +19435,7 @@
         <p:spPr>
           <a:xfrm>
             <a:off x="3611880" y="1408176"/>
-            <a:ext cx="733529" cy="914400"/>
+            <a:ext cx="723481" cy="914400"/>
           </a:xfrm>
           <a:prstGeom prst="rect">
             <a:avLst/>
@@ -19478,8 +19478,8 @@
         </p:nvSpPr>
         <p:spPr>
           <a:xfrm>
-            <a:off x="4510001" y="1408176"/>
-            <a:ext cx="7130310" cy="256032"/>
+            <a:off x="4499953" y="1408176"/>
+            <a:ext cx="7140358" cy="256032"/>
           </a:xfrm>
           <a:prstGeom prst="rect">
             <a:avLst/>
@@ -19512,8 +19512,8 @@
         </p:nvSpPr>
         <p:spPr>
           <a:xfrm>
-            <a:off x="4510001" y="1682495"/>
-            <a:ext cx="7130310" cy="347472"/>
+            <a:off x="4499953" y="1682495"/>
+            <a:ext cx="7140358" cy="347472"/>
           </a:xfrm>
           <a:prstGeom prst="rect">
             <a:avLst/>
@@ -19551,8 +19551,8 @@
         </p:nvSpPr>
         <p:spPr>
           <a:xfrm>
-            <a:off x="4510001" y="2048256"/>
-            <a:ext cx="7130310" cy="292608"/>
+            <a:off x="4499953" y="2048256"/>
+            <a:ext cx="7140358" cy="292608"/>
           </a:xfrm>
           <a:prstGeom prst="rect">
             <a:avLst/>
@@ -23809,7 +23809,7 @@
         <p:spPr>
           <a:xfrm>
             <a:off x="3611880" y="1389888"/>
-            <a:ext cx="586824" cy="731520"/>
+            <a:ext cx="578785" cy="731520"/>
           </a:xfrm>
           <a:prstGeom prst="rect">
             <a:avLst/>
@@ -23825,7 +23825,7 @@
         <p:spPr>
           <a:xfrm>
             <a:off x="3611880" y="1389888"/>
-            <a:ext cx="586823" cy="731520"/>
+            <a:ext cx="578785" cy="731520"/>
           </a:xfrm>
           <a:prstGeom prst="rect">
             <a:avLst/>
@@ -23868,8 +23868,8 @@
         </p:nvSpPr>
         <p:spPr>
           <a:xfrm>
-            <a:off x="4326719" y="1389888"/>
-            <a:ext cx="3134784" cy="914400"/>
+            <a:off x="4318681" y="1389888"/>
+            <a:ext cx="3142822" cy="914400"/>
           </a:xfrm>
           <a:prstGeom prst="rect">
             <a:avLst/>
@@ -25583,7 +25583,7 @@
       </p:sp>
       <p:pic>
         <p:nvPicPr>
-          <p:cNvPr id="17" name="Picture 16" descr="_ph-bloc-virkkunen.png"/>
+          <p:cNvPr id="17" name="Picture 16" descr="bloc-virkkunen.png"/>
           <p:cNvPicPr>
             <a:picLocks noChangeAspect="1"/>
           </p:cNvPicPr>
@@ -25881,7 +25881,7 @@
       </p:sp>
       <p:pic>
         <p:nvPicPr>
-          <p:cNvPr id="25" name="Picture 24" descr="_ph-bloc-sefcovic.png"/>
+          <p:cNvPr id="25" name="Picture 24" descr="bloc-sefcovic.png"/>
           <p:cNvPicPr>
             <a:picLocks noChangeAspect="1"/>
           </p:cNvPicPr>
@@ -26962,7 +26962,7 @@
       </p:sp>
       <p:pic>
         <p:nvPicPr>
-          <p:cNvPr id="18" name="Picture 17" descr="_ph-bloc-mataboge.png"/>
+          <p:cNvPr id="18" name="Picture 17" descr="bloc-mataboge.png"/>
           <p:cNvPicPr>
             <a:picLocks noChangeAspect="1"/>
           </p:cNvPicPr>
@@ -27260,7 +27260,7 @@
       </p:sp>
       <p:pic>
         <p:nvPicPr>
-          <p:cNvPr id="26" name="Picture 25" descr="_ph-bloc-belobe.png"/>
+          <p:cNvPr id="26" name="Picture 25" descr="bloc-belobe.png"/>
           <p:cNvPicPr>
             <a:picLocks noChangeAspect="1"/>
           </p:cNvPicPr>
@@ -33878,7 +33878,7 @@
       </p:sp>
       <p:pic>
         <p:nvPicPr>
-          <p:cNvPr id="16" name="Picture 15" descr="_ph-argentina-genua.png"/>
+          <p:cNvPr id="16" name="Picture 15" descr="argentina-genua.png"/>
           <p:cNvPicPr>
             <a:picLocks noChangeAspect="1"/>
           </p:cNvPicPr>
@@ -33893,7 +33893,7 @@
         <p:spPr>
           <a:xfrm>
             <a:off x="3611880" y="1408176"/>
-            <a:ext cx="731520" cy="914400"/>
+            <a:ext cx="730332" cy="914400"/>
           </a:xfrm>
           <a:prstGeom prst="rect">
             <a:avLst/>
@@ -33909,7 +33909,7 @@
         <p:spPr>
           <a:xfrm>
             <a:off x="3611880" y="1408176"/>
-            <a:ext cx="731520" cy="914400"/>
+            <a:ext cx="730332" cy="914400"/>
           </a:xfrm>
           <a:prstGeom prst="rect">
             <a:avLst/>
@@ -33952,8 +33952,8 @@
         </p:nvSpPr>
         <p:spPr>
           <a:xfrm>
-            <a:off x="4507992" y="1408176"/>
-            <a:ext cx="7132320" cy="256032"/>
+            <a:off x="4506804" y="1408176"/>
+            <a:ext cx="7133507" cy="256032"/>
           </a:xfrm>
           <a:prstGeom prst="rect">
             <a:avLst/>
@@ -33986,8 +33986,8 @@
         </p:nvSpPr>
         <p:spPr>
           <a:xfrm>
-            <a:off x="4507992" y="1682495"/>
-            <a:ext cx="7132320" cy="347472"/>
+            <a:off x="4506804" y="1682495"/>
+            <a:ext cx="7133507" cy="347472"/>
           </a:xfrm>
           <a:prstGeom prst="rect">
             <a:avLst/>
@@ -34025,8 +34025,8 @@
         </p:nvSpPr>
         <p:spPr>
           <a:xfrm>
-            <a:off x="4507992" y="2048256"/>
-            <a:ext cx="7132320" cy="292608"/>
+            <a:off x="4506804" y="2048256"/>
+            <a:ext cx="7133507" cy="292608"/>
           </a:xfrm>
           <a:prstGeom prst="rect">
             <a:avLst/>
@@ -34207,7 +34207,7 @@
         <p:spPr>
           <a:xfrm>
             <a:off x="3611880" y="4023359"/>
-            <a:ext cx="584481" cy="731520"/>
+            <a:ext cx="587433" cy="731520"/>
           </a:xfrm>
           <a:prstGeom prst="rect">
             <a:avLst/>
@@ -34223,7 +34223,7 @@
         <p:spPr>
           <a:xfrm>
             <a:off x="3611880" y="4023359"/>
-            <a:ext cx="584480" cy="731520"/>
+            <a:ext cx="587432" cy="731520"/>
           </a:xfrm>
           <a:prstGeom prst="rect">
             <a:avLst/>
@@ -34266,8 +34266,8 @@
         </p:nvSpPr>
         <p:spPr>
           <a:xfrm>
-            <a:off x="4324376" y="4023359"/>
-            <a:ext cx="3137127" cy="914400"/>
+            <a:off x="4327328" y="4023359"/>
+            <a:ext cx="3134175" cy="914400"/>
           </a:xfrm>
           <a:prstGeom prst="rect">
             <a:avLst/>
@@ -34416,7 +34416,7 @@
       </p:sp>
       <p:pic>
         <p:nvPicPr>
-          <p:cNvPr id="29" name="Picture 28" descr="_ph-argentina-lavigne.png"/>
+          <p:cNvPr id="29" name="Picture 28" descr="argentina-lavigne.png"/>
           <p:cNvPicPr>
             <a:picLocks noChangeAspect="1"/>
           </p:cNvPicPr>
@@ -34431,7 +34431,7 @@
         <p:spPr>
           <a:xfrm>
             <a:off x="7790688" y="4023359"/>
-            <a:ext cx="585216" cy="731520"/>
+            <a:ext cx="584082" cy="731520"/>
           </a:xfrm>
           <a:prstGeom prst="rect">
             <a:avLst/>
@@ -34447,7 +34447,7 @@
         <p:spPr>
           <a:xfrm>
             <a:off x="7790688" y="4023359"/>
-            <a:ext cx="585216" cy="731520"/>
+            <a:ext cx="584081" cy="731520"/>
           </a:xfrm>
           <a:prstGeom prst="rect">
             <a:avLst/>
@@ -34490,8 +34490,8 @@
         </p:nvSpPr>
         <p:spPr>
           <a:xfrm>
-            <a:off x="8503920" y="4023359"/>
-            <a:ext cx="3136391" cy="914400"/>
+            <a:off x="8502785" y="4023359"/>
+            <a:ext cx="3137526" cy="914400"/>
           </a:xfrm>
           <a:prstGeom prst="rect">
             <a:avLst/>
@@ -35444,7 +35444,7 @@
         <p:spPr>
           <a:xfrm>
             <a:off x="3611880" y="1389888"/>
-            <a:ext cx="586097" cy="731520"/>
+            <a:ext cx="581691" cy="731520"/>
           </a:xfrm>
           <a:prstGeom prst="rect">
             <a:avLst/>
@@ -35460,7 +35460,7 @@
         <p:spPr>
           <a:xfrm>
             <a:off x="3611880" y="1389888"/>
-            <a:ext cx="586097" cy="731520"/>
+            <a:ext cx="581690" cy="731520"/>
           </a:xfrm>
           <a:prstGeom prst="rect">
             <a:avLst/>
@@ -35503,8 +35503,8 @@
         </p:nvSpPr>
         <p:spPr>
           <a:xfrm>
-            <a:off x="4325993" y="1389888"/>
-            <a:ext cx="3135510" cy="914400"/>
+            <a:off x="4321586" y="1389888"/>
+            <a:ext cx="3139917" cy="914400"/>
           </a:xfrm>
           <a:prstGeom prst="rect">
             <a:avLst/>
@@ -35668,7 +35668,7 @@
         <p:spPr>
           <a:xfrm>
             <a:off x="7790688" y="1389888"/>
-            <a:ext cx="584481" cy="731520"/>
+            <a:ext cx="587433" cy="731520"/>
           </a:xfrm>
           <a:prstGeom prst="rect">
             <a:avLst/>
@@ -35684,7 +35684,7 @@
         <p:spPr>
           <a:xfrm>
             <a:off x="7790688" y="1389888"/>
-            <a:ext cx="584480" cy="731520"/>
+            <a:ext cx="587432" cy="731520"/>
           </a:xfrm>
           <a:prstGeom prst="rect">
             <a:avLst/>
@@ -35727,8 +35727,8 @@
         </p:nvSpPr>
         <p:spPr>
           <a:xfrm>
-            <a:off x="8503184" y="1389888"/>
-            <a:ext cx="3137127" cy="914400"/>
+            <a:off x="8506136" y="1389888"/>
+            <a:ext cx="3134175" cy="914400"/>
           </a:xfrm>
           <a:prstGeom prst="rect">
             <a:avLst/>
@@ -35962,7 +35962,7 @@
         <p:spPr>
           <a:xfrm>
             <a:off x="3611880" y="4041648"/>
-            <a:ext cx="733778" cy="914400"/>
+            <a:ext cx="730015" cy="914400"/>
           </a:xfrm>
           <a:prstGeom prst="rect">
             <a:avLst/>
@@ -35978,7 +35978,7 @@
         <p:spPr>
           <a:xfrm>
             <a:off x="3611880" y="4041648"/>
-            <a:ext cx="733777" cy="914400"/>
+            <a:ext cx="730014" cy="914400"/>
           </a:xfrm>
           <a:prstGeom prst="rect">
             <a:avLst/>
@@ -36021,8 +36021,8 @@
         </p:nvSpPr>
         <p:spPr>
           <a:xfrm>
-            <a:off x="4510249" y="4041648"/>
-            <a:ext cx="7130062" cy="256032"/>
+            <a:off x="4506486" y="4041648"/>
+            <a:ext cx="7133825" cy="256032"/>
           </a:xfrm>
           <a:prstGeom prst="rect">
             <a:avLst/>
@@ -36055,8 +36055,8 @@
         </p:nvSpPr>
         <p:spPr>
           <a:xfrm>
-            <a:off x="4510249" y="4315968"/>
-            <a:ext cx="7130062" cy="347472"/>
+            <a:off x="4506486" y="4315968"/>
+            <a:ext cx="7133825" cy="347472"/>
           </a:xfrm>
           <a:prstGeom prst="rect">
             <a:avLst/>
@@ -36094,8 +36094,8 @@
         </p:nvSpPr>
         <p:spPr>
           <a:xfrm>
-            <a:off x="4510249" y="4681727"/>
-            <a:ext cx="7130062" cy="292608"/>
+            <a:off x="4506486" y="4681727"/>
+            <a:ext cx="7133825" cy="292608"/>
           </a:xfrm>
           <a:prstGeom prst="rect">
             <a:avLst/>
@@ -36986,7 +36986,7 @@
         <p:spPr>
           <a:xfrm>
             <a:off x="3611880" y="1389888"/>
-            <a:ext cx="586740" cy="731520"/>
+            <a:ext cx="582930" cy="731520"/>
           </a:xfrm>
           <a:prstGeom prst="rect">
             <a:avLst/>
@@ -37002,7 +37002,7 @@
         <p:spPr>
           <a:xfrm>
             <a:off x="3611880" y="1389888"/>
-            <a:ext cx="586740" cy="731520"/>
+            <a:ext cx="582930" cy="731520"/>
           </a:xfrm>
           <a:prstGeom prst="rect">
             <a:avLst/>
@@ -37045,8 +37045,8 @@
         </p:nvSpPr>
         <p:spPr>
           <a:xfrm>
-            <a:off x="4326636" y="1389888"/>
-            <a:ext cx="3134868" cy="914400"/>
+            <a:off x="4322826" y="1389888"/>
+            <a:ext cx="3138677" cy="914400"/>
           </a:xfrm>
           <a:prstGeom prst="rect">
             <a:avLst/>
@@ -37210,7 +37210,7 @@
         <p:spPr>
           <a:xfrm>
             <a:off x="7790688" y="1389888"/>
-            <a:ext cx="582736" cy="731520"/>
+            <a:ext cx="585216" cy="731520"/>
           </a:xfrm>
           <a:prstGeom prst="rect">
             <a:avLst/>
@@ -37226,7 +37226,7 @@
         <p:spPr>
           <a:xfrm>
             <a:off x="7790688" y="1389888"/>
-            <a:ext cx="582736" cy="731520"/>
+            <a:ext cx="585216" cy="731520"/>
           </a:xfrm>
           <a:prstGeom prst="rect">
             <a:avLst/>
@@ -37269,8 +37269,8 @@
         </p:nvSpPr>
         <p:spPr>
           <a:xfrm>
-            <a:off x="8501440" y="1389888"/>
-            <a:ext cx="3138871" cy="914400"/>
+            <a:off x="8503920" y="1389888"/>
+            <a:ext cx="3136391" cy="914400"/>
           </a:xfrm>
           <a:prstGeom prst="rect">
             <a:avLst/>
@@ -37504,7 +37504,7 @@
         <p:spPr>
           <a:xfrm>
             <a:off x="3611880" y="4041648"/>
-            <a:ext cx="730601" cy="914400"/>
+            <a:ext cx="734291" cy="914400"/>
           </a:xfrm>
           <a:prstGeom prst="rect">
             <a:avLst/>
@@ -37520,7 +37520,7 @@
         <p:spPr>
           <a:xfrm>
             <a:off x="3611880" y="4041648"/>
-            <a:ext cx="730601" cy="914400"/>
+            <a:ext cx="734290" cy="914400"/>
           </a:xfrm>
           <a:prstGeom prst="rect">
             <a:avLst/>
@@ -37563,8 +37563,8 @@
         </p:nvSpPr>
         <p:spPr>
           <a:xfrm>
-            <a:off x="4507073" y="4041648"/>
-            <a:ext cx="7133238" cy="256032"/>
+            <a:off x="4510762" y="4041648"/>
+            <a:ext cx="7129549" cy="256032"/>
           </a:xfrm>
           <a:prstGeom prst="rect">
             <a:avLst/>
@@ -37597,8 +37597,8 @@
         </p:nvSpPr>
         <p:spPr>
           <a:xfrm>
-            <a:off x="4507073" y="4315968"/>
-            <a:ext cx="7133238" cy="347472"/>
+            <a:off x="4510762" y="4315968"/>
+            <a:ext cx="7129549" cy="347472"/>
           </a:xfrm>
           <a:prstGeom prst="rect">
             <a:avLst/>
@@ -37636,8 +37636,8 @@
         </p:nvSpPr>
         <p:spPr>
           <a:xfrm>
-            <a:off x="4507073" y="4681727"/>
-            <a:ext cx="7133238" cy="292608"/>
+            <a:off x="4510762" y="4681727"/>
+            <a:ext cx="7129549" cy="292608"/>
           </a:xfrm>
           <a:prstGeom prst="rect">
             <a:avLst/>
@@ -38512,7 +38512,7 @@
         <p:spPr>
           <a:xfrm>
             <a:off x="3611880" y="1408176"/>
-            <a:ext cx="727113" cy="914400"/>
+            <a:ext cx="731520" cy="914400"/>
           </a:xfrm>
           <a:prstGeom prst="rect">
             <a:avLst/>
@@ -38528,7 +38528,7 @@
         <p:spPr>
           <a:xfrm>
             <a:off x="3611880" y="1408176"/>
-            <a:ext cx="727113" cy="914400"/>
+            <a:ext cx="731520" cy="914400"/>
           </a:xfrm>
           <a:prstGeom prst="rect">
             <a:avLst/>
@@ -38571,8 +38571,8 @@
         </p:nvSpPr>
         <p:spPr>
           <a:xfrm>
-            <a:off x="4503585" y="1408176"/>
-            <a:ext cx="7136726" cy="256032"/>
+            <a:off x="4507992" y="1408176"/>
+            <a:ext cx="7132320" cy="256032"/>
           </a:xfrm>
           <a:prstGeom prst="rect">
             <a:avLst/>
@@ -38605,8 +38605,8 @@
         </p:nvSpPr>
         <p:spPr>
           <a:xfrm>
-            <a:off x="4503585" y="1682495"/>
-            <a:ext cx="7136726" cy="347472"/>
+            <a:off x="4507992" y="1682495"/>
+            <a:ext cx="7132320" cy="347472"/>
           </a:xfrm>
           <a:prstGeom prst="rect">
             <a:avLst/>
@@ -38644,8 +38644,8 @@
         </p:nvSpPr>
         <p:spPr>
           <a:xfrm>
-            <a:off x="4503585" y="2048256"/>
-            <a:ext cx="7136726" cy="292608"/>
+            <a:off x="4507992" y="2048256"/>
+            <a:ext cx="7132320" cy="292608"/>
           </a:xfrm>
           <a:prstGeom prst="rect">
             <a:avLst/>
@@ -39034,7 +39034,7 @@
         <p:spPr>
           <a:xfrm>
             <a:off x="7790688" y="4023359"/>
-            <a:ext cx="586097" cy="731520"/>
+            <a:ext cx="581691" cy="731520"/>
           </a:xfrm>
           <a:prstGeom prst="rect">
             <a:avLst/>
@@ -39050,7 +39050,7 @@
         <p:spPr>
           <a:xfrm>
             <a:off x="7790688" y="4023359"/>
-            <a:ext cx="586097" cy="731520"/>
+            <a:ext cx="581690" cy="731520"/>
           </a:xfrm>
           <a:prstGeom prst="rect">
             <a:avLst/>
@@ -39093,8 +39093,8 @@
         </p:nvSpPr>
         <p:spPr>
           <a:xfrm>
-            <a:off x="8504801" y="4023359"/>
-            <a:ext cx="3135510" cy="914400"/>
+            <a:off x="8500394" y="4023359"/>
+            <a:ext cx="3139917" cy="914400"/>
           </a:xfrm>
           <a:prstGeom prst="rect">
             <a:avLst/>
@@ -40038,7 +40038,7 @@
         <p:spPr>
           <a:xfrm>
             <a:off x="3611880" y="1389888"/>
-            <a:ext cx="582070" cy="731520"/>
+            <a:ext cx="585216" cy="731520"/>
           </a:xfrm>
           <a:prstGeom prst="rect">
             <a:avLst/>
@@ -40054,7 +40054,7 @@
         <p:spPr>
           <a:xfrm>
             <a:off x="3611880" y="1389888"/>
-            <a:ext cx="582069" cy="731520"/>
+            <a:ext cx="585216" cy="731520"/>
           </a:xfrm>
           <a:prstGeom prst="rect">
             <a:avLst/>
@@ -40097,8 +40097,8 @@
         </p:nvSpPr>
         <p:spPr>
           <a:xfrm>
-            <a:off x="4321965" y="1389888"/>
-            <a:ext cx="3139538" cy="914400"/>
+            <a:off x="4325112" y="1389888"/>
+            <a:ext cx="3136391" cy="914400"/>
           </a:xfrm>
           <a:prstGeom prst="rect">
             <a:avLst/>
@@ -40262,7 +40262,7 @@
         <p:spPr>
           <a:xfrm>
             <a:off x="7790688" y="1389888"/>
-            <a:ext cx="583617" cy="731520"/>
+            <a:ext cx="586824" cy="731520"/>
           </a:xfrm>
           <a:prstGeom prst="rect">
             <a:avLst/>
@@ -40278,7 +40278,7 @@
         <p:spPr>
           <a:xfrm>
             <a:off x="7790688" y="1389888"/>
-            <a:ext cx="583617" cy="731520"/>
+            <a:ext cx="586823" cy="731520"/>
           </a:xfrm>
           <a:prstGeom prst="rect">
             <a:avLst/>
@@ -40321,8 +40321,8 @@
         </p:nvSpPr>
         <p:spPr>
           <a:xfrm>
-            <a:off x="8502321" y="1389888"/>
-            <a:ext cx="3137990" cy="914400"/>
+            <a:off x="8505527" y="1389888"/>
+            <a:ext cx="3134784" cy="914400"/>
           </a:xfrm>
           <a:prstGeom prst="rect">
             <a:avLst/>
@@ -40556,7 +40556,7 @@
         <p:spPr>
           <a:xfrm>
             <a:off x="3611880" y="4023359"/>
-            <a:ext cx="583738" cy="731520"/>
+            <a:ext cx="586701" cy="731520"/>
           </a:xfrm>
           <a:prstGeom prst="rect">
             <a:avLst/>
@@ -40572,7 +40572,7 @@
         <p:spPr>
           <a:xfrm>
             <a:off x="3611880" y="4023359"/>
-            <a:ext cx="583738" cy="731520"/>
+            <a:ext cx="586701" cy="731520"/>
           </a:xfrm>
           <a:prstGeom prst="rect">
             <a:avLst/>
@@ -40615,8 +40615,8 @@
         </p:nvSpPr>
         <p:spPr>
           <a:xfrm>
-            <a:off x="4323634" y="4023359"/>
-            <a:ext cx="3137869" cy="914400"/>
+            <a:off x="4326597" y="4023359"/>
+            <a:ext cx="3134906" cy="914400"/>
           </a:xfrm>
           <a:prstGeom prst="rect">
             <a:avLst/>
@@ -40780,7 +40780,7 @@
         <p:spPr>
           <a:xfrm>
             <a:off x="7790688" y="4023359"/>
-            <a:ext cx="587433" cy="731520"/>
+            <a:ext cx="583738" cy="731520"/>
           </a:xfrm>
           <a:prstGeom prst="rect">
             <a:avLst/>
@@ -40796,7 +40796,7 @@
         <p:spPr>
           <a:xfrm>
             <a:off x="7790688" y="4023359"/>
-            <a:ext cx="587432" cy="731520"/>
+            <a:ext cx="583738" cy="731520"/>
           </a:xfrm>
           <a:prstGeom prst="rect">
             <a:avLst/>
@@ -40839,8 +40839,8 @@
         </p:nvSpPr>
         <p:spPr>
           <a:xfrm>
-            <a:off x="8506136" y="4023359"/>
-            <a:ext cx="3134175" cy="914400"/>
+            <a:off x="8502442" y="4023359"/>
+            <a:ext cx="3137869" cy="914400"/>
           </a:xfrm>
           <a:prstGeom prst="rect">
             <a:avLst/>
